--- a/docs/apresentacoes/06-testes-e-publicacao.pptx
+++ b/docs/apresentacoes/06-testes-e-publicacao.pptx
@@ -117,24 +117,24 @@
   <p:extLst>
     <p:ext uri="{521415D9-36F7-43E2-AB2F-B90AF26B5E84}">
       <p14:sectionLst xmlns:p14="http://schemas.microsoft.com/office/powerpoint/2010/main">
-        <p14:section name="Abertura" id="{85b75bab-852d-69ef-f8b5-107d4fccfce1}">
+        <p14:section name="Abertura" id="{ef219ba3-dd3b-7093-de3d-cd2b24289f23}">
           <p14:sldIdLst>
             <p14:sldId id="256"/>
           </p14:sldIdLst>
         </p14:section>
-        <p14:section name="Contexto" id="{5a8b4ff3-6c3b-f40c-a653-822576f83cd2}">
+        <p14:section name="Contexto" id="{85b13603-ff69-a50f-6523-c139d6d9844f}">
           <p14:sldIdLst>
             <p14:sldId id="257"/>
           </p14:sldIdLst>
         </p14:section>
-        <p14:section name="Testes" id="{d3c3758f-692c-a311-3a72-75d207370193}">
+        <p14:section name="Testes" id="{8a2fe34a-9b1a-5387-d068-90d40d654cfd}">
           <p14:sldIdLst>
             <p14:sldId id="258"/>
             <p14:sldId id="259"/>
             <p14:sldId id="260"/>
           </p14:sldIdLst>
         </p14:section>
-        <p14:section name="Publicação" id="{6c00ceca-a56e-4919-281c-c8eddb18ff94}">
+        <p14:section name="Publicação" id="{3e5ca41c-f57b-7d0d-751f-7421b7075c6b}">
           <p14:sldIdLst>
             <p14:sldId id="261"/>
             <p14:sldId id="262"/>
@@ -143,7 +143,7 @@
             <p14:sldId id="265"/>
           </p14:sldIdLst>
         </p14:section>
-        <p14:section name="Encerramento" id="{40e89d88-5e1e-2ae3-80bc-d2bd26481efc}">
+        <p14:section name="Encerramento" id="{7a6ee0a8-2acf-c928-a0da-0b7ca5fc44e9}">
           <p14:sldIdLst>
             <p14:sldId id="266"/>
           </p14:sldIdLst>
@@ -8660,9 +8660,14 @@
             </a:avLst>
           </a:prstGeom>
           <a:solidFill>
-            <a:srgbClr val="1D2D3E"/>
+            <a:srgbClr val="1F1F1F"/>
           </a:solidFill>
-          <a:ln/>
+          <a:ln w="9525">
+            <a:solidFill>
+              <a:srgbClr val="2B2B2B"/>
+            </a:solidFill>
+            <a:prstDash val="solid"/>
+          </a:ln>
           <a:effectLst>
             <a:outerShdw sx="100000" sy="100000" kx="0" ky="0" algn="bl" rotWithShape="0" blurRad="101600" dist="25400" dir="5400000">
               <a:srgbClr val="223649">
@@ -8699,13 +8704,55 @@
             <a:r>
               <a:rPr lang="en-US" sz="1200" dirty="0">
                 <a:solidFill>
-                  <a:srgbClr val="EAECEE"/>
-                </a:solidFill>
-                <a:latin typeface="Courier New" pitchFamily="34" charset="0"/>
-                <a:ea typeface="Courier New" pitchFamily="34" charset="-122"/>
-                <a:cs typeface="Courier New" pitchFamily="34" charset="-120"/>
-              </a:rPr>
-              <a:t>it('aprovar cancela o pedido e devolve o pagamento',</a:t>
+                  <a:srgbClr val="DCDCAA"/>
+                </a:solidFill>
+                <a:latin typeface="Courier New" pitchFamily="34" charset="0"/>
+                <a:ea typeface="Courier New" pitchFamily="34" charset="-122"/>
+                <a:cs typeface="Courier New" pitchFamily="34" charset="-120"/>
+              </a:rPr>
+              <a:t>it</a:t>
+            </a:r>
+            <a:pPr indent="0" marL="0">
+              <a:buNone/>
+            </a:pPr>
+            <a:r>
+              <a:rPr lang="en-US" sz="1200" dirty="0">
+                <a:solidFill>
+                  <a:srgbClr val="FFD700"/>
+                </a:solidFill>
+                <a:latin typeface="Courier New" pitchFamily="34" charset="0"/>
+                <a:ea typeface="Courier New" pitchFamily="34" charset="-122"/>
+                <a:cs typeface="Courier New" pitchFamily="34" charset="-120"/>
+              </a:rPr>
+              <a:t>(</a:t>
+            </a:r>
+            <a:pPr indent="0" marL="0">
+              <a:buNone/>
+            </a:pPr>
+            <a:r>
+              <a:rPr lang="en-US" sz="1200" dirty="0">
+                <a:solidFill>
+                  <a:srgbClr val="CE9178"/>
+                </a:solidFill>
+                <a:latin typeface="Courier New" pitchFamily="34" charset="0"/>
+                <a:ea typeface="Courier New" pitchFamily="34" charset="-122"/>
+                <a:cs typeface="Courier New" pitchFamily="34" charset="-120"/>
+              </a:rPr>
+              <a:t>'aprovar cancela o pedido e devolve o pagamento'</a:t>
+            </a:r>
+            <a:pPr indent="0" marL="0">
+              <a:buNone/>
+            </a:pPr>
+            <a:r>
+              <a:rPr lang="en-US" sz="1200" dirty="0">
+                <a:solidFill>
+                  <a:srgbClr val="CCCCCC"/>
+                </a:solidFill>
+                <a:latin typeface="Courier New" pitchFamily="34" charset="0"/>
+                <a:ea typeface="Courier New" pitchFamily="34" charset="-122"/>
+                <a:cs typeface="Courier New" pitchFamily="34" charset="-120"/>
+              </a:rPr>
+              <a:t>,</a:t>
             </a:r>
             <a:endParaRPr lang="en-US" sz="1200" dirty="0"/>
           </a:p>
@@ -8716,13 +8763,83 @@
             <a:r>
               <a:rPr lang="en-US" sz="1200" dirty="0">
                 <a:solidFill>
-                  <a:srgbClr val="EAECEE"/>
-                </a:solidFill>
-                <a:latin typeface="Courier New" pitchFamily="34" charset="0"/>
-                <a:ea typeface="Courier New" pitchFamily="34" charset="-122"/>
-                <a:cs typeface="Courier New" pitchFamily="34" charset="-120"/>
-              </a:rPr>
-              <a:t>  async () =&gt; {</a:t>
+                  <a:srgbClr val="CCCCCC"/>
+                </a:solidFill>
+                <a:latin typeface="Courier New" pitchFamily="34" charset="0"/>
+                <a:ea typeface="Courier New" pitchFamily="34" charset="-122"/>
+                <a:cs typeface="Courier New" pitchFamily="34" charset="-120"/>
+              </a:rPr>
+              <a:t>  </a:t>
+            </a:r>
+            <a:pPr indent="0" marL="0">
+              <a:buNone/>
+            </a:pPr>
+            <a:r>
+              <a:rPr lang="en-US" sz="1200" dirty="0">
+                <a:solidFill>
+                  <a:srgbClr val="569CD6"/>
+                </a:solidFill>
+                <a:latin typeface="Courier New" pitchFamily="34" charset="0"/>
+                <a:ea typeface="Courier New" pitchFamily="34" charset="-122"/>
+                <a:cs typeface="Courier New" pitchFamily="34" charset="-120"/>
+              </a:rPr>
+              <a:t>async</a:t>
+            </a:r>
+            <a:pPr indent="0" marL="0">
+              <a:buNone/>
+            </a:pPr>
+            <a:r>
+              <a:rPr lang="en-US" sz="1200" dirty="0">
+                <a:solidFill>
+                  <a:srgbClr val="CCCCCC"/>
+                </a:solidFill>
+                <a:latin typeface="Courier New" pitchFamily="34" charset="0"/>
+                <a:ea typeface="Courier New" pitchFamily="34" charset="-122"/>
+                <a:cs typeface="Courier New" pitchFamily="34" charset="-120"/>
+              </a:rPr>
+              <a:t> </a:t>
+            </a:r>
+            <a:pPr indent="0" marL="0">
+              <a:buNone/>
+            </a:pPr>
+            <a:r>
+              <a:rPr lang="en-US" sz="1200" dirty="0">
+                <a:solidFill>
+                  <a:srgbClr val="DA70D6"/>
+                </a:solidFill>
+                <a:latin typeface="Courier New" pitchFamily="34" charset="0"/>
+                <a:ea typeface="Courier New" pitchFamily="34" charset="-122"/>
+                <a:cs typeface="Courier New" pitchFamily="34" charset="-120"/>
+              </a:rPr>
+              <a:t>()</a:t>
+            </a:r>
+            <a:pPr indent="0" marL="0">
+              <a:buNone/>
+            </a:pPr>
+            <a:r>
+              <a:rPr lang="en-US" sz="1200" dirty="0">
+                <a:solidFill>
+                  <a:srgbClr val="CCCCCC"/>
+                </a:solidFill>
+                <a:latin typeface="Courier New" pitchFamily="34" charset="0"/>
+                <a:ea typeface="Courier New" pitchFamily="34" charset="-122"/>
+                <a:cs typeface="Courier New" pitchFamily="34" charset="-120"/>
+              </a:rPr>
+              <a:t> =&gt; </a:t>
+            </a:r>
+            <a:pPr indent="0" marL="0">
+              <a:buNone/>
+            </a:pPr>
+            <a:r>
+              <a:rPr lang="en-US" sz="1200" dirty="0">
+                <a:solidFill>
+                  <a:srgbClr val="DA70D6"/>
+                </a:solidFill>
+                <a:latin typeface="Courier New" pitchFamily="34" charset="0"/>
+                <a:ea typeface="Courier New" pitchFamily="34" charset="-122"/>
+                <a:cs typeface="Courier New" pitchFamily="34" charset="-120"/>
+              </a:rPr>
+              <a:t>{</a:t>
             </a:r>
             <a:endParaRPr lang="en-US" sz="1200" dirty="0"/>
           </a:p>
@@ -8733,13 +8850,237 @@
             <a:r>
               <a:rPr lang="en-US" sz="1200" dirty="0">
                 <a:solidFill>
-                  <a:srgbClr val="EAECEE"/>
-                </a:solidFill>
-                <a:latin typeface="Courier New" pitchFamily="34" charset="0"/>
-                <a:ea typeface="Courier New" pitchFamily="34" charset="-122"/>
-                <a:cs typeface="Courier New" pitchFamily="34" charset="-120"/>
-              </a:rPr>
-              <a:t>  const { pedido, reembolso, item } = await solicitacao()</a:t>
+                  <a:srgbClr val="CCCCCC"/>
+                </a:solidFill>
+                <a:latin typeface="Courier New" pitchFamily="34" charset="0"/>
+                <a:ea typeface="Courier New" pitchFamily="34" charset="-122"/>
+                <a:cs typeface="Courier New" pitchFamily="34" charset="-120"/>
+              </a:rPr>
+              <a:t>  </a:t>
+            </a:r>
+            <a:pPr indent="0" marL="0">
+              <a:buNone/>
+            </a:pPr>
+            <a:r>
+              <a:rPr lang="en-US" sz="1200" dirty="0">
+                <a:solidFill>
+                  <a:srgbClr val="569CD6"/>
+                </a:solidFill>
+                <a:latin typeface="Courier New" pitchFamily="34" charset="0"/>
+                <a:ea typeface="Courier New" pitchFamily="34" charset="-122"/>
+                <a:cs typeface="Courier New" pitchFamily="34" charset="-120"/>
+              </a:rPr>
+              <a:t>const</a:t>
+            </a:r>
+            <a:pPr indent="0" marL="0">
+              <a:buNone/>
+            </a:pPr>
+            <a:r>
+              <a:rPr lang="en-US" sz="1200" dirty="0">
+                <a:solidFill>
+                  <a:srgbClr val="CCCCCC"/>
+                </a:solidFill>
+                <a:latin typeface="Courier New" pitchFamily="34" charset="0"/>
+                <a:ea typeface="Courier New" pitchFamily="34" charset="-122"/>
+                <a:cs typeface="Courier New" pitchFamily="34" charset="-120"/>
+              </a:rPr>
+              <a:t> </a:t>
+            </a:r>
+            <a:pPr indent="0" marL="0">
+              <a:buNone/>
+            </a:pPr>
+            <a:r>
+              <a:rPr lang="en-US" sz="1200" dirty="0">
+                <a:solidFill>
+                  <a:srgbClr val="179FFF"/>
+                </a:solidFill>
+                <a:latin typeface="Courier New" pitchFamily="34" charset="0"/>
+                <a:ea typeface="Courier New" pitchFamily="34" charset="-122"/>
+                <a:cs typeface="Courier New" pitchFamily="34" charset="-120"/>
+              </a:rPr>
+              <a:t>{</a:t>
+            </a:r>
+            <a:pPr indent="0" marL="0">
+              <a:buNone/>
+            </a:pPr>
+            <a:r>
+              <a:rPr lang="en-US" sz="1200" dirty="0">
+                <a:solidFill>
+                  <a:srgbClr val="CCCCCC"/>
+                </a:solidFill>
+                <a:latin typeface="Courier New" pitchFamily="34" charset="0"/>
+                <a:ea typeface="Courier New" pitchFamily="34" charset="-122"/>
+                <a:cs typeface="Courier New" pitchFamily="34" charset="-120"/>
+              </a:rPr>
+              <a:t> </a:t>
+            </a:r>
+            <a:pPr indent="0" marL="0">
+              <a:buNone/>
+            </a:pPr>
+            <a:r>
+              <a:rPr lang="en-US" sz="1200" dirty="0">
+                <a:solidFill>
+                  <a:srgbClr val="9CDCFE"/>
+                </a:solidFill>
+                <a:latin typeface="Courier New" pitchFamily="34" charset="0"/>
+                <a:ea typeface="Courier New" pitchFamily="34" charset="-122"/>
+                <a:cs typeface="Courier New" pitchFamily="34" charset="-120"/>
+              </a:rPr>
+              <a:t>pedido</a:t>
+            </a:r>
+            <a:pPr indent="0" marL="0">
+              <a:buNone/>
+            </a:pPr>
+            <a:r>
+              <a:rPr lang="en-US" sz="1200" dirty="0">
+                <a:solidFill>
+                  <a:srgbClr val="CCCCCC"/>
+                </a:solidFill>
+                <a:latin typeface="Courier New" pitchFamily="34" charset="0"/>
+                <a:ea typeface="Courier New" pitchFamily="34" charset="-122"/>
+                <a:cs typeface="Courier New" pitchFamily="34" charset="-120"/>
+              </a:rPr>
+              <a:t>, </a:t>
+            </a:r>
+            <a:pPr indent="0" marL="0">
+              <a:buNone/>
+            </a:pPr>
+            <a:r>
+              <a:rPr lang="en-US" sz="1200" dirty="0">
+                <a:solidFill>
+                  <a:srgbClr val="9CDCFE"/>
+                </a:solidFill>
+                <a:latin typeface="Courier New" pitchFamily="34" charset="0"/>
+                <a:ea typeface="Courier New" pitchFamily="34" charset="-122"/>
+                <a:cs typeface="Courier New" pitchFamily="34" charset="-120"/>
+              </a:rPr>
+              <a:t>reembolso</a:t>
+            </a:r>
+            <a:pPr indent="0" marL="0">
+              <a:buNone/>
+            </a:pPr>
+            <a:r>
+              <a:rPr lang="en-US" sz="1200" dirty="0">
+                <a:solidFill>
+                  <a:srgbClr val="CCCCCC"/>
+                </a:solidFill>
+                <a:latin typeface="Courier New" pitchFamily="34" charset="0"/>
+                <a:ea typeface="Courier New" pitchFamily="34" charset="-122"/>
+                <a:cs typeface="Courier New" pitchFamily="34" charset="-120"/>
+              </a:rPr>
+              <a:t>, </a:t>
+            </a:r>
+            <a:pPr indent="0" marL="0">
+              <a:buNone/>
+            </a:pPr>
+            <a:r>
+              <a:rPr lang="en-US" sz="1200" dirty="0">
+                <a:solidFill>
+                  <a:srgbClr val="9CDCFE"/>
+                </a:solidFill>
+                <a:latin typeface="Courier New" pitchFamily="34" charset="0"/>
+                <a:ea typeface="Courier New" pitchFamily="34" charset="-122"/>
+                <a:cs typeface="Courier New" pitchFamily="34" charset="-120"/>
+              </a:rPr>
+              <a:t>item</a:t>
+            </a:r>
+            <a:pPr indent="0" marL="0">
+              <a:buNone/>
+            </a:pPr>
+            <a:r>
+              <a:rPr lang="en-US" sz="1200" dirty="0">
+                <a:solidFill>
+                  <a:srgbClr val="CCCCCC"/>
+                </a:solidFill>
+                <a:latin typeface="Courier New" pitchFamily="34" charset="0"/>
+                <a:ea typeface="Courier New" pitchFamily="34" charset="-122"/>
+                <a:cs typeface="Courier New" pitchFamily="34" charset="-120"/>
+              </a:rPr>
+              <a:t> </a:t>
+            </a:r>
+            <a:pPr indent="0" marL="0">
+              <a:buNone/>
+            </a:pPr>
+            <a:r>
+              <a:rPr lang="en-US" sz="1200" dirty="0">
+                <a:solidFill>
+                  <a:srgbClr val="179FFF"/>
+                </a:solidFill>
+                <a:latin typeface="Courier New" pitchFamily="34" charset="0"/>
+                <a:ea typeface="Courier New" pitchFamily="34" charset="-122"/>
+                <a:cs typeface="Courier New" pitchFamily="34" charset="-120"/>
+              </a:rPr>
+              <a:t>}</a:t>
+            </a:r>
+            <a:pPr indent="0" marL="0">
+              <a:buNone/>
+            </a:pPr>
+            <a:r>
+              <a:rPr lang="en-US" sz="1200" dirty="0">
+                <a:solidFill>
+                  <a:srgbClr val="CCCCCC"/>
+                </a:solidFill>
+                <a:latin typeface="Courier New" pitchFamily="34" charset="0"/>
+                <a:ea typeface="Courier New" pitchFamily="34" charset="-122"/>
+                <a:cs typeface="Courier New" pitchFamily="34" charset="-120"/>
+              </a:rPr>
+              <a:t> = </a:t>
+            </a:r>
+            <a:pPr indent="0" marL="0">
+              <a:buNone/>
+            </a:pPr>
+            <a:r>
+              <a:rPr lang="en-US" sz="1200" dirty="0">
+                <a:solidFill>
+                  <a:srgbClr val="C586C0"/>
+                </a:solidFill>
+                <a:latin typeface="Courier New" pitchFamily="34" charset="0"/>
+                <a:ea typeface="Courier New" pitchFamily="34" charset="-122"/>
+                <a:cs typeface="Courier New" pitchFamily="34" charset="-120"/>
+              </a:rPr>
+              <a:t>await</a:t>
+            </a:r>
+            <a:pPr indent="0" marL="0">
+              <a:buNone/>
+            </a:pPr>
+            <a:r>
+              <a:rPr lang="en-US" sz="1200" dirty="0">
+                <a:solidFill>
+                  <a:srgbClr val="CCCCCC"/>
+                </a:solidFill>
+                <a:latin typeface="Courier New" pitchFamily="34" charset="0"/>
+                <a:ea typeface="Courier New" pitchFamily="34" charset="-122"/>
+                <a:cs typeface="Courier New" pitchFamily="34" charset="-120"/>
+              </a:rPr>
+              <a:t> </a:t>
+            </a:r>
+            <a:pPr indent="0" marL="0">
+              <a:buNone/>
+            </a:pPr>
+            <a:r>
+              <a:rPr lang="en-US" sz="1200" dirty="0">
+                <a:solidFill>
+                  <a:srgbClr val="DCDCAA"/>
+                </a:solidFill>
+                <a:latin typeface="Courier New" pitchFamily="34" charset="0"/>
+                <a:ea typeface="Courier New" pitchFamily="34" charset="-122"/>
+                <a:cs typeface="Courier New" pitchFamily="34" charset="-120"/>
+              </a:rPr>
+              <a:t>solicitacao</a:t>
+            </a:r>
+            <a:pPr indent="0" marL="0">
+              <a:buNone/>
+            </a:pPr>
+            <a:r>
+              <a:rPr lang="en-US" sz="1200" dirty="0">
+                <a:solidFill>
+                  <a:srgbClr val="179FFF"/>
+                </a:solidFill>
+                <a:latin typeface="Courier New" pitchFamily="34" charset="0"/>
+                <a:ea typeface="Courier New" pitchFamily="34" charset="-122"/>
+                <a:cs typeface="Courier New" pitchFamily="34" charset="-120"/>
+              </a:rPr>
+              <a:t>()</a:t>
             </a:r>
             <a:endParaRPr lang="en-US" sz="1200" dirty="0"/>
           </a:p>
@@ -8750,13 +9091,153 @@
             <a:r>
               <a:rPr lang="en-US" sz="1200" dirty="0">
                 <a:solidFill>
-                  <a:srgbClr val="EAECEE"/>
-                </a:solidFill>
-                <a:latin typeface="Courier New" pitchFamily="34" charset="0"/>
-                <a:ea typeface="Courier New" pitchFamily="34" charset="-122"/>
-                <a:cs typeface="Courier New" pitchFamily="34" charset="-120"/>
-              </a:rPr>
-              <a:t>  assert.equal(reembolso.statusReembolso_code, 'PENDENTE')</a:t>
+                  <a:srgbClr val="CCCCCC"/>
+                </a:solidFill>
+                <a:latin typeface="Courier New" pitchFamily="34" charset="0"/>
+                <a:ea typeface="Courier New" pitchFamily="34" charset="-122"/>
+                <a:cs typeface="Courier New" pitchFamily="34" charset="-120"/>
+              </a:rPr>
+              <a:t>  </a:t>
+            </a:r>
+            <a:pPr indent="0" marL="0">
+              <a:buNone/>
+            </a:pPr>
+            <a:r>
+              <a:rPr lang="en-US" sz="1200" dirty="0">
+                <a:solidFill>
+                  <a:srgbClr val="9CDCFE"/>
+                </a:solidFill>
+                <a:latin typeface="Courier New" pitchFamily="34" charset="0"/>
+                <a:ea typeface="Courier New" pitchFamily="34" charset="-122"/>
+                <a:cs typeface="Courier New" pitchFamily="34" charset="-120"/>
+              </a:rPr>
+              <a:t>assert</a:t>
+            </a:r>
+            <a:pPr indent="0" marL="0">
+              <a:buNone/>
+            </a:pPr>
+            <a:r>
+              <a:rPr lang="en-US" sz="1200" dirty="0">
+                <a:solidFill>
+                  <a:srgbClr val="CCCCCC"/>
+                </a:solidFill>
+                <a:latin typeface="Courier New" pitchFamily="34" charset="0"/>
+                <a:ea typeface="Courier New" pitchFamily="34" charset="-122"/>
+                <a:cs typeface="Courier New" pitchFamily="34" charset="-120"/>
+              </a:rPr>
+              <a:t>.</a:t>
+            </a:r>
+            <a:pPr indent="0" marL="0">
+              <a:buNone/>
+            </a:pPr>
+            <a:r>
+              <a:rPr lang="en-US" sz="1200" dirty="0">
+                <a:solidFill>
+                  <a:srgbClr val="DCDCAA"/>
+                </a:solidFill>
+                <a:latin typeface="Courier New" pitchFamily="34" charset="0"/>
+                <a:ea typeface="Courier New" pitchFamily="34" charset="-122"/>
+                <a:cs typeface="Courier New" pitchFamily="34" charset="-120"/>
+              </a:rPr>
+              <a:t>equal</a:t>
+            </a:r>
+            <a:pPr indent="0" marL="0">
+              <a:buNone/>
+            </a:pPr>
+            <a:r>
+              <a:rPr lang="en-US" sz="1200" dirty="0">
+                <a:solidFill>
+                  <a:srgbClr val="179FFF"/>
+                </a:solidFill>
+                <a:latin typeface="Courier New" pitchFamily="34" charset="0"/>
+                <a:ea typeface="Courier New" pitchFamily="34" charset="-122"/>
+                <a:cs typeface="Courier New" pitchFamily="34" charset="-120"/>
+              </a:rPr>
+              <a:t>(</a:t>
+            </a:r>
+            <a:pPr indent="0" marL="0">
+              <a:buNone/>
+            </a:pPr>
+            <a:r>
+              <a:rPr lang="en-US" sz="1200" dirty="0">
+                <a:solidFill>
+                  <a:srgbClr val="9CDCFE"/>
+                </a:solidFill>
+                <a:latin typeface="Courier New" pitchFamily="34" charset="0"/>
+                <a:ea typeface="Courier New" pitchFamily="34" charset="-122"/>
+                <a:cs typeface="Courier New" pitchFamily="34" charset="-120"/>
+              </a:rPr>
+              <a:t>reembolso</a:t>
+            </a:r>
+            <a:pPr indent="0" marL="0">
+              <a:buNone/>
+            </a:pPr>
+            <a:r>
+              <a:rPr lang="en-US" sz="1200" dirty="0">
+                <a:solidFill>
+                  <a:srgbClr val="CCCCCC"/>
+                </a:solidFill>
+                <a:latin typeface="Courier New" pitchFamily="34" charset="0"/>
+                <a:ea typeface="Courier New" pitchFamily="34" charset="-122"/>
+                <a:cs typeface="Courier New" pitchFamily="34" charset="-120"/>
+              </a:rPr>
+              <a:t>.</a:t>
+            </a:r>
+            <a:pPr indent="0" marL="0">
+              <a:buNone/>
+            </a:pPr>
+            <a:r>
+              <a:rPr lang="en-US" sz="1200" dirty="0">
+                <a:solidFill>
+                  <a:srgbClr val="9CDCFE"/>
+                </a:solidFill>
+                <a:latin typeface="Courier New" pitchFamily="34" charset="0"/>
+                <a:ea typeface="Courier New" pitchFamily="34" charset="-122"/>
+                <a:cs typeface="Courier New" pitchFamily="34" charset="-120"/>
+              </a:rPr>
+              <a:t>statusReembolso_code</a:t>
+            </a:r>
+            <a:pPr indent="0" marL="0">
+              <a:buNone/>
+            </a:pPr>
+            <a:r>
+              <a:rPr lang="en-US" sz="1200" dirty="0">
+                <a:solidFill>
+                  <a:srgbClr val="CCCCCC"/>
+                </a:solidFill>
+                <a:latin typeface="Courier New" pitchFamily="34" charset="0"/>
+                <a:ea typeface="Courier New" pitchFamily="34" charset="-122"/>
+                <a:cs typeface="Courier New" pitchFamily="34" charset="-120"/>
+              </a:rPr>
+              <a:t>, </a:t>
+            </a:r>
+            <a:pPr indent="0" marL="0">
+              <a:buNone/>
+            </a:pPr>
+            <a:r>
+              <a:rPr lang="en-US" sz="1200" dirty="0">
+                <a:solidFill>
+                  <a:srgbClr val="CE9178"/>
+                </a:solidFill>
+                <a:latin typeface="Courier New" pitchFamily="34" charset="0"/>
+                <a:ea typeface="Courier New" pitchFamily="34" charset="-122"/>
+                <a:cs typeface="Courier New" pitchFamily="34" charset="-120"/>
+              </a:rPr>
+              <a:t>'PENDENTE'</a:t>
+            </a:r>
+            <a:pPr indent="0" marL="0">
+              <a:buNone/>
+            </a:pPr>
+            <a:r>
+              <a:rPr lang="en-US" sz="1200" dirty="0">
+                <a:solidFill>
+                  <a:srgbClr val="179FFF"/>
+                </a:solidFill>
+                <a:latin typeface="Courier New" pitchFamily="34" charset="0"/>
+                <a:ea typeface="Courier New" pitchFamily="34" charset="-122"/>
+                <a:cs typeface="Courier New" pitchFamily="34" charset="-120"/>
+              </a:rPr>
+              <a:t>)</a:t>
             </a:r>
             <a:endParaRPr lang="en-US" sz="1200" dirty="0"/>
           </a:p>
@@ -8767,13 +9248,181 @@
             <a:r>
               <a:rPr lang="en-US" sz="1200" dirty="0">
                 <a:solidFill>
-                  <a:srgbClr val="EAECEE"/>
-                </a:solidFill>
-                <a:latin typeface="Courier New" pitchFamily="34" charset="0"/>
-                <a:ea typeface="Courier New" pitchFamily="34" charset="-122"/>
-                <a:cs typeface="Courier New" pitchFamily="34" charset="-120"/>
-              </a:rPr>
-              <a:t>  const antes = await reservado(item.ID)</a:t>
+                  <a:srgbClr val="CCCCCC"/>
+                </a:solidFill>
+                <a:latin typeface="Courier New" pitchFamily="34" charset="0"/>
+                <a:ea typeface="Courier New" pitchFamily="34" charset="-122"/>
+                <a:cs typeface="Courier New" pitchFamily="34" charset="-120"/>
+              </a:rPr>
+              <a:t>  </a:t>
+            </a:r>
+            <a:pPr indent="0" marL="0">
+              <a:buNone/>
+            </a:pPr>
+            <a:r>
+              <a:rPr lang="en-US" sz="1200" dirty="0">
+                <a:solidFill>
+                  <a:srgbClr val="569CD6"/>
+                </a:solidFill>
+                <a:latin typeface="Courier New" pitchFamily="34" charset="0"/>
+                <a:ea typeface="Courier New" pitchFamily="34" charset="-122"/>
+                <a:cs typeface="Courier New" pitchFamily="34" charset="-120"/>
+              </a:rPr>
+              <a:t>const</a:t>
+            </a:r>
+            <a:pPr indent="0" marL="0">
+              <a:buNone/>
+            </a:pPr>
+            <a:r>
+              <a:rPr lang="en-US" sz="1200" dirty="0">
+                <a:solidFill>
+                  <a:srgbClr val="CCCCCC"/>
+                </a:solidFill>
+                <a:latin typeface="Courier New" pitchFamily="34" charset="0"/>
+                <a:ea typeface="Courier New" pitchFamily="34" charset="-122"/>
+                <a:cs typeface="Courier New" pitchFamily="34" charset="-120"/>
+              </a:rPr>
+              <a:t> </a:t>
+            </a:r>
+            <a:pPr indent="0" marL="0">
+              <a:buNone/>
+            </a:pPr>
+            <a:r>
+              <a:rPr lang="en-US" sz="1200" dirty="0">
+                <a:solidFill>
+                  <a:srgbClr val="9CDCFE"/>
+                </a:solidFill>
+                <a:latin typeface="Courier New" pitchFamily="34" charset="0"/>
+                <a:ea typeface="Courier New" pitchFamily="34" charset="-122"/>
+                <a:cs typeface="Courier New" pitchFamily="34" charset="-120"/>
+              </a:rPr>
+              <a:t>antes</a:t>
+            </a:r>
+            <a:pPr indent="0" marL="0">
+              <a:buNone/>
+            </a:pPr>
+            <a:r>
+              <a:rPr lang="en-US" sz="1200" dirty="0">
+                <a:solidFill>
+                  <a:srgbClr val="CCCCCC"/>
+                </a:solidFill>
+                <a:latin typeface="Courier New" pitchFamily="34" charset="0"/>
+                <a:ea typeface="Courier New" pitchFamily="34" charset="-122"/>
+                <a:cs typeface="Courier New" pitchFamily="34" charset="-120"/>
+              </a:rPr>
+              <a:t> = </a:t>
+            </a:r>
+            <a:pPr indent="0" marL="0">
+              <a:buNone/>
+            </a:pPr>
+            <a:r>
+              <a:rPr lang="en-US" sz="1200" dirty="0">
+                <a:solidFill>
+                  <a:srgbClr val="C586C0"/>
+                </a:solidFill>
+                <a:latin typeface="Courier New" pitchFamily="34" charset="0"/>
+                <a:ea typeface="Courier New" pitchFamily="34" charset="-122"/>
+                <a:cs typeface="Courier New" pitchFamily="34" charset="-120"/>
+              </a:rPr>
+              <a:t>await</a:t>
+            </a:r>
+            <a:pPr indent="0" marL="0">
+              <a:buNone/>
+            </a:pPr>
+            <a:r>
+              <a:rPr lang="en-US" sz="1200" dirty="0">
+                <a:solidFill>
+                  <a:srgbClr val="CCCCCC"/>
+                </a:solidFill>
+                <a:latin typeface="Courier New" pitchFamily="34" charset="0"/>
+                <a:ea typeface="Courier New" pitchFamily="34" charset="-122"/>
+                <a:cs typeface="Courier New" pitchFamily="34" charset="-120"/>
+              </a:rPr>
+              <a:t> </a:t>
+            </a:r>
+            <a:pPr indent="0" marL="0">
+              <a:buNone/>
+            </a:pPr>
+            <a:r>
+              <a:rPr lang="en-US" sz="1200" dirty="0">
+                <a:solidFill>
+                  <a:srgbClr val="DCDCAA"/>
+                </a:solidFill>
+                <a:latin typeface="Courier New" pitchFamily="34" charset="0"/>
+                <a:ea typeface="Courier New" pitchFamily="34" charset="-122"/>
+                <a:cs typeface="Courier New" pitchFamily="34" charset="-120"/>
+              </a:rPr>
+              <a:t>reservado</a:t>
+            </a:r>
+            <a:pPr indent="0" marL="0">
+              <a:buNone/>
+            </a:pPr>
+            <a:r>
+              <a:rPr lang="en-US" sz="1200" dirty="0">
+                <a:solidFill>
+                  <a:srgbClr val="179FFF"/>
+                </a:solidFill>
+                <a:latin typeface="Courier New" pitchFamily="34" charset="0"/>
+                <a:ea typeface="Courier New" pitchFamily="34" charset="-122"/>
+                <a:cs typeface="Courier New" pitchFamily="34" charset="-120"/>
+              </a:rPr>
+              <a:t>(</a:t>
+            </a:r>
+            <a:pPr indent="0" marL="0">
+              <a:buNone/>
+            </a:pPr>
+            <a:r>
+              <a:rPr lang="en-US" sz="1200" dirty="0">
+                <a:solidFill>
+                  <a:srgbClr val="9CDCFE"/>
+                </a:solidFill>
+                <a:latin typeface="Courier New" pitchFamily="34" charset="0"/>
+                <a:ea typeface="Courier New" pitchFamily="34" charset="-122"/>
+                <a:cs typeface="Courier New" pitchFamily="34" charset="-120"/>
+              </a:rPr>
+              <a:t>item</a:t>
+            </a:r>
+            <a:pPr indent="0" marL="0">
+              <a:buNone/>
+            </a:pPr>
+            <a:r>
+              <a:rPr lang="en-US" sz="1200" dirty="0">
+                <a:solidFill>
+                  <a:srgbClr val="CCCCCC"/>
+                </a:solidFill>
+                <a:latin typeface="Courier New" pitchFamily="34" charset="0"/>
+                <a:ea typeface="Courier New" pitchFamily="34" charset="-122"/>
+                <a:cs typeface="Courier New" pitchFamily="34" charset="-120"/>
+              </a:rPr>
+              <a:t>.</a:t>
+            </a:r>
+            <a:pPr indent="0" marL="0">
+              <a:buNone/>
+            </a:pPr>
+            <a:r>
+              <a:rPr lang="en-US" sz="1200" dirty="0">
+                <a:solidFill>
+                  <a:srgbClr val="4FC1FF"/>
+                </a:solidFill>
+                <a:latin typeface="Courier New" pitchFamily="34" charset="0"/>
+                <a:ea typeface="Courier New" pitchFamily="34" charset="-122"/>
+                <a:cs typeface="Courier New" pitchFamily="34" charset="-120"/>
+              </a:rPr>
+              <a:t>ID</a:t>
+            </a:r>
+            <a:pPr indent="0" marL="0">
+              <a:buNone/>
+            </a:pPr>
+            <a:r>
+              <a:rPr lang="en-US" sz="1200" dirty="0">
+                <a:solidFill>
+                  <a:srgbClr val="179FFF"/>
+                </a:solidFill>
+                <a:latin typeface="Courier New" pitchFamily="34" charset="0"/>
+                <a:ea typeface="Courier New" pitchFamily="34" charset="-122"/>
+                <a:cs typeface="Courier New" pitchFamily="34" charset="-120"/>
+              </a:rPr>
+              <a:t>)</a:t>
             </a:r>
             <a:endParaRPr lang="en-US" sz="1200" dirty="0"/>
           </a:p>
@@ -8784,7 +9433,7 @@
             <a:r>
               <a:rPr lang="en-US" sz="1200" dirty="0">
                 <a:solidFill>
-                  <a:srgbClr val="EAECEE"/>
+                  <a:srgbClr val="CCCCCC"/>
                 </a:solidFill>
                 <a:latin typeface="Courier New" pitchFamily="34" charset="0"/>
                 <a:ea typeface="Courier New" pitchFamily="34" charset="-122"/>
@@ -8801,13 +9450,209 @@
             <a:r>
               <a:rPr lang="en-US" sz="1200" dirty="0">
                 <a:solidFill>
-                  <a:srgbClr val="EAECEE"/>
-                </a:solidFill>
-                <a:latin typeface="Courier New" pitchFamily="34" charset="0"/>
-                <a:ea typeface="Courier New" pitchFamily="34" charset="-122"/>
-                <a:cs typeface="Courier New" pitchFamily="34" charset="-120"/>
-              </a:rPr>
-              <a:t>  const { data } = await api.post(</a:t>
+                  <a:srgbClr val="CCCCCC"/>
+                </a:solidFill>
+                <a:latin typeface="Courier New" pitchFamily="34" charset="0"/>
+                <a:ea typeface="Courier New" pitchFamily="34" charset="-122"/>
+                <a:cs typeface="Courier New" pitchFamily="34" charset="-120"/>
+              </a:rPr>
+              <a:t>  </a:t>
+            </a:r>
+            <a:pPr indent="0" marL="0">
+              <a:buNone/>
+            </a:pPr>
+            <a:r>
+              <a:rPr lang="en-US" sz="1200" dirty="0">
+                <a:solidFill>
+                  <a:srgbClr val="569CD6"/>
+                </a:solidFill>
+                <a:latin typeface="Courier New" pitchFamily="34" charset="0"/>
+                <a:ea typeface="Courier New" pitchFamily="34" charset="-122"/>
+                <a:cs typeface="Courier New" pitchFamily="34" charset="-120"/>
+              </a:rPr>
+              <a:t>const</a:t>
+            </a:r>
+            <a:pPr indent="0" marL="0">
+              <a:buNone/>
+            </a:pPr>
+            <a:r>
+              <a:rPr lang="en-US" sz="1200" dirty="0">
+                <a:solidFill>
+                  <a:srgbClr val="CCCCCC"/>
+                </a:solidFill>
+                <a:latin typeface="Courier New" pitchFamily="34" charset="0"/>
+                <a:ea typeface="Courier New" pitchFamily="34" charset="-122"/>
+                <a:cs typeface="Courier New" pitchFamily="34" charset="-120"/>
+              </a:rPr>
+              <a:t> </a:t>
+            </a:r>
+            <a:pPr indent="0" marL="0">
+              <a:buNone/>
+            </a:pPr>
+            <a:r>
+              <a:rPr lang="en-US" sz="1200" dirty="0">
+                <a:solidFill>
+                  <a:srgbClr val="179FFF"/>
+                </a:solidFill>
+                <a:latin typeface="Courier New" pitchFamily="34" charset="0"/>
+                <a:ea typeface="Courier New" pitchFamily="34" charset="-122"/>
+                <a:cs typeface="Courier New" pitchFamily="34" charset="-120"/>
+              </a:rPr>
+              <a:t>{</a:t>
+            </a:r>
+            <a:pPr indent="0" marL="0">
+              <a:buNone/>
+            </a:pPr>
+            <a:r>
+              <a:rPr lang="en-US" sz="1200" dirty="0">
+                <a:solidFill>
+                  <a:srgbClr val="CCCCCC"/>
+                </a:solidFill>
+                <a:latin typeface="Courier New" pitchFamily="34" charset="0"/>
+                <a:ea typeface="Courier New" pitchFamily="34" charset="-122"/>
+                <a:cs typeface="Courier New" pitchFamily="34" charset="-120"/>
+              </a:rPr>
+              <a:t> </a:t>
+            </a:r>
+            <a:pPr indent="0" marL="0">
+              <a:buNone/>
+            </a:pPr>
+            <a:r>
+              <a:rPr lang="en-US" sz="1200" dirty="0">
+                <a:solidFill>
+                  <a:srgbClr val="9CDCFE"/>
+                </a:solidFill>
+                <a:latin typeface="Courier New" pitchFamily="34" charset="0"/>
+                <a:ea typeface="Courier New" pitchFamily="34" charset="-122"/>
+                <a:cs typeface="Courier New" pitchFamily="34" charset="-120"/>
+              </a:rPr>
+              <a:t>data</a:t>
+            </a:r>
+            <a:pPr indent="0" marL="0">
+              <a:buNone/>
+            </a:pPr>
+            <a:r>
+              <a:rPr lang="en-US" sz="1200" dirty="0">
+                <a:solidFill>
+                  <a:srgbClr val="CCCCCC"/>
+                </a:solidFill>
+                <a:latin typeface="Courier New" pitchFamily="34" charset="0"/>
+                <a:ea typeface="Courier New" pitchFamily="34" charset="-122"/>
+                <a:cs typeface="Courier New" pitchFamily="34" charset="-120"/>
+              </a:rPr>
+              <a:t> </a:t>
+            </a:r>
+            <a:pPr indent="0" marL="0">
+              <a:buNone/>
+            </a:pPr>
+            <a:r>
+              <a:rPr lang="en-US" sz="1200" dirty="0">
+                <a:solidFill>
+                  <a:srgbClr val="179FFF"/>
+                </a:solidFill>
+                <a:latin typeface="Courier New" pitchFamily="34" charset="0"/>
+                <a:ea typeface="Courier New" pitchFamily="34" charset="-122"/>
+                <a:cs typeface="Courier New" pitchFamily="34" charset="-120"/>
+              </a:rPr>
+              <a:t>}</a:t>
+            </a:r>
+            <a:pPr indent="0" marL="0">
+              <a:buNone/>
+            </a:pPr>
+            <a:r>
+              <a:rPr lang="en-US" sz="1200" dirty="0">
+                <a:solidFill>
+                  <a:srgbClr val="CCCCCC"/>
+                </a:solidFill>
+                <a:latin typeface="Courier New" pitchFamily="34" charset="0"/>
+                <a:ea typeface="Courier New" pitchFamily="34" charset="-122"/>
+                <a:cs typeface="Courier New" pitchFamily="34" charset="-120"/>
+              </a:rPr>
+              <a:t> = </a:t>
+            </a:r>
+            <a:pPr indent="0" marL="0">
+              <a:buNone/>
+            </a:pPr>
+            <a:r>
+              <a:rPr lang="en-US" sz="1200" dirty="0">
+                <a:solidFill>
+                  <a:srgbClr val="C586C0"/>
+                </a:solidFill>
+                <a:latin typeface="Courier New" pitchFamily="34" charset="0"/>
+                <a:ea typeface="Courier New" pitchFamily="34" charset="-122"/>
+                <a:cs typeface="Courier New" pitchFamily="34" charset="-120"/>
+              </a:rPr>
+              <a:t>await</a:t>
+            </a:r>
+            <a:pPr indent="0" marL="0">
+              <a:buNone/>
+            </a:pPr>
+            <a:r>
+              <a:rPr lang="en-US" sz="1200" dirty="0">
+                <a:solidFill>
+                  <a:srgbClr val="CCCCCC"/>
+                </a:solidFill>
+                <a:latin typeface="Courier New" pitchFamily="34" charset="0"/>
+                <a:ea typeface="Courier New" pitchFamily="34" charset="-122"/>
+                <a:cs typeface="Courier New" pitchFamily="34" charset="-120"/>
+              </a:rPr>
+              <a:t> </a:t>
+            </a:r>
+            <a:pPr indent="0" marL="0">
+              <a:buNone/>
+            </a:pPr>
+            <a:r>
+              <a:rPr lang="en-US" sz="1200" dirty="0">
+                <a:solidFill>
+                  <a:srgbClr val="9CDCFE"/>
+                </a:solidFill>
+                <a:latin typeface="Courier New" pitchFamily="34" charset="0"/>
+                <a:ea typeface="Courier New" pitchFamily="34" charset="-122"/>
+                <a:cs typeface="Courier New" pitchFamily="34" charset="-120"/>
+              </a:rPr>
+              <a:t>api</a:t>
+            </a:r>
+            <a:pPr indent="0" marL="0">
+              <a:buNone/>
+            </a:pPr>
+            <a:r>
+              <a:rPr lang="en-US" sz="1200" dirty="0">
+                <a:solidFill>
+                  <a:srgbClr val="CCCCCC"/>
+                </a:solidFill>
+                <a:latin typeface="Courier New" pitchFamily="34" charset="0"/>
+                <a:ea typeface="Courier New" pitchFamily="34" charset="-122"/>
+                <a:cs typeface="Courier New" pitchFamily="34" charset="-120"/>
+              </a:rPr>
+              <a:t>.</a:t>
+            </a:r>
+            <a:pPr indent="0" marL="0">
+              <a:buNone/>
+            </a:pPr>
+            <a:r>
+              <a:rPr lang="en-US" sz="1200" dirty="0">
+                <a:solidFill>
+                  <a:srgbClr val="DCDCAA"/>
+                </a:solidFill>
+                <a:latin typeface="Courier New" pitchFamily="34" charset="0"/>
+                <a:ea typeface="Courier New" pitchFamily="34" charset="-122"/>
+                <a:cs typeface="Courier New" pitchFamily="34" charset="-120"/>
+              </a:rPr>
+              <a:t>post</a:t>
+            </a:r>
+            <a:pPr indent="0" marL="0">
+              <a:buNone/>
+            </a:pPr>
+            <a:r>
+              <a:rPr lang="en-US" sz="1200" dirty="0">
+                <a:solidFill>
+                  <a:srgbClr val="179FFF"/>
+                </a:solidFill>
+                <a:latin typeface="Courier New" pitchFamily="34" charset="0"/>
+                <a:ea typeface="Courier New" pitchFamily="34" charset="-122"/>
+                <a:cs typeface="Courier New" pitchFamily="34" charset="-120"/>
+              </a:rPr>
+              <a:t>(</a:t>
             </a:r>
             <a:endParaRPr lang="en-US" sz="1200" dirty="0"/>
           </a:p>
@@ -8818,13 +9663,181 @@
             <a:r>
               <a:rPr lang="en-US" sz="1200" dirty="0">
                 <a:solidFill>
-                  <a:srgbClr val="EAECEE"/>
-                </a:solidFill>
-                <a:latin typeface="Courier New" pitchFamily="34" charset="0"/>
-                <a:ea typeface="Courier New" pitchFamily="34" charset="-122"/>
-                <a:cs typeface="Courier New" pitchFamily="34" charset="-120"/>
-              </a:rPr>
-              <a:t>    `${R}/Reembolsos(${reembolso.ID})/` +</a:t>
+                  <a:srgbClr val="CCCCCC"/>
+                </a:solidFill>
+                <a:latin typeface="Courier New" pitchFamily="34" charset="0"/>
+                <a:ea typeface="Courier New" pitchFamily="34" charset="-122"/>
+                <a:cs typeface="Courier New" pitchFamily="34" charset="-120"/>
+              </a:rPr>
+              <a:t>    </a:t>
+            </a:r>
+            <a:pPr indent="0" marL="0">
+              <a:buNone/>
+            </a:pPr>
+            <a:r>
+              <a:rPr lang="en-US" sz="1200" dirty="0">
+                <a:solidFill>
+                  <a:srgbClr val="CE9178"/>
+                </a:solidFill>
+                <a:latin typeface="Courier New" pitchFamily="34" charset="0"/>
+                <a:ea typeface="Courier New" pitchFamily="34" charset="-122"/>
+                <a:cs typeface="Courier New" pitchFamily="34" charset="-120"/>
+              </a:rPr>
+              <a:t>`</a:t>
+            </a:r>
+            <a:pPr indent="0" marL="0">
+              <a:buNone/>
+            </a:pPr>
+            <a:r>
+              <a:rPr lang="en-US" sz="1200" dirty="0">
+                <a:solidFill>
+                  <a:srgbClr val="569CD6"/>
+                </a:solidFill>
+                <a:latin typeface="Courier New" pitchFamily="34" charset="0"/>
+                <a:ea typeface="Courier New" pitchFamily="34" charset="-122"/>
+                <a:cs typeface="Courier New" pitchFamily="34" charset="-120"/>
+              </a:rPr>
+              <a:t>${</a:t>
+            </a:r>
+            <a:pPr indent="0" marL="0">
+              <a:buNone/>
+            </a:pPr>
+            <a:r>
+              <a:rPr lang="en-US" sz="1200" dirty="0">
+                <a:solidFill>
+                  <a:srgbClr val="9CDCFE"/>
+                </a:solidFill>
+                <a:latin typeface="Courier New" pitchFamily="34" charset="0"/>
+                <a:ea typeface="Courier New" pitchFamily="34" charset="-122"/>
+                <a:cs typeface="Courier New" pitchFamily="34" charset="-120"/>
+              </a:rPr>
+              <a:t>R</a:t>
+            </a:r>
+            <a:pPr indent="0" marL="0">
+              <a:buNone/>
+            </a:pPr>
+            <a:r>
+              <a:rPr lang="en-US" sz="1200" dirty="0">
+                <a:solidFill>
+                  <a:srgbClr val="569CD6"/>
+                </a:solidFill>
+                <a:latin typeface="Courier New" pitchFamily="34" charset="0"/>
+                <a:ea typeface="Courier New" pitchFamily="34" charset="-122"/>
+                <a:cs typeface="Courier New" pitchFamily="34" charset="-120"/>
+              </a:rPr>
+              <a:t>}</a:t>
+            </a:r>
+            <a:pPr indent="0" marL="0">
+              <a:buNone/>
+            </a:pPr>
+            <a:r>
+              <a:rPr lang="en-US" sz="1200" dirty="0">
+                <a:solidFill>
+                  <a:srgbClr val="CE9178"/>
+                </a:solidFill>
+                <a:latin typeface="Courier New" pitchFamily="34" charset="0"/>
+                <a:ea typeface="Courier New" pitchFamily="34" charset="-122"/>
+                <a:cs typeface="Courier New" pitchFamily="34" charset="-120"/>
+              </a:rPr>
+              <a:t>/Reembolsos(</a:t>
+            </a:r>
+            <a:pPr indent="0" marL="0">
+              <a:buNone/>
+            </a:pPr>
+            <a:r>
+              <a:rPr lang="en-US" sz="1200" dirty="0">
+                <a:solidFill>
+                  <a:srgbClr val="569CD6"/>
+                </a:solidFill>
+                <a:latin typeface="Courier New" pitchFamily="34" charset="0"/>
+                <a:ea typeface="Courier New" pitchFamily="34" charset="-122"/>
+                <a:cs typeface="Courier New" pitchFamily="34" charset="-120"/>
+              </a:rPr>
+              <a:t>${</a:t>
+            </a:r>
+            <a:pPr indent="0" marL="0">
+              <a:buNone/>
+            </a:pPr>
+            <a:r>
+              <a:rPr lang="en-US" sz="1200" dirty="0">
+                <a:solidFill>
+                  <a:srgbClr val="9CDCFE"/>
+                </a:solidFill>
+                <a:latin typeface="Courier New" pitchFamily="34" charset="0"/>
+                <a:ea typeface="Courier New" pitchFamily="34" charset="-122"/>
+                <a:cs typeface="Courier New" pitchFamily="34" charset="-120"/>
+              </a:rPr>
+              <a:t>reembolso</a:t>
+            </a:r>
+            <a:pPr indent="0" marL="0">
+              <a:buNone/>
+            </a:pPr>
+            <a:r>
+              <a:rPr lang="en-US" sz="1200" dirty="0">
+                <a:solidFill>
+                  <a:srgbClr val="CCCCCC"/>
+                </a:solidFill>
+                <a:latin typeface="Courier New" pitchFamily="34" charset="0"/>
+                <a:ea typeface="Courier New" pitchFamily="34" charset="-122"/>
+                <a:cs typeface="Courier New" pitchFamily="34" charset="-120"/>
+              </a:rPr>
+              <a:t>.</a:t>
+            </a:r>
+            <a:pPr indent="0" marL="0">
+              <a:buNone/>
+            </a:pPr>
+            <a:r>
+              <a:rPr lang="en-US" sz="1200" dirty="0">
+                <a:solidFill>
+                  <a:srgbClr val="9CDCFE"/>
+                </a:solidFill>
+                <a:latin typeface="Courier New" pitchFamily="34" charset="0"/>
+                <a:ea typeface="Courier New" pitchFamily="34" charset="-122"/>
+                <a:cs typeface="Courier New" pitchFamily="34" charset="-120"/>
+              </a:rPr>
+              <a:t>ID</a:t>
+            </a:r>
+            <a:pPr indent="0" marL="0">
+              <a:buNone/>
+            </a:pPr>
+            <a:r>
+              <a:rPr lang="en-US" sz="1200" dirty="0">
+                <a:solidFill>
+                  <a:srgbClr val="569CD6"/>
+                </a:solidFill>
+                <a:latin typeface="Courier New" pitchFamily="34" charset="0"/>
+                <a:ea typeface="Courier New" pitchFamily="34" charset="-122"/>
+                <a:cs typeface="Courier New" pitchFamily="34" charset="-120"/>
+              </a:rPr>
+              <a:t>}</a:t>
+            </a:r>
+            <a:pPr indent="0" marL="0">
+              <a:buNone/>
+            </a:pPr>
+            <a:r>
+              <a:rPr lang="en-US" sz="1200" dirty="0">
+                <a:solidFill>
+                  <a:srgbClr val="CE9178"/>
+                </a:solidFill>
+                <a:latin typeface="Courier New" pitchFamily="34" charset="0"/>
+                <a:ea typeface="Courier New" pitchFamily="34" charset="-122"/>
+                <a:cs typeface="Courier New" pitchFamily="34" charset="-120"/>
+              </a:rPr>
+              <a:t>)/`</a:t>
+            </a:r>
+            <a:pPr indent="0" marL="0">
+              <a:buNone/>
+            </a:pPr>
+            <a:r>
+              <a:rPr lang="en-US" sz="1200" dirty="0">
+                <a:solidFill>
+                  <a:srgbClr val="CCCCCC"/>
+                </a:solidFill>
+                <a:latin typeface="Courier New" pitchFamily="34" charset="0"/>
+                <a:ea typeface="Courier New" pitchFamily="34" charset="-122"/>
+                <a:cs typeface="Courier New" pitchFamily="34" charset="-120"/>
+              </a:rPr>
+              <a:t> +</a:t>
             </a:r>
             <a:endParaRPr lang="en-US" sz="1200" dirty="0"/>
           </a:p>
@@ -8835,13 +9848,41 @@
             <a:r>
               <a:rPr lang="en-US" sz="1200" dirty="0">
                 <a:solidFill>
-                  <a:srgbClr val="EAECEE"/>
-                </a:solidFill>
-                <a:latin typeface="Courier New" pitchFamily="34" charset="0"/>
-                <a:ea typeface="Courier New" pitchFamily="34" charset="-122"/>
-                <a:cs typeface="Courier New" pitchFamily="34" charset="-120"/>
-              </a:rPr>
-              <a:t>    'ReembolsosService.aprovarReembolso',</a:t>
+                  <a:srgbClr val="CCCCCC"/>
+                </a:solidFill>
+                <a:latin typeface="Courier New" pitchFamily="34" charset="0"/>
+                <a:ea typeface="Courier New" pitchFamily="34" charset="-122"/>
+                <a:cs typeface="Courier New" pitchFamily="34" charset="-120"/>
+              </a:rPr>
+              <a:t>    </a:t>
+            </a:r>
+            <a:pPr indent="0" marL="0">
+              <a:buNone/>
+            </a:pPr>
+            <a:r>
+              <a:rPr lang="en-US" sz="1200" dirty="0">
+                <a:solidFill>
+                  <a:srgbClr val="CE9178"/>
+                </a:solidFill>
+                <a:latin typeface="Courier New" pitchFamily="34" charset="0"/>
+                <a:ea typeface="Courier New" pitchFamily="34" charset="-122"/>
+                <a:cs typeface="Courier New" pitchFamily="34" charset="-120"/>
+              </a:rPr>
+              <a:t>'ReembolsosService.aprovarReembolso'</a:t>
+            </a:r>
+            <a:pPr indent="0" marL="0">
+              <a:buNone/>
+            </a:pPr>
+            <a:r>
+              <a:rPr lang="en-US" sz="1200" dirty="0">
+                <a:solidFill>
+                  <a:srgbClr val="CCCCCC"/>
+                </a:solidFill>
+                <a:latin typeface="Courier New" pitchFamily="34" charset="0"/>
+                <a:ea typeface="Courier New" pitchFamily="34" charset="-122"/>
+                <a:cs typeface="Courier New" pitchFamily="34" charset="-120"/>
+              </a:rPr>
+              <a:t>,</a:t>
             </a:r>
             <a:endParaRPr lang="en-US" sz="1200" dirty="0"/>
           </a:p>
@@ -8852,13 +9893,125 @@
             <a:r>
               <a:rPr lang="en-US" sz="1200" dirty="0">
                 <a:solidFill>
-                  <a:srgbClr val="EAECEE"/>
-                </a:solidFill>
-                <a:latin typeface="Courier New" pitchFamily="34" charset="0"/>
-                <a:ea typeface="Courier New" pitchFamily="34" charset="-122"/>
-                <a:cs typeface="Courier New" pitchFamily="34" charset="-120"/>
-              </a:rPr>
-              <a:t>    { motivoDecisao: 'Procedente' })</a:t>
+                  <a:srgbClr val="CCCCCC"/>
+                </a:solidFill>
+                <a:latin typeface="Courier New" pitchFamily="34" charset="0"/>
+                <a:ea typeface="Courier New" pitchFamily="34" charset="-122"/>
+                <a:cs typeface="Courier New" pitchFamily="34" charset="-120"/>
+              </a:rPr>
+              <a:t>    </a:t>
+            </a:r>
+            <a:pPr indent="0" marL="0">
+              <a:buNone/>
+            </a:pPr>
+            <a:r>
+              <a:rPr lang="en-US" sz="1200" dirty="0">
+                <a:solidFill>
+                  <a:srgbClr val="FFD700"/>
+                </a:solidFill>
+                <a:latin typeface="Courier New" pitchFamily="34" charset="0"/>
+                <a:ea typeface="Courier New" pitchFamily="34" charset="-122"/>
+                <a:cs typeface="Courier New" pitchFamily="34" charset="-120"/>
+              </a:rPr>
+              <a:t>{</a:t>
+            </a:r>
+            <a:pPr indent="0" marL="0">
+              <a:buNone/>
+            </a:pPr>
+            <a:r>
+              <a:rPr lang="en-US" sz="1200" dirty="0">
+                <a:solidFill>
+                  <a:srgbClr val="CCCCCC"/>
+                </a:solidFill>
+                <a:latin typeface="Courier New" pitchFamily="34" charset="0"/>
+                <a:ea typeface="Courier New" pitchFamily="34" charset="-122"/>
+                <a:cs typeface="Courier New" pitchFamily="34" charset="-120"/>
+              </a:rPr>
+              <a:t> </a:t>
+            </a:r>
+            <a:pPr indent="0" marL="0">
+              <a:buNone/>
+            </a:pPr>
+            <a:r>
+              <a:rPr lang="en-US" sz="1200" dirty="0">
+                <a:solidFill>
+                  <a:srgbClr val="9CDCFE"/>
+                </a:solidFill>
+                <a:latin typeface="Courier New" pitchFamily="34" charset="0"/>
+                <a:ea typeface="Courier New" pitchFamily="34" charset="-122"/>
+                <a:cs typeface="Courier New" pitchFamily="34" charset="-120"/>
+              </a:rPr>
+              <a:t>motivoDecisao</a:t>
+            </a:r>
+            <a:pPr indent="0" marL="0">
+              <a:buNone/>
+            </a:pPr>
+            <a:r>
+              <a:rPr lang="en-US" sz="1200" dirty="0">
+                <a:solidFill>
+                  <a:srgbClr val="CCCCCC"/>
+                </a:solidFill>
+                <a:latin typeface="Courier New" pitchFamily="34" charset="0"/>
+                <a:ea typeface="Courier New" pitchFamily="34" charset="-122"/>
+                <a:cs typeface="Courier New" pitchFamily="34" charset="-120"/>
+              </a:rPr>
+              <a:t>: </a:t>
+            </a:r>
+            <a:pPr indent="0" marL="0">
+              <a:buNone/>
+            </a:pPr>
+            <a:r>
+              <a:rPr lang="en-US" sz="1200" dirty="0">
+                <a:solidFill>
+                  <a:srgbClr val="CE9178"/>
+                </a:solidFill>
+                <a:latin typeface="Courier New" pitchFamily="34" charset="0"/>
+                <a:ea typeface="Courier New" pitchFamily="34" charset="-122"/>
+                <a:cs typeface="Courier New" pitchFamily="34" charset="-120"/>
+              </a:rPr>
+              <a:t>'Procedente'</a:t>
+            </a:r>
+            <a:pPr indent="0" marL="0">
+              <a:buNone/>
+            </a:pPr>
+            <a:r>
+              <a:rPr lang="en-US" sz="1200" dirty="0">
+                <a:solidFill>
+                  <a:srgbClr val="CCCCCC"/>
+                </a:solidFill>
+                <a:latin typeface="Courier New" pitchFamily="34" charset="0"/>
+                <a:ea typeface="Courier New" pitchFamily="34" charset="-122"/>
+                <a:cs typeface="Courier New" pitchFamily="34" charset="-120"/>
+              </a:rPr>
+              <a:t> </a:t>
+            </a:r>
+            <a:pPr indent="0" marL="0">
+              <a:buNone/>
+            </a:pPr>
+            <a:r>
+              <a:rPr lang="en-US" sz="1200" dirty="0">
+                <a:solidFill>
+                  <a:srgbClr val="FFD700"/>
+                </a:solidFill>
+                <a:latin typeface="Courier New" pitchFamily="34" charset="0"/>
+                <a:ea typeface="Courier New" pitchFamily="34" charset="-122"/>
+                <a:cs typeface="Courier New" pitchFamily="34" charset="-120"/>
+              </a:rPr>
+              <a:t>}</a:t>
+            </a:r>
+            <a:pPr indent="0" marL="0">
+              <a:buNone/>
+            </a:pPr>
+            <a:r>
+              <a:rPr lang="en-US" sz="1200" dirty="0">
+                <a:solidFill>
+                  <a:srgbClr val="179FFF"/>
+                </a:solidFill>
+                <a:latin typeface="Courier New" pitchFamily="34" charset="0"/>
+                <a:ea typeface="Courier New" pitchFamily="34" charset="-122"/>
+                <a:cs typeface="Courier New" pitchFamily="34" charset="-120"/>
+              </a:rPr>
+              <a:t>)</a:t>
             </a:r>
             <a:endParaRPr lang="en-US" sz="1200" dirty="0"/>
           </a:p>
@@ -8869,13 +10022,153 @@
             <a:r>
               <a:rPr lang="en-US" sz="1200" dirty="0">
                 <a:solidFill>
-                  <a:srgbClr val="EAECEE"/>
-                </a:solidFill>
-                <a:latin typeface="Courier New" pitchFamily="34" charset="0"/>
-                <a:ea typeface="Courier New" pitchFamily="34" charset="-122"/>
-                <a:cs typeface="Courier New" pitchFamily="34" charset="-120"/>
-              </a:rPr>
-              <a:t>  assert.equal(data.statusReembolso_code, 'APROVADO')</a:t>
+                  <a:srgbClr val="CCCCCC"/>
+                </a:solidFill>
+                <a:latin typeface="Courier New" pitchFamily="34" charset="0"/>
+                <a:ea typeface="Courier New" pitchFamily="34" charset="-122"/>
+                <a:cs typeface="Courier New" pitchFamily="34" charset="-120"/>
+              </a:rPr>
+              <a:t>  </a:t>
+            </a:r>
+            <a:pPr indent="0" marL="0">
+              <a:buNone/>
+            </a:pPr>
+            <a:r>
+              <a:rPr lang="en-US" sz="1200" dirty="0">
+                <a:solidFill>
+                  <a:srgbClr val="9CDCFE"/>
+                </a:solidFill>
+                <a:latin typeface="Courier New" pitchFamily="34" charset="0"/>
+                <a:ea typeface="Courier New" pitchFamily="34" charset="-122"/>
+                <a:cs typeface="Courier New" pitchFamily="34" charset="-120"/>
+              </a:rPr>
+              <a:t>assert</a:t>
+            </a:r>
+            <a:pPr indent="0" marL="0">
+              <a:buNone/>
+            </a:pPr>
+            <a:r>
+              <a:rPr lang="en-US" sz="1200" dirty="0">
+                <a:solidFill>
+                  <a:srgbClr val="CCCCCC"/>
+                </a:solidFill>
+                <a:latin typeface="Courier New" pitchFamily="34" charset="0"/>
+                <a:ea typeface="Courier New" pitchFamily="34" charset="-122"/>
+                <a:cs typeface="Courier New" pitchFamily="34" charset="-120"/>
+              </a:rPr>
+              <a:t>.</a:t>
+            </a:r>
+            <a:pPr indent="0" marL="0">
+              <a:buNone/>
+            </a:pPr>
+            <a:r>
+              <a:rPr lang="en-US" sz="1200" dirty="0">
+                <a:solidFill>
+                  <a:srgbClr val="DCDCAA"/>
+                </a:solidFill>
+                <a:latin typeface="Courier New" pitchFamily="34" charset="0"/>
+                <a:ea typeface="Courier New" pitchFamily="34" charset="-122"/>
+                <a:cs typeface="Courier New" pitchFamily="34" charset="-120"/>
+              </a:rPr>
+              <a:t>equal</a:t>
+            </a:r>
+            <a:pPr indent="0" marL="0">
+              <a:buNone/>
+            </a:pPr>
+            <a:r>
+              <a:rPr lang="en-US" sz="1200" dirty="0">
+                <a:solidFill>
+                  <a:srgbClr val="179FFF"/>
+                </a:solidFill>
+                <a:latin typeface="Courier New" pitchFamily="34" charset="0"/>
+                <a:ea typeface="Courier New" pitchFamily="34" charset="-122"/>
+                <a:cs typeface="Courier New" pitchFamily="34" charset="-120"/>
+              </a:rPr>
+              <a:t>(</a:t>
+            </a:r>
+            <a:pPr indent="0" marL="0">
+              <a:buNone/>
+            </a:pPr>
+            <a:r>
+              <a:rPr lang="en-US" sz="1200" dirty="0">
+                <a:solidFill>
+                  <a:srgbClr val="9CDCFE"/>
+                </a:solidFill>
+                <a:latin typeface="Courier New" pitchFamily="34" charset="0"/>
+                <a:ea typeface="Courier New" pitchFamily="34" charset="-122"/>
+                <a:cs typeface="Courier New" pitchFamily="34" charset="-120"/>
+              </a:rPr>
+              <a:t>data</a:t>
+            </a:r>
+            <a:pPr indent="0" marL="0">
+              <a:buNone/>
+            </a:pPr>
+            <a:r>
+              <a:rPr lang="en-US" sz="1200" dirty="0">
+                <a:solidFill>
+                  <a:srgbClr val="CCCCCC"/>
+                </a:solidFill>
+                <a:latin typeface="Courier New" pitchFamily="34" charset="0"/>
+                <a:ea typeface="Courier New" pitchFamily="34" charset="-122"/>
+                <a:cs typeface="Courier New" pitchFamily="34" charset="-120"/>
+              </a:rPr>
+              <a:t>.</a:t>
+            </a:r>
+            <a:pPr indent="0" marL="0">
+              <a:buNone/>
+            </a:pPr>
+            <a:r>
+              <a:rPr lang="en-US" sz="1200" dirty="0">
+                <a:solidFill>
+                  <a:srgbClr val="9CDCFE"/>
+                </a:solidFill>
+                <a:latin typeface="Courier New" pitchFamily="34" charset="0"/>
+                <a:ea typeface="Courier New" pitchFamily="34" charset="-122"/>
+                <a:cs typeface="Courier New" pitchFamily="34" charset="-120"/>
+              </a:rPr>
+              <a:t>statusReembolso_code</a:t>
+            </a:r>
+            <a:pPr indent="0" marL="0">
+              <a:buNone/>
+            </a:pPr>
+            <a:r>
+              <a:rPr lang="en-US" sz="1200" dirty="0">
+                <a:solidFill>
+                  <a:srgbClr val="CCCCCC"/>
+                </a:solidFill>
+                <a:latin typeface="Courier New" pitchFamily="34" charset="0"/>
+                <a:ea typeface="Courier New" pitchFamily="34" charset="-122"/>
+                <a:cs typeface="Courier New" pitchFamily="34" charset="-120"/>
+              </a:rPr>
+              <a:t>, </a:t>
+            </a:r>
+            <a:pPr indent="0" marL="0">
+              <a:buNone/>
+            </a:pPr>
+            <a:r>
+              <a:rPr lang="en-US" sz="1200" dirty="0">
+                <a:solidFill>
+                  <a:srgbClr val="CE9178"/>
+                </a:solidFill>
+                <a:latin typeface="Courier New" pitchFamily="34" charset="0"/>
+                <a:ea typeface="Courier New" pitchFamily="34" charset="-122"/>
+                <a:cs typeface="Courier New" pitchFamily="34" charset="-120"/>
+              </a:rPr>
+              <a:t>'APROVADO'</a:t>
+            </a:r>
+            <a:pPr indent="0" marL="0">
+              <a:buNone/>
+            </a:pPr>
+            <a:r>
+              <a:rPr lang="en-US" sz="1200" dirty="0">
+                <a:solidFill>
+                  <a:srgbClr val="179FFF"/>
+                </a:solidFill>
+                <a:latin typeface="Courier New" pitchFamily="34" charset="0"/>
+                <a:ea typeface="Courier New" pitchFamily="34" charset="-122"/>
+                <a:cs typeface="Courier New" pitchFamily="34" charset="-120"/>
+              </a:rPr>
+              <a:t>)</a:t>
             </a:r>
             <a:endParaRPr lang="en-US" sz="1200" dirty="0"/>
           </a:p>
@@ -8886,7 +10179,7 @@
             <a:r>
               <a:rPr lang="en-US" sz="1200" dirty="0">
                 <a:solidFill>
-                  <a:srgbClr val="EAECEE"/>
+                  <a:srgbClr val="CCCCCC"/>
                 </a:solidFill>
                 <a:latin typeface="Courier New" pitchFamily="34" charset="0"/>
                 <a:ea typeface="Courier New" pitchFamily="34" charset="-122"/>
@@ -8903,13 +10196,181 @@
             <a:r>
               <a:rPr lang="en-US" sz="1200" dirty="0">
                 <a:solidFill>
-                  <a:srgbClr val="EAECEE"/>
-                </a:solidFill>
-                <a:latin typeface="Courier New" pitchFamily="34" charset="0"/>
-                <a:ea typeface="Courier New" pitchFamily="34" charset="-122"/>
-                <a:cs typeface="Courier New" pitchFamily="34" charset="-120"/>
-              </a:rPr>
-              <a:t>  const atual = await pedidoAtual(pedido.ID)</a:t>
+                  <a:srgbClr val="CCCCCC"/>
+                </a:solidFill>
+                <a:latin typeface="Courier New" pitchFamily="34" charset="0"/>
+                <a:ea typeface="Courier New" pitchFamily="34" charset="-122"/>
+                <a:cs typeface="Courier New" pitchFamily="34" charset="-120"/>
+              </a:rPr>
+              <a:t>  </a:t>
+            </a:r>
+            <a:pPr indent="0" marL="0">
+              <a:buNone/>
+            </a:pPr>
+            <a:r>
+              <a:rPr lang="en-US" sz="1200" dirty="0">
+                <a:solidFill>
+                  <a:srgbClr val="569CD6"/>
+                </a:solidFill>
+                <a:latin typeface="Courier New" pitchFamily="34" charset="0"/>
+                <a:ea typeface="Courier New" pitchFamily="34" charset="-122"/>
+                <a:cs typeface="Courier New" pitchFamily="34" charset="-120"/>
+              </a:rPr>
+              <a:t>const</a:t>
+            </a:r>
+            <a:pPr indent="0" marL="0">
+              <a:buNone/>
+            </a:pPr>
+            <a:r>
+              <a:rPr lang="en-US" sz="1200" dirty="0">
+                <a:solidFill>
+                  <a:srgbClr val="CCCCCC"/>
+                </a:solidFill>
+                <a:latin typeface="Courier New" pitchFamily="34" charset="0"/>
+                <a:ea typeface="Courier New" pitchFamily="34" charset="-122"/>
+                <a:cs typeface="Courier New" pitchFamily="34" charset="-120"/>
+              </a:rPr>
+              <a:t> </a:t>
+            </a:r>
+            <a:pPr indent="0" marL="0">
+              <a:buNone/>
+            </a:pPr>
+            <a:r>
+              <a:rPr lang="en-US" sz="1200" dirty="0">
+                <a:solidFill>
+                  <a:srgbClr val="9CDCFE"/>
+                </a:solidFill>
+                <a:latin typeface="Courier New" pitchFamily="34" charset="0"/>
+                <a:ea typeface="Courier New" pitchFamily="34" charset="-122"/>
+                <a:cs typeface="Courier New" pitchFamily="34" charset="-120"/>
+              </a:rPr>
+              <a:t>atual</a:t>
+            </a:r>
+            <a:pPr indent="0" marL="0">
+              <a:buNone/>
+            </a:pPr>
+            <a:r>
+              <a:rPr lang="en-US" sz="1200" dirty="0">
+                <a:solidFill>
+                  <a:srgbClr val="CCCCCC"/>
+                </a:solidFill>
+                <a:latin typeface="Courier New" pitchFamily="34" charset="0"/>
+                <a:ea typeface="Courier New" pitchFamily="34" charset="-122"/>
+                <a:cs typeface="Courier New" pitchFamily="34" charset="-120"/>
+              </a:rPr>
+              <a:t> = </a:t>
+            </a:r>
+            <a:pPr indent="0" marL="0">
+              <a:buNone/>
+            </a:pPr>
+            <a:r>
+              <a:rPr lang="en-US" sz="1200" dirty="0">
+                <a:solidFill>
+                  <a:srgbClr val="C586C0"/>
+                </a:solidFill>
+                <a:latin typeface="Courier New" pitchFamily="34" charset="0"/>
+                <a:ea typeface="Courier New" pitchFamily="34" charset="-122"/>
+                <a:cs typeface="Courier New" pitchFamily="34" charset="-120"/>
+              </a:rPr>
+              <a:t>await</a:t>
+            </a:r>
+            <a:pPr indent="0" marL="0">
+              <a:buNone/>
+            </a:pPr>
+            <a:r>
+              <a:rPr lang="en-US" sz="1200" dirty="0">
+                <a:solidFill>
+                  <a:srgbClr val="CCCCCC"/>
+                </a:solidFill>
+                <a:latin typeface="Courier New" pitchFamily="34" charset="0"/>
+                <a:ea typeface="Courier New" pitchFamily="34" charset="-122"/>
+                <a:cs typeface="Courier New" pitchFamily="34" charset="-120"/>
+              </a:rPr>
+              <a:t> </a:t>
+            </a:r>
+            <a:pPr indent="0" marL="0">
+              <a:buNone/>
+            </a:pPr>
+            <a:r>
+              <a:rPr lang="en-US" sz="1200" dirty="0">
+                <a:solidFill>
+                  <a:srgbClr val="DCDCAA"/>
+                </a:solidFill>
+                <a:latin typeface="Courier New" pitchFamily="34" charset="0"/>
+                <a:ea typeface="Courier New" pitchFamily="34" charset="-122"/>
+                <a:cs typeface="Courier New" pitchFamily="34" charset="-120"/>
+              </a:rPr>
+              <a:t>pedidoAtual</a:t>
+            </a:r>
+            <a:pPr indent="0" marL="0">
+              <a:buNone/>
+            </a:pPr>
+            <a:r>
+              <a:rPr lang="en-US" sz="1200" dirty="0">
+                <a:solidFill>
+                  <a:srgbClr val="179FFF"/>
+                </a:solidFill>
+                <a:latin typeface="Courier New" pitchFamily="34" charset="0"/>
+                <a:ea typeface="Courier New" pitchFamily="34" charset="-122"/>
+                <a:cs typeface="Courier New" pitchFamily="34" charset="-120"/>
+              </a:rPr>
+              <a:t>(</a:t>
+            </a:r>
+            <a:pPr indent="0" marL="0">
+              <a:buNone/>
+            </a:pPr>
+            <a:r>
+              <a:rPr lang="en-US" sz="1200" dirty="0">
+                <a:solidFill>
+                  <a:srgbClr val="9CDCFE"/>
+                </a:solidFill>
+                <a:latin typeface="Courier New" pitchFamily="34" charset="0"/>
+                <a:ea typeface="Courier New" pitchFamily="34" charset="-122"/>
+                <a:cs typeface="Courier New" pitchFamily="34" charset="-120"/>
+              </a:rPr>
+              <a:t>pedido</a:t>
+            </a:r>
+            <a:pPr indent="0" marL="0">
+              <a:buNone/>
+            </a:pPr>
+            <a:r>
+              <a:rPr lang="en-US" sz="1200" dirty="0">
+                <a:solidFill>
+                  <a:srgbClr val="CCCCCC"/>
+                </a:solidFill>
+                <a:latin typeface="Courier New" pitchFamily="34" charset="0"/>
+                <a:ea typeface="Courier New" pitchFamily="34" charset="-122"/>
+                <a:cs typeface="Courier New" pitchFamily="34" charset="-120"/>
+              </a:rPr>
+              <a:t>.</a:t>
+            </a:r>
+            <a:pPr indent="0" marL="0">
+              <a:buNone/>
+            </a:pPr>
+            <a:r>
+              <a:rPr lang="en-US" sz="1200" dirty="0">
+                <a:solidFill>
+                  <a:srgbClr val="4FC1FF"/>
+                </a:solidFill>
+                <a:latin typeface="Courier New" pitchFamily="34" charset="0"/>
+                <a:ea typeface="Courier New" pitchFamily="34" charset="-122"/>
+                <a:cs typeface="Courier New" pitchFamily="34" charset="-120"/>
+              </a:rPr>
+              <a:t>ID</a:t>
+            </a:r>
+            <a:pPr indent="0" marL="0">
+              <a:buNone/>
+            </a:pPr>
+            <a:r>
+              <a:rPr lang="en-US" sz="1200" dirty="0">
+                <a:solidFill>
+                  <a:srgbClr val="179FFF"/>
+                </a:solidFill>
+                <a:latin typeface="Courier New" pitchFamily="34" charset="0"/>
+                <a:ea typeface="Courier New" pitchFamily="34" charset="-122"/>
+                <a:cs typeface="Courier New" pitchFamily="34" charset="-120"/>
+              </a:rPr>
+              <a:t>)</a:t>
             </a:r>
             <a:endParaRPr lang="en-US" sz="1200" dirty="0"/>
           </a:p>
@@ -8920,13 +10381,153 @@
             <a:r>
               <a:rPr lang="en-US" sz="1200" dirty="0">
                 <a:solidFill>
-                  <a:srgbClr val="EAECEE"/>
-                </a:solidFill>
-                <a:latin typeface="Courier New" pitchFamily="34" charset="0"/>
-                <a:ea typeface="Courier New" pitchFamily="34" charset="-122"/>
-                <a:cs typeface="Courier New" pitchFamily="34" charset="-120"/>
-              </a:rPr>
-              <a:t>  assert.equal(atual.statusPedido_code, 'CANCELADO')</a:t>
+                  <a:srgbClr val="CCCCCC"/>
+                </a:solidFill>
+                <a:latin typeface="Courier New" pitchFamily="34" charset="0"/>
+                <a:ea typeface="Courier New" pitchFamily="34" charset="-122"/>
+                <a:cs typeface="Courier New" pitchFamily="34" charset="-120"/>
+              </a:rPr>
+              <a:t>  </a:t>
+            </a:r>
+            <a:pPr indent="0" marL="0">
+              <a:buNone/>
+            </a:pPr>
+            <a:r>
+              <a:rPr lang="en-US" sz="1200" dirty="0">
+                <a:solidFill>
+                  <a:srgbClr val="9CDCFE"/>
+                </a:solidFill>
+                <a:latin typeface="Courier New" pitchFamily="34" charset="0"/>
+                <a:ea typeface="Courier New" pitchFamily="34" charset="-122"/>
+                <a:cs typeface="Courier New" pitchFamily="34" charset="-120"/>
+              </a:rPr>
+              <a:t>assert</a:t>
+            </a:r>
+            <a:pPr indent="0" marL="0">
+              <a:buNone/>
+            </a:pPr>
+            <a:r>
+              <a:rPr lang="en-US" sz="1200" dirty="0">
+                <a:solidFill>
+                  <a:srgbClr val="CCCCCC"/>
+                </a:solidFill>
+                <a:latin typeface="Courier New" pitchFamily="34" charset="0"/>
+                <a:ea typeface="Courier New" pitchFamily="34" charset="-122"/>
+                <a:cs typeface="Courier New" pitchFamily="34" charset="-120"/>
+              </a:rPr>
+              <a:t>.</a:t>
+            </a:r>
+            <a:pPr indent="0" marL="0">
+              <a:buNone/>
+            </a:pPr>
+            <a:r>
+              <a:rPr lang="en-US" sz="1200" dirty="0">
+                <a:solidFill>
+                  <a:srgbClr val="DCDCAA"/>
+                </a:solidFill>
+                <a:latin typeface="Courier New" pitchFamily="34" charset="0"/>
+                <a:ea typeface="Courier New" pitchFamily="34" charset="-122"/>
+                <a:cs typeface="Courier New" pitchFamily="34" charset="-120"/>
+              </a:rPr>
+              <a:t>equal</a:t>
+            </a:r>
+            <a:pPr indent="0" marL="0">
+              <a:buNone/>
+            </a:pPr>
+            <a:r>
+              <a:rPr lang="en-US" sz="1200" dirty="0">
+                <a:solidFill>
+                  <a:srgbClr val="179FFF"/>
+                </a:solidFill>
+                <a:latin typeface="Courier New" pitchFamily="34" charset="0"/>
+                <a:ea typeface="Courier New" pitchFamily="34" charset="-122"/>
+                <a:cs typeface="Courier New" pitchFamily="34" charset="-120"/>
+              </a:rPr>
+              <a:t>(</a:t>
+            </a:r>
+            <a:pPr indent="0" marL="0">
+              <a:buNone/>
+            </a:pPr>
+            <a:r>
+              <a:rPr lang="en-US" sz="1200" dirty="0">
+                <a:solidFill>
+                  <a:srgbClr val="9CDCFE"/>
+                </a:solidFill>
+                <a:latin typeface="Courier New" pitchFamily="34" charset="0"/>
+                <a:ea typeface="Courier New" pitchFamily="34" charset="-122"/>
+                <a:cs typeface="Courier New" pitchFamily="34" charset="-120"/>
+              </a:rPr>
+              <a:t>atual</a:t>
+            </a:r>
+            <a:pPr indent="0" marL="0">
+              <a:buNone/>
+            </a:pPr>
+            <a:r>
+              <a:rPr lang="en-US" sz="1200" dirty="0">
+                <a:solidFill>
+                  <a:srgbClr val="CCCCCC"/>
+                </a:solidFill>
+                <a:latin typeface="Courier New" pitchFamily="34" charset="0"/>
+                <a:ea typeface="Courier New" pitchFamily="34" charset="-122"/>
+                <a:cs typeface="Courier New" pitchFamily="34" charset="-120"/>
+              </a:rPr>
+              <a:t>.</a:t>
+            </a:r>
+            <a:pPr indent="0" marL="0">
+              <a:buNone/>
+            </a:pPr>
+            <a:r>
+              <a:rPr lang="en-US" sz="1200" dirty="0">
+                <a:solidFill>
+                  <a:srgbClr val="9CDCFE"/>
+                </a:solidFill>
+                <a:latin typeface="Courier New" pitchFamily="34" charset="0"/>
+                <a:ea typeface="Courier New" pitchFamily="34" charset="-122"/>
+                <a:cs typeface="Courier New" pitchFamily="34" charset="-120"/>
+              </a:rPr>
+              <a:t>statusPedido_code</a:t>
+            </a:r>
+            <a:pPr indent="0" marL="0">
+              <a:buNone/>
+            </a:pPr>
+            <a:r>
+              <a:rPr lang="en-US" sz="1200" dirty="0">
+                <a:solidFill>
+                  <a:srgbClr val="CCCCCC"/>
+                </a:solidFill>
+                <a:latin typeface="Courier New" pitchFamily="34" charset="0"/>
+                <a:ea typeface="Courier New" pitchFamily="34" charset="-122"/>
+                <a:cs typeface="Courier New" pitchFamily="34" charset="-120"/>
+              </a:rPr>
+              <a:t>, </a:t>
+            </a:r>
+            <a:pPr indent="0" marL="0">
+              <a:buNone/>
+            </a:pPr>
+            <a:r>
+              <a:rPr lang="en-US" sz="1200" dirty="0">
+                <a:solidFill>
+                  <a:srgbClr val="CE9178"/>
+                </a:solidFill>
+                <a:latin typeface="Courier New" pitchFamily="34" charset="0"/>
+                <a:ea typeface="Courier New" pitchFamily="34" charset="-122"/>
+                <a:cs typeface="Courier New" pitchFamily="34" charset="-120"/>
+              </a:rPr>
+              <a:t>'CANCELADO'</a:t>
+            </a:r>
+            <a:pPr indent="0" marL="0">
+              <a:buNone/>
+            </a:pPr>
+            <a:r>
+              <a:rPr lang="en-US" sz="1200" dirty="0">
+                <a:solidFill>
+                  <a:srgbClr val="179FFF"/>
+                </a:solidFill>
+                <a:latin typeface="Courier New" pitchFamily="34" charset="0"/>
+                <a:ea typeface="Courier New" pitchFamily="34" charset="-122"/>
+                <a:cs typeface="Courier New" pitchFamily="34" charset="-120"/>
+              </a:rPr>
+              <a:t>)</a:t>
             </a:r>
             <a:endParaRPr lang="en-US" sz="1200" dirty="0"/>
           </a:p>
@@ -8937,13 +10538,153 @@
             <a:r>
               <a:rPr lang="en-US" sz="1200" dirty="0">
                 <a:solidFill>
-                  <a:srgbClr val="EAECEE"/>
-                </a:solidFill>
-                <a:latin typeface="Courier New" pitchFamily="34" charset="0"/>
-                <a:ea typeface="Courier New" pitchFamily="34" charset="-122"/>
-                <a:cs typeface="Courier New" pitchFamily="34" charset="-120"/>
-              </a:rPr>
-              <a:t>  assert.equal(atual.statusPagamento_code, 'DEVOLVIDO')</a:t>
+                  <a:srgbClr val="CCCCCC"/>
+                </a:solidFill>
+                <a:latin typeface="Courier New" pitchFamily="34" charset="0"/>
+                <a:ea typeface="Courier New" pitchFamily="34" charset="-122"/>
+                <a:cs typeface="Courier New" pitchFamily="34" charset="-120"/>
+              </a:rPr>
+              <a:t>  </a:t>
+            </a:r>
+            <a:pPr indent="0" marL="0">
+              <a:buNone/>
+            </a:pPr>
+            <a:r>
+              <a:rPr lang="en-US" sz="1200" dirty="0">
+                <a:solidFill>
+                  <a:srgbClr val="9CDCFE"/>
+                </a:solidFill>
+                <a:latin typeface="Courier New" pitchFamily="34" charset="0"/>
+                <a:ea typeface="Courier New" pitchFamily="34" charset="-122"/>
+                <a:cs typeface="Courier New" pitchFamily="34" charset="-120"/>
+              </a:rPr>
+              <a:t>assert</a:t>
+            </a:r>
+            <a:pPr indent="0" marL="0">
+              <a:buNone/>
+            </a:pPr>
+            <a:r>
+              <a:rPr lang="en-US" sz="1200" dirty="0">
+                <a:solidFill>
+                  <a:srgbClr val="CCCCCC"/>
+                </a:solidFill>
+                <a:latin typeface="Courier New" pitchFamily="34" charset="0"/>
+                <a:ea typeface="Courier New" pitchFamily="34" charset="-122"/>
+                <a:cs typeface="Courier New" pitchFamily="34" charset="-120"/>
+              </a:rPr>
+              <a:t>.</a:t>
+            </a:r>
+            <a:pPr indent="0" marL="0">
+              <a:buNone/>
+            </a:pPr>
+            <a:r>
+              <a:rPr lang="en-US" sz="1200" dirty="0">
+                <a:solidFill>
+                  <a:srgbClr val="DCDCAA"/>
+                </a:solidFill>
+                <a:latin typeface="Courier New" pitchFamily="34" charset="0"/>
+                <a:ea typeface="Courier New" pitchFamily="34" charset="-122"/>
+                <a:cs typeface="Courier New" pitchFamily="34" charset="-120"/>
+              </a:rPr>
+              <a:t>equal</a:t>
+            </a:r>
+            <a:pPr indent="0" marL="0">
+              <a:buNone/>
+            </a:pPr>
+            <a:r>
+              <a:rPr lang="en-US" sz="1200" dirty="0">
+                <a:solidFill>
+                  <a:srgbClr val="179FFF"/>
+                </a:solidFill>
+                <a:latin typeface="Courier New" pitchFamily="34" charset="0"/>
+                <a:ea typeface="Courier New" pitchFamily="34" charset="-122"/>
+                <a:cs typeface="Courier New" pitchFamily="34" charset="-120"/>
+              </a:rPr>
+              <a:t>(</a:t>
+            </a:r>
+            <a:pPr indent="0" marL="0">
+              <a:buNone/>
+            </a:pPr>
+            <a:r>
+              <a:rPr lang="en-US" sz="1200" dirty="0">
+                <a:solidFill>
+                  <a:srgbClr val="9CDCFE"/>
+                </a:solidFill>
+                <a:latin typeface="Courier New" pitchFamily="34" charset="0"/>
+                <a:ea typeface="Courier New" pitchFamily="34" charset="-122"/>
+                <a:cs typeface="Courier New" pitchFamily="34" charset="-120"/>
+              </a:rPr>
+              <a:t>atual</a:t>
+            </a:r>
+            <a:pPr indent="0" marL="0">
+              <a:buNone/>
+            </a:pPr>
+            <a:r>
+              <a:rPr lang="en-US" sz="1200" dirty="0">
+                <a:solidFill>
+                  <a:srgbClr val="CCCCCC"/>
+                </a:solidFill>
+                <a:latin typeface="Courier New" pitchFamily="34" charset="0"/>
+                <a:ea typeface="Courier New" pitchFamily="34" charset="-122"/>
+                <a:cs typeface="Courier New" pitchFamily="34" charset="-120"/>
+              </a:rPr>
+              <a:t>.</a:t>
+            </a:r>
+            <a:pPr indent="0" marL="0">
+              <a:buNone/>
+            </a:pPr>
+            <a:r>
+              <a:rPr lang="en-US" sz="1200" dirty="0">
+                <a:solidFill>
+                  <a:srgbClr val="9CDCFE"/>
+                </a:solidFill>
+                <a:latin typeface="Courier New" pitchFamily="34" charset="0"/>
+                <a:ea typeface="Courier New" pitchFamily="34" charset="-122"/>
+                <a:cs typeface="Courier New" pitchFamily="34" charset="-120"/>
+              </a:rPr>
+              <a:t>statusPagamento_code</a:t>
+            </a:r>
+            <a:pPr indent="0" marL="0">
+              <a:buNone/>
+            </a:pPr>
+            <a:r>
+              <a:rPr lang="en-US" sz="1200" dirty="0">
+                <a:solidFill>
+                  <a:srgbClr val="CCCCCC"/>
+                </a:solidFill>
+                <a:latin typeface="Courier New" pitchFamily="34" charset="0"/>
+                <a:ea typeface="Courier New" pitchFamily="34" charset="-122"/>
+                <a:cs typeface="Courier New" pitchFamily="34" charset="-120"/>
+              </a:rPr>
+              <a:t>, </a:t>
+            </a:r>
+            <a:pPr indent="0" marL="0">
+              <a:buNone/>
+            </a:pPr>
+            <a:r>
+              <a:rPr lang="en-US" sz="1200" dirty="0">
+                <a:solidFill>
+                  <a:srgbClr val="CE9178"/>
+                </a:solidFill>
+                <a:latin typeface="Courier New" pitchFamily="34" charset="0"/>
+                <a:ea typeface="Courier New" pitchFamily="34" charset="-122"/>
+                <a:cs typeface="Courier New" pitchFamily="34" charset="-120"/>
+              </a:rPr>
+              <a:t>'DEVOLVIDO'</a:t>
+            </a:r>
+            <a:pPr indent="0" marL="0">
+              <a:buNone/>
+            </a:pPr>
+            <a:r>
+              <a:rPr lang="en-US" sz="1200" dirty="0">
+                <a:solidFill>
+                  <a:srgbClr val="179FFF"/>
+                </a:solidFill>
+                <a:latin typeface="Courier New" pitchFamily="34" charset="0"/>
+                <a:ea typeface="Courier New" pitchFamily="34" charset="-122"/>
+                <a:cs typeface="Courier New" pitchFamily="34" charset="-120"/>
+              </a:rPr>
+              <a:t>)</a:t>
             </a:r>
             <a:endParaRPr lang="en-US" sz="1200" dirty="0"/>
           </a:p>
@@ -8954,13 +10695,251 @@
             <a:r>
               <a:rPr lang="en-US" sz="1200" dirty="0">
                 <a:solidFill>
-                  <a:srgbClr val="EAECEE"/>
-                </a:solidFill>
-                <a:latin typeface="Courier New" pitchFamily="34" charset="0"/>
-                <a:ea typeface="Courier New" pitchFamily="34" charset="-122"/>
-                <a:cs typeface="Courier New" pitchFamily="34" charset="-120"/>
-              </a:rPr>
-              <a:t>  assert.equal(await reservado(item.ID), antes - 2)</a:t>
+                  <a:srgbClr val="CCCCCC"/>
+                </a:solidFill>
+                <a:latin typeface="Courier New" pitchFamily="34" charset="0"/>
+                <a:ea typeface="Courier New" pitchFamily="34" charset="-122"/>
+                <a:cs typeface="Courier New" pitchFamily="34" charset="-120"/>
+              </a:rPr>
+              <a:t>  </a:t>
+            </a:r>
+            <a:pPr indent="0" marL="0">
+              <a:buNone/>
+            </a:pPr>
+            <a:r>
+              <a:rPr lang="en-US" sz="1200" dirty="0">
+                <a:solidFill>
+                  <a:srgbClr val="9CDCFE"/>
+                </a:solidFill>
+                <a:latin typeface="Courier New" pitchFamily="34" charset="0"/>
+                <a:ea typeface="Courier New" pitchFamily="34" charset="-122"/>
+                <a:cs typeface="Courier New" pitchFamily="34" charset="-120"/>
+              </a:rPr>
+              <a:t>assert</a:t>
+            </a:r>
+            <a:pPr indent="0" marL="0">
+              <a:buNone/>
+            </a:pPr>
+            <a:r>
+              <a:rPr lang="en-US" sz="1200" dirty="0">
+                <a:solidFill>
+                  <a:srgbClr val="CCCCCC"/>
+                </a:solidFill>
+                <a:latin typeface="Courier New" pitchFamily="34" charset="0"/>
+                <a:ea typeface="Courier New" pitchFamily="34" charset="-122"/>
+                <a:cs typeface="Courier New" pitchFamily="34" charset="-120"/>
+              </a:rPr>
+              <a:t>.</a:t>
+            </a:r>
+            <a:pPr indent="0" marL="0">
+              <a:buNone/>
+            </a:pPr>
+            <a:r>
+              <a:rPr lang="en-US" sz="1200" dirty="0">
+                <a:solidFill>
+                  <a:srgbClr val="DCDCAA"/>
+                </a:solidFill>
+                <a:latin typeface="Courier New" pitchFamily="34" charset="0"/>
+                <a:ea typeface="Courier New" pitchFamily="34" charset="-122"/>
+                <a:cs typeface="Courier New" pitchFamily="34" charset="-120"/>
+              </a:rPr>
+              <a:t>equal</a:t>
+            </a:r>
+            <a:pPr indent="0" marL="0">
+              <a:buNone/>
+            </a:pPr>
+            <a:r>
+              <a:rPr lang="en-US" sz="1200" dirty="0">
+                <a:solidFill>
+                  <a:srgbClr val="179FFF"/>
+                </a:solidFill>
+                <a:latin typeface="Courier New" pitchFamily="34" charset="0"/>
+                <a:ea typeface="Courier New" pitchFamily="34" charset="-122"/>
+                <a:cs typeface="Courier New" pitchFamily="34" charset="-120"/>
+              </a:rPr>
+              <a:t>(</a:t>
+            </a:r>
+            <a:pPr indent="0" marL="0">
+              <a:buNone/>
+            </a:pPr>
+            <a:r>
+              <a:rPr lang="en-US" sz="1200" dirty="0">
+                <a:solidFill>
+                  <a:srgbClr val="C586C0"/>
+                </a:solidFill>
+                <a:latin typeface="Courier New" pitchFamily="34" charset="0"/>
+                <a:ea typeface="Courier New" pitchFamily="34" charset="-122"/>
+                <a:cs typeface="Courier New" pitchFamily="34" charset="-120"/>
+              </a:rPr>
+              <a:t>await</a:t>
+            </a:r>
+            <a:pPr indent="0" marL="0">
+              <a:buNone/>
+            </a:pPr>
+            <a:r>
+              <a:rPr lang="en-US" sz="1200" dirty="0">
+                <a:solidFill>
+                  <a:srgbClr val="CCCCCC"/>
+                </a:solidFill>
+                <a:latin typeface="Courier New" pitchFamily="34" charset="0"/>
+                <a:ea typeface="Courier New" pitchFamily="34" charset="-122"/>
+                <a:cs typeface="Courier New" pitchFamily="34" charset="-120"/>
+              </a:rPr>
+              <a:t> </a:t>
+            </a:r>
+            <a:pPr indent="0" marL="0">
+              <a:buNone/>
+            </a:pPr>
+            <a:r>
+              <a:rPr lang="en-US" sz="1200" dirty="0">
+                <a:solidFill>
+                  <a:srgbClr val="DCDCAA"/>
+                </a:solidFill>
+                <a:latin typeface="Courier New" pitchFamily="34" charset="0"/>
+                <a:ea typeface="Courier New" pitchFamily="34" charset="-122"/>
+                <a:cs typeface="Courier New" pitchFamily="34" charset="-120"/>
+              </a:rPr>
+              <a:t>reservado</a:t>
+            </a:r>
+            <a:pPr indent="0" marL="0">
+              <a:buNone/>
+            </a:pPr>
+            <a:r>
+              <a:rPr lang="en-US" sz="1200" dirty="0">
+                <a:solidFill>
+                  <a:srgbClr val="FFD700"/>
+                </a:solidFill>
+                <a:latin typeface="Courier New" pitchFamily="34" charset="0"/>
+                <a:ea typeface="Courier New" pitchFamily="34" charset="-122"/>
+                <a:cs typeface="Courier New" pitchFamily="34" charset="-120"/>
+              </a:rPr>
+              <a:t>(</a:t>
+            </a:r>
+            <a:pPr indent="0" marL="0">
+              <a:buNone/>
+            </a:pPr>
+            <a:r>
+              <a:rPr lang="en-US" sz="1200" dirty="0">
+                <a:solidFill>
+                  <a:srgbClr val="9CDCFE"/>
+                </a:solidFill>
+                <a:latin typeface="Courier New" pitchFamily="34" charset="0"/>
+                <a:ea typeface="Courier New" pitchFamily="34" charset="-122"/>
+                <a:cs typeface="Courier New" pitchFamily="34" charset="-120"/>
+              </a:rPr>
+              <a:t>item</a:t>
+            </a:r>
+            <a:pPr indent="0" marL="0">
+              <a:buNone/>
+            </a:pPr>
+            <a:r>
+              <a:rPr lang="en-US" sz="1200" dirty="0">
+                <a:solidFill>
+                  <a:srgbClr val="CCCCCC"/>
+                </a:solidFill>
+                <a:latin typeface="Courier New" pitchFamily="34" charset="0"/>
+                <a:ea typeface="Courier New" pitchFamily="34" charset="-122"/>
+                <a:cs typeface="Courier New" pitchFamily="34" charset="-120"/>
+              </a:rPr>
+              <a:t>.</a:t>
+            </a:r>
+            <a:pPr indent="0" marL="0">
+              <a:buNone/>
+            </a:pPr>
+            <a:r>
+              <a:rPr lang="en-US" sz="1200" dirty="0">
+                <a:solidFill>
+                  <a:srgbClr val="4FC1FF"/>
+                </a:solidFill>
+                <a:latin typeface="Courier New" pitchFamily="34" charset="0"/>
+                <a:ea typeface="Courier New" pitchFamily="34" charset="-122"/>
+                <a:cs typeface="Courier New" pitchFamily="34" charset="-120"/>
+              </a:rPr>
+              <a:t>ID</a:t>
+            </a:r>
+            <a:pPr indent="0" marL="0">
+              <a:buNone/>
+            </a:pPr>
+            <a:r>
+              <a:rPr lang="en-US" sz="1200" dirty="0">
+                <a:solidFill>
+                  <a:srgbClr val="FFD700"/>
+                </a:solidFill>
+                <a:latin typeface="Courier New" pitchFamily="34" charset="0"/>
+                <a:ea typeface="Courier New" pitchFamily="34" charset="-122"/>
+                <a:cs typeface="Courier New" pitchFamily="34" charset="-120"/>
+              </a:rPr>
+              <a:t>)</a:t>
+            </a:r>
+            <a:pPr indent="0" marL="0">
+              <a:buNone/>
+            </a:pPr>
+            <a:r>
+              <a:rPr lang="en-US" sz="1200" dirty="0">
+                <a:solidFill>
+                  <a:srgbClr val="CCCCCC"/>
+                </a:solidFill>
+                <a:latin typeface="Courier New" pitchFamily="34" charset="0"/>
+                <a:ea typeface="Courier New" pitchFamily="34" charset="-122"/>
+                <a:cs typeface="Courier New" pitchFamily="34" charset="-120"/>
+              </a:rPr>
+              <a:t>, </a:t>
+            </a:r>
+            <a:pPr indent="0" marL="0">
+              <a:buNone/>
+            </a:pPr>
+            <a:r>
+              <a:rPr lang="en-US" sz="1200" dirty="0">
+                <a:solidFill>
+                  <a:srgbClr val="9CDCFE"/>
+                </a:solidFill>
+                <a:latin typeface="Courier New" pitchFamily="34" charset="0"/>
+                <a:ea typeface="Courier New" pitchFamily="34" charset="-122"/>
+                <a:cs typeface="Courier New" pitchFamily="34" charset="-120"/>
+              </a:rPr>
+              <a:t>antes</a:t>
+            </a:r>
+            <a:pPr indent="0" marL="0">
+              <a:buNone/>
+            </a:pPr>
+            <a:r>
+              <a:rPr lang="en-US" sz="1200" dirty="0">
+                <a:solidFill>
+                  <a:srgbClr val="CCCCCC"/>
+                </a:solidFill>
+                <a:latin typeface="Courier New" pitchFamily="34" charset="0"/>
+                <a:ea typeface="Courier New" pitchFamily="34" charset="-122"/>
+                <a:cs typeface="Courier New" pitchFamily="34" charset="-120"/>
+              </a:rPr>
+              <a:t> - </a:t>
+            </a:r>
+            <a:pPr indent="0" marL="0">
+              <a:buNone/>
+            </a:pPr>
+            <a:r>
+              <a:rPr lang="en-US" sz="1200" dirty="0">
+                <a:solidFill>
+                  <a:srgbClr val="B5CEA8"/>
+                </a:solidFill>
+                <a:latin typeface="Courier New" pitchFamily="34" charset="0"/>
+                <a:ea typeface="Courier New" pitchFamily="34" charset="-122"/>
+                <a:cs typeface="Courier New" pitchFamily="34" charset="-120"/>
+              </a:rPr>
+              <a:t>2</a:t>
+            </a:r>
+            <a:pPr indent="0" marL="0">
+              <a:buNone/>
+            </a:pPr>
+            <a:r>
+              <a:rPr lang="en-US" sz="1200" dirty="0">
+                <a:solidFill>
+                  <a:srgbClr val="179FFF"/>
+                </a:solidFill>
+                <a:latin typeface="Courier New" pitchFamily="34" charset="0"/>
+                <a:ea typeface="Courier New" pitchFamily="34" charset="-122"/>
+                <a:cs typeface="Courier New" pitchFamily="34" charset="-120"/>
+              </a:rPr>
+              <a:t>)</a:t>
             </a:r>
             <a:endParaRPr lang="en-US" sz="1200" dirty="0"/>
           </a:p>
@@ -8971,13 +10950,27 @@
             <a:r>
               <a:rPr lang="en-US" sz="1200" dirty="0">
                 <a:solidFill>
-                  <a:srgbClr val="EAECEE"/>
-                </a:solidFill>
-                <a:latin typeface="Courier New" pitchFamily="34" charset="0"/>
-                <a:ea typeface="Courier New" pitchFamily="34" charset="-122"/>
-                <a:cs typeface="Courier New" pitchFamily="34" charset="-120"/>
-              </a:rPr>
-              <a:t>})</a:t>
+                  <a:srgbClr val="DA70D6"/>
+                </a:solidFill>
+                <a:latin typeface="Courier New" pitchFamily="34" charset="0"/>
+                <a:ea typeface="Courier New" pitchFamily="34" charset="-122"/>
+                <a:cs typeface="Courier New" pitchFamily="34" charset="-120"/>
+              </a:rPr>
+              <a:t>}</a:t>
+            </a:r>
+            <a:pPr indent="0" marL="0">
+              <a:buNone/>
+            </a:pPr>
+            <a:r>
+              <a:rPr lang="en-US" sz="1200" dirty="0">
+                <a:solidFill>
+                  <a:srgbClr val="FFD700"/>
+                </a:solidFill>
+                <a:latin typeface="Courier New" pitchFamily="34" charset="0"/>
+                <a:ea typeface="Courier New" pitchFamily="34" charset="-122"/>
+                <a:cs typeface="Courier New" pitchFamily="34" charset="-120"/>
+              </a:rPr>
+              <a:t>)</a:t>
             </a:r>
             <a:endParaRPr lang="en-US" sz="1200" dirty="0"/>
           </a:p>
@@ -11385,9 +13378,14 @@
             </a:avLst>
           </a:prstGeom>
           <a:solidFill>
-            <a:srgbClr val="1D2D3E"/>
+            <a:srgbClr val="1F1F1F"/>
           </a:solidFill>
-          <a:ln/>
+          <a:ln w="9525">
+            <a:solidFill>
+              <a:srgbClr val="2B2B2B"/>
+            </a:solidFill>
+            <a:prstDash val="solid"/>
+          </a:ln>
           <a:effectLst>
             <a:outerShdw sx="100000" sy="100000" kx="0" ky="0" algn="bl" rotWithShape="0" blurRad="101600" dist="25400" dir="5400000">
               <a:srgbClr val="223649">
@@ -11424,13 +13422,55 @@
             <a:r>
               <a:rPr lang="en-US" sz="1300" dirty="0">
                 <a:solidFill>
-                  <a:srgbClr val="EAECEE"/>
-                </a:solidFill>
-                <a:latin typeface="Courier New" pitchFamily="34" charset="0"/>
-                <a:ea typeface="Courier New" pitchFamily="34" charset="-122"/>
-                <a:cs typeface="Courier New" pitchFamily="34" charset="-120"/>
-              </a:rPr>
-              <a:t>$ cds add xsuaa,html5-repo,workzone,mta   # @cap-js/hana e [production] já configurados</a:t>
+                  <a:srgbClr val="CCCCCC"/>
+                </a:solidFill>
+                <a:latin typeface="Courier New" pitchFamily="34" charset="0"/>
+                <a:ea typeface="Courier New" pitchFamily="34" charset="-122"/>
+                <a:cs typeface="Courier New" pitchFamily="34" charset="-120"/>
+              </a:rPr>
+              <a:t>$ </a:t>
+            </a:r>
+            <a:pPr indent="0" marL="0">
+              <a:buNone/>
+            </a:pPr>
+            <a:r>
+              <a:rPr lang="en-US" sz="1300" dirty="0">
+                <a:solidFill>
+                  <a:srgbClr val="DCDCAA"/>
+                </a:solidFill>
+                <a:latin typeface="Courier New" pitchFamily="34" charset="0"/>
+                <a:ea typeface="Courier New" pitchFamily="34" charset="-122"/>
+                <a:cs typeface="Courier New" pitchFamily="34" charset="-120"/>
+              </a:rPr>
+              <a:t>cds</a:t>
+            </a:r>
+            <a:pPr indent="0" marL="0">
+              <a:buNone/>
+            </a:pPr>
+            <a:r>
+              <a:rPr lang="en-US" sz="1300" dirty="0">
+                <a:solidFill>
+                  <a:srgbClr val="CCCCCC"/>
+                </a:solidFill>
+                <a:latin typeface="Courier New" pitchFamily="34" charset="0"/>
+                <a:ea typeface="Courier New" pitchFamily="34" charset="-122"/>
+                <a:cs typeface="Courier New" pitchFamily="34" charset="-120"/>
+              </a:rPr>
+              <a:t> add xsuaa,html5-repo,workzone,mta   </a:t>
+            </a:r>
+            <a:pPr indent="0" marL="0">
+              <a:buNone/>
+            </a:pPr>
+            <a:r>
+              <a:rPr lang="en-US" sz="1300" dirty="0">
+                <a:solidFill>
+                  <a:srgbClr val="6A9955"/>
+                </a:solidFill>
+                <a:latin typeface="Courier New" pitchFamily="34" charset="0"/>
+                <a:ea typeface="Courier New" pitchFamily="34" charset="-122"/>
+                <a:cs typeface="Courier New" pitchFamily="34" charset="-120"/>
+              </a:rPr>
+              <a:t># @cap-js/hana e [production] já configurados</a:t>
             </a:r>
             <a:endParaRPr lang="en-US" sz="1300" dirty="0"/>
           </a:p>
@@ -11441,13 +13481,55 @@
             <a:r>
               <a:rPr lang="en-US" sz="1300" dirty="0">
                 <a:solidFill>
-                  <a:srgbClr val="EAECEE"/>
-                </a:solidFill>
-                <a:latin typeface="Courier New" pitchFamily="34" charset="0"/>
-                <a:ea typeface="Courier New" pitchFamily="34" charset="-122"/>
-                <a:cs typeface="Courier New" pitchFamily="34" charset="-120"/>
-              </a:rPr>
-              <a:t>$ npm run build                          # TS: compila para gen/srv (JS: cds build --production)</a:t>
+                  <a:srgbClr val="CCCCCC"/>
+                </a:solidFill>
+                <a:latin typeface="Courier New" pitchFamily="34" charset="0"/>
+                <a:ea typeface="Courier New" pitchFamily="34" charset="-122"/>
+                <a:cs typeface="Courier New" pitchFamily="34" charset="-120"/>
+              </a:rPr>
+              <a:t>$ </a:t>
+            </a:r>
+            <a:pPr indent="0" marL="0">
+              <a:buNone/>
+            </a:pPr>
+            <a:r>
+              <a:rPr lang="en-US" sz="1300" dirty="0">
+                <a:solidFill>
+                  <a:srgbClr val="DCDCAA"/>
+                </a:solidFill>
+                <a:latin typeface="Courier New" pitchFamily="34" charset="0"/>
+                <a:ea typeface="Courier New" pitchFamily="34" charset="-122"/>
+                <a:cs typeface="Courier New" pitchFamily="34" charset="-120"/>
+              </a:rPr>
+              <a:t>npm</a:t>
+            </a:r>
+            <a:pPr indent="0" marL="0">
+              <a:buNone/>
+            </a:pPr>
+            <a:r>
+              <a:rPr lang="en-US" sz="1300" dirty="0">
+                <a:solidFill>
+                  <a:srgbClr val="CCCCCC"/>
+                </a:solidFill>
+                <a:latin typeface="Courier New" pitchFamily="34" charset="0"/>
+                <a:ea typeface="Courier New" pitchFamily="34" charset="-122"/>
+                <a:cs typeface="Courier New" pitchFamily="34" charset="-120"/>
+              </a:rPr>
+              <a:t> run build                          </a:t>
+            </a:r>
+            <a:pPr indent="0" marL="0">
+              <a:buNone/>
+            </a:pPr>
+            <a:r>
+              <a:rPr lang="en-US" sz="1300" dirty="0">
+                <a:solidFill>
+                  <a:srgbClr val="6A9955"/>
+                </a:solidFill>
+                <a:latin typeface="Courier New" pitchFamily="34" charset="0"/>
+                <a:ea typeface="Courier New" pitchFamily="34" charset="-122"/>
+                <a:cs typeface="Courier New" pitchFamily="34" charset="-120"/>
+              </a:rPr>
+              <a:t># TS: compila para gen/srv (JS: cds build --production)</a:t>
             </a:r>
             <a:endParaRPr lang="en-US" sz="1300" dirty="0"/>
           </a:p>
@@ -11458,13 +13540,55 @@
             <a:r>
               <a:rPr lang="en-US" sz="1300" dirty="0">
                 <a:solidFill>
-                  <a:srgbClr val="EAECEE"/>
-                </a:solidFill>
-                <a:latin typeface="Courier New" pitchFamily="34" charset="0"/>
-                <a:ea typeface="Courier New" pitchFamily="34" charset="-122"/>
-                <a:cs typeface="Courier New" pitchFamily="34" charset="-120"/>
-              </a:rPr>
-              <a:t>$ mbt build                              # mta_archives/pedidos-compras-cap_1.0.0.mtar</a:t>
+                  <a:srgbClr val="CCCCCC"/>
+                </a:solidFill>
+                <a:latin typeface="Courier New" pitchFamily="34" charset="0"/>
+                <a:ea typeface="Courier New" pitchFamily="34" charset="-122"/>
+                <a:cs typeface="Courier New" pitchFamily="34" charset="-120"/>
+              </a:rPr>
+              <a:t>$ </a:t>
+            </a:r>
+            <a:pPr indent="0" marL="0">
+              <a:buNone/>
+            </a:pPr>
+            <a:r>
+              <a:rPr lang="en-US" sz="1300" dirty="0">
+                <a:solidFill>
+                  <a:srgbClr val="DCDCAA"/>
+                </a:solidFill>
+                <a:latin typeface="Courier New" pitchFamily="34" charset="0"/>
+                <a:ea typeface="Courier New" pitchFamily="34" charset="-122"/>
+                <a:cs typeface="Courier New" pitchFamily="34" charset="-120"/>
+              </a:rPr>
+              <a:t>mbt</a:t>
+            </a:r>
+            <a:pPr indent="0" marL="0">
+              <a:buNone/>
+            </a:pPr>
+            <a:r>
+              <a:rPr lang="en-US" sz="1300" dirty="0">
+                <a:solidFill>
+                  <a:srgbClr val="CCCCCC"/>
+                </a:solidFill>
+                <a:latin typeface="Courier New" pitchFamily="34" charset="0"/>
+                <a:ea typeface="Courier New" pitchFamily="34" charset="-122"/>
+                <a:cs typeface="Courier New" pitchFamily="34" charset="-120"/>
+              </a:rPr>
+              <a:t> build                              </a:t>
+            </a:r>
+            <a:pPr indent="0" marL="0">
+              <a:buNone/>
+            </a:pPr>
+            <a:r>
+              <a:rPr lang="en-US" sz="1300" dirty="0">
+                <a:solidFill>
+                  <a:srgbClr val="6A9955"/>
+                </a:solidFill>
+                <a:latin typeface="Courier New" pitchFamily="34" charset="0"/>
+                <a:ea typeface="Courier New" pitchFamily="34" charset="-122"/>
+                <a:cs typeface="Courier New" pitchFamily="34" charset="-120"/>
+              </a:rPr>
+              <a:t># mta_archives/pedidos-compras-cap_1.0.0.mtar</a:t>
             </a:r>
             <a:endParaRPr lang="en-US" sz="1300" dirty="0"/>
           </a:p>
@@ -11475,13 +13599,69 @@
             <a:r>
               <a:rPr lang="en-US" sz="1300" dirty="0">
                 <a:solidFill>
-                  <a:srgbClr val="EAECEE"/>
-                </a:solidFill>
-                <a:latin typeface="Courier New" pitchFamily="34" charset="0"/>
-                <a:ea typeface="Courier New" pitchFamily="34" charset="-122"/>
-                <a:cs typeface="Courier New" pitchFamily="34" charset="-120"/>
-              </a:rPr>
-              <a:t>$ cf login -a https://api.cf.&lt;região&gt;.hana.ondemand.com</a:t>
+                  <a:srgbClr val="CCCCCC"/>
+                </a:solidFill>
+                <a:latin typeface="Courier New" pitchFamily="34" charset="0"/>
+                <a:ea typeface="Courier New" pitchFamily="34" charset="-122"/>
+                <a:cs typeface="Courier New" pitchFamily="34" charset="-120"/>
+              </a:rPr>
+              <a:t>$ </a:t>
+            </a:r>
+            <a:pPr indent="0" marL="0">
+              <a:buNone/>
+            </a:pPr>
+            <a:r>
+              <a:rPr lang="en-US" sz="1300" dirty="0">
+                <a:solidFill>
+                  <a:srgbClr val="DCDCAA"/>
+                </a:solidFill>
+                <a:latin typeface="Courier New" pitchFamily="34" charset="0"/>
+                <a:ea typeface="Courier New" pitchFamily="34" charset="-122"/>
+                <a:cs typeface="Courier New" pitchFamily="34" charset="-120"/>
+              </a:rPr>
+              <a:t>cf</a:t>
+            </a:r>
+            <a:pPr indent="0" marL="0">
+              <a:buNone/>
+            </a:pPr>
+            <a:r>
+              <a:rPr lang="en-US" sz="1300" dirty="0">
+                <a:solidFill>
+                  <a:srgbClr val="CCCCCC"/>
+                </a:solidFill>
+                <a:latin typeface="Courier New" pitchFamily="34" charset="0"/>
+                <a:ea typeface="Courier New" pitchFamily="34" charset="-122"/>
+                <a:cs typeface="Courier New" pitchFamily="34" charset="-120"/>
+              </a:rPr>
+              <a:t> login </a:t>
+            </a:r>
+            <a:pPr indent="0" marL="0">
+              <a:buNone/>
+            </a:pPr>
+            <a:r>
+              <a:rPr lang="en-US" sz="1300" dirty="0">
+                <a:solidFill>
+                  <a:srgbClr val="569CD6"/>
+                </a:solidFill>
+                <a:latin typeface="Courier New" pitchFamily="34" charset="0"/>
+                <a:ea typeface="Courier New" pitchFamily="34" charset="-122"/>
+                <a:cs typeface="Courier New" pitchFamily="34" charset="-120"/>
+              </a:rPr>
+              <a:t>-a</a:t>
+            </a:r>
+            <a:pPr indent="0" marL="0">
+              <a:buNone/>
+            </a:pPr>
+            <a:r>
+              <a:rPr lang="en-US" sz="1300" dirty="0">
+                <a:solidFill>
+                  <a:srgbClr val="CCCCCC"/>
+                </a:solidFill>
+                <a:latin typeface="Courier New" pitchFamily="34" charset="0"/>
+                <a:ea typeface="Courier New" pitchFamily="34" charset="-122"/>
+                <a:cs typeface="Courier New" pitchFamily="34" charset="-120"/>
+              </a:rPr>
+              <a:t> https://api.cf.&lt;região&gt;.hana.ondemand.com</a:t>
             </a:r>
             <a:endParaRPr lang="en-US" sz="1300" dirty="0"/>
           </a:p>
@@ -11492,13 +13672,41 @@
             <a:r>
               <a:rPr lang="en-US" sz="1300" dirty="0">
                 <a:solidFill>
-                  <a:srgbClr val="EAECEE"/>
-                </a:solidFill>
-                <a:latin typeface="Courier New" pitchFamily="34" charset="0"/>
-                <a:ea typeface="Courier New" pitchFamily="34" charset="-122"/>
-                <a:cs typeface="Courier New" pitchFamily="34" charset="-120"/>
-              </a:rPr>
-              <a:t>$ cf deploy mta_archives/pedidos-compras-cap_1.0.0.mtar</a:t>
+                  <a:srgbClr val="CCCCCC"/>
+                </a:solidFill>
+                <a:latin typeface="Courier New" pitchFamily="34" charset="0"/>
+                <a:ea typeface="Courier New" pitchFamily="34" charset="-122"/>
+                <a:cs typeface="Courier New" pitchFamily="34" charset="-120"/>
+              </a:rPr>
+              <a:t>$ </a:t>
+            </a:r>
+            <a:pPr indent="0" marL="0">
+              <a:buNone/>
+            </a:pPr>
+            <a:r>
+              <a:rPr lang="en-US" sz="1300" dirty="0">
+                <a:solidFill>
+                  <a:srgbClr val="DCDCAA"/>
+                </a:solidFill>
+                <a:latin typeface="Courier New" pitchFamily="34" charset="0"/>
+                <a:ea typeface="Courier New" pitchFamily="34" charset="-122"/>
+                <a:cs typeface="Courier New" pitchFamily="34" charset="-120"/>
+              </a:rPr>
+              <a:t>cf</a:t>
+            </a:r>
+            <a:pPr indent="0" marL="0">
+              <a:buNone/>
+            </a:pPr>
+            <a:r>
+              <a:rPr lang="en-US" sz="1300" dirty="0">
+                <a:solidFill>
+                  <a:srgbClr val="CCCCCC"/>
+                </a:solidFill>
+                <a:latin typeface="Courier New" pitchFamily="34" charset="0"/>
+                <a:ea typeface="Courier New" pitchFamily="34" charset="-122"/>
+                <a:cs typeface="Courier New" pitchFamily="34" charset="-120"/>
+              </a:rPr>
+              <a:t> deploy mta_archives/pedidos-compras-cap_1.0.0.mtar</a:t>
             </a:r>
             <a:endParaRPr lang="en-US" sz="1300" dirty="0"/>
           </a:p>

--- a/docs/apresentacoes/06-testes-e-publicacao.pptx
+++ b/docs/apresentacoes/06-testes-e-publicacao.pptx
@@ -10,10 +10,18 @@
     <p:sldId id="258" r:id="rId4"/>
     <p:sldId id="259" r:id="rId5"/>
     <p:sldId id="260" r:id="rId6"/>
-    <p:sldId id="261" r:id="rId7"/>
-    <p:sldId id="262" r:id="rId8"/>
+    <p:sldId id="273" r:id="rId24"/>
+    <p:sldId id="274" r:id="rId25"/>
+    <p:sldId id="275" r:id="rId26"/>
+    <p:sldId id="276" r:id="rId27"/>
+    <p:sldId id="277" r:id="rId28"/>
+    <p:sldId id="278" r:id="rId29"/>
+    <p:sldId id="279" r:id="rId30"/>
+    <p:sldId id="280" r:id="rId31"/>
+    <p:sldId id="281" r:id="rId32"/>
+    <p:sldId id="282" r:id="rId33"/>
+    <p:sldId id="264" r:id="rId10"/>
     <p:sldId id="263" r:id="rId9"/>
-    <p:sldId id="264" r:id="rId10"/>
     <p:sldId id="265" r:id="rId11"/>
     <p:sldId id="266" r:id="rId12"/>
     <p:sldId id="267" r:id="rId13"/>
@@ -1267,10 +1275,8 @@
           <a:lstStyle/>
           <a:p>
             <a:r>
-              <a:rPr lang="en-US" dirty="0"/>
-              <a:t>Encerramento da série de etapas: recapitula as seis etapas e indica a série por BO.</a:t>
-            </a:r>
-            <a:endParaRPr lang="en-US" dirty="0"/>
+              <a:t>Encerramento da série: recapitula as seis etapas e as seções por BO.</a:t>
+            </a:r>
           </a:p>
         </p:txBody>
       </p:sp>
@@ -1303,6 +1309,146 @@
         <p14:creationId xmlns:p14="http://schemas.microsoft.com/office/powerpoint/2010/main" val="1024086991"/>
       </p:ext>
     </p:extLst>
+  </p:cSld>
+  <p:clrMapOvr>
+    <a:masterClrMapping/>
+  </p:clrMapOvr>
+</p:notes>
+</file>
+
+<file path=ppt/notesSlides/notesSlide18.xml><?xml version="1.0" encoding="utf-8"?>
+<p:notes xmlns:a="http://schemas.openxmlformats.org/drawingml/2006/main" xmlns:p="http://schemas.openxmlformats.org/presentationml/2006/main" xmlns:r="http://schemas.openxmlformats.org/officeDocument/2006/relationships">
+  <p:cSld>
+    <p:spTree>
+      <p:nvGrpSpPr>
+        <p:cNvPr id="1" name=""/>
+        <p:cNvGrpSpPr/>
+        <p:nvPr/>
+      </p:nvGrpSpPr>
+      <p:grpSpPr>
+        <a:xfrm>
+          <a:off x="0" y="0"/>
+          <a:ext cx="0" cy="0"/>
+          <a:chOff x="0" y="0"/>
+          <a:chExt cx="0" cy="0"/>
+        </a:xfrm>
+      </p:grpSpPr>
+      <p:sp>
+        <p:nvSpPr>
+          <p:cNvPr id="2" name="Slide Image Placeholder 1"/>
+          <p:cNvSpPr>
+            <a:spLocks noGrp="1"/>
+          </p:cNvSpPr>
+          <p:nvPr>
+            <p:ph type="sldImg" idx="2"/>
+          </p:nvPr>
+        </p:nvSpPr>
+        <p:spPr/>
+      </p:sp>
+      <p:sp>
+        <p:nvSpPr>
+          <p:cNvPr id="3" name="Notes Placeholder 2"/>
+          <p:cNvSpPr>
+            <a:spLocks noGrp="1"/>
+          </p:cNvSpPr>
+          <p:nvPr>
+            <p:ph type="body" idx="3" sz="quarter"/>
+          </p:nvPr>
+        </p:nvSpPr>
+        <p:spPr/>
+        <p:txBody>
+          <a:bodyPr/>
+          <a:lstStyle/>
+          <a:p>
+            <a:r>
+              <a:t>Seção do BO Comum na etapa 6.</a:t>
+            </a:r>
+          </a:p>
+        </p:txBody>
+      </p:sp>
+      <p:sp>
+        <p:nvSpPr>
+          <p:cNvPr id="4" name="Slide Number Placeholder 3"/>
+          <p:cNvSpPr>
+            <a:spLocks noGrp="1"/>
+          </p:cNvSpPr>
+          <p:nvPr>
+            <p:ph type="sldNum" idx="5" sz="quarter"/>
+          </p:nvPr>
+        </p:nvSpPr>
+        <p:spPr/>
+      </p:sp>
+    </p:spTree>
+  </p:cSld>
+  <p:clrMapOvr>
+    <a:masterClrMapping/>
+  </p:clrMapOvr>
+</p:notes>
+</file>
+
+<file path=ppt/notesSlides/notesSlide19.xml><?xml version="1.0" encoding="utf-8"?>
+<p:notes xmlns:a="http://schemas.openxmlformats.org/drawingml/2006/main" xmlns:p="http://schemas.openxmlformats.org/presentationml/2006/main" xmlns:r="http://schemas.openxmlformats.org/officeDocument/2006/relationships">
+  <p:cSld>
+    <p:spTree>
+      <p:nvGrpSpPr>
+        <p:cNvPr id="1" name=""/>
+        <p:cNvGrpSpPr/>
+        <p:nvPr/>
+      </p:nvGrpSpPr>
+      <p:grpSpPr>
+        <a:xfrm>
+          <a:off x="0" y="0"/>
+          <a:ext cx="0" cy="0"/>
+          <a:chOff x="0" y="0"/>
+          <a:chExt cx="0" cy="0"/>
+        </a:xfrm>
+      </p:grpSpPr>
+      <p:sp>
+        <p:nvSpPr>
+          <p:cNvPr id="2" name="Slide Image Placeholder 1"/>
+          <p:cNvSpPr>
+            <a:spLocks noGrp="1"/>
+          </p:cNvSpPr>
+          <p:nvPr>
+            <p:ph type="sldImg" idx="2"/>
+          </p:nvPr>
+        </p:nvSpPr>
+        <p:spPr/>
+      </p:sp>
+      <p:sp>
+        <p:nvSpPr>
+          <p:cNvPr id="3" name="Notes Placeholder 2"/>
+          <p:cNvSpPr>
+            <a:spLocks noGrp="1"/>
+          </p:cNvSpPr>
+          <p:nvPr>
+            <p:ph type="body" idx="3" sz="quarter"/>
+          </p:nvPr>
+        </p:nvSpPr>
+        <p:spPr/>
+        <p:txBody>
+          <a:bodyPr/>
+          <a:lstStyle/>
+          <a:p>
+            <a:r>
+              <a:t>Funções puras e o leitor de planilhas são testados direto, sem subir o CAP.</a:t>
+            </a:r>
+          </a:p>
+        </p:txBody>
+      </p:sp>
+      <p:sp>
+        <p:nvSpPr>
+          <p:cNvPr id="4" name="Slide Number Placeholder 3"/>
+          <p:cNvSpPr>
+            <a:spLocks noGrp="1"/>
+          </p:cNvSpPr>
+          <p:nvPr>
+            <p:ph type="sldNum" idx="5" sz="quarter"/>
+          </p:nvPr>
+        </p:nvSpPr>
+        <p:spPr/>
+      </p:sp>
+    </p:spTree>
   </p:cSld>
   <p:clrMapOvr>
     <a:masterClrMapping/>
@@ -1391,6 +1537,566 @@
         <p14:creationId xmlns:p14="http://schemas.microsoft.com/office/powerpoint/2010/main" val="1024086991"/>
       </p:ext>
     </p:extLst>
+  </p:cSld>
+  <p:clrMapOvr>
+    <a:masterClrMapping/>
+  </p:clrMapOvr>
+</p:notes>
+</file>
+
+<file path=ppt/notesSlides/notesSlide20.xml><?xml version="1.0" encoding="utf-8"?>
+<p:notes xmlns:a="http://schemas.openxmlformats.org/drawingml/2006/main" xmlns:p="http://schemas.openxmlformats.org/presentationml/2006/main" xmlns:r="http://schemas.openxmlformats.org/officeDocument/2006/relationships">
+  <p:cSld>
+    <p:spTree>
+      <p:nvGrpSpPr>
+        <p:cNvPr id="1" name=""/>
+        <p:cNvGrpSpPr/>
+        <p:nvPr/>
+      </p:nvGrpSpPr>
+      <p:grpSpPr>
+        <a:xfrm>
+          <a:off x="0" y="0"/>
+          <a:ext cx="0" cy="0"/>
+          <a:chOff x="0" y="0"/>
+          <a:chExt cx="0" cy="0"/>
+        </a:xfrm>
+      </p:grpSpPr>
+      <p:sp>
+        <p:nvSpPr>
+          <p:cNvPr id="2" name="Slide Image Placeholder 1"/>
+          <p:cNvSpPr>
+            <a:spLocks noGrp="1"/>
+          </p:cNvSpPr>
+          <p:nvPr>
+            <p:ph type="sldImg" idx="2"/>
+          </p:nvPr>
+        </p:nvSpPr>
+        <p:spPr/>
+      </p:sp>
+      <p:sp>
+        <p:nvSpPr>
+          <p:cNvPr id="3" name="Notes Placeholder 2"/>
+          <p:cNvSpPr>
+            <a:spLocks noGrp="1"/>
+          </p:cNvSpPr>
+          <p:nvPr>
+            <p:ph type="body" idx="3" sz="quarter"/>
+          </p:nvPr>
+        </p:nvSpPr>
+        <p:spPr/>
+        <p:txBody>
+          <a:bodyPr/>
+          <a:lstStyle/>
+          <a:p>
+            <a:r>
+              <a:t>Seção do BO Clientes na etapa 6.</a:t>
+            </a:r>
+          </a:p>
+        </p:txBody>
+      </p:sp>
+      <p:sp>
+        <p:nvSpPr>
+          <p:cNvPr id="4" name="Slide Number Placeholder 3"/>
+          <p:cNvSpPr>
+            <a:spLocks noGrp="1"/>
+          </p:cNvSpPr>
+          <p:nvPr>
+            <p:ph type="sldNum" idx="5" sz="quarter"/>
+          </p:nvPr>
+        </p:nvSpPr>
+        <p:spPr/>
+      </p:sp>
+    </p:spTree>
+  </p:cSld>
+  <p:clrMapOvr>
+    <a:masterClrMapping/>
+  </p:clrMapOvr>
+</p:notes>
+</file>
+
+<file path=ppt/notesSlides/notesSlide21.xml><?xml version="1.0" encoding="utf-8"?>
+<p:notes xmlns:a="http://schemas.openxmlformats.org/drawingml/2006/main" xmlns:p="http://schemas.openxmlformats.org/presentationml/2006/main" xmlns:r="http://schemas.openxmlformats.org/officeDocument/2006/relationships">
+  <p:cSld>
+    <p:spTree>
+      <p:nvGrpSpPr>
+        <p:cNvPr id="1" name=""/>
+        <p:cNvGrpSpPr/>
+        <p:nvPr/>
+      </p:nvGrpSpPr>
+      <p:grpSpPr>
+        <a:xfrm>
+          <a:off x="0" y="0"/>
+          <a:ext cx="0" cy="0"/>
+          <a:chOff x="0" y="0"/>
+          <a:chExt cx="0" cy="0"/>
+        </a:xfrm>
+      </p:grpSpPr>
+      <p:sp>
+        <p:nvSpPr>
+          <p:cNvPr id="2" name="Slide Image Placeholder 1"/>
+          <p:cNvSpPr>
+            <a:spLocks noGrp="1"/>
+          </p:cNvSpPr>
+          <p:nvPr>
+            <p:ph type="sldImg" idx="2"/>
+          </p:nvPr>
+        </p:nvSpPr>
+        <p:spPr/>
+      </p:sp>
+      <p:sp>
+        <p:nvSpPr>
+          <p:cNvPr id="3" name="Notes Placeholder 2"/>
+          <p:cNvSpPr>
+            <a:spLocks noGrp="1"/>
+          </p:cNvSpPr>
+          <p:nvPr>
+            <p:ph type="body" idx="3" sz="quarter"/>
+          </p:nvPr>
+        </p:nvSpPr>
+        <p:spPr/>
+        <p:txBody>
+          <a:bodyPr/>
+          <a:lstStyle/>
+          <a:p>
+            <a:r>
+              <a:t>Os títulos dos testes descrevem o comportamento esperado do BO.</a:t>
+            </a:r>
+          </a:p>
+        </p:txBody>
+      </p:sp>
+      <p:sp>
+        <p:nvSpPr>
+          <p:cNvPr id="4" name="Slide Number Placeholder 3"/>
+          <p:cNvSpPr>
+            <a:spLocks noGrp="1"/>
+          </p:cNvSpPr>
+          <p:nvPr>
+            <p:ph type="sldNum" idx="5" sz="quarter"/>
+          </p:nvPr>
+        </p:nvSpPr>
+        <p:spPr/>
+      </p:sp>
+    </p:spTree>
+  </p:cSld>
+  <p:clrMapOvr>
+    <a:masterClrMapping/>
+  </p:clrMapOvr>
+</p:notes>
+</file>
+
+<file path=ppt/notesSlides/notesSlide22.xml><?xml version="1.0" encoding="utf-8"?>
+<p:notes xmlns:a="http://schemas.openxmlformats.org/drawingml/2006/main" xmlns:p="http://schemas.openxmlformats.org/presentationml/2006/main" xmlns:r="http://schemas.openxmlformats.org/officeDocument/2006/relationships">
+  <p:cSld>
+    <p:spTree>
+      <p:nvGrpSpPr>
+        <p:cNvPr id="1" name=""/>
+        <p:cNvGrpSpPr/>
+        <p:nvPr/>
+      </p:nvGrpSpPr>
+      <p:grpSpPr>
+        <a:xfrm>
+          <a:off x="0" y="0"/>
+          <a:ext cx="0" cy="0"/>
+          <a:chOff x="0" y="0"/>
+          <a:chExt cx="0" cy="0"/>
+        </a:xfrm>
+      </p:grpSpPr>
+      <p:sp>
+        <p:nvSpPr>
+          <p:cNvPr id="2" name="Slide Image Placeholder 1"/>
+          <p:cNvSpPr>
+            <a:spLocks noGrp="1"/>
+          </p:cNvSpPr>
+          <p:nvPr>
+            <p:ph type="sldImg" idx="2"/>
+          </p:nvPr>
+        </p:nvSpPr>
+        <p:spPr/>
+      </p:sp>
+      <p:sp>
+        <p:nvSpPr>
+          <p:cNvPr id="3" name="Notes Placeholder 2"/>
+          <p:cNvSpPr>
+            <a:spLocks noGrp="1"/>
+          </p:cNvSpPr>
+          <p:nvPr>
+            <p:ph type="body" idx="3" sz="quarter"/>
+          </p:nvPr>
+        </p:nvSpPr>
+        <p:spPr/>
+        <p:txBody>
+          <a:bodyPr/>
+          <a:lstStyle/>
+          <a:p>
+            <a:r>
+              <a:t>Seção do BO Estoque na etapa 6.</a:t>
+            </a:r>
+          </a:p>
+        </p:txBody>
+      </p:sp>
+      <p:sp>
+        <p:nvSpPr>
+          <p:cNvPr id="4" name="Slide Number Placeholder 3"/>
+          <p:cNvSpPr>
+            <a:spLocks noGrp="1"/>
+          </p:cNvSpPr>
+          <p:nvPr>
+            <p:ph type="sldNum" idx="5" sz="quarter"/>
+          </p:nvPr>
+        </p:nvSpPr>
+        <p:spPr/>
+      </p:sp>
+    </p:spTree>
+  </p:cSld>
+  <p:clrMapOvr>
+    <a:masterClrMapping/>
+  </p:clrMapOvr>
+</p:notes>
+</file>
+
+<file path=ppt/notesSlides/notesSlide23.xml><?xml version="1.0" encoding="utf-8"?>
+<p:notes xmlns:a="http://schemas.openxmlformats.org/drawingml/2006/main" xmlns:p="http://schemas.openxmlformats.org/presentationml/2006/main" xmlns:r="http://schemas.openxmlformats.org/officeDocument/2006/relationships">
+  <p:cSld>
+    <p:spTree>
+      <p:nvGrpSpPr>
+        <p:cNvPr id="1" name=""/>
+        <p:cNvGrpSpPr/>
+        <p:nvPr/>
+      </p:nvGrpSpPr>
+      <p:grpSpPr>
+        <a:xfrm>
+          <a:off x="0" y="0"/>
+          <a:ext cx="0" cy="0"/>
+          <a:chOff x="0" y="0"/>
+          <a:chExt cx="0" cy="0"/>
+        </a:xfrm>
+      </p:grpSpPr>
+      <p:sp>
+        <p:nvSpPr>
+          <p:cNvPr id="2" name="Slide Image Placeholder 1"/>
+          <p:cNvSpPr>
+            <a:spLocks noGrp="1"/>
+          </p:cNvSpPr>
+          <p:nvPr>
+            <p:ph type="sldImg" idx="2"/>
+          </p:nvPr>
+        </p:nvSpPr>
+        <p:spPr/>
+      </p:sp>
+      <p:sp>
+        <p:nvSpPr>
+          <p:cNvPr id="3" name="Notes Placeholder 2"/>
+          <p:cNvSpPr>
+            <a:spLocks noGrp="1"/>
+          </p:cNvSpPr>
+          <p:nvPr>
+            <p:ph type="body" idx="3" sz="quarter"/>
+          </p:nvPr>
+        </p:nvSpPr>
+        <p:spPr/>
+        <p:txBody>
+          <a:bodyPr/>
+          <a:lstStyle/>
+          <a:p>
+            <a:r>
+              <a:t>Os títulos dos testes descrevem o comportamento esperado do BO.</a:t>
+            </a:r>
+          </a:p>
+        </p:txBody>
+      </p:sp>
+      <p:sp>
+        <p:nvSpPr>
+          <p:cNvPr id="4" name="Slide Number Placeholder 3"/>
+          <p:cNvSpPr>
+            <a:spLocks noGrp="1"/>
+          </p:cNvSpPr>
+          <p:nvPr>
+            <p:ph type="sldNum" idx="5" sz="quarter"/>
+          </p:nvPr>
+        </p:nvSpPr>
+        <p:spPr/>
+      </p:sp>
+    </p:spTree>
+  </p:cSld>
+  <p:clrMapOvr>
+    <a:masterClrMapping/>
+  </p:clrMapOvr>
+</p:notes>
+</file>
+
+<file path=ppt/notesSlides/notesSlide24.xml><?xml version="1.0" encoding="utf-8"?>
+<p:notes xmlns:a="http://schemas.openxmlformats.org/drawingml/2006/main" xmlns:p="http://schemas.openxmlformats.org/presentationml/2006/main" xmlns:r="http://schemas.openxmlformats.org/officeDocument/2006/relationships">
+  <p:cSld>
+    <p:spTree>
+      <p:nvGrpSpPr>
+        <p:cNvPr id="1" name=""/>
+        <p:cNvGrpSpPr/>
+        <p:nvPr/>
+      </p:nvGrpSpPr>
+      <p:grpSpPr>
+        <a:xfrm>
+          <a:off x="0" y="0"/>
+          <a:ext cx="0" cy="0"/>
+          <a:chOff x="0" y="0"/>
+          <a:chExt cx="0" cy="0"/>
+        </a:xfrm>
+      </p:grpSpPr>
+      <p:sp>
+        <p:nvSpPr>
+          <p:cNvPr id="2" name="Slide Image Placeholder 1"/>
+          <p:cNvSpPr>
+            <a:spLocks noGrp="1"/>
+          </p:cNvSpPr>
+          <p:nvPr>
+            <p:ph type="sldImg" idx="2"/>
+          </p:nvPr>
+        </p:nvSpPr>
+        <p:spPr/>
+      </p:sp>
+      <p:sp>
+        <p:nvSpPr>
+          <p:cNvPr id="3" name="Notes Placeholder 2"/>
+          <p:cNvSpPr>
+            <a:spLocks noGrp="1"/>
+          </p:cNvSpPr>
+          <p:nvPr>
+            <p:ph type="body" idx="3" sz="quarter"/>
+          </p:nvPr>
+        </p:nvSpPr>
+        <p:spPr/>
+        <p:txBody>
+          <a:bodyPr/>
+          <a:lstStyle/>
+          <a:p>
+            <a:r>
+              <a:t>Seção do BO Pedidos na etapa 6.</a:t>
+            </a:r>
+          </a:p>
+        </p:txBody>
+      </p:sp>
+      <p:sp>
+        <p:nvSpPr>
+          <p:cNvPr id="4" name="Slide Number Placeholder 3"/>
+          <p:cNvSpPr>
+            <a:spLocks noGrp="1"/>
+          </p:cNvSpPr>
+          <p:nvPr>
+            <p:ph type="sldNum" idx="5" sz="quarter"/>
+          </p:nvPr>
+        </p:nvSpPr>
+        <p:spPr/>
+      </p:sp>
+    </p:spTree>
+  </p:cSld>
+  <p:clrMapOvr>
+    <a:masterClrMapping/>
+  </p:clrMapOvr>
+</p:notes>
+</file>
+
+<file path=ppt/notesSlides/notesSlide25.xml><?xml version="1.0" encoding="utf-8"?>
+<p:notes xmlns:a="http://schemas.openxmlformats.org/drawingml/2006/main" xmlns:p="http://schemas.openxmlformats.org/presentationml/2006/main" xmlns:r="http://schemas.openxmlformats.org/officeDocument/2006/relationships">
+  <p:cSld>
+    <p:spTree>
+      <p:nvGrpSpPr>
+        <p:cNvPr id="1" name=""/>
+        <p:cNvGrpSpPr/>
+        <p:nvPr/>
+      </p:nvGrpSpPr>
+      <p:grpSpPr>
+        <a:xfrm>
+          <a:off x="0" y="0"/>
+          <a:ext cx="0" cy="0"/>
+          <a:chOff x="0" y="0"/>
+          <a:chExt cx="0" cy="0"/>
+        </a:xfrm>
+      </p:grpSpPr>
+      <p:sp>
+        <p:nvSpPr>
+          <p:cNvPr id="2" name="Slide Image Placeholder 1"/>
+          <p:cNvSpPr>
+            <a:spLocks noGrp="1"/>
+          </p:cNvSpPr>
+          <p:nvPr>
+            <p:ph type="sldImg" idx="2"/>
+          </p:nvPr>
+        </p:nvSpPr>
+        <p:spPr/>
+      </p:sp>
+      <p:sp>
+        <p:nvSpPr>
+          <p:cNvPr id="3" name="Notes Placeholder 2"/>
+          <p:cNvSpPr>
+            <a:spLocks noGrp="1"/>
+          </p:cNvSpPr>
+          <p:nvPr>
+            <p:ph type="body" idx="3" sz="quarter"/>
+          </p:nvPr>
+        </p:nvSpPr>
+        <p:spPr/>
+        <p:txBody>
+          <a:bodyPr/>
+          <a:lstStyle/>
+          <a:p>
+            <a:r>
+              <a:t>Títulos reais dos testes, agrupados pelos describe do arquivo.</a:t>
+            </a:r>
+          </a:p>
+        </p:txBody>
+      </p:sp>
+      <p:sp>
+        <p:nvSpPr>
+          <p:cNvPr id="4" name="Slide Number Placeholder 3"/>
+          <p:cNvSpPr>
+            <a:spLocks noGrp="1"/>
+          </p:cNvSpPr>
+          <p:nvPr>
+            <p:ph type="sldNum" idx="5" sz="quarter"/>
+          </p:nvPr>
+        </p:nvSpPr>
+        <p:spPr/>
+      </p:sp>
+    </p:spTree>
+  </p:cSld>
+  <p:clrMapOvr>
+    <a:masterClrMapping/>
+  </p:clrMapOvr>
+</p:notes>
+</file>
+
+<file path=ppt/notesSlides/notesSlide26.xml><?xml version="1.0" encoding="utf-8"?>
+<p:notes xmlns:a="http://schemas.openxmlformats.org/drawingml/2006/main" xmlns:p="http://schemas.openxmlformats.org/presentationml/2006/main" xmlns:r="http://schemas.openxmlformats.org/officeDocument/2006/relationships">
+  <p:cSld>
+    <p:spTree>
+      <p:nvGrpSpPr>
+        <p:cNvPr id="1" name=""/>
+        <p:cNvGrpSpPr/>
+        <p:nvPr/>
+      </p:nvGrpSpPr>
+      <p:grpSpPr>
+        <a:xfrm>
+          <a:off x="0" y="0"/>
+          <a:ext cx="0" cy="0"/>
+          <a:chOff x="0" y="0"/>
+          <a:chExt cx="0" cy="0"/>
+        </a:xfrm>
+      </p:grpSpPr>
+      <p:sp>
+        <p:nvSpPr>
+          <p:cNvPr id="2" name="Slide Image Placeholder 1"/>
+          <p:cNvSpPr>
+            <a:spLocks noGrp="1"/>
+          </p:cNvSpPr>
+          <p:nvPr>
+            <p:ph type="sldImg" idx="2"/>
+          </p:nvPr>
+        </p:nvSpPr>
+        <p:spPr/>
+      </p:sp>
+      <p:sp>
+        <p:nvSpPr>
+          <p:cNvPr id="3" name="Notes Placeholder 2"/>
+          <p:cNvSpPr>
+            <a:spLocks noGrp="1"/>
+          </p:cNvSpPr>
+          <p:nvPr>
+            <p:ph type="body" idx="3" sz="quarter"/>
+          </p:nvPr>
+        </p:nvSpPr>
+        <p:spPr/>
+        <p:txBody>
+          <a:bodyPr/>
+          <a:lstStyle/>
+          <a:p>
+            <a:r>
+              <a:t>Seção do BO Reembolsos na etapa 6.</a:t>
+            </a:r>
+          </a:p>
+        </p:txBody>
+      </p:sp>
+      <p:sp>
+        <p:nvSpPr>
+          <p:cNvPr id="4" name="Slide Number Placeholder 3"/>
+          <p:cNvSpPr>
+            <a:spLocks noGrp="1"/>
+          </p:cNvSpPr>
+          <p:nvPr>
+            <p:ph type="sldNum" idx="5" sz="quarter"/>
+          </p:nvPr>
+        </p:nvSpPr>
+        <p:spPr/>
+      </p:sp>
+    </p:spTree>
+  </p:cSld>
+  <p:clrMapOvr>
+    <a:masterClrMapping/>
+  </p:clrMapOvr>
+</p:notes>
+</file>
+
+<file path=ppt/notesSlides/notesSlide27.xml><?xml version="1.0" encoding="utf-8"?>
+<p:notes xmlns:a="http://schemas.openxmlformats.org/drawingml/2006/main" xmlns:p="http://schemas.openxmlformats.org/presentationml/2006/main" xmlns:r="http://schemas.openxmlformats.org/officeDocument/2006/relationships">
+  <p:cSld>
+    <p:spTree>
+      <p:nvGrpSpPr>
+        <p:cNvPr id="1" name=""/>
+        <p:cNvGrpSpPr/>
+        <p:nvPr/>
+      </p:nvGrpSpPr>
+      <p:grpSpPr>
+        <a:xfrm>
+          <a:off x="0" y="0"/>
+          <a:ext cx="0" cy="0"/>
+          <a:chOff x="0" y="0"/>
+          <a:chExt cx="0" cy="0"/>
+        </a:xfrm>
+      </p:grpSpPr>
+      <p:sp>
+        <p:nvSpPr>
+          <p:cNvPr id="2" name="Slide Image Placeholder 1"/>
+          <p:cNvSpPr>
+            <a:spLocks noGrp="1"/>
+          </p:cNvSpPr>
+          <p:nvPr>
+            <p:ph type="sldImg" idx="2"/>
+          </p:nvPr>
+        </p:nvSpPr>
+        <p:spPr/>
+      </p:sp>
+      <p:sp>
+        <p:nvSpPr>
+          <p:cNvPr id="3" name="Notes Placeholder 2"/>
+          <p:cNvSpPr>
+            <a:spLocks noGrp="1"/>
+          </p:cNvSpPr>
+          <p:nvPr>
+            <p:ph type="body" idx="3" sz="quarter"/>
+          </p:nvPr>
+        </p:nvSpPr>
+        <p:spPr/>
+        <p:txBody>
+          <a:bodyPr/>
+          <a:lstStyle/>
+          <a:p>
+            <a:r>
+              <a:t>O apoio solicitacao() percorre o fluxo inteiro pela API: cria, paga e cancela um pedido para gerar a solicitação.</a:t>
+            </a:r>
+          </a:p>
+        </p:txBody>
+      </p:sp>
+      <p:sp>
+        <p:nvSpPr>
+          <p:cNvPr id="4" name="Slide Number Placeholder 3"/>
+          <p:cNvSpPr>
+            <a:spLocks noGrp="1"/>
+          </p:cNvSpPr>
+          <p:nvPr>
+            <p:ph type="sldNum" idx="5" sz="quarter"/>
+          </p:nvPr>
+        </p:nvSpPr>
+        <p:spPr/>
+      </p:sp>
+    </p:spTree>
   </p:cSld>
   <p:clrMapOvr>
     <a:masterClrMapping/>
@@ -1644,182 +2350,6 @@
             <a:fld id="{F7021451-1387-4CA6-816F-3879F97B5CBC}" type="slidenum">
               <a:rPr lang="en-US"/>
               <a:t>5</a:t>
-            </a:fld>
-            <a:endParaRPr lang="en-US"/>
-          </a:p>
-        </p:txBody>
-      </p:sp>
-    </p:spTree>
-    <p:extLst>
-      <p:ext uri="{BB962C8B-B14F-4D97-AF65-F5344CB8AC3E}">
-        <p14:creationId xmlns:p14="http://schemas.microsoft.com/office/powerpoint/2010/main" val="1024086991"/>
-      </p:ext>
-    </p:extLst>
-  </p:cSld>
-  <p:clrMapOvr>
-    <a:masterClrMapping/>
-  </p:clrMapOvr>
-</p:notes>
-</file>
-
-<file path=ppt/notesSlides/notesSlide6.xml><?xml version="1.0" encoding="utf-8"?>
-<p:notes xmlns:a="http://schemas.openxmlformats.org/drawingml/2006/main" xmlns:r="http://schemas.openxmlformats.org/officeDocument/2006/relationships" xmlns:p="http://schemas.openxmlformats.org/presentationml/2006/main">
-  <p:cSld>
-    <p:spTree>
-      <p:nvGrpSpPr>
-        <p:cNvPr id="1" name=""/>
-        <p:cNvGrpSpPr/>
-        <p:nvPr/>
-      </p:nvGrpSpPr>
-      <p:grpSpPr>
-        <a:xfrm>
-          <a:off x="0" y="0"/>
-          <a:ext cx="0" cy="0"/>
-          <a:chOff x="0" y="0"/>
-          <a:chExt cx="0" cy="0"/>
-        </a:xfrm>
-      </p:grpSpPr>
-      <p:sp>
-        <p:nvSpPr>
-          <p:cNvPr id="2" name="Slide Image Placeholder 1"/>
-          <p:cNvSpPr>
-            <a:spLocks noGrp="1" noRot="1" noChangeAspect="1"/>
-          </p:cNvSpPr>
-          <p:nvPr>
-            <p:ph type="sldImg"/>
-          </p:nvPr>
-        </p:nvSpPr>
-        <p:spPr/>
-      </p:sp>
-      <p:sp>
-        <p:nvSpPr>
-          <p:cNvPr id="3" name="Notes Placeholder 2"/>
-          <p:cNvSpPr>
-            <a:spLocks noGrp="1"/>
-          </p:cNvSpPr>
-          <p:nvPr>
-            <p:ph type="body" idx="1"/>
-          </p:nvPr>
-        </p:nvSpPr>
-        <p:spPr/>
-        <p:txBody>
-          <a:bodyPr/>
-          <a:lstStyle/>
-          <a:p>
-            <a:r>
-              <a:rPr lang="en-US" dirty="0"/>
-              <a:t>Títulos reais dos testes de clientes.test e estoque.test.</a:t>
-            </a:r>
-            <a:endParaRPr lang="en-US" dirty="0"/>
-          </a:p>
-        </p:txBody>
-      </p:sp>
-      <p:sp>
-        <p:nvSpPr>
-          <p:cNvPr id="4" name="Slide Number Placeholder 3"/>
-          <p:cNvSpPr>
-            <a:spLocks noGrp="1"/>
-          </p:cNvSpPr>
-          <p:nvPr>
-            <p:ph type="sldNum" sz="quarter" idx="10"/>
-          </p:nvPr>
-        </p:nvSpPr>
-        <p:spPr/>
-        <p:txBody>
-          <a:bodyPr/>
-          <a:lstStyle/>
-          <a:p>
-            <a:fld id="{F7021451-1387-4CA6-816F-3879F97B5CBC}" type="slidenum">
-              <a:rPr lang="en-US"/>
-              <a:t>6</a:t>
-            </a:fld>
-            <a:endParaRPr lang="en-US"/>
-          </a:p>
-        </p:txBody>
-      </p:sp>
-    </p:spTree>
-    <p:extLst>
-      <p:ext uri="{BB962C8B-B14F-4D97-AF65-F5344CB8AC3E}">
-        <p14:creationId xmlns:p14="http://schemas.microsoft.com/office/powerpoint/2010/main" val="1024086991"/>
-      </p:ext>
-    </p:extLst>
-  </p:cSld>
-  <p:clrMapOvr>
-    <a:masterClrMapping/>
-  </p:clrMapOvr>
-</p:notes>
-</file>
-
-<file path=ppt/notesSlides/notesSlide7.xml><?xml version="1.0" encoding="utf-8"?>
-<p:notes xmlns:a="http://schemas.openxmlformats.org/drawingml/2006/main" xmlns:r="http://schemas.openxmlformats.org/officeDocument/2006/relationships" xmlns:p="http://schemas.openxmlformats.org/presentationml/2006/main">
-  <p:cSld>
-    <p:spTree>
-      <p:nvGrpSpPr>
-        <p:cNvPr id="1" name=""/>
-        <p:cNvGrpSpPr/>
-        <p:nvPr/>
-      </p:nvGrpSpPr>
-      <p:grpSpPr>
-        <a:xfrm>
-          <a:off x="0" y="0"/>
-          <a:ext cx="0" cy="0"/>
-          <a:chOff x="0" y="0"/>
-          <a:chExt cx="0" cy="0"/>
-        </a:xfrm>
-      </p:grpSpPr>
-      <p:sp>
-        <p:nvSpPr>
-          <p:cNvPr id="2" name="Slide Image Placeholder 1"/>
-          <p:cNvSpPr>
-            <a:spLocks noGrp="1" noRot="1" noChangeAspect="1"/>
-          </p:cNvSpPr>
-          <p:nvPr>
-            <p:ph type="sldImg"/>
-          </p:nvPr>
-        </p:nvSpPr>
-        <p:spPr/>
-      </p:sp>
-      <p:sp>
-        <p:nvSpPr>
-          <p:cNvPr id="3" name="Notes Placeholder 2"/>
-          <p:cNvSpPr>
-            <a:spLocks noGrp="1"/>
-          </p:cNvSpPr>
-          <p:nvPr>
-            <p:ph type="body" idx="1"/>
-          </p:nvPr>
-        </p:nvSpPr>
-        <p:spPr/>
-        <p:txBody>
-          <a:bodyPr/>
-          <a:lstStyle/>
-          <a:p>
-            <a:r>
-              <a:rPr lang="en-US" dirty="0"/>
-              <a:t>Títulos reais de pedidos.test, agrupados por describe.</a:t>
-            </a:r>
-            <a:endParaRPr lang="en-US" dirty="0"/>
-          </a:p>
-        </p:txBody>
-      </p:sp>
-      <p:sp>
-        <p:nvSpPr>
-          <p:cNvPr id="4" name="Slide Number Placeholder 3"/>
-          <p:cNvSpPr>
-            <a:spLocks noGrp="1"/>
-          </p:cNvSpPr>
-          <p:nvPr>
-            <p:ph type="sldNum" sz="quarter" idx="10"/>
-          </p:nvPr>
-        </p:nvSpPr>
-        <p:spPr/>
-        <p:txBody>
-          <a:bodyPr/>
-          <a:lstStyle/>
-          <a:p>
-            <a:fld id="{F7021451-1387-4CA6-816F-3879F97B5CBC}" type="slidenum">
-              <a:rPr lang="en-US"/>
-              <a:t>7</a:t>
             </a:fld>
             <a:endParaRPr lang="en-US"/>
           </a:p>
@@ -12369,9 +12899,1160 @@
                   <a:srgbClr val="89D1FF"/>
                 </a:solidFill>
               </a:rPr>
-              <a:t>Continue na série Implementação por BO (decks 07 a 11) · github.com/AdrianoBispo/sap-cap-nodejs-pedidos-de-compras-app</a:t>
+              <a:t>Cada etapa traz uma seção por BO: Comum, Clientes, Estoque, Pedidos e Reembolsos · github.com/AdrianoBispo/sap-cap-nodejs-pedidos-de-compras-app</a:t>
             </a:r>
             <a:endParaRPr lang="en-US" sz="1400" dirty="0"/>
+          </a:p>
+        </p:txBody>
+      </p:sp>
+    </p:spTree>
+  </p:cSld>
+  <p:clrMapOvr>
+    <a:masterClrMapping/>
+  </p:clrMapOvr>
+</p:sld>
+</file>
+
+<file path=ppt/slides/slide18.xml><?xml version="1.0" encoding="utf-8"?>
+<p:sld xmlns:a="http://schemas.openxmlformats.org/drawingml/2006/main" xmlns:p="http://schemas.openxmlformats.org/presentationml/2006/main" xmlns:r="http://schemas.openxmlformats.org/officeDocument/2006/relationships">
+  <p:cSld name="Slide 1">
+    <p:spTree>
+      <p:nvGrpSpPr>
+        <p:cNvPr id="1" name=""/>
+        <p:cNvGrpSpPr/>
+        <p:nvPr/>
+      </p:nvGrpSpPr>
+      <p:grpSpPr>
+        <a:xfrm>
+          <a:off x="0" y="0"/>
+          <a:ext cx="0" cy="0"/>
+          <a:chOff x="0" y="0"/>
+          <a:chExt cx="0" cy="0"/>
+        </a:xfrm>
+      </p:grpSpPr>
+      <p:sp>
+        <p:nvSpPr>
+          <p:cNvPr id="2" name="Text 0"/>
+          <p:cNvSpPr/>
+          <p:nvPr>
+            <p:ph idx="100" type="body" hasCustomPrompt="1"/>
+          </p:nvPr>
+        </p:nvSpPr>
+        <p:spPr>
+          <a:xfrm>
+            <a:off x="731520" y="1417320"/>
+            <a:ext cx="5486400" cy="411480"/>
+          </a:xfrm>
+          <a:prstGeom prst="rect">
+            <a:avLst/>
+          </a:prstGeom>
+          <a:noFill/>
+          <a:ln/>
+        </p:spPr>
+        <p:txBody>
+          <a:bodyPr wrap="square" lIns="0" tIns="0" rIns="0" bIns="0" rtlCol="0" anchor="ctr"/>
+          <a:lstStyle/>
+          <a:p>
+            <a:pPr algn="l" indent="0" marL="0">
+              <a:buNone/>
+            </a:pPr>
+            <a:r>
+              <a:rPr lang="en-US" sz="1400" b="1" spc="200" kern="0" dirty="0">
+                <a:solidFill>
+                  <a:srgbClr val="89D1FF"/>
+                </a:solidFill>
+              </a:rPr>
+              <a:t>ETAPA 6 · COMUM</a:t>
+            </a:r>
+            <a:endParaRPr lang="en-US" sz="1400" dirty="0"/>
+          </a:p>
+        </p:txBody>
+      </p:sp>
+      <p:sp>
+        <p:nvSpPr>
+          <p:cNvPr id="3" name="Text 0"/>
+          <p:cNvSpPr/>
+          <p:nvPr>
+            <p:ph idx="101" type="title" hasCustomPrompt="1"/>
+          </p:nvPr>
+        </p:nvSpPr>
+        <p:spPr>
+          <a:xfrm>
+            <a:off x="731520" y="1965960"/>
+            <a:ext cx="6766560" cy="1737360"/>
+          </a:xfrm>
+          <a:prstGeom prst="rect">
+            <a:avLst/>
+          </a:prstGeom>
+          <a:noFill/>
+          <a:ln/>
+        </p:spPr>
+        <p:txBody>
+          <a:bodyPr wrap="square" lIns="0" tIns="0" rIns="0" bIns="0" rtlCol="0" anchor="t"/>
+          <a:lstStyle/>
+          <a:p>
+            <a:pPr algn="l" indent="0" marL="0">
+              <a:buNone/>
+            </a:pPr>
+            <a:r>
+              <a:rPr lang="en-US" sz="4400" b="1" dirty="0">
+                <a:solidFill>
+                  <a:schemeClr val="bg1"/>
+                </a:solidFill>
+              </a:rPr>
+              <a:t>BO Comum</a:t>
+            </a:r>
+            <a:endParaRPr lang="en-US" sz="4400" dirty="0"/>
+          </a:p>
+        </p:txBody>
+      </p:sp>
+      <p:sp>
+        <p:nvSpPr>
+          <p:cNvPr id="4" name="Text 0"/>
+          <p:cNvSpPr/>
+          <p:nvPr>
+            <p:ph idx="102" type="body" hasCustomPrompt="1"/>
+          </p:nvPr>
+        </p:nvSpPr>
+        <p:spPr>
+          <a:xfrm>
+            <a:off x="731520" y="3840480"/>
+            <a:ext cx="6400800" cy="1097280"/>
+          </a:xfrm>
+          <a:prstGeom prst="rect">
+            <a:avLst/>
+          </a:prstGeom>
+          <a:noFill/>
+          <a:ln/>
+        </p:spPr>
+        <p:txBody>
+          <a:bodyPr wrap="square" lIns="0" tIns="0" rIns="0" bIns="0" rtlCol="0" anchor="t"/>
+          <a:lstStyle/>
+          <a:p>
+            <a:pPr algn="l" indent="0" marL="0">
+              <a:buNone/>
+            </a:pPr>
+            <a:r>
+              <a:rPr lang="en-US" sz="1800" dirty="0">
+                <a:solidFill>
+                  <a:srgbClr val="D1EFFF"/>
+                </a:solidFill>
+              </a:rPr>
+              <a:t>unidade.test: CPF, utilitários e o leitor de planilhas testados direto, sem subir o servidor CAP.</a:t>
+            </a:r>
+            <a:endParaRPr lang="en-US" sz="1800" dirty="0"/>
+          </a:p>
+        </p:txBody>
+      </p:sp>
+      <p:sp>
+        <p:nvSpPr>
+          <p:cNvPr id="5" name="Avatar da etapa"/>
+          <p:cNvSpPr/>
+          <p:nvPr/>
+        </p:nvSpPr>
+        <p:spPr>
+          <a:xfrm>
+            <a:off x="8183880" y="1417320"/>
+            <a:ext cx="3291840" cy="3291840"/>
+          </a:xfrm>
+          <a:prstGeom prst="roundRect">
+            <a:avLst>
+              <a:gd name="adj" fmla="val 22222"/>
+            </a:avLst>
+          </a:prstGeom>
+          <a:solidFill>
+            <a:srgbClr val="1B3A7A"/>
+          </a:solidFill>
+          <a:ln/>
+        </p:spPr>
+      </p:sp>
+      <p:sp>
+        <p:nvSpPr>
+          <p:cNvPr id="6" name="Avatar interno"/>
+          <p:cNvSpPr/>
+          <p:nvPr/>
+        </p:nvSpPr>
+        <p:spPr>
+          <a:xfrm>
+            <a:off x="8732520" y="1965960"/>
+            <a:ext cx="2194560" cy="2194560"/>
+          </a:xfrm>
+          <a:prstGeom prst="roundRect">
+            <a:avLst>
+              <a:gd name="adj" fmla="val 22917"/>
+            </a:avLst>
+          </a:prstGeom>
+          <a:solidFill>
+            <a:schemeClr val="accent1"/>
+          </a:solidFill>
+          <a:ln/>
+        </p:spPr>
+      </p:sp>
+      <p:pic>
+        <p:nvPicPr>
+          <p:cNvPr id="7" name="Image 0" descr="Comum">    </p:cNvPr>
+          <p:cNvPicPr>
+            <a:picLocks noChangeAspect="1"/>
+          </p:cNvPicPr>
+          <p:nvPr/>
+        </p:nvPicPr>
+        <p:blipFill>
+          <a:blip r:embed="rId2"/>
+          <a:stretch>
+            <a:fillRect/>
+          </a:stretch>
+        </p:blipFill>
+        <p:spPr>
+          <a:xfrm>
+            <a:off x="9281160" y="2514600"/>
+            <a:ext cx="1097280" cy="1097280"/>
+          </a:xfrm>
+          <a:prstGeom prst="rect">
+            <a:avLst/>
+          </a:prstGeom>
+        </p:spPr>
+      </p:pic>
+      <p:sp>
+        <p:nvSpPr>
+          <p:cNvPr id="8" name="Etapa 1"/>
+          <p:cNvSpPr/>
+          <p:nvPr/>
+        </p:nvSpPr>
+        <p:spPr>
+          <a:xfrm>
+            <a:off x="8183880" y="5074920"/>
+            <a:ext cx="548640" cy="109728"/>
+          </a:xfrm>
+          <a:prstGeom prst="roundRect">
+            <a:avLst>
+              <a:gd name="adj" fmla="val 50000"/>
+            </a:avLst>
+          </a:prstGeom>
+          <a:solidFill>
+            <a:srgbClr val="89D1FF"/>
+          </a:solidFill>
+          <a:ln/>
+        </p:spPr>
+      </p:sp>
+      <p:sp>
+        <p:nvSpPr>
+          <p:cNvPr id="9" name="Etapa 2"/>
+          <p:cNvSpPr/>
+          <p:nvPr/>
+        </p:nvSpPr>
+        <p:spPr>
+          <a:xfrm>
+            <a:off x="8842248" y="5074920"/>
+            <a:ext cx="548640" cy="109728"/>
+          </a:xfrm>
+          <a:prstGeom prst="roundRect">
+            <a:avLst>
+              <a:gd name="adj" fmla="val 50000"/>
+            </a:avLst>
+          </a:prstGeom>
+          <a:solidFill>
+            <a:srgbClr val="1B3A7A"/>
+          </a:solidFill>
+          <a:ln/>
+        </p:spPr>
+      </p:sp>
+      <p:sp>
+        <p:nvSpPr>
+          <p:cNvPr id="10" name="Etapa 3"/>
+          <p:cNvSpPr/>
+          <p:nvPr/>
+        </p:nvSpPr>
+        <p:spPr>
+          <a:xfrm>
+            <a:off x="9500616" y="5074920"/>
+            <a:ext cx="548640" cy="109728"/>
+          </a:xfrm>
+          <a:prstGeom prst="roundRect">
+            <a:avLst>
+              <a:gd name="adj" fmla="val 50000"/>
+            </a:avLst>
+          </a:prstGeom>
+          <a:solidFill>
+            <a:srgbClr val="1B3A7A"/>
+          </a:solidFill>
+          <a:ln/>
+        </p:spPr>
+      </p:sp>
+      <p:sp>
+        <p:nvSpPr>
+          <p:cNvPr id="11" name="Etapa 4"/>
+          <p:cNvSpPr/>
+          <p:nvPr/>
+        </p:nvSpPr>
+        <p:spPr>
+          <a:xfrm>
+            <a:off x="10158984" y="5074920"/>
+            <a:ext cx="548640" cy="109728"/>
+          </a:xfrm>
+          <a:prstGeom prst="roundRect">
+            <a:avLst>
+              <a:gd name="adj" fmla="val 50000"/>
+            </a:avLst>
+          </a:prstGeom>
+          <a:solidFill>
+            <a:srgbClr val="1B3A7A"/>
+          </a:solidFill>
+          <a:ln/>
+        </p:spPr>
+      </p:sp>
+      <p:sp>
+        <p:nvSpPr>
+          <p:cNvPr id="12" name="Etapa 5"/>
+          <p:cNvSpPr/>
+          <p:nvPr/>
+        </p:nvSpPr>
+        <p:spPr>
+          <a:xfrm>
+            <a:off x="10817352" y="5074920"/>
+            <a:ext cx="548640" cy="109728"/>
+          </a:xfrm>
+          <a:prstGeom prst="roundRect">
+            <a:avLst>
+              <a:gd name="adj" fmla="val 50000"/>
+            </a:avLst>
+          </a:prstGeom>
+          <a:solidFill>
+            <a:srgbClr val="1B3A7A"/>
+          </a:solidFill>
+          <a:ln/>
+        </p:spPr>
+      </p:sp>
+      <p:sp>
+        <p:nvSpPr>
+          <p:cNvPr id="13" name="Text 10"/>
+          <p:cNvSpPr txBox="1"/>
+          <p:nvPr/>
+        </p:nvSpPr>
+        <p:spPr>
+          <a:xfrm>
+            <a:off x="8183880" y="5303520"/>
+            <a:ext cx="3291840" cy="274320"/>
+          </a:xfrm>
+          <a:prstGeom prst="rect">
+            <a:avLst/>
+          </a:prstGeom>
+          <a:noFill/>
+          <a:ln/>
+        </p:spPr>
+        <p:txBody>
+          <a:bodyPr wrap="square" lIns="0" tIns="0" rIns="0" bIns="0" rtlCol="0" anchor="ctr"/>
+          <a:lstStyle/>
+          <a:p>
+            <a:pPr indent="0" marL="0">
+              <a:buNone/>
+            </a:pPr>
+            <a:r>
+              <a:rPr lang="en-US" sz="1200" dirty="0">
+                <a:solidFill>
+                  <a:srgbClr val="89D1FF"/>
+                </a:solidFill>
+              </a:rPr>
+              <a:t>BO 1 de 5</a:t>
+            </a:r>
+            <a:endParaRPr lang="en-US" sz="1200" dirty="0"/>
+          </a:p>
+        </p:txBody>
+      </p:sp>
+    </p:spTree>
+  </p:cSld>
+  <p:clrMapOvr>
+    <a:masterClrMapping/>
+  </p:clrMapOvr>
+</p:sld>
+</file>
+
+<file path=ppt/slides/slide19.xml><?xml version="1.0" encoding="utf-8"?>
+<p:sld xmlns:a="http://schemas.openxmlformats.org/drawingml/2006/main" xmlns:p="http://schemas.openxmlformats.org/presentationml/2006/main" xmlns:r="http://schemas.openxmlformats.org/officeDocument/2006/relationships">
+  <p:cSld name="Slide 16">
+    <p:spTree>
+      <p:nvGrpSpPr>
+        <p:cNvPr id="1" name=""/>
+        <p:cNvGrpSpPr/>
+        <p:nvPr/>
+      </p:nvGrpSpPr>
+      <p:grpSpPr>
+        <a:xfrm>
+          <a:off x="0" y="0"/>
+          <a:ext cx="0" cy="0"/>
+          <a:chOff x="0" y="0"/>
+          <a:chExt cx="0" cy="0"/>
+        </a:xfrm>
+      </p:grpSpPr>
+      <p:sp>
+        <p:nvSpPr>
+          <p:cNvPr id="2" name="Text 0"/>
+          <p:cNvSpPr/>
+          <p:nvPr>
+            <p:ph idx="100" type="body" hasCustomPrompt="1"/>
+          </p:nvPr>
+        </p:nvSpPr>
+        <p:spPr>
+          <a:xfrm>
+            <a:off x="548640" y="292608"/>
+            <a:ext cx="9144000" cy="292608"/>
+          </a:xfrm>
+          <a:prstGeom prst="rect">
+            <a:avLst/>
+          </a:prstGeom>
+          <a:noFill/>
+          <a:ln/>
+        </p:spPr>
+        <p:txBody>
+          <a:bodyPr wrap="square" lIns="0" tIns="0" rIns="0" bIns="0" rtlCol="0" anchor="ctr"/>
+          <a:lstStyle/>
+          <a:p>
+            <a:pPr algn="l" indent="0" marL="0">
+              <a:buNone/>
+            </a:pPr>
+            <a:r>
+              <a:rPr lang="en-US" sz="1200" b="1" spc="150" kern="0" dirty="0">
+                <a:solidFill>
+                  <a:schemeClr val="accent1"/>
+                </a:solidFill>
+              </a:rPr>
+              <a:t>COMUM · TESTES</a:t>
+            </a:r>
+            <a:endParaRPr lang="en-US" sz="1200" dirty="0"/>
+          </a:p>
+        </p:txBody>
+      </p:sp>
+      <p:sp>
+        <p:nvSpPr>
+          <p:cNvPr id="3" name="Text 0"/>
+          <p:cNvSpPr/>
+          <p:nvPr>
+            <p:ph idx="101" type="title" hasCustomPrompt="1"/>
+          </p:nvPr>
+        </p:nvSpPr>
+        <p:spPr>
+          <a:xfrm>
+            <a:off x="548640" y="603504"/>
+            <a:ext cx="11064240" cy="685800"/>
+          </a:xfrm>
+          <a:prstGeom prst="rect">
+            <a:avLst/>
+          </a:prstGeom>
+          <a:noFill/>
+          <a:ln/>
+        </p:spPr>
+        <p:txBody>
+          <a:bodyPr wrap="square" lIns="0" tIns="0" rIns="0" bIns="0" rtlCol="0" anchor="ctr"/>
+          <a:lstStyle/>
+          <a:p>
+            <a:pPr algn="l" indent="0" marL="0">
+              <a:buNone/>
+            </a:pPr>
+            <a:r>
+              <a:rPr lang="en-US" sz="3200" b="1" dirty="0">
+                <a:solidFill>
+                  <a:schemeClr val="tx1"/>
+                </a:solidFill>
+              </a:rPr>
+              <a:t>unidade.test: o comum testado sem servidor</a:t>
+            </a:r>
+            <a:endParaRPr lang="en-US" sz="3200" dirty="0"/>
+          </a:p>
+        </p:txBody>
+      </p:sp>
+      <p:sp>
+        <p:nvSpPr>
+          <p:cNvPr id="5" name="Cartão"/>
+          <p:cNvSpPr/>
+          <p:nvPr/>
+        </p:nvSpPr>
+        <p:spPr>
+          <a:xfrm>
+            <a:off x="548640" y="1554480"/>
+            <a:ext cx="11091672" cy="3538728"/>
+          </a:xfrm>
+          <a:prstGeom prst="roundRect">
+            <a:avLst>
+              <a:gd name="adj" fmla="val 3101"/>
+            </a:avLst>
+          </a:prstGeom>
+          <a:solidFill>
+            <a:schemeClr val="bg1"/>
+          </a:solidFill>
+          <a:ln w="9525">
+            <a:solidFill>
+              <a:srgbClr val="E5E5E5"/>
+            </a:solidFill>
+            <a:prstDash val="solid"/>
+          </a:ln>
+          <a:effectLst>
+            <a:outerShdw sx="100000" sy="100000" kx="0" ky="0" algn="bl" rotWithShape="0" blurRad="101600" dist="25400" dir="5400000">
+              <a:srgbClr val="223649">
+                <a:alpha val="14000"/>
+              </a:srgbClr>
+            </a:outerShdw>
+          </a:effectLst>
+        </p:spPr>
+      </p:sp>
+      <p:graphicFrame>
+        <p:nvGraphicFramePr>
+          <p:cNvPr id="17" name="Table 0"/>
+          <p:cNvGraphicFramePr>
+            <a:graphicFrameLocks noGrp="1"/>
+          </p:cNvGraphicFramePr>
+          <p:nvPr>
+            <p:extLst>
+              <p:ext uri="{D42A27DB-BD31-4B8C-83A1-F6EECF244321}">
+                <p14:modId xmlns:p14="http://schemas.microsoft.com/office/powerpoint/2010/main" val="1579011935"/>
+              </p:ext>
+            </p:extLst>
+          </p:nvPr>
+        </p:nvGraphicFramePr>
+        <p:xfrm>
+          <a:off x="731520" y="1691640"/>
+          <a:ext cx="10725912" cy="914400"/>
+        </p:xfrm>
+        <a:graphic>
+          <a:graphicData uri="http://schemas.openxmlformats.org/drawingml/2006/table">
+            <a:tbl>
+              <a:tblPr/>
+              <a:tblGrid>
+                <a:gridCol w="2304741"/>
+                <a:gridCol w="8421171"/>
+              </a:tblGrid>
+              <a:tr h="411480">
+                <a:tc>
+                  <a:txBody>
+                    <a:bodyPr/>
+                    <a:lstStyle/>
+                    <a:p>
+                      <a:pPr indent="0" marL="0">
+                        <a:buNone/>
+                      </a:pPr>
+                      <a:r>
+                        <a:rPr lang="en-US" sz="1300" b="1" dirty="0">
+                          <a:solidFill>
+                            <a:schemeClr val="tx1"/>
+                          </a:solidFill>
+                        </a:rPr>
+                        <a:t>Grupo</a:t>
+                      </a:r>
+                      <a:endParaRPr lang="en-US" sz="1300" dirty="0"/>
+                    </a:p>
+                  </a:txBody>
+                  <a:tcPr marL="91440" marR="91440" marT="36576" marB="36576" anchor="ctr">
+                    <a:lnL w="0" cap="flat" cmpd="sng" algn="ctr">
+                      <a:noFill/>
+                    </a:lnL>
+                    <a:lnR w="0" cap="flat" cmpd="sng" algn="ctr">
+                      <a:noFill/>
+                    </a:lnR>
+                    <a:lnT w="0" cap="flat" cmpd="sng" algn="ctr">
+                      <a:noFill/>
+                    </a:lnT>
+                    <a:lnB w="12700" cap="flat" cmpd="sng" algn="ctr">
+                      <a:solidFill>
+                        <a:srgbClr val="A8B2BD"/>
+                      </a:solidFill>
+                      <a:prstDash val="solid"/>
+                      <a:round/>
+                      <a:headEnd type="none" w="med" len="med"/>
+                      <a:tailEnd type="none" w="med" len="med"/>
+                    </a:lnB>
+                    <a:solidFill>
+                      <a:srgbClr val="FFFFFF"/>
+                    </a:solidFill>
+                  </a:tcPr>
+                </a:tc>
+                <a:tc>
+                  <a:txBody>
+                    <a:bodyPr/>
+                    <a:lstStyle/>
+                    <a:p>
+                      <a:pPr indent="0" marL="0">
+                        <a:buNone/>
+                      </a:pPr>
+                      <a:r>
+                        <a:rPr lang="en-US" sz="1300" b="1" dirty="0">
+                          <a:solidFill>
+                            <a:schemeClr val="tx1"/>
+                          </a:solidFill>
+                        </a:rPr>
+                        <a:t>Casos</a:t>
+                      </a:r>
+                      <a:endParaRPr lang="en-US" sz="1300" dirty="0"/>
+                    </a:p>
+                  </a:txBody>
+                  <a:tcPr marL="91440" marR="91440" marT="36576" marB="36576" anchor="ctr">
+                    <a:lnL w="0" cap="flat" cmpd="sng" algn="ctr">
+                      <a:noFill/>
+                    </a:lnL>
+                    <a:lnR w="0" cap="flat" cmpd="sng" algn="ctr">
+                      <a:noFill/>
+                    </a:lnR>
+                    <a:lnT w="0" cap="flat" cmpd="sng" algn="ctr">
+                      <a:noFill/>
+                    </a:lnT>
+                    <a:lnB w="12700" cap="flat" cmpd="sng" algn="ctr">
+                      <a:solidFill>
+                        <a:srgbClr val="A8B2BD"/>
+                      </a:solidFill>
+                      <a:prstDash val="solid"/>
+                      <a:round/>
+                      <a:headEnd type="none" w="med" len="med"/>
+                      <a:tailEnd type="none" w="med" len="med"/>
+                    </a:lnB>
+                    <a:solidFill>
+                      <a:srgbClr val="FFFFFF"/>
+                    </a:solidFill>
+                  </a:tcPr>
+                </a:tc>
+              </a:tr>
+              <a:tr h="713232">
+                <a:tc>
+                  <a:txBody>
+                    <a:bodyPr/>
+                    <a:lstStyle/>
+                    <a:p>
+                      <a:pPr indent="0" marL="0">
+                        <a:buNone/>
+                      </a:pPr>
+                      <a:r>
+                        <a:rPr lang="en-US" sz="1200" b="1" dirty="0">
+                          <a:solidFill>
+                            <a:schemeClr val="tx1"/>
+                          </a:solidFill>
+                          <a:latin typeface="Courier New" pitchFamily="34" charset="0"/>
+                          <a:ea typeface="Courier New" pitchFamily="34" charset="-122"/>
+                          <a:cs typeface="Courier New" pitchFamily="34" charset="-120"/>
+                        </a:rPr>
+                        <a:t>utilitários</a:t>
+                      </a:r>
+                      <a:endParaRPr lang="en-US" sz="1200" dirty="0">
+                        <a:latin typeface="Courier New" charset="0"/>
+                        <a:ea typeface="Courier New" charset="0"/>
+                        <a:cs typeface="Courier New" charset="0"/>
+                      </a:endParaRPr>
+                    </a:p>
+                  </a:txBody>
+                  <a:tcPr marL="91440" marR="91440" marT="36576" marB="36576" anchor="ctr">
+                    <a:lnL w="0" cap="flat" cmpd="sng" algn="ctr">
+                      <a:noFill/>
+                    </a:lnL>
+                    <a:lnR w="0" cap="flat" cmpd="sng" algn="ctr">
+                      <a:noFill/>
+                    </a:lnR>
+                    <a:lnT w="0" cap="flat" cmpd="sng" algn="ctr">
+                      <a:noFill/>
+                    </a:lnT>
+                    <a:lnB w="12700" cap="flat" cmpd="sng" algn="ctr">
+                      <a:solidFill>
+                        <a:srgbClr val="E5E5E5"/>
+                      </a:solidFill>
+                      <a:prstDash val="solid"/>
+                      <a:round/>
+                      <a:headEnd type="none" w="med" len="med"/>
+                      <a:tailEnd type="none" w="med" len="med"/>
+                    </a:lnB>
+                    <a:solidFill>
+                      <a:srgbClr val="FFFFFF"/>
+                    </a:solidFill>
+                  </a:tcPr>
+                </a:tc>
+                <a:tc>
+                  <a:txBody>
+                    <a:bodyPr/>
+                    <a:lstStyle/>
+                    <a:p>
+                      <a:pPr indent="0" marL="0">
+                        <a:buNone/>
+                      </a:pPr>
+                      <a:r>
+                        <a:rPr lang="en-US" sz="1300" dirty="0">
+                          <a:solidFill>
+                            <a:srgbClr val="556B82"/>
+                          </a:solidFill>
+                        </a:rPr>
+                        <a:t>CPF (DV, repetidos, formato) · e-mail e telefone · imagens JPEG/PNG/WEBP · status de estoque · endereço, SKU e soma de quantidades</a:t>
+                      </a:r>
+                      <a:endParaRPr lang="en-US" sz="1300" dirty="0"/>
+                    </a:p>
+                  </a:txBody>
+                  <a:tcPr marL="91440" marR="91440" marT="36576" marB="36576" anchor="ctr">
+                    <a:lnL w="0" cap="flat" cmpd="sng" algn="ctr">
+                      <a:noFill/>
+                    </a:lnL>
+                    <a:lnR w="0" cap="flat" cmpd="sng" algn="ctr">
+                      <a:noFill/>
+                    </a:lnR>
+                    <a:lnT w="0" cap="flat" cmpd="sng" algn="ctr">
+                      <a:noFill/>
+                    </a:lnT>
+                    <a:lnB w="12700" cap="flat" cmpd="sng" algn="ctr">
+                      <a:solidFill>
+                        <a:srgbClr val="E5E5E5"/>
+                      </a:solidFill>
+                      <a:prstDash val="solid"/>
+                      <a:round/>
+                      <a:headEnd type="none" w="med" len="med"/>
+                      <a:tailEnd type="none" w="med" len="med"/>
+                    </a:lnB>
+                    <a:solidFill>
+                      <a:srgbClr val="FFFFFF"/>
+                    </a:solidFill>
+                  </a:tcPr>
+                </a:tc>
+              </a:tr>
+              <a:tr h="713232">
+                <a:tc>
+                  <a:txBody>
+                    <a:bodyPr/>
+                    <a:lstStyle/>
+                    <a:p>
+                      <a:pPr indent="0" marL="0">
+                        <a:buNone/>
+                      </a:pPr>
+                      <a:r>
+                        <a:rPr lang="en-US" sz="1200" b="1" dirty="0">
+                          <a:solidFill>
+                            <a:schemeClr val="tx1"/>
+                          </a:solidFill>
+                          <a:latin typeface="Courier New" pitchFamily="34" charset="0"/>
+                          <a:ea typeface="Courier New" pitchFamily="34" charset="-122"/>
+                          <a:cs typeface="Courier New" pitchFamily="34" charset="-120"/>
+                        </a:rPr>
+                        <a:t>pagamento simulado</a:t>
+                      </a:r>
+                      <a:endParaRPr lang="en-US" sz="1200" dirty="0">
+                        <a:latin typeface="Courier New" charset="0"/>
+                        <a:ea typeface="Courier New" charset="0"/>
+                        <a:cs typeface="Courier New" charset="0"/>
+                      </a:endParaRPr>
+                    </a:p>
+                  </a:txBody>
+                  <a:tcPr marL="91440" marR="91440" marT="36576" marB="36576" anchor="ctr">
+                    <a:lnL w="0" cap="flat" cmpd="sng" algn="ctr">
+                      <a:noFill/>
+                    </a:lnL>
+                    <a:lnR w="0" cap="flat" cmpd="sng" algn="ctr">
+                      <a:noFill/>
+                    </a:lnR>
+                    <a:lnT w="0" cap="flat" cmpd="sng" algn="ctr">
+                      <a:noFill/>
+                    </a:lnT>
+                    <a:lnB w="12700" cap="flat" cmpd="sng" algn="ctr">
+                      <a:solidFill>
+                        <a:srgbClr val="E5E5E5"/>
+                      </a:solidFill>
+                      <a:prstDash val="solid"/>
+                      <a:round/>
+                      <a:headEnd type="none" w="med" len="med"/>
+                      <a:tailEnd type="none" w="med" len="med"/>
+                    </a:lnB>
+                    <a:solidFill>
+                      <a:srgbClr val="FFFFFF"/>
+                    </a:solidFill>
+                  </a:tcPr>
+                </a:tc>
+                <a:tc>
+                  <a:txBody>
+                    <a:bodyPr/>
+                    <a:lstStyle/>
+                    <a:p>
+                      <a:pPr indent="0" marL="0">
+                        <a:buNone/>
+                      </a:pPr>
+                      <a:r>
+                        <a:rPr lang="en-US" sz="1300" dirty="0">
+                          <a:solidFill>
+                            <a:srgbClr val="556B82"/>
+                          </a:solidFill>
+                        </a:rPr>
+                        <a:t>Aprovado VISA com máscara · MASTERCARD e recusa com CVV 000 · dados inválidos são erro, não recusa</a:t>
+                      </a:r>
+                      <a:endParaRPr lang="en-US" sz="1300" dirty="0"/>
+                    </a:p>
+                  </a:txBody>
+                  <a:tcPr marL="91440" marR="91440" marT="36576" marB="36576" anchor="ctr">
+                    <a:lnL w="0" cap="flat" cmpd="sng" algn="ctr">
+                      <a:noFill/>
+                    </a:lnL>
+                    <a:lnR w="0" cap="flat" cmpd="sng" algn="ctr">
+                      <a:noFill/>
+                    </a:lnR>
+                    <a:lnT w="0" cap="flat" cmpd="sng" algn="ctr">
+                      <a:noFill/>
+                    </a:lnT>
+                    <a:lnB w="12700" cap="flat" cmpd="sng" algn="ctr">
+                      <a:solidFill>
+                        <a:srgbClr val="E5E5E5"/>
+                      </a:solidFill>
+                      <a:prstDash val="solid"/>
+                      <a:round/>
+                      <a:headEnd type="none" w="med" len="med"/>
+                      <a:tailEnd type="none" w="med" len="med"/>
+                    </a:lnB>
+                    <a:solidFill>
+                      <a:srgbClr val="FFFFFF"/>
+                    </a:solidFill>
+                  </a:tcPr>
+                </a:tc>
+              </a:tr>
+              <a:tr h="713232">
+                <a:tc>
+                  <a:txBody>
+                    <a:bodyPr/>
+                    <a:lstStyle/>
+                    <a:p>
+                      <a:pPr indent="0" marL="0">
+                        <a:buNone/>
+                      </a:pPr>
+                      <a:r>
+                        <a:rPr lang="en-US" sz="1200" b="1" dirty="0">
+                          <a:solidFill>
+                            <a:schemeClr val="tx1"/>
+                          </a:solidFill>
+                          <a:latin typeface="Courier New" pitchFamily="34" charset="0"/>
+                          <a:ea typeface="Courier New" pitchFamily="34" charset="-122"/>
+                          <a:cs typeface="Courier New" pitchFamily="34" charset="-120"/>
+                        </a:rPr>
+                        <a:t>leitor de planilhas</a:t>
+                      </a:r>
+                      <a:endParaRPr lang="en-US" sz="1200" dirty="0">
+                        <a:latin typeface="Courier New" charset="0"/>
+                        <a:ea typeface="Courier New" charset="0"/>
+                        <a:cs typeface="Courier New" charset="0"/>
+                      </a:endParaRPr>
+                    </a:p>
+                  </a:txBody>
+                  <a:tcPr marL="91440" marR="91440" marT="36576" marB="36576" anchor="ctr">
+                    <a:lnL w="0" cap="flat" cmpd="sng" algn="ctr">
+                      <a:noFill/>
+                    </a:lnL>
+                    <a:lnR w="0" cap="flat" cmpd="sng" algn="ctr">
+                      <a:noFill/>
+                    </a:lnR>
+                    <a:lnT w="0" cap="flat" cmpd="sng" algn="ctr">
+                      <a:noFill/>
+                    </a:lnT>
+                    <a:lnB w="12700" cap="flat" cmpd="sng" algn="ctr">
+                      <a:solidFill>
+                        <a:srgbClr val="E5E5E5"/>
+                      </a:solidFill>
+                      <a:prstDash val="solid"/>
+                      <a:round/>
+                      <a:headEnd type="none" w="med" len="med"/>
+                      <a:tailEnd type="none" w="med" len="med"/>
+                    </a:lnB>
+                    <a:solidFill>
+                      <a:srgbClr val="FFFFFF"/>
+                    </a:solidFill>
+                  </a:tcPr>
+                </a:tc>
+                <a:tc>
+                  <a:txBody>
+                    <a:bodyPr/>
+                    <a:lstStyle/>
+                    <a:p>
+                      <a:pPr indent="0" marL="0">
+                        <a:buNone/>
+                      </a:pPr>
+                      <a:r>
+                        <a:rPr lang="en-US" sz="1300" dirty="0">
+                          <a:solidFill>
+                            <a:srgbClr val="556B82"/>
+                          </a:solidFill>
+                        </a:rPr>
+                        <a:t>CSV com ; e com , · XLSX com textos compartilhados e inline · coluna ausente, sem dados, limite de linhas e .xls</a:t>
+                      </a:r>
+                      <a:endParaRPr lang="en-US" sz="1300" dirty="0"/>
+                    </a:p>
+                  </a:txBody>
+                  <a:tcPr marL="91440" marR="91440" marT="36576" marB="36576" anchor="ctr">
+                    <a:lnL w="0" cap="flat" cmpd="sng" algn="ctr">
+                      <a:noFill/>
+                    </a:lnL>
+                    <a:lnR w="0" cap="flat" cmpd="sng" algn="ctr">
+                      <a:noFill/>
+                    </a:lnR>
+                    <a:lnT w="0" cap="flat" cmpd="sng" algn="ctr">
+                      <a:noFill/>
+                    </a:lnT>
+                    <a:lnB w="12700" cap="flat" cmpd="sng" algn="ctr">
+                      <a:solidFill>
+                        <a:srgbClr val="E5E5E5"/>
+                      </a:solidFill>
+                      <a:prstDash val="solid"/>
+                      <a:round/>
+                      <a:headEnd type="none" w="med" len="med"/>
+                      <a:tailEnd type="none" w="med" len="med"/>
+                    </a:lnB>
+                    <a:solidFill>
+                      <a:srgbClr val="FFFFFF"/>
+                    </a:solidFill>
+                  </a:tcPr>
+                </a:tc>
+              </a:tr>
+              <a:tr h="713232">
+                <a:tc>
+                  <a:txBody>
+                    <a:bodyPr/>
+                    <a:lstStyle/>
+                    <a:p>
+                      <a:pPr indent="0" marL="0">
+                        <a:buNone/>
+                      </a:pPr>
+                      <a:r>
+                        <a:rPr lang="en-US" sz="1200" b="1" dirty="0">
+                          <a:solidFill>
+                            <a:schemeClr val="tx1"/>
+                          </a:solidFill>
+                          <a:latin typeface="Courier New" pitchFamily="34" charset="0"/>
+                          <a:ea typeface="Courier New" pitchFamily="34" charset="-122"/>
+                          <a:cs typeface="Courier New" pitchFamily="34" charset="-120"/>
+                        </a:rPr>
+                        <a:t>limites e conversões</a:t>
+                      </a:r>
+                      <a:endParaRPr lang="en-US" sz="1200" dirty="0">
+                        <a:latin typeface="Courier New" charset="0"/>
+                        <a:ea typeface="Courier New" charset="0"/>
+                        <a:cs typeface="Courier New" charset="0"/>
+                      </a:endParaRPr>
+                    </a:p>
+                  </a:txBody>
+                  <a:tcPr marL="91440" marR="91440" marT="36576" marB="36576" anchor="ctr">
+                    <a:lnL w="0" cap="flat" cmpd="sng" algn="ctr">
+                      <a:noFill/>
+                    </a:lnL>
+                    <a:lnR w="0" cap="flat" cmpd="sng" algn="ctr">
+                      <a:noFill/>
+                    </a:lnR>
+                    <a:lnT w="0" cap="flat" cmpd="sng" algn="ctr">
+                      <a:noFill/>
+                    </a:lnT>
+                    <a:lnB w="12700" cap="flat" cmpd="sng" algn="ctr">
+                      <a:solidFill>
+                        <a:srgbClr val="FFFFFF"/>
+                      </a:solidFill>
+                      <a:prstDash val="solid"/>
+                      <a:round/>
+                      <a:headEnd type="none" w="med" len="med"/>
+                      <a:tailEnd type="none" w="med" len="med"/>
+                    </a:lnB>
+                    <a:solidFill>
+                      <a:srgbClr val="FFFFFF"/>
+                    </a:solidFill>
+                  </a:tcPr>
+                </a:tc>
+                <a:tc>
+                  <a:txBody>
+                    <a:bodyPr/>
+                    <a:lstStyle/>
+                    <a:p>
+                      <a:pPr indent="0" marL="0">
+                        <a:buNone/>
+                      </a:pPr>
+                      <a:r>
+                        <a:rPr lang="en-US" sz="1300" dirty="0">
+                          <a:solidFill>
+                            <a:srgbClr val="556B82"/>
+                          </a:solidFill>
+                        </a:rPr>
+                        <a:t>XLSX acima do limite descompactado é recusado · datas, números e nomes de coluna</a:t>
+                      </a:r>
+                      <a:endParaRPr lang="en-US" sz="1300" dirty="0"/>
+                    </a:p>
+                  </a:txBody>
+                  <a:tcPr marL="91440" marR="91440" marT="36576" marB="36576" anchor="ctr">
+                    <a:lnL w="0" cap="flat" cmpd="sng" algn="ctr">
+                      <a:noFill/>
+                    </a:lnL>
+                    <a:lnR w="0" cap="flat" cmpd="sng" algn="ctr">
+                      <a:noFill/>
+                    </a:lnR>
+                    <a:lnT w="0" cap="flat" cmpd="sng" algn="ctr">
+                      <a:noFill/>
+                    </a:lnT>
+                    <a:lnB w="12700" cap="flat" cmpd="sng" algn="ctr">
+                      <a:solidFill>
+                        <a:srgbClr val="FFFFFF"/>
+                      </a:solidFill>
+                      <a:prstDash val="solid"/>
+                      <a:round/>
+                      <a:headEnd type="none" w="med" len="med"/>
+                      <a:tailEnd type="none" w="med" len="med"/>
+                    </a:lnB>
+                    <a:solidFill>
+                      <a:srgbClr val="FFFFFF"/>
+                    </a:solidFill>
+                  </a:tcPr>
+                </a:tc>
+              </a:tr>
+            </a:tbl>
+          </a:graphicData>
+        </a:graphic>
+      </p:graphicFrame>
+      <p:sp>
+        <p:nvSpPr>
+          <p:cNvPr id="7" name="Cartão"/>
+          <p:cNvSpPr/>
+          <p:nvPr/>
+        </p:nvSpPr>
+        <p:spPr>
+          <a:xfrm>
+            <a:off x="548640" y="5166360"/>
+            <a:ext cx="11091672" cy="914400"/>
+          </a:xfrm>
+          <a:prstGeom prst="roundRect">
+            <a:avLst>
+              <a:gd name="adj" fmla="val 12000"/>
+            </a:avLst>
+          </a:prstGeom>
+          <a:solidFill>
+            <a:srgbClr val="EBF8FF"/>
+          </a:solidFill>
+          <a:ln w="9525">
+            <a:solidFill>
+              <a:srgbClr val="D1EFFF"/>
+            </a:solidFill>
+            <a:prstDash val="solid"/>
+          </a:ln>
+        </p:spPr>
+      </p:sp>
+      <p:sp>
+        <p:nvSpPr>
+          <p:cNvPr id="8" name="Avatar LuTestTube"/>
+          <p:cNvSpPr/>
+          <p:nvPr/>
+        </p:nvSpPr>
+        <p:spPr>
+          <a:xfrm>
+            <a:off x="731520" y="5394960"/>
+            <a:ext cx="457200" cy="457200"/>
+          </a:xfrm>
+          <a:prstGeom prst="roundRect">
+            <a:avLst>
+              <a:gd name="adj" fmla="val 22000"/>
+            </a:avLst>
+          </a:prstGeom>
+          <a:solidFill>
+            <a:srgbClr val="0070F2"/>
+          </a:solidFill>
+          <a:ln/>
+        </p:spPr>
+      </p:sp>
+      <p:pic>
+        <p:nvPicPr>
+          <p:cNvPr id="9" name="Image 0" descr="LuTestTube">    </p:cNvPr>
+          <p:cNvPicPr>
+            <a:picLocks noChangeAspect="1"/>
+          </p:cNvPicPr>
+          <p:nvPr/>
+        </p:nvPicPr>
+        <p:blipFill>
+          <a:blip r:embed="rId2"/>
+          <a:stretch>
+            <a:fillRect/>
+          </a:stretch>
+        </p:blipFill>
+        <p:spPr>
+          <a:xfrm>
+            <a:off x="841248" y="5504688"/>
+            <a:ext cx="237744" cy="237744"/>
+          </a:xfrm>
+          <a:prstGeom prst="rect">
+            <a:avLst/>
+          </a:prstGeom>
+        </p:spPr>
+      </p:pic>
+      <p:sp>
+        <p:nvSpPr>
+          <p:cNvPr id="10" name="Text 5"/>
+          <p:cNvSpPr txBox="1"/>
+          <p:nvPr/>
+        </p:nvSpPr>
+        <p:spPr>
+          <a:xfrm>
+            <a:off x="1371600" y="5166360"/>
+            <a:ext cx="10085832" cy="914400"/>
+          </a:xfrm>
+          <a:prstGeom prst="rect">
+            <a:avLst/>
+          </a:prstGeom>
+          <a:noFill/>
+          <a:ln/>
+        </p:spPr>
+        <p:txBody>
+          <a:bodyPr wrap="square" lIns="0" tIns="0" rIns="0" bIns="0" rtlCol="0" anchor="ctr"/>
+          <a:lstStyle/>
+          <a:p>
+            <a:pPr indent="0" marL="0">
+              <a:buNone/>
+            </a:pPr>
+            <a:r>
+              <a:rPr lang="en-US" sz="1400" b="1" dirty="0">
+                <a:solidFill>
+                  <a:schemeClr val="accent1"/>
+                </a:solidFill>
+              </a:rPr>
+              <a:t>Mesmo arquivo nas duas versões  </a:t>
+            </a:r>
+            <a:pPr indent="0" marL="0">
+              <a:buNone/>
+            </a:pPr>
+            <a:r>
+              <a:rPr lang="en-US" sz="1400" dirty="0">
+                <a:solidFill>
+                  <a:schemeClr val="tx1"/>
+                </a:solidFill>
+              </a:rPr>
+              <a:t>test/unidade.test.js e test/unidade.test.ts cobrem as mesmas regras.</a:t>
+            </a:r>
+            <a:endParaRPr lang="en-US" sz="1400" dirty="0"/>
+          </a:p>
+        </p:txBody>
+      </p:sp>
+      <p:sp>
+        <p:nvSpPr>
+          <p:cNvPr id="25" name="Slide Number Placeholder 0"/>
+          <p:cNvSpPr>
+            <a:spLocks noGrp="1"/>
+          </p:cNvSpPr>
+          <p:nvPr>
+            <p:ph type="sldNum" sz="quarter" idx="4294967295"/>
+          </p:nvPr>
+        </p:nvSpPr>
+        <p:spPr>
+          <a:xfrm>
+            <a:off x="11155680" y="6419088"/>
+            <a:ext cx="484632" cy="274320"/>
+          </a:xfrm>
+          <a:prstGeom prst="rect">
+            <a:avLst/>
+          </a:prstGeom>
+          <a:extLst>
+            <a:ext uri="{C572A759-6A51-4108-AA02-DFA0A04FC94B}">
+              <ma14:wrappingTextBoxFlag xmlns:ma14="http://schemas.microsoft.com/office/mac/drawingml/2011/main" val="0"/>
+            </a:ext>
+          </a:extLst>
+        </p:spPr>
+        <p:txBody>
+          <a:bodyPr/>
+          <a:lstStyle>
+            <a:lvl1pPr>
+              <a:defRPr sz="1000">
+                <a:solidFill>
+                  <a:srgbClr val="556B82"/>
+                </a:solidFill>
+              </a:defRPr>
+            </a:lvl1pPr>
+          </a:lstStyle>
+          <a:p>
+            <a:pPr algn="r"/>
+            <a:fld id="{F7021451-1387-4CA6-816F-3879F97B5CBC}" type="slidenum">
+              <a:rPr b="0" lang="en-US"/>
+              <a:t>16</a:t>
+            </a:fld>
+            <a:endParaRPr lang="en-US"/>
           </a:p>
         </p:txBody>
       </p:sp>
@@ -13764,6 +15445,5754 @@
             <a:fld id="{F7021451-1387-4CA6-816F-3879F97B5CBC}" type="slidenum">
               <a:rPr b="0" lang="en-US"/>
               <a:t>2</a:t>
+            </a:fld>
+            <a:endParaRPr lang="en-US"/>
+          </a:p>
+        </p:txBody>
+      </p:sp>
+    </p:spTree>
+  </p:cSld>
+  <p:clrMapOvr>
+    <a:masterClrMapping/>
+  </p:clrMapOvr>
+</p:sld>
+</file>
+
+<file path=ppt/slides/slide20.xml><?xml version="1.0" encoding="utf-8"?>
+<p:sld xmlns:a="http://schemas.openxmlformats.org/drawingml/2006/main" xmlns:p="http://schemas.openxmlformats.org/presentationml/2006/main" xmlns:r="http://schemas.openxmlformats.org/officeDocument/2006/relationships">
+  <p:cSld name="Slide 1">
+    <p:spTree>
+      <p:nvGrpSpPr>
+        <p:cNvPr id="1" name=""/>
+        <p:cNvGrpSpPr/>
+        <p:nvPr/>
+      </p:nvGrpSpPr>
+      <p:grpSpPr>
+        <a:xfrm>
+          <a:off x="0" y="0"/>
+          <a:ext cx="0" cy="0"/>
+          <a:chOff x="0" y="0"/>
+          <a:chExt cx="0" cy="0"/>
+        </a:xfrm>
+      </p:grpSpPr>
+      <p:sp>
+        <p:nvSpPr>
+          <p:cNvPr id="2" name="Text 0"/>
+          <p:cNvSpPr/>
+          <p:nvPr>
+            <p:ph idx="100" type="body" hasCustomPrompt="1"/>
+          </p:nvPr>
+        </p:nvSpPr>
+        <p:spPr>
+          <a:xfrm>
+            <a:off x="731520" y="1417320"/>
+            <a:ext cx="5486400" cy="411480"/>
+          </a:xfrm>
+          <a:prstGeom prst="rect">
+            <a:avLst/>
+          </a:prstGeom>
+          <a:noFill/>
+          <a:ln/>
+        </p:spPr>
+        <p:txBody>
+          <a:bodyPr wrap="square" lIns="0" tIns="0" rIns="0" bIns="0" rtlCol="0" anchor="ctr"/>
+          <a:lstStyle/>
+          <a:p>
+            <a:pPr algn="l" indent="0" marL="0">
+              <a:buNone/>
+            </a:pPr>
+            <a:r>
+              <a:rPr lang="en-US" sz="1400" b="1" spc="200" kern="0" dirty="0">
+                <a:solidFill>
+                  <a:srgbClr val="89D1FF"/>
+                </a:solidFill>
+              </a:rPr>
+              <a:t>ETAPA 6 · CLIENTES</a:t>
+            </a:r>
+            <a:endParaRPr lang="en-US" sz="1400" dirty="0"/>
+          </a:p>
+        </p:txBody>
+      </p:sp>
+      <p:sp>
+        <p:nvSpPr>
+          <p:cNvPr id="3" name="Text 0"/>
+          <p:cNvSpPr/>
+          <p:nvPr>
+            <p:ph idx="101" type="title" hasCustomPrompt="1"/>
+          </p:nvPr>
+        </p:nvSpPr>
+        <p:spPr>
+          <a:xfrm>
+            <a:off x="731520" y="1965960"/>
+            <a:ext cx="6766560" cy="1737360"/>
+          </a:xfrm>
+          <a:prstGeom prst="rect">
+            <a:avLst/>
+          </a:prstGeom>
+          <a:noFill/>
+          <a:ln/>
+        </p:spPr>
+        <p:txBody>
+          <a:bodyPr wrap="square" lIns="0" tIns="0" rIns="0" bIns="0" rtlCol="0" anchor="t"/>
+          <a:lstStyle/>
+          <a:p>
+            <a:pPr algn="l" indent="0" marL="0">
+              <a:buNone/>
+            </a:pPr>
+            <a:r>
+              <a:rPr lang="en-US" sz="4400" b="1" dirty="0">
+                <a:solidFill>
+                  <a:schemeClr val="bg1"/>
+                </a:solidFill>
+              </a:rPr>
+              <a:t>BO Clientes</a:t>
+            </a:r>
+            <a:endParaRPr lang="en-US" sz="4400" dirty="0"/>
+          </a:p>
+        </p:txBody>
+      </p:sp>
+      <p:sp>
+        <p:nvSpPr>
+          <p:cNvPr id="4" name="Text 0"/>
+          <p:cNvSpPr/>
+          <p:nvPr>
+            <p:ph idx="102" type="body" hasCustomPrompt="1"/>
+          </p:nvPr>
+        </p:nvSpPr>
+        <p:spPr>
+          <a:xfrm>
+            <a:off x="731520" y="3840480"/>
+            <a:ext cx="6400800" cy="1097280"/>
+          </a:xfrm>
+          <a:prstGeom prst="rect">
+            <a:avLst/>
+          </a:prstGeom>
+          <a:noFill/>
+          <a:ln/>
+        </p:spPr>
+        <p:txBody>
+          <a:bodyPr wrap="square" lIns="0" tIns="0" rIns="0" bIns="0" rtlCol="0" anchor="t"/>
+          <a:lstStyle/>
+          <a:p>
+            <a:pPr algn="l" indent="0" marL="0">
+              <a:buNone/>
+            </a:pPr>
+            <a:r>
+              <a:rPr lang="en-US" sz="1800" dirty="0">
+                <a:solidFill>
+                  <a:srgbClr val="D1EFFF"/>
+                </a:solidFill>
+              </a:rPr>
+              <a:t>clientes.test: ViaCEP, CPF, endereço principal, foto, exclusão controlada e o perfil Comum somente leitura.</a:t>
+            </a:r>
+            <a:endParaRPr lang="en-US" sz="1800" dirty="0"/>
+          </a:p>
+        </p:txBody>
+      </p:sp>
+      <p:sp>
+        <p:nvSpPr>
+          <p:cNvPr id="5" name="Avatar da etapa"/>
+          <p:cNvSpPr/>
+          <p:nvPr/>
+        </p:nvSpPr>
+        <p:spPr>
+          <a:xfrm>
+            <a:off x="8183880" y="1417320"/>
+            <a:ext cx="3291840" cy="3291840"/>
+          </a:xfrm>
+          <a:prstGeom prst="roundRect">
+            <a:avLst>
+              <a:gd name="adj" fmla="val 22222"/>
+            </a:avLst>
+          </a:prstGeom>
+          <a:solidFill>
+            <a:srgbClr val="1B3A7A"/>
+          </a:solidFill>
+          <a:ln/>
+        </p:spPr>
+      </p:sp>
+      <p:sp>
+        <p:nvSpPr>
+          <p:cNvPr id="6" name="Avatar interno"/>
+          <p:cNvSpPr/>
+          <p:nvPr/>
+        </p:nvSpPr>
+        <p:spPr>
+          <a:xfrm>
+            <a:off x="8732520" y="1965960"/>
+            <a:ext cx="2194560" cy="2194560"/>
+          </a:xfrm>
+          <a:prstGeom prst="roundRect">
+            <a:avLst>
+              <a:gd name="adj" fmla="val 22917"/>
+            </a:avLst>
+          </a:prstGeom>
+          <a:solidFill>
+            <a:schemeClr val="accent1"/>
+          </a:solidFill>
+          <a:ln/>
+        </p:spPr>
+      </p:sp>
+      <p:pic>
+        <p:nvPicPr>
+          <p:cNvPr id="7" name="Image 0" descr="Clientes">    </p:cNvPr>
+          <p:cNvPicPr>
+            <a:picLocks noChangeAspect="1"/>
+          </p:cNvPicPr>
+          <p:nvPr/>
+        </p:nvPicPr>
+        <p:blipFill>
+          <a:blip r:embed="rId2"/>
+          <a:stretch>
+            <a:fillRect/>
+          </a:stretch>
+        </p:blipFill>
+        <p:spPr>
+          <a:xfrm>
+            <a:off x="9281160" y="2514600"/>
+            <a:ext cx="1097280" cy="1097280"/>
+          </a:xfrm>
+          <a:prstGeom prst="rect">
+            <a:avLst/>
+          </a:prstGeom>
+        </p:spPr>
+      </p:pic>
+      <p:sp>
+        <p:nvSpPr>
+          <p:cNvPr id="8" name="Etapa 1"/>
+          <p:cNvSpPr/>
+          <p:nvPr/>
+        </p:nvSpPr>
+        <p:spPr>
+          <a:xfrm>
+            <a:off x="8183880" y="5074920"/>
+            <a:ext cx="548640" cy="109728"/>
+          </a:xfrm>
+          <a:prstGeom prst="roundRect">
+            <a:avLst>
+              <a:gd name="adj" fmla="val 50000"/>
+            </a:avLst>
+          </a:prstGeom>
+          <a:solidFill>
+            <a:srgbClr val="1B3A7A"/>
+          </a:solidFill>
+          <a:ln/>
+        </p:spPr>
+      </p:sp>
+      <p:sp>
+        <p:nvSpPr>
+          <p:cNvPr id="9" name="Etapa 2"/>
+          <p:cNvSpPr/>
+          <p:nvPr/>
+        </p:nvSpPr>
+        <p:spPr>
+          <a:xfrm>
+            <a:off x="8842248" y="5074920"/>
+            <a:ext cx="548640" cy="109728"/>
+          </a:xfrm>
+          <a:prstGeom prst="roundRect">
+            <a:avLst>
+              <a:gd name="adj" fmla="val 50000"/>
+            </a:avLst>
+          </a:prstGeom>
+          <a:solidFill>
+            <a:srgbClr val="89D1FF"/>
+          </a:solidFill>
+          <a:ln/>
+        </p:spPr>
+      </p:sp>
+      <p:sp>
+        <p:nvSpPr>
+          <p:cNvPr id="10" name="Etapa 3"/>
+          <p:cNvSpPr/>
+          <p:nvPr/>
+        </p:nvSpPr>
+        <p:spPr>
+          <a:xfrm>
+            <a:off x="9500616" y="5074920"/>
+            <a:ext cx="548640" cy="109728"/>
+          </a:xfrm>
+          <a:prstGeom prst="roundRect">
+            <a:avLst>
+              <a:gd name="adj" fmla="val 50000"/>
+            </a:avLst>
+          </a:prstGeom>
+          <a:solidFill>
+            <a:srgbClr val="1B3A7A"/>
+          </a:solidFill>
+          <a:ln/>
+        </p:spPr>
+      </p:sp>
+      <p:sp>
+        <p:nvSpPr>
+          <p:cNvPr id="11" name="Etapa 4"/>
+          <p:cNvSpPr/>
+          <p:nvPr/>
+        </p:nvSpPr>
+        <p:spPr>
+          <a:xfrm>
+            <a:off x="10158984" y="5074920"/>
+            <a:ext cx="548640" cy="109728"/>
+          </a:xfrm>
+          <a:prstGeom prst="roundRect">
+            <a:avLst>
+              <a:gd name="adj" fmla="val 50000"/>
+            </a:avLst>
+          </a:prstGeom>
+          <a:solidFill>
+            <a:srgbClr val="1B3A7A"/>
+          </a:solidFill>
+          <a:ln/>
+        </p:spPr>
+      </p:sp>
+      <p:sp>
+        <p:nvSpPr>
+          <p:cNvPr id="12" name="Etapa 5"/>
+          <p:cNvSpPr/>
+          <p:nvPr/>
+        </p:nvSpPr>
+        <p:spPr>
+          <a:xfrm>
+            <a:off x="10817352" y="5074920"/>
+            <a:ext cx="548640" cy="109728"/>
+          </a:xfrm>
+          <a:prstGeom prst="roundRect">
+            <a:avLst>
+              <a:gd name="adj" fmla="val 50000"/>
+            </a:avLst>
+          </a:prstGeom>
+          <a:solidFill>
+            <a:srgbClr val="1B3A7A"/>
+          </a:solidFill>
+          <a:ln/>
+        </p:spPr>
+      </p:sp>
+      <p:sp>
+        <p:nvSpPr>
+          <p:cNvPr id="13" name="Text 10"/>
+          <p:cNvSpPr txBox="1"/>
+          <p:nvPr/>
+        </p:nvSpPr>
+        <p:spPr>
+          <a:xfrm>
+            <a:off x="8183880" y="5303520"/>
+            <a:ext cx="3291840" cy="274320"/>
+          </a:xfrm>
+          <a:prstGeom prst="rect">
+            <a:avLst/>
+          </a:prstGeom>
+          <a:noFill/>
+          <a:ln/>
+        </p:spPr>
+        <p:txBody>
+          <a:bodyPr wrap="square" lIns="0" tIns="0" rIns="0" bIns="0" rtlCol="0" anchor="ctr"/>
+          <a:lstStyle/>
+          <a:p>
+            <a:pPr indent="0" marL="0">
+              <a:buNone/>
+            </a:pPr>
+            <a:r>
+              <a:rPr lang="en-US" sz="1200" dirty="0">
+                <a:solidFill>
+                  <a:srgbClr val="89D1FF"/>
+                </a:solidFill>
+              </a:rPr>
+              <a:t>BO 2 de 5</a:t>
+            </a:r>
+            <a:endParaRPr lang="en-US" sz="1200" dirty="0"/>
+          </a:p>
+        </p:txBody>
+      </p:sp>
+    </p:spTree>
+  </p:cSld>
+  <p:clrMapOvr>
+    <a:masterClrMapping/>
+  </p:clrMapOvr>
+</p:sld>
+</file>
+
+<file path=ppt/slides/slide21.xml><?xml version="1.0" encoding="utf-8"?>
+<p:sld xmlns:a="http://schemas.openxmlformats.org/drawingml/2006/main" xmlns:p="http://schemas.openxmlformats.org/presentationml/2006/main" xmlns:r="http://schemas.openxmlformats.org/officeDocument/2006/relationships">
+  <p:cSld name="Slide 19">
+    <p:spTree>
+      <p:nvGrpSpPr>
+        <p:cNvPr id="1" name=""/>
+        <p:cNvGrpSpPr/>
+        <p:nvPr/>
+      </p:nvGrpSpPr>
+      <p:grpSpPr>
+        <a:xfrm>
+          <a:off x="0" y="0"/>
+          <a:ext cx="0" cy="0"/>
+          <a:chOff x="0" y="0"/>
+          <a:chExt cx="0" cy="0"/>
+        </a:xfrm>
+      </p:grpSpPr>
+      <p:sp>
+        <p:nvSpPr>
+          <p:cNvPr id="2" name="Text 0"/>
+          <p:cNvSpPr/>
+          <p:nvPr>
+            <p:ph idx="100" type="body" hasCustomPrompt="1"/>
+          </p:nvPr>
+        </p:nvSpPr>
+        <p:spPr>
+          <a:xfrm>
+            <a:off x="548640" y="292608"/>
+            <a:ext cx="9144000" cy="292608"/>
+          </a:xfrm>
+          <a:prstGeom prst="rect">
+            <a:avLst/>
+          </a:prstGeom>
+          <a:noFill/>
+          <a:ln/>
+        </p:spPr>
+        <p:txBody>
+          <a:bodyPr wrap="square" lIns="0" tIns="0" rIns="0" bIns="0" rtlCol="0" anchor="ctr"/>
+          <a:lstStyle/>
+          <a:p>
+            <a:pPr algn="l" indent="0" marL="0">
+              <a:buNone/>
+            </a:pPr>
+            <a:r>
+              <a:rPr lang="en-US" sz="1200" b="1" spc="150" kern="0" dirty="0">
+                <a:solidFill>
+                  <a:schemeClr val="accent1"/>
+                </a:solidFill>
+              </a:rPr>
+              <a:t>CLIENTES · TESTES</a:t>
+            </a:r>
+            <a:endParaRPr lang="en-US" sz="1200" dirty="0"/>
+          </a:p>
+        </p:txBody>
+      </p:sp>
+      <p:sp>
+        <p:nvSpPr>
+          <p:cNvPr id="3" name="Text 0"/>
+          <p:cNvSpPr/>
+          <p:nvPr>
+            <p:ph idx="101" type="title" hasCustomPrompt="1"/>
+          </p:nvPr>
+        </p:nvSpPr>
+        <p:spPr>
+          <a:xfrm>
+            <a:off x="548640" y="603504"/>
+            <a:ext cx="11064240" cy="685800"/>
+          </a:xfrm>
+          <a:prstGeom prst="rect">
+            <a:avLst/>
+          </a:prstGeom>
+          <a:noFill/>
+          <a:ln/>
+        </p:spPr>
+        <p:txBody>
+          <a:bodyPr wrap="square" lIns="0" tIns="0" rIns="0" bIns="0" rtlCol="0" anchor="ctr"/>
+          <a:lstStyle/>
+          <a:p>
+            <a:pPr algn="l" indent="0" marL="0">
+              <a:buNone/>
+            </a:pPr>
+            <a:r>
+              <a:rPr lang="en-US" sz="3200" b="1" dirty="0">
+                <a:solidFill>
+                  <a:schemeClr val="tx1"/>
+                </a:solidFill>
+              </a:rPr>
+              <a:t>clientes.test: 13 testes do BO</a:t>
+            </a:r>
+            <a:endParaRPr lang="en-US" sz="3200" dirty="0"/>
+          </a:p>
+        </p:txBody>
+      </p:sp>
+      <p:sp>
+        <p:nvSpPr>
+          <p:cNvPr id="5" name="Cartão"/>
+          <p:cNvSpPr/>
+          <p:nvPr/>
+        </p:nvSpPr>
+        <p:spPr>
+          <a:xfrm>
+            <a:off x="548640" y="1554480"/>
+            <a:ext cx="5440680" cy="4526280"/>
+          </a:xfrm>
+          <a:prstGeom prst="roundRect">
+            <a:avLst>
+              <a:gd name="adj" fmla="val 2424"/>
+            </a:avLst>
+          </a:prstGeom>
+          <a:solidFill>
+            <a:schemeClr val="bg1"/>
+          </a:solidFill>
+          <a:ln w="9525">
+            <a:solidFill>
+              <a:srgbClr val="E5E5E5"/>
+            </a:solidFill>
+            <a:prstDash val="solid"/>
+          </a:ln>
+          <a:effectLst>
+            <a:outerShdw sx="100000" sy="100000" kx="0" ky="0" algn="bl" rotWithShape="0" blurRad="101600" dist="25400" dir="5400000">
+              <a:srgbClr val="223649">
+                <a:alpha val="14000"/>
+              </a:srgbClr>
+            </a:outerShdw>
+          </a:effectLst>
+        </p:spPr>
+      </p:sp>
+      <p:sp>
+        <p:nvSpPr>
+          <p:cNvPr id="6" name="Text 3"/>
+          <p:cNvSpPr txBox="1"/>
+          <p:nvPr/>
+        </p:nvSpPr>
+        <p:spPr>
+          <a:xfrm>
+            <a:off x="822960" y="1783080"/>
+            <a:ext cx="4937760" cy="4114800"/>
+          </a:xfrm>
+          <a:prstGeom prst="rect">
+            <a:avLst/>
+          </a:prstGeom>
+          <a:noFill/>
+          <a:ln/>
+        </p:spPr>
+        <p:txBody>
+          <a:bodyPr wrap="square" lIns="0" tIns="0" rIns="0" bIns="0" rtlCol="0" anchor="t"/>
+          <a:lstStyle/>
+          <a:p>
+            <a:pPr marL="342900" indent="-342900">
+              <a:spcAft>
+                <a:spcPts val="1000"/>
+              </a:spcAft>
+              <a:buSzPct val="100000"/>
+              <a:buChar char="•"/>
+            </a:pPr>
+            <a:r>
+              <a:rPr lang="en-US" sz="1400" dirty="0">
+                <a:solidFill>
+                  <a:schemeClr val="tx1"/>
+                </a:solidFill>
+              </a:rPr>
+              <a:t>cria cliente com endereço preenchido pelo ViaCEP, ativo e com score</a:t>
+            </a:r>
+            <a:endParaRPr lang="en-US" sz="1400" dirty="0"/>
+          </a:p>
+          <a:p>
+            <a:pPr marL="342900" indent="-342900">
+              <a:spcAft>
+                <a:spcPts val="1000"/>
+              </a:spcAft>
+              <a:buSzPct val="100000"/>
+              <a:buChar char="•"/>
+            </a:pPr>
+            <a:r>
+              <a:rPr lang="en-US" sz="1400" dirty="0">
+                <a:solidFill>
+                  <a:schemeClr val="tx1"/>
+                </a:solidFill>
+              </a:rPr>
+              <a:t>CEP já cadastrado é reaproveitado sem chamar o ViaCEP</a:t>
+            </a:r>
+            <a:endParaRPr lang="en-US" sz="1400" dirty="0"/>
+          </a:p>
+          <a:p>
+            <a:pPr marL="342900" indent="-342900">
+              <a:spcAft>
+                <a:spcPts val="1000"/>
+              </a:spcAft>
+              <a:buSzPct val="100000"/>
+              <a:buChar char="•"/>
+            </a:pPr>
+            <a:r>
+              <a:rPr lang="en-US" sz="1400" dirty="0">
+                <a:solidFill>
+                  <a:schemeClr val="tx1"/>
+                </a:solidFill>
+              </a:rPr>
+              <a:t>CPF inválido ou duplicado bloqueia o Save</a:t>
+            </a:r>
+            <a:endParaRPr lang="en-US" sz="1400" dirty="0"/>
+          </a:p>
+          <a:p>
+            <a:pPr marL="342900" indent="-342900">
+              <a:spcAft>
+                <a:spcPts val="1000"/>
+              </a:spcAft>
+              <a:buSzPct val="100000"/>
+              <a:buChar char="•"/>
+            </a:pPr>
+            <a:r>
+              <a:rPr lang="en-US" sz="1400" dirty="0">
+                <a:solidFill>
+                  <a:schemeClr val="tx1"/>
+                </a:solidFill>
+              </a:rPr>
+              <a:t>e-mail, telefone e data de nascimento são validados</a:t>
+            </a:r>
+            <a:endParaRPr lang="en-US" sz="1400" dirty="0"/>
+          </a:p>
+          <a:p>
+            <a:pPr marL="342900" indent="-342900">
+              <a:spcAft>
+                <a:spcPts val="1000"/>
+              </a:spcAft>
+              <a:buSzPct val="100000"/>
+              <a:buChar char="•"/>
+            </a:pPr>
+            <a:r>
+              <a:rPr lang="en-US" sz="1400" dirty="0">
+                <a:solidFill>
+                  <a:schemeClr val="tx1"/>
+                </a:solidFill>
+              </a:rPr>
+              <a:t>CEP inexistente ou ViaCEP indisponível bloqueiam o Save</a:t>
+            </a:r>
+            <a:endParaRPr lang="en-US" sz="1400" dirty="0"/>
+          </a:p>
+          <a:p>
+            <a:pPr marL="342900" indent="-342900">
+              <a:spcAft>
+                <a:spcPts val="1000"/>
+              </a:spcAft>
+              <a:buSzPct val="100000"/>
+              <a:buChar char="•"/>
+            </a:pPr>
+            <a:r>
+              <a:rPr lang="en-US" sz="1400" dirty="0">
+                <a:solidFill>
+                  <a:schemeClr val="tx1"/>
+                </a:solidFill>
+              </a:rPr>
+              <a:t>CEP geral exige logradouro e bairro informados pelo usuário</a:t>
+            </a:r>
+            <a:endParaRPr lang="en-US" sz="1400" dirty="0"/>
+          </a:p>
+          <a:p>
+            <a:pPr marL="342900" indent="-342900">
+              <a:spcAft>
+                <a:spcPts val="1000"/>
+              </a:spcAft>
+              <a:buSzPct val="100000"/>
+              <a:buChar char="•"/>
+            </a:pPr>
+            <a:r>
+              <a:rPr lang="en-US" sz="1400" dirty="0">
+                <a:solidFill>
+                  <a:schemeClr val="tx1"/>
+                </a:solidFill>
+              </a:rPr>
+              <a:t>número do endereço é obrigatório e o CEP é único por cliente</a:t>
+            </a:r>
+            <a:endParaRPr lang="en-US" sz="1400" dirty="0"/>
+          </a:p>
+        </p:txBody>
+      </p:sp>
+      <p:sp>
+        <p:nvSpPr>
+          <p:cNvPr id="7" name="Cartão"/>
+          <p:cNvSpPr/>
+          <p:nvPr/>
+        </p:nvSpPr>
+        <p:spPr>
+          <a:xfrm>
+            <a:off x="6199632" y="1554480"/>
+            <a:ext cx="5440680" cy="4526280"/>
+          </a:xfrm>
+          <a:prstGeom prst="roundRect">
+            <a:avLst>
+              <a:gd name="adj" fmla="val 2424"/>
+            </a:avLst>
+          </a:prstGeom>
+          <a:solidFill>
+            <a:schemeClr val="bg1"/>
+          </a:solidFill>
+          <a:ln w="9525">
+            <a:solidFill>
+              <a:srgbClr val="E5E5E5"/>
+            </a:solidFill>
+            <a:prstDash val="solid"/>
+          </a:ln>
+          <a:effectLst>
+            <a:outerShdw sx="100000" sy="100000" kx="0" ky="0" algn="bl" rotWithShape="0" blurRad="101600" dist="25400" dir="5400000">
+              <a:srgbClr val="223649">
+                <a:alpha val="14000"/>
+              </a:srgbClr>
+            </a:outerShdw>
+          </a:effectLst>
+        </p:spPr>
+      </p:sp>
+      <p:sp>
+        <p:nvSpPr>
+          <p:cNvPr id="8" name="Text 5"/>
+          <p:cNvSpPr txBox="1"/>
+          <p:nvPr/>
+        </p:nvSpPr>
+        <p:spPr>
+          <a:xfrm>
+            <a:off x="6473952" y="1783080"/>
+            <a:ext cx="4937760" cy="4114800"/>
+          </a:xfrm>
+          <a:prstGeom prst="rect">
+            <a:avLst/>
+          </a:prstGeom>
+          <a:noFill/>
+          <a:ln/>
+        </p:spPr>
+        <p:txBody>
+          <a:bodyPr wrap="square" lIns="0" tIns="0" rIns="0" bIns="0" rtlCol="0" anchor="t"/>
+          <a:lstStyle/>
+          <a:p>
+            <a:pPr marL="342900" indent="-342900">
+              <a:spcAft>
+                <a:spcPts val="1000"/>
+              </a:spcAft>
+              <a:buSzPct val="100000"/>
+              <a:buChar char="•"/>
+            </a:pPr>
+            <a:r>
+              <a:rPr lang="en-US" sz="1400" dirty="0">
+                <a:solidFill>
+                  <a:schemeClr val="tx1"/>
+                </a:solidFill>
+              </a:rPr>
+              <a:t>definir endereço principal desmarca os demais (rascunho e ativo)</a:t>
+            </a:r>
+            <a:endParaRPr lang="en-US" sz="1400" dirty="0"/>
+          </a:p>
+          <a:p>
+            <a:pPr marL="342900" indent="-342900">
+              <a:spcAft>
+                <a:spcPts val="1000"/>
+              </a:spcAft>
+              <a:buSzPct val="100000"/>
+              <a:buChar char="•"/>
+            </a:pPr>
+            <a:r>
+              <a:rPr lang="en-US" sz="1400" dirty="0">
+                <a:solidFill>
+                  <a:schemeClr val="tx1"/>
+                </a:solidFill>
+              </a:rPr>
+              <a:t>usuário comum consulta, mas não cria, edita nem exclui clientes</a:t>
+            </a:r>
+            <a:endParaRPr lang="en-US" sz="1400" dirty="0"/>
+          </a:p>
+          <a:p>
+            <a:pPr marL="342900" indent="-342900">
+              <a:spcAft>
+                <a:spcPts val="1000"/>
+              </a:spcAft>
+              <a:buSzPct val="100000"/>
+              <a:buChar char="•"/>
+            </a:pPr>
+            <a:r>
+              <a:rPr lang="en-US" sz="1400" dirty="0">
+                <a:solidFill>
+                  <a:schemeClr val="tx1"/>
+                </a:solidFill>
+              </a:rPr>
+              <a:t>a UI só oferece alteração ao Admin: Permissoes.somenteLeitura</a:t>
+            </a:r>
+            <a:endParaRPr lang="en-US" sz="1400" dirty="0"/>
+          </a:p>
+          <a:p>
+            <a:pPr marL="342900" indent="-342900">
+              <a:spcAft>
+                <a:spcPts val="1000"/>
+              </a:spcAft>
+              <a:buSzPct val="100000"/>
+              <a:buChar char="•"/>
+            </a:pPr>
+            <a:r>
+              <a:rPr lang="en-US" sz="1400" dirty="0">
+                <a:solidFill>
+                  <a:schemeClr val="tx1"/>
+                </a:solidFill>
+              </a:rPr>
+              <a:t>cliente com pedido não pode ser excluído; sem pedido pode</a:t>
+            </a:r>
+            <a:endParaRPr lang="en-US" sz="1400" dirty="0"/>
+          </a:p>
+          <a:p>
+            <a:pPr marL="342900" indent="-342900">
+              <a:spcAft>
+                <a:spcPts val="1000"/>
+              </a:spcAft>
+              <a:buSzPct val="100000"/>
+              <a:buChar char="•"/>
+            </a:pPr>
+            <a:r>
+              <a:rPr lang="en-US" sz="1400" dirty="0">
+                <a:solidFill>
+                  <a:schemeClr val="tx1"/>
+                </a:solidFill>
+              </a:rPr>
+              <a:t>foto aceita apenas JPEG, PNG ou WEBP com assinatura válida</a:t>
+            </a:r>
+            <a:endParaRPr lang="en-US" sz="1400" dirty="0"/>
+          </a:p>
+          <a:p>
+            <a:pPr marL="342900" indent="-342900">
+              <a:spcAft>
+                <a:spcPts val="1000"/>
+              </a:spcAft>
+              <a:buSzPct val="100000"/>
+              <a:buChar char="•"/>
+            </a:pPr>
+            <a:r>
+              <a:rPr lang="en-US" sz="1400" dirty="0">
+                <a:solidFill>
+                  <a:schemeClr val="tx1"/>
+                </a:solidFill>
+              </a:rPr>
+              <a:t>foto enviada no rascunho é gravada e exibida depois do Save</a:t>
+            </a:r>
+            <a:endParaRPr lang="en-US" sz="1400" dirty="0"/>
+          </a:p>
+        </p:txBody>
+      </p:sp>
+      <p:sp>
+        <p:nvSpPr>
+          <p:cNvPr id="25" name="Slide Number Placeholder 0"/>
+          <p:cNvSpPr>
+            <a:spLocks noGrp="1"/>
+          </p:cNvSpPr>
+          <p:nvPr>
+            <p:ph type="sldNum" sz="quarter" idx="4294967295"/>
+          </p:nvPr>
+        </p:nvSpPr>
+        <p:spPr>
+          <a:xfrm>
+            <a:off x="11155680" y="6419088"/>
+            <a:ext cx="484632" cy="274320"/>
+          </a:xfrm>
+          <a:prstGeom prst="rect">
+            <a:avLst/>
+          </a:prstGeom>
+          <a:extLst>
+            <a:ext uri="{C572A759-6A51-4108-AA02-DFA0A04FC94B}">
+              <ma14:wrappingTextBoxFlag xmlns:ma14="http://schemas.microsoft.com/office/mac/drawingml/2011/main" val="0"/>
+            </a:ext>
+          </a:extLst>
+        </p:spPr>
+        <p:txBody>
+          <a:bodyPr/>
+          <a:lstStyle>
+            <a:lvl1pPr>
+              <a:defRPr sz="1000">
+                <a:solidFill>
+                  <a:srgbClr val="556B82"/>
+                </a:solidFill>
+              </a:defRPr>
+            </a:lvl1pPr>
+          </a:lstStyle>
+          <a:p>
+            <a:pPr algn="r"/>
+            <a:fld id="{F7021451-1387-4CA6-816F-3879F97B5CBC}" type="slidenum">
+              <a:rPr b="0" lang="en-US"/>
+              <a:t>19</a:t>
+            </a:fld>
+            <a:endParaRPr lang="en-US"/>
+          </a:p>
+        </p:txBody>
+      </p:sp>
+    </p:spTree>
+  </p:cSld>
+  <p:clrMapOvr>
+    <a:masterClrMapping/>
+  </p:clrMapOvr>
+</p:sld>
+</file>
+
+<file path=ppt/slides/slide22.xml><?xml version="1.0" encoding="utf-8"?>
+<p:sld xmlns:a="http://schemas.openxmlformats.org/drawingml/2006/main" xmlns:p="http://schemas.openxmlformats.org/presentationml/2006/main" xmlns:r="http://schemas.openxmlformats.org/officeDocument/2006/relationships">
+  <p:cSld name="Slide 1">
+    <p:spTree>
+      <p:nvGrpSpPr>
+        <p:cNvPr id="1" name=""/>
+        <p:cNvGrpSpPr/>
+        <p:nvPr/>
+      </p:nvGrpSpPr>
+      <p:grpSpPr>
+        <a:xfrm>
+          <a:off x="0" y="0"/>
+          <a:ext cx="0" cy="0"/>
+          <a:chOff x="0" y="0"/>
+          <a:chExt cx="0" cy="0"/>
+        </a:xfrm>
+      </p:grpSpPr>
+      <p:sp>
+        <p:nvSpPr>
+          <p:cNvPr id="2" name="Text 0"/>
+          <p:cNvSpPr/>
+          <p:nvPr>
+            <p:ph idx="100" type="body" hasCustomPrompt="1"/>
+          </p:nvPr>
+        </p:nvSpPr>
+        <p:spPr>
+          <a:xfrm>
+            <a:off x="731520" y="1417320"/>
+            <a:ext cx="5486400" cy="411480"/>
+          </a:xfrm>
+          <a:prstGeom prst="rect">
+            <a:avLst/>
+          </a:prstGeom>
+          <a:noFill/>
+          <a:ln/>
+        </p:spPr>
+        <p:txBody>
+          <a:bodyPr wrap="square" lIns="0" tIns="0" rIns="0" bIns="0" rtlCol="0" anchor="ctr"/>
+          <a:lstStyle/>
+          <a:p>
+            <a:pPr algn="l" indent="0" marL="0">
+              <a:buNone/>
+            </a:pPr>
+            <a:r>
+              <a:rPr lang="en-US" sz="1400" b="1" spc="200" kern="0" dirty="0">
+                <a:solidFill>
+                  <a:srgbClr val="89D1FF"/>
+                </a:solidFill>
+              </a:rPr>
+              <a:t>ETAPA 6 · ESTOQUE</a:t>
+            </a:r>
+            <a:endParaRPr lang="en-US" sz="1400" dirty="0"/>
+          </a:p>
+        </p:txBody>
+      </p:sp>
+      <p:sp>
+        <p:nvSpPr>
+          <p:cNvPr id="3" name="Text 0"/>
+          <p:cNvSpPr/>
+          <p:nvPr>
+            <p:ph idx="101" type="title" hasCustomPrompt="1"/>
+          </p:nvPr>
+        </p:nvSpPr>
+        <p:spPr>
+          <a:xfrm>
+            <a:off x="731520" y="1965960"/>
+            <a:ext cx="6766560" cy="1737360"/>
+          </a:xfrm>
+          <a:prstGeom prst="rect">
+            <a:avLst/>
+          </a:prstGeom>
+          <a:noFill/>
+          <a:ln/>
+        </p:spPr>
+        <p:txBody>
+          <a:bodyPr wrap="square" lIns="0" tIns="0" rIns="0" bIns="0" rtlCol="0" anchor="t"/>
+          <a:lstStyle/>
+          <a:p>
+            <a:pPr algn="l" indent="0" marL="0">
+              <a:buNone/>
+            </a:pPr>
+            <a:r>
+              <a:rPr lang="en-US" sz="4400" b="1" dirty="0">
+                <a:solidFill>
+                  <a:schemeClr val="bg1"/>
+                </a:solidFill>
+              </a:rPr>
+              <a:t>BO Estoque</a:t>
+            </a:r>
+            <a:endParaRPr lang="en-US" sz="4400" dirty="0"/>
+          </a:p>
+        </p:txBody>
+      </p:sp>
+      <p:sp>
+        <p:nvSpPr>
+          <p:cNvPr id="4" name="Text 0"/>
+          <p:cNvSpPr/>
+          <p:nvPr>
+            <p:ph idx="102" type="body" hasCustomPrompt="1"/>
+          </p:nvPr>
+        </p:nvSpPr>
+        <p:spPr>
+          <a:xfrm>
+            <a:off x="731520" y="3840480"/>
+            <a:ext cx="6400800" cy="1097280"/>
+          </a:xfrm>
+          <a:prstGeom prst="rect">
+            <a:avLst/>
+          </a:prstGeom>
+          <a:noFill/>
+          <a:ln/>
+        </p:spPr>
+        <p:txBody>
+          <a:bodyPr wrap="square" lIns="0" tIns="0" rIns="0" bIns="0" rtlCol="0" anchor="t"/>
+          <a:lstStyle/>
+          <a:p>
+            <a:pPr algn="l" indent="0" marL="0">
+              <a:buNone/>
+            </a:pPr>
+            <a:r>
+              <a:rPr lang="en-US" sz="1800" dirty="0">
+                <a:solidFill>
+                  <a:srgbClr val="D1EFFF"/>
+                </a:solidFill>
+              </a:rPr>
+              <a:t>estoque.test: SKU, saldo e status, reservas preservadas na edição, inativação e exclusão.</a:t>
+            </a:r>
+            <a:endParaRPr lang="en-US" sz="1800" dirty="0"/>
+          </a:p>
+        </p:txBody>
+      </p:sp>
+      <p:sp>
+        <p:nvSpPr>
+          <p:cNvPr id="5" name="Avatar da etapa"/>
+          <p:cNvSpPr/>
+          <p:nvPr/>
+        </p:nvSpPr>
+        <p:spPr>
+          <a:xfrm>
+            <a:off x="8183880" y="1417320"/>
+            <a:ext cx="3291840" cy="3291840"/>
+          </a:xfrm>
+          <a:prstGeom prst="roundRect">
+            <a:avLst>
+              <a:gd name="adj" fmla="val 22222"/>
+            </a:avLst>
+          </a:prstGeom>
+          <a:solidFill>
+            <a:srgbClr val="1B3A7A"/>
+          </a:solidFill>
+          <a:ln/>
+        </p:spPr>
+      </p:sp>
+      <p:sp>
+        <p:nvSpPr>
+          <p:cNvPr id="6" name="Avatar interno"/>
+          <p:cNvSpPr/>
+          <p:nvPr/>
+        </p:nvSpPr>
+        <p:spPr>
+          <a:xfrm>
+            <a:off x="8732520" y="1965960"/>
+            <a:ext cx="2194560" cy="2194560"/>
+          </a:xfrm>
+          <a:prstGeom prst="roundRect">
+            <a:avLst>
+              <a:gd name="adj" fmla="val 22917"/>
+            </a:avLst>
+          </a:prstGeom>
+          <a:solidFill>
+            <a:schemeClr val="accent1"/>
+          </a:solidFill>
+          <a:ln/>
+        </p:spPr>
+      </p:sp>
+      <p:pic>
+        <p:nvPicPr>
+          <p:cNvPr id="7" name="Image 0" descr="Estoque">    </p:cNvPr>
+          <p:cNvPicPr>
+            <a:picLocks noChangeAspect="1"/>
+          </p:cNvPicPr>
+          <p:nvPr/>
+        </p:nvPicPr>
+        <p:blipFill>
+          <a:blip r:embed="rId2"/>
+          <a:stretch>
+            <a:fillRect/>
+          </a:stretch>
+        </p:blipFill>
+        <p:spPr>
+          <a:xfrm>
+            <a:off x="9281160" y="2514600"/>
+            <a:ext cx="1097280" cy="1097280"/>
+          </a:xfrm>
+          <a:prstGeom prst="rect">
+            <a:avLst/>
+          </a:prstGeom>
+        </p:spPr>
+      </p:pic>
+      <p:sp>
+        <p:nvSpPr>
+          <p:cNvPr id="8" name="Etapa 1"/>
+          <p:cNvSpPr/>
+          <p:nvPr/>
+        </p:nvSpPr>
+        <p:spPr>
+          <a:xfrm>
+            <a:off x="8183880" y="5074920"/>
+            <a:ext cx="548640" cy="109728"/>
+          </a:xfrm>
+          <a:prstGeom prst="roundRect">
+            <a:avLst>
+              <a:gd name="adj" fmla="val 50000"/>
+            </a:avLst>
+          </a:prstGeom>
+          <a:solidFill>
+            <a:srgbClr val="1B3A7A"/>
+          </a:solidFill>
+          <a:ln/>
+        </p:spPr>
+      </p:sp>
+      <p:sp>
+        <p:nvSpPr>
+          <p:cNvPr id="9" name="Etapa 2"/>
+          <p:cNvSpPr/>
+          <p:nvPr/>
+        </p:nvSpPr>
+        <p:spPr>
+          <a:xfrm>
+            <a:off x="8842248" y="5074920"/>
+            <a:ext cx="548640" cy="109728"/>
+          </a:xfrm>
+          <a:prstGeom prst="roundRect">
+            <a:avLst>
+              <a:gd name="adj" fmla="val 50000"/>
+            </a:avLst>
+          </a:prstGeom>
+          <a:solidFill>
+            <a:srgbClr val="1B3A7A"/>
+          </a:solidFill>
+          <a:ln/>
+        </p:spPr>
+      </p:sp>
+      <p:sp>
+        <p:nvSpPr>
+          <p:cNvPr id="10" name="Etapa 3"/>
+          <p:cNvSpPr/>
+          <p:nvPr/>
+        </p:nvSpPr>
+        <p:spPr>
+          <a:xfrm>
+            <a:off x="9500616" y="5074920"/>
+            <a:ext cx="548640" cy="109728"/>
+          </a:xfrm>
+          <a:prstGeom prst="roundRect">
+            <a:avLst>
+              <a:gd name="adj" fmla="val 50000"/>
+            </a:avLst>
+          </a:prstGeom>
+          <a:solidFill>
+            <a:srgbClr val="89D1FF"/>
+          </a:solidFill>
+          <a:ln/>
+        </p:spPr>
+      </p:sp>
+      <p:sp>
+        <p:nvSpPr>
+          <p:cNvPr id="11" name="Etapa 4"/>
+          <p:cNvSpPr/>
+          <p:nvPr/>
+        </p:nvSpPr>
+        <p:spPr>
+          <a:xfrm>
+            <a:off x="10158984" y="5074920"/>
+            <a:ext cx="548640" cy="109728"/>
+          </a:xfrm>
+          <a:prstGeom prst="roundRect">
+            <a:avLst>
+              <a:gd name="adj" fmla="val 50000"/>
+            </a:avLst>
+          </a:prstGeom>
+          <a:solidFill>
+            <a:srgbClr val="1B3A7A"/>
+          </a:solidFill>
+          <a:ln/>
+        </p:spPr>
+      </p:sp>
+      <p:sp>
+        <p:nvSpPr>
+          <p:cNvPr id="12" name="Etapa 5"/>
+          <p:cNvSpPr/>
+          <p:nvPr/>
+        </p:nvSpPr>
+        <p:spPr>
+          <a:xfrm>
+            <a:off x="10817352" y="5074920"/>
+            <a:ext cx="548640" cy="109728"/>
+          </a:xfrm>
+          <a:prstGeom prst="roundRect">
+            <a:avLst>
+              <a:gd name="adj" fmla="val 50000"/>
+            </a:avLst>
+          </a:prstGeom>
+          <a:solidFill>
+            <a:srgbClr val="1B3A7A"/>
+          </a:solidFill>
+          <a:ln/>
+        </p:spPr>
+      </p:sp>
+      <p:sp>
+        <p:nvSpPr>
+          <p:cNvPr id="13" name="Text 10"/>
+          <p:cNvSpPr txBox="1"/>
+          <p:nvPr/>
+        </p:nvSpPr>
+        <p:spPr>
+          <a:xfrm>
+            <a:off x="8183880" y="5303520"/>
+            <a:ext cx="3291840" cy="274320"/>
+          </a:xfrm>
+          <a:prstGeom prst="rect">
+            <a:avLst/>
+          </a:prstGeom>
+          <a:noFill/>
+          <a:ln/>
+        </p:spPr>
+        <p:txBody>
+          <a:bodyPr wrap="square" lIns="0" tIns="0" rIns="0" bIns="0" rtlCol="0" anchor="ctr"/>
+          <a:lstStyle/>
+          <a:p>
+            <a:pPr indent="0" marL="0">
+              <a:buNone/>
+            </a:pPr>
+            <a:r>
+              <a:rPr lang="en-US" sz="1200" dirty="0">
+                <a:solidFill>
+                  <a:srgbClr val="89D1FF"/>
+                </a:solidFill>
+              </a:rPr>
+              <a:t>BO 3 de 5</a:t>
+            </a:r>
+            <a:endParaRPr lang="en-US" sz="1200" dirty="0"/>
+          </a:p>
+        </p:txBody>
+      </p:sp>
+    </p:spTree>
+  </p:cSld>
+  <p:clrMapOvr>
+    <a:masterClrMapping/>
+  </p:clrMapOvr>
+</p:sld>
+</file>
+
+<file path=ppt/slides/slide23.xml><?xml version="1.0" encoding="utf-8"?>
+<p:sld xmlns:a="http://schemas.openxmlformats.org/drawingml/2006/main" xmlns:p="http://schemas.openxmlformats.org/presentationml/2006/main" xmlns:r="http://schemas.openxmlformats.org/officeDocument/2006/relationships">
+  <p:cSld name="Slide 15">
+    <p:spTree>
+      <p:nvGrpSpPr>
+        <p:cNvPr id="1" name=""/>
+        <p:cNvGrpSpPr/>
+        <p:nvPr/>
+      </p:nvGrpSpPr>
+      <p:grpSpPr>
+        <a:xfrm>
+          <a:off x="0" y="0"/>
+          <a:ext cx="0" cy="0"/>
+          <a:chOff x="0" y="0"/>
+          <a:chExt cx="0" cy="0"/>
+        </a:xfrm>
+      </p:grpSpPr>
+      <p:sp>
+        <p:nvSpPr>
+          <p:cNvPr id="2" name="Text 0"/>
+          <p:cNvSpPr/>
+          <p:nvPr>
+            <p:ph idx="100" type="body" hasCustomPrompt="1"/>
+          </p:nvPr>
+        </p:nvSpPr>
+        <p:spPr>
+          <a:xfrm>
+            <a:off x="548640" y="292608"/>
+            <a:ext cx="9144000" cy="292608"/>
+          </a:xfrm>
+          <a:prstGeom prst="rect">
+            <a:avLst/>
+          </a:prstGeom>
+          <a:noFill/>
+          <a:ln/>
+        </p:spPr>
+        <p:txBody>
+          <a:bodyPr wrap="square" lIns="0" tIns="0" rIns="0" bIns="0" rtlCol="0" anchor="ctr"/>
+          <a:lstStyle/>
+          <a:p>
+            <a:pPr algn="l" indent="0" marL="0">
+              <a:buNone/>
+            </a:pPr>
+            <a:r>
+              <a:rPr lang="en-US" sz="1200" b="1" spc="150" kern="0" dirty="0">
+                <a:solidFill>
+                  <a:schemeClr val="accent1"/>
+                </a:solidFill>
+              </a:rPr>
+              <a:t>ESTOQUE · TESTES</a:t>
+            </a:r>
+            <a:endParaRPr lang="en-US" sz="1200" dirty="0"/>
+          </a:p>
+        </p:txBody>
+      </p:sp>
+      <p:sp>
+        <p:nvSpPr>
+          <p:cNvPr id="3" name="Text 0"/>
+          <p:cNvSpPr/>
+          <p:nvPr>
+            <p:ph idx="101" type="title" hasCustomPrompt="1"/>
+          </p:nvPr>
+        </p:nvSpPr>
+        <p:spPr>
+          <a:xfrm>
+            <a:off x="548640" y="603504"/>
+            <a:ext cx="11064240" cy="685800"/>
+          </a:xfrm>
+          <a:prstGeom prst="rect">
+            <a:avLst/>
+          </a:prstGeom>
+          <a:noFill/>
+          <a:ln/>
+        </p:spPr>
+        <p:txBody>
+          <a:bodyPr wrap="square" lIns="0" tIns="0" rIns="0" bIns="0" rtlCol="0" anchor="ctr"/>
+          <a:lstStyle/>
+          <a:p>
+            <a:pPr algn="l" indent="0" marL="0">
+              <a:buNone/>
+            </a:pPr>
+            <a:r>
+              <a:rPr lang="en-US" sz="3200" b="1" dirty="0">
+                <a:solidFill>
+                  <a:schemeClr val="tx1"/>
+                </a:solidFill>
+              </a:rPr>
+              <a:t>estoque.test: 10 testes do BO</a:t>
+            </a:r>
+            <a:endParaRPr lang="en-US" sz="3200" dirty="0"/>
+          </a:p>
+        </p:txBody>
+      </p:sp>
+      <p:sp>
+        <p:nvSpPr>
+          <p:cNvPr id="5" name="Cartão"/>
+          <p:cNvSpPr/>
+          <p:nvPr/>
+        </p:nvSpPr>
+        <p:spPr>
+          <a:xfrm>
+            <a:off x="548640" y="1554480"/>
+            <a:ext cx="5440680" cy="4526280"/>
+          </a:xfrm>
+          <a:prstGeom prst="roundRect">
+            <a:avLst>
+              <a:gd name="adj" fmla="val 2424"/>
+            </a:avLst>
+          </a:prstGeom>
+          <a:solidFill>
+            <a:schemeClr val="bg1"/>
+          </a:solidFill>
+          <a:ln w="9525">
+            <a:solidFill>
+              <a:srgbClr val="E5E5E5"/>
+            </a:solidFill>
+            <a:prstDash val="solid"/>
+          </a:ln>
+          <a:effectLst>
+            <a:outerShdw sx="100000" sy="100000" kx="0" ky="0" algn="bl" rotWithShape="0" blurRad="101600" dist="25400" dir="5400000">
+              <a:srgbClr val="223649">
+                <a:alpha val="14000"/>
+              </a:srgbClr>
+            </a:outerShdw>
+          </a:effectLst>
+        </p:spPr>
+      </p:sp>
+      <p:sp>
+        <p:nvSpPr>
+          <p:cNvPr id="6" name="Text 3"/>
+          <p:cNvSpPr txBox="1"/>
+          <p:nvPr/>
+        </p:nvSpPr>
+        <p:spPr>
+          <a:xfrm>
+            <a:off x="822960" y="1783080"/>
+            <a:ext cx="4937760" cy="4114800"/>
+          </a:xfrm>
+          <a:prstGeom prst="rect">
+            <a:avLst/>
+          </a:prstGeom>
+          <a:noFill/>
+          <a:ln/>
+        </p:spPr>
+        <p:txBody>
+          <a:bodyPr wrap="square" lIns="0" tIns="0" rIns="0" bIns="0" rtlCol="0" anchor="t"/>
+          <a:lstStyle/>
+          <a:p>
+            <a:pPr marL="342900" indent="-342900">
+              <a:spcAft>
+                <a:spcPts val="1200"/>
+              </a:spcAft>
+              <a:buSzPct val="100000"/>
+              <a:buChar char="•"/>
+            </a:pPr>
+            <a:r>
+              <a:rPr lang="en-US" sz="1400" dirty="0">
+                <a:solidFill>
+                  <a:schemeClr val="tx1"/>
+                </a:solidFill>
+              </a:rPr>
+              <a:t>gera SKU no Save com as 3 primeiras letras da categoria</a:t>
+            </a:r>
+            <a:endParaRPr lang="en-US" sz="1400" dirty="0"/>
+          </a:p>
+          <a:p>
+            <a:pPr marL="342900" indent="-342900">
+              <a:spcAft>
+                <a:spcPts val="1200"/>
+              </a:spcAft>
+              <a:buSzPct val="100000"/>
+              <a:buChar char="•"/>
+            </a:pPr>
+            <a:r>
+              <a:rPr lang="en-US" sz="1400" dirty="0">
+                <a:solidFill>
+                  <a:schemeClr val="tx1"/>
+                </a:solidFill>
+              </a:rPr>
+              <a:t>regenera o SKU quando a categoria muda e mantém quando não muda</a:t>
+            </a:r>
+            <a:endParaRPr lang="en-US" sz="1400" dirty="0"/>
+          </a:p>
+          <a:p>
+            <a:pPr marL="342900" indent="-342900">
+              <a:spcAft>
+                <a:spcPts val="1200"/>
+              </a:spcAft>
+              <a:buSzPct val="100000"/>
+              <a:buChar char="•"/>
+            </a:pPr>
+            <a:r>
+              <a:rPr lang="en-US" sz="1400" dirty="0">
+                <a:solidFill>
+                  <a:schemeClr val="tx1"/>
+                </a:solidFill>
+              </a:rPr>
+              <a:t>disponível = estoque - reservada e status SEM_ESTOQUE / ACABANDO / EM_ESTOQUE</a:t>
+            </a:r>
+            <a:endParaRPr lang="en-US" sz="1400" dirty="0"/>
+          </a:p>
+          <a:p>
+            <a:pPr marL="342900" indent="-342900">
+              <a:spcAft>
+                <a:spcPts val="1200"/>
+              </a:spcAft>
+              <a:buSzPct val="100000"/>
+              <a:buChar char="•"/>
+            </a:pPr>
+            <a:r>
+              <a:rPr lang="en-US" sz="1400" dirty="0">
+                <a:solidFill>
+                  <a:schemeClr val="tx1"/>
+                </a:solidFill>
+              </a:rPr>
+              <a:t>preço negativo e estoque menor que a reserva são rejeitados</a:t>
+            </a:r>
+            <a:endParaRPr lang="en-US" sz="1400" dirty="0"/>
+          </a:p>
+          <a:p>
+            <a:pPr marL="342900" indent="-342900">
+              <a:spcAft>
+                <a:spcPts val="1200"/>
+              </a:spcAft>
+              <a:buSzPct val="100000"/>
+              <a:buChar char="•"/>
+            </a:pPr>
+            <a:r>
+              <a:rPr lang="en-US" sz="1400" dirty="0">
+                <a:solidFill>
+                  <a:schemeClr val="tx1"/>
+                </a:solidFill>
+              </a:rPr>
+              <a:t>salvar a edição do item não sobrescreve reservas feitas no meio tempo</a:t>
+            </a:r>
+            <a:endParaRPr lang="en-US" sz="1400" dirty="0"/>
+          </a:p>
+        </p:txBody>
+      </p:sp>
+      <p:sp>
+        <p:nvSpPr>
+          <p:cNvPr id="7" name="Cartão"/>
+          <p:cNvSpPr/>
+          <p:nvPr/>
+        </p:nvSpPr>
+        <p:spPr>
+          <a:xfrm>
+            <a:off x="6199632" y="1554480"/>
+            <a:ext cx="5440680" cy="4526280"/>
+          </a:xfrm>
+          <a:prstGeom prst="roundRect">
+            <a:avLst>
+              <a:gd name="adj" fmla="val 2424"/>
+            </a:avLst>
+          </a:prstGeom>
+          <a:solidFill>
+            <a:schemeClr val="bg1"/>
+          </a:solidFill>
+          <a:ln w="9525">
+            <a:solidFill>
+              <a:srgbClr val="E5E5E5"/>
+            </a:solidFill>
+            <a:prstDash val="solid"/>
+          </a:ln>
+          <a:effectLst>
+            <a:outerShdw sx="100000" sy="100000" kx="0" ky="0" algn="bl" rotWithShape="0" blurRad="101600" dist="25400" dir="5400000">
+              <a:srgbClr val="223649">
+                <a:alpha val="14000"/>
+              </a:srgbClr>
+            </a:outerShdw>
+          </a:effectLst>
+        </p:spPr>
+      </p:sp>
+      <p:sp>
+        <p:nvSpPr>
+          <p:cNvPr id="8" name="Text 5"/>
+          <p:cNvSpPr txBox="1"/>
+          <p:nvPr/>
+        </p:nvSpPr>
+        <p:spPr>
+          <a:xfrm>
+            <a:off x="6473952" y="1783080"/>
+            <a:ext cx="4937760" cy="4114800"/>
+          </a:xfrm>
+          <a:prstGeom prst="rect">
+            <a:avLst/>
+          </a:prstGeom>
+          <a:noFill/>
+          <a:ln/>
+        </p:spPr>
+        <p:txBody>
+          <a:bodyPr wrap="square" lIns="0" tIns="0" rIns="0" bIns="0" rtlCol="0" anchor="t"/>
+          <a:lstStyle/>
+          <a:p>
+            <a:pPr marL="342900" indent="-342900">
+              <a:spcAft>
+                <a:spcPts val="1200"/>
+              </a:spcAft>
+              <a:buSzPct val="100000"/>
+              <a:buChar char="•"/>
+            </a:pPr>
+            <a:r>
+              <a:rPr lang="en-US" sz="1400" dirty="0">
+                <a:solidFill>
+                  <a:schemeClr val="tx1"/>
+                </a:solidFill>
+              </a:rPr>
+              <a:t>inativação bloqueada com estoque disponível; permitida sem estoque e sem pedido</a:t>
+            </a:r>
+            <a:endParaRPr lang="en-US" sz="1400" dirty="0"/>
+          </a:p>
+          <a:p>
+            <a:pPr marL="342900" indent="-342900">
+              <a:spcAft>
+                <a:spcPts val="1200"/>
+              </a:spcAft>
+              <a:buSzPct val="100000"/>
+              <a:buChar char="•"/>
+            </a:pPr>
+            <a:r>
+              <a:rPr lang="en-US" sz="1400" dirty="0">
+                <a:solidFill>
+                  <a:schemeClr val="tx1"/>
+                </a:solidFill>
+              </a:rPr>
+              <a:t>exclusão bloqueada para item vinculado a pedido; item livre é excluído</a:t>
+            </a:r>
+            <a:endParaRPr lang="en-US" sz="1400" dirty="0"/>
+          </a:p>
+          <a:p>
+            <a:pPr marL="342900" indent="-342900">
+              <a:spcAft>
+                <a:spcPts val="1200"/>
+              </a:spcAft>
+              <a:buSzPct val="100000"/>
+              <a:buChar char="•"/>
+            </a:pPr>
+            <a:r>
+              <a:rPr lang="en-US" sz="1400" dirty="0">
+                <a:solidFill>
+                  <a:schemeClr val="tx1"/>
+                </a:solidFill>
+              </a:rPr>
+              <a:t>usuário comum consulta, mas não mantém itens</a:t>
+            </a:r>
+            <a:endParaRPr lang="en-US" sz="1400" dirty="0"/>
+          </a:p>
+          <a:p>
+            <a:pPr marL="342900" indent="-342900">
+              <a:spcAft>
+                <a:spcPts val="1200"/>
+              </a:spcAft>
+              <a:buSzPct val="100000"/>
+              <a:buChar char="•"/>
+            </a:pPr>
+            <a:r>
+              <a:rPr lang="en-US" sz="1400" dirty="0">
+                <a:solidFill>
+                  <a:schemeClr val="tx1"/>
+                </a:solidFill>
+              </a:rPr>
+              <a:t>a UI só oferece alteração ao Admin: Permissoes.somenteLeitura</a:t>
+            </a:r>
+            <a:endParaRPr lang="en-US" sz="1400" dirty="0"/>
+          </a:p>
+          <a:p>
+            <a:pPr marL="342900" indent="-342900">
+              <a:spcAft>
+                <a:spcPts val="1200"/>
+              </a:spcAft>
+              <a:buSzPct val="100000"/>
+              <a:buChar char="•"/>
+            </a:pPr>
+            <a:r>
+              <a:rPr lang="en-US" sz="1400" dirty="0">
+                <a:solidFill>
+                  <a:schemeClr val="tx1"/>
+                </a:solidFill>
+              </a:rPr>
+              <a:t>foto enviada no rascunho é gravada e exibida depois do Save</a:t>
+            </a:r>
+            <a:endParaRPr lang="en-US" sz="1400" dirty="0"/>
+          </a:p>
+        </p:txBody>
+      </p:sp>
+      <p:sp>
+        <p:nvSpPr>
+          <p:cNvPr id="25" name="Slide Number Placeholder 0"/>
+          <p:cNvSpPr>
+            <a:spLocks noGrp="1"/>
+          </p:cNvSpPr>
+          <p:nvPr>
+            <p:ph type="sldNum" sz="quarter" idx="4294967295"/>
+          </p:nvPr>
+        </p:nvSpPr>
+        <p:spPr>
+          <a:xfrm>
+            <a:off x="11155680" y="6419088"/>
+            <a:ext cx="484632" cy="274320"/>
+          </a:xfrm>
+          <a:prstGeom prst="rect">
+            <a:avLst/>
+          </a:prstGeom>
+          <a:extLst>
+            <a:ext uri="{C572A759-6A51-4108-AA02-DFA0A04FC94B}">
+              <ma14:wrappingTextBoxFlag xmlns:ma14="http://schemas.microsoft.com/office/mac/drawingml/2011/main" val="0"/>
+            </a:ext>
+          </a:extLst>
+        </p:spPr>
+        <p:txBody>
+          <a:bodyPr/>
+          <a:lstStyle>
+            <a:lvl1pPr>
+              <a:defRPr sz="1000">
+                <a:solidFill>
+                  <a:srgbClr val="556B82"/>
+                </a:solidFill>
+              </a:defRPr>
+            </a:lvl1pPr>
+          </a:lstStyle>
+          <a:p>
+            <a:pPr algn="r"/>
+            <a:fld id="{F7021451-1387-4CA6-816F-3879F97B5CBC}" type="slidenum">
+              <a:rPr b="0" lang="en-US"/>
+              <a:t>15</a:t>
+            </a:fld>
+            <a:endParaRPr lang="en-US"/>
+          </a:p>
+        </p:txBody>
+      </p:sp>
+    </p:spTree>
+  </p:cSld>
+  <p:clrMapOvr>
+    <a:masterClrMapping/>
+  </p:clrMapOvr>
+</p:sld>
+</file>
+
+<file path=ppt/slides/slide24.xml><?xml version="1.0" encoding="utf-8"?>
+<p:sld xmlns:a="http://schemas.openxmlformats.org/drawingml/2006/main" xmlns:p="http://schemas.openxmlformats.org/presentationml/2006/main" xmlns:r="http://schemas.openxmlformats.org/officeDocument/2006/relationships">
+  <p:cSld name="Slide 1">
+    <p:spTree>
+      <p:nvGrpSpPr>
+        <p:cNvPr id="1" name=""/>
+        <p:cNvGrpSpPr/>
+        <p:nvPr/>
+      </p:nvGrpSpPr>
+      <p:grpSpPr>
+        <a:xfrm>
+          <a:off x="0" y="0"/>
+          <a:ext cx="0" cy="0"/>
+          <a:chOff x="0" y="0"/>
+          <a:chExt cx="0" cy="0"/>
+        </a:xfrm>
+      </p:grpSpPr>
+      <p:sp>
+        <p:nvSpPr>
+          <p:cNvPr id="2" name="Text 0"/>
+          <p:cNvSpPr/>
+          <p:nvPr>
+            <p:ph idx="100" type="body" hasCustomPrompt="1"/>
+          </p:nvPr>
+        </p:nvSpPr>
+        <p:spPr>
+          <a:xfrm>
+            <a:off x="731520" y="1417320"/>
+            <a:ext cx="5486400" cy="411480"/>
+          </a:xfrm>
+          <a:prstGeom prst="rect">
+            <a:avLst/>
+          </a:prstGeom>
+          <a:noFill/>
+          <a:ln/>
+        </p:spPr>
+        <p:txBody>
+          <a:bodyPr wrap="square" lIns="0" tIns="0" rIns="0" bIns="0" rtlCol="0" anchor="ctr"/>
+          <a:lstStyle/>
+          <a:p>
+            <a:pPr algn="l" indent="0" marL="0">
+              <a:buNone/>
+            </a:pPr>
+            <a:r>
+              <a:rPr lang="en-US" sz="1400" b="1" spc="200" kern="0" dirty="0">
+                <a:solidFill>
+                  <a:srgbClr val="89D1FF"/>
+                </a:solidFill>
+              </a:rPr>
+              <a:t>ETAPA 6 · PEDIDOS</a:t>
+            </a:r>
+            <a:endParaRPr lang="en-US" sz="1400" dirty="0"/>
+          </a:p>
+        </p:txBody>
+      </p:sp>
+      <p:sp>
+        <p:nvSpPr>
+          <p:cNvPr id="3" name="Text 0"/>
+          <p:cNvSpPr/>
+          <p:nvPr>
+            <p:ph idx="101" type="title" hasCustomPrompt="1"/>
+          </p:nvPr>
+        </p:nvSpPr>
+        <p:spPr>
+          <a:xfrm>
+            <a:off x="731520" y="1965960"/>
+            <a:ext cx="6766560" cy="1737360"/>
+          </a:xfrm>
+          <a:prstGeom prst="rect">
+            <a:avLst/>
+          </a:prstGeom>
+          <a:noFill/>
+          <a:ln/>
+        </p:spPr>
+        <p:txBody>
+          <a:bodyPr wrap="square" lIns="0" tIns="0" rIns="0" bIns="0" rtlCol="0" anchor="t"/>
+          <a:lstStyle/>
+          <a:p>
+            <a:pPr algn="l" indent="0" marL="0">
+              <a:buNone/>
+            </a:pPr>
+            <a:r>
+              <a:rPr lang="en-US" sz="4400" b="1" dirty="0">
+                <a:solidFill>
+                  <a:schemeClr val="bg1"/>
+                </a:solidFill>
+              </a:rPr>
+              <a:t>BO Pedidos</a:t>
+            </a:r>
+            <a:endParaRPr lang="en-US" sz="4400" dirty="0"/>
+          </a:p>
+        </p:txBody>
+      </p:sp>
+      <p:sp>
+        <p:nvSpPr>
+          <p:cNvPr id="4" name="Text 0"/>
+          <p:cNvSpPr/>
+          <p:nvPr>
+            <p:ph idx="102" type="body" hasCustomPrompt="1"/>
+          </p:nvPr>
+        </p:nvSpPr>
+        <p:spPr>
+          <a:xfrm>
+            <a:off x="731520" y="3840480"/>
+            <a:ext cx="6400800" cy="1097280"/>
+          </a:xfrm>
+          <a:prstGeom prst="rect">
+            <a:avLst/>
+          </a:prstGeom>
+          <a:noFill/>
+          <a:ln/>
+        </p:spPr>
+        <p:txBody>
+          <a:bodyPr wrap="square" lIns="0" tIns="0" rIns="0" bIns="0" rtlCol="0" anchor="t"/>
+          <a:lstStyle/>
+          <a:p>
+            <a:pPr algn="l" indent="0" marL="0">
+              <a:buNone/>
+            </a:pPr>
+            <a:r>
+              <a:rPr lang="en-US" sz="1800" dirty="0">
+                <a:solidFill>
+                  <a:srgbClr val="D1EFFF"/>
+                </a:solidFill>
+              </a:rPr>
+              <a:t>pedidos.test: do rascunho às actions do ciclo de vida, com reserva pela diferença e leitura desatualizada recusada.</a:t>
+            </a:r>
+            <a:endParaRPr lang="en-US" sz="1800" dirty="0"/>
+          </a:p>
+        </p:txBody>
+      </p:sp>
+      <p:sp>
+        <p:nvSpPr>
+          <p:cNvPr id="5" name="Avatar da etapa"/>
+          <p:cNvSpPr/>
+          <p:nvPr/>
+        </p:nvSpPr>
+        <p:spPr>
+          <a:xfrm>
+            <a:off x="8183880" y="1417320"/>
+            <a:ext cx="3291840" cy="3291840"/>
+          </a:xfrm>
+          <a:prstGeom prst="roundRect">
+            <a:avLst>
+              <a:gd name="adj" fmla="val 22222"/>
+            </a:avLst>
+          </a:prstGeom>
+          <a:solidFill>
+            <a:srgbClr val="1B3A7A"/>
+          </a:solidFill>
+          <a:ln/>
+        </p:spPr>
+      </p:sp>
+      <p:sp>
+        <p:nvSpPr>
+          <p:cNvPr id="6" name="Avatar interno"/>
+          <p:cNvSpPr/>
+          <p:nvPr/>
+        </p:nvSpPr>
+        <p:spPr>
+          <a:xfrm>
+            <a:off x="8732520" y="1965960"/>
+            <a:ext cx="2194560" cy="2194560"/>
+          </a:xfrm>
+          <a:prstGeom prst="roundRect">
+            <a:avLst>
+              <a:gd name="adj" fmla="val 22917"/>
+            </a:avLst>
+          </a:prstGeom>
+          <a:solidFill>
+            <a:schemeClr val="accent1"/>
+          </a:solidFill>
+          <a:ln/>
+        </p:spPr>
+      </p:sp>
+      <p:pic>
+        <p:nvPicPr>
+          <p:cNvPr id="7" name="Image 0" descr="Pedidos">    </p:cNvPr>
+          <p:cNvPicPr>
+            <a:picLocks noChangeAspect="1"/>
+          </p:cNvPicPr>
+          <p:nvPr/>
+        </p:nvPicPr>
+        <p:blipFill>
+          <a:blip r:embed="rId2"/>
+          <a:stretch>
+            <a:fillRect/>
+          </a:stretch>
+        </p:blipFill>
+        <p:spPr>
+          <a:xfrm>
+            <a:off x="9281160" y="2514600"/>
+            <a:ext cx="1097280" cy="1097280"/>
+          </a:xfrm>
+          <a:prstGeom prst="rect">
+            <a:avLst/>
+          </a:prstGeom>
+        </p:spPr>
+      </p:pic>
+      <p:sp>
+        <p:nvSpPr>
+          <p:cNvPr id="8" name="Etapa 1"/>
+          <p:cNvSpPr/>
+          <p:nvPr/>
+        </p:nvSpPr>
+        <p:spPr>
+          <a:xfrm>
+            <a:off x="8183880" y="5074920"/>
+            <a:ext cx="548640" cy="109728"/>
+          </a:xfrm>
+          <a:prstGeom prst="roundRect">
+            <a:avLst>
+              <a:gd name="adj" fmla="val 50000"/>
+            </a:avLst>
+          </a:prstGeom>
+          <a:solidFill>
+            <a:srgbClr val="1B3A7A"/>
+          </a:solidFill>
+          <a:ln/>
+        </p:spPr>
+      </p:sp>
+      <p:sp>
+        <p:nvSpPr>
+          <p:cNvPr id="9" name="Etapa 2"/>
+          <p:cNvSpPr/>
+          <p:nvPr/>
+        </p:nvSpPr>
+        <p:spPr>
+          <a:xfrm>
+            <a:off x="8842248" y="5074920"/>
+            <a:ext cx="548640" cy="109728"/>
+          </a:xfrm>
+          <a:prstGeom prst="roundRect">
+            <a:avLst>
+              <a:gd name="adj" fmla="val 50000"/>
+            </a:avLst>
+          </a:prstGeom>
+          <a:solidFill>
+            <a:srgbClr val="1B3A7A"/>
+          </a:solidFill>
+          <a:ln/>
+        </p:spPr>
+      </p:sp>
+      <p:sp>
+        <p:nvSpPr>
+          <p:cNvPr id="10" name="Etapa 3"/>
+          <p:cNvSpPr/>
+          <p:nvPr/>
+        </p:nvSpPr>
+        <p:spPr>
+          <a:xfrm>
+            <a:off x="9500616" y="5074920"/>
+            <a:ext cx="548640" cy="109728"/>
+          </a:xfrm>
+          <a:prstGeom prst="roundRect">
+            <a:avLst>
+              <a:gd name="adj" fmla="val 50000"/>
+            </a:avLst>
+          </a:prstGeom>
+          <a:solidFill>
+            <a:srgbClr val="1B3A7A"/>
+          </a:solidFill>
+          <a:ln/>
+        </p:spPr>
+      </p:sp>
+      <p:sp>
+        <p:nvSpPr>
+          <p:cNvPr id="11" name="Etapa 4"/>
+          <p:cNvSpPr/>
+          <p:nvPr/>
+        </p:nvSpPr>
+        <p:spPr>
+          <a:xfrm>
+            <a:off x="10158984" y="5074920"/>
+            <a:ext cx="548640" cy="109728"/>
+          </a:xfrm>
+          <a:prstGeom prst="roundRect">
+            <a:avLst>
+              <a:gd name="adj" fmla="val 50000"/>
+            </a:avLst>
+          </a:prstGeom>
+          <a:solidFill>
+            <a:srgbClr val="89D1FF"/>
+          </a:solidFill>
+          <a:ln/>
+        </p:spPr>
+      </p:sp>
+      <p:sp>
+        <p:nvSpPr>
+          <p:cNvPr id="12" name="Etapa 5"/>
+          <p:cNvSpPr/>
+          <p:nvPr/>
+        </p:nvSpPr>
+        <p:spPr>
+          <a:xfrm>
+            <a:off x="10817352" y="5074920"/>
+            <a:ext cx="548640" cy="109728"/>
+          </a:xfrm>
+          <a:prstGeom prst="roundRect">
+            <a:avLst>
+              <a:gd name="adj" fmla="val 50000"/>
+            </a:avLst>
+          </a:prstGeom>
+          <a:solidFill>
+            <a:srgbClr val="1B3A7A"/>
+          </a:solidFill>
+          <a:ln/>
+        </p:spPr>
+      </p:sp>
+      <p:sp>
+        <p:nvSpPr>
+          <p:cNvPr id="13" name="Text 10"/>
+          <p:cNvSpPr txBox="1"/>
+          <p:nvPr/>
+        </p:nvSpPr>
+        <p:spPr>
+          <a:xfrm>
+            <a:off x="8183880" y="5303520"/>
+            <a:ext cx="3291840" cy="274320"/>
+          </a:xfrm>
+          <a:prstGeom prst="rect">
+            <a:avLst/>
+          </a:prstGeom>
+          <a:noFill/>
+          <a:ln/>
+        </p:spPr>
+        <p:txBody>
+          <a:bodyPr wrap="square" lIns="0" tIns="0" rIns="0" bIns="0" rtlCol="0" anchor="ctr"/>
+          <a:lstStyle/>
+          <a:p>
+            <a:pPr indent="0" marL="0">
+              <a:buNone/>
+            </a:pPr>
+            <a:r>
+              <a:rPr lang="en-US" sz="1200" dirty="0">
+                <a:solidFill>
+                  <a:srgbClr val="89D1FF"/>
+                </a:solidFill>
+              </a:rPr>
+              <a:t>BO 4 de 5</a:t>
+            </a:r>
+            <a:endParaRPr lang="en-US" sz="1200" dirty="0"/>
+          </a:p>
+        </p:txBody>
+      </p:sp>
+    </p:spTree>
+  </p:cSld>
+  <p:clrMapOvr>
+    <a:masterClrMapping/>
+  </p:clrMapOvr>
+</p:sld>
+</file>
+
+<file path=ppt/slides/slide25.xml><?xml version="1.0" encoding="utf-8"?>
+<p:sld xmlns:a="http://schemas.openxmlformats.org/drawingml/2006/main" xmlns:p="http://schemas.openxmlformats.org/presentationml/2006/main" xmlns:r="http://schemas.openxmlformats.org/officeDocument/2006/relationships">
+  <p:cSld name="Slide 21">
+    <p:spTree>
+      <p:nvGrpSpPr>
+        <p:cNvPr id="1" name=""/>
+        <p:cNvGrpSpPr/>
+        <p:nvPr/>
+      </p:nvGrpSpPr>
+      <p:grpSpPr>
+        <a:xfrm>
+          <a:off x="0" y="0"/>
+          <a:ext cx="0" cy="0"/>
+          <a:chOff x="0" y="0"/>
+          <a:chExt cx="0" cy="0"/>
+        </a:xfrm>
+      </p:grpSpPr>
+      <p:sp>
+        <p:nvSpPr>
+          <p:cNvPr id="2" name="Text 0"/>
+          <p:cNvSpPr/>
+          <p:nvPr>
+            <p:ph idx="100" type="body" hasCustomPrompt="1"/>
+          </p:nvPr>
+        </p:nvSpPr>
+        <p:spPr>
+          <a:xfrm>
+            <a:off x="548640" y="292608"/>
+            <a:ext cx="9144000" cy="292608"/>
+          </a:xfrm>
+          <a:prstGeom prst="rect">
+            <a:avLst/>
+          </a:prstGeom>
+          <a:noFill/>
+          <a:ln/>
+        </p:spPr>
+        <p:txBody>
+          <a:bodyPr wrap="square" lIns="0" tIns="0" rIns="0" bIns="0" rtlCol="0" anchor="ctr"/>
+          <a:lstStyle/>
+          <a:p>
+            <a:pPr algn="l" indent="0" marL="0">
+              <a:buNone/>
+            </a:pPr>
+            <a:r>
+              <a:rPr lang="en-US" sz="1200" b="1" spc="150" kern="0" dirty="0">
+                <a:solidFill>
+                  <a:schemeClr val="accent1"/>
+                </a:solidFill>
+              </a:rPr>
+              <a:t>PEDIDOS · TESTES</a:t>
+            </a:r>
+            <a:endParaRPr lang="en-US" sz="1200" dirty="0"/>
+          </a:p>
+        </p:txBody>
+      </p:sp>
+      <p:sp>
+        <p:nvSpPr>
+          <p:cNvPr id="3" name="Text 0"/>
+          <p:cNvSpPr/>
+          <p:nvPr>
+            <p:ph idx="101" type="title" hasCustomPrompt="1"/>
+          </p:nvPr>
+        </p:nvSpPr>
+        <p:spPr>
+          <a:xfrm>
+            <a:off x="548640" y="603504"/>
+            <a:ext cx="11064240" cy="685800"/>
+          </a:xfrm>
+          <a:prstGeom prst="rect">
+            <a:avLst/>
+          </a:prstGeom>
+          <a:noFill/>
+          <a:ln/>
+        </p:spPr>
+        <p:txBody>
+          <a:bodyPr wrap="square" lIns="0" tIns="0" rIns="0" bIns="0" rtlCol="0" anchor="ctr"/>
+          <a:lstStyle/>
+          <a:p>
+            <a:pPr algn="l" indent="0" marL="0">
+              <a:buNone/>
+            </a:pPr>
+            <a:r>
+              <a:rPr lang="en-US" sz="3200" b="1" dirty="0">
+                <a:solidFill>
+                  <a:schemeClr val="tx1"/>
+                </a:solidFill>
+              </a:rPr>
+              <a:t>pedidos.test: 20 testes do BO</a:t>
+            </a:r>
+            <a:endParaRPr lang="en-US" sz="3200" dirty="0"/>
+          </a:p>
+        </p:txBody>
+      </p:sp>
+      <p:sp>
+        <p:nvSpPr>
+          <p:cNvPr id="5" name="Cartão"/>
+          <p:cNvSpPr/>
+          <p:nvPr/>
+        </p:nvSpPr>
+        <p:spPr>
+          <a:xfrm>
+            <a:off x="548640" y="1554480"/>
+            <a:ext cx="5440680" cy="4526280"/>
+          </a:xfrm>
+          <a:prstGeom prst="roundRect">
+            <a:avLst>
+              <a:gd name="adj" fmla="val 2424"/>
+            </a:avLst>
+          </a:prstGeom>
+          <a:solidFill>
+            <a:schemeClr val="bg1"/>
+          </a:solidFill>
+          <a:ln w="9525">
+            <a:solidFill>
+              <a:srgbClr val="E5E5E5"/>
+            </a:solidFill>
+            <a:prstDash val="solid"/>
+          </a:ln>
+          <a:effectLst>
+            <a:outerShdw sx="100000" sy="100000" kx="0" ky="0" algn="bl" rotWithShape="0" blurRad="101600" dist="25400" dir="5400000">
+              <a:srgbClr val="223649">
+                <a:alpha val="14000"/>
+              </a:srgbClr>
+            </a:outerShdw>
+          </a:effectLst>
+        </p:spPr>
+      </p:sp>
+      <p:sp>
+        <p:nvSpPr>
+          <p:cNvPr id="6" name="Text 3"/>
+          <p:cNvSpPr txBox="1"/>
+          <p:nvPr/>
+        </p:nvSpPr>
+        <p:spPr>
+          <a:xfrm>
+            <a:off x="822960" y="1691640"/>
+            <a:ext cx="4937760" cy="365760"/>
+          </a:xfrm>
+          <a:prstGeom prst="rect">
+            <a:avLst/>
+          </a:prstGeom>
+          <a:noFill/>
+          <a:ln/>
+        </p:spPr>
+        <p:txBody>
+          <a:bodyPr wrap="square" lIns="0" tIns="0" rIns="0" bIns="0" rtlCol="0" anchor="ctr"/>
+          <a:lstStyle/>
+          <a:p>
+            <a:pPr indent="0" marL="0">
+              <a:buNone/>
+            </a:pPr>
+            <a:r>
+              <a:rPr lang="en-US" sz="1500" b="1" dirty="0">
+                <a:solidFill>
+                  <a:schemeClr val="tx1"/>
+                </a:solidFill>
+              </a:rPr>
+              <a:t>registro e edição</a:t>
+            </a:r>
+            <a:endParaRPr lang="en-US" sz="1500" dirty="0"/>
+          </a:p>
+        </p:txBody>
+      </p:sp>
+      <p:sp>
+        <p:nvSpPr>
+          <p:cNvPr id="7" name="Text 4"/>
+          <p:cNvSpPr txBox="1"/>
+          <p:nvPr/>
+        </p:nvSpPr>
+        <p:spPr>
+          <a:xfrm>
+            <a:off x="822960" y="2148840"/>
+            <a:ext cx="4937760" cy="3794760"/>
+          </a:xfrm>
+          <a:prstGeom prst="rect">
+            <a:avLst/>
+          </a:prstGeom>
+          <a:noFill/>
+          <a:ln/>
+        </p:spPr>
+        <p:txBody>
+          <a:bodyPr wrap="square" lIns="0" tIns="0" rIns="0" bIns="0" rtlCol="0" anchor="t"/>
+          <a:lstStyle/>
+          <a:p>
+            <a:pPr marL="342900" indent="-342900">
+              <a:spcAft>
+                <a:spcPts val="600"/>
+              </a:spcAft>
+              <a:buSzPct val="100000"/>
+              <a:buChar char="•"/>
+            </a:pPr>
+            <a:r>
+              <a:rPr lang="en-US" sz="1300" dirty="0">
+                <a:solidFill>
+                  <a:schemeClr val="tx1"/>
+                </a:solidFill>
+              </a:rPr>
+              <a:t>rascunho não reserva estoque e calcula o total provisório</a:t>
+            </a:r>
+            <a:endParaRPr lang="en-US" sz="1300" dirty="0"/>
+          </a:p>
+          <a:p>
+            <a:pPr marL="342900" indent="-342900">
+              <a:spcAft>
+                <a:spcPts val="600"/>
+              </a:spcAft>
+              <a:buSzPct val="100000"/>
+              <a:buChar char="•"/>
+            </a:pPr>
+            <a:r>
+              <a:rPr lang="en-US" sz="1300" dirty="0">
+                <a:solidFill>
+                  <a:schemeClr val="tx1"/>
+                </a:solidFill>
+              </a:rPr>
+              <a:t>Salvar registra ABERTO, gera o número e reserva o estoque</a:t>
+            </a:r>
+            <a:endParaRPr lang="en-US" sz="1300" dirty="0"/>
+          </a:p>
+          <a:p>
+            <a:pPr marL="342900" indent="-342900">
+              <a:spcAft>
+                <a:spcPts val="600"/>
+              </a:spcAft>
+              <a:buSzPct val="100000"/>
+              <a:buChar char="•"/>
+            </a:pPr>
+            <a:r>
+              <a:rPr lang="en-US" sz="1300" dirty="0">
+                <a:solidFill>
+                  <a:schemeClr val="tx1"/>
+                </a:solidFill>
+              </a:rPr>
+              <a:t>estoque insuficiente bloqueia o Save e nada é reservado</a:t>
+            </a:r>
+            <a:endParaRPr lang="en-US" sz="1300" dirty="0"/>
+          </a:p>
+          <a:p>
+            <a:pPr marL="342900" indent="-342900">
+              <a:spcAft>
+                <a:spcPts val="600"/>
+              </a:spcAft>
+              <a:buSzPct val="100000"/>
+              <a:buChar char="•"/>
+            </a:pPr>
+            <a:r>
+              <a:rPr lang="en-US" sz="1300" dirty="0">
+                <a:solidFill>
+                  <a:schemeClr val="tx1"/>
+                </a:solidFill>
+              </a:rPr>
+              <a:t>pedido sem itens não é registrado</a:t>
+            </a:r>
+            <a:endParaRPr lang="en-US" sz="1300" dirty="0"/>
+          </a:p>
+          <a:p>
+            <a:pPr marL="342900" indent="-342900">
+              <a:spcAft>
+                <a:spcPts val="600"/>
+              </a:spcAft>
+              <a:buSzPct val="100000"/>
+              <a:buChar char="•"/>
+            </a:pPr>
+            <a:r>
+              <a:rPr lang="en-US" sz="1300" dirty="0">
+                <a:solidFill>
+                  <a:schemeClr val="tx1"/>
+                </a:solidFill>
+              </a:rPr>
+              <a:t>item sem estoque é barrado ao ser incluído no rascunho</a:t>
+            </a:r>
+            <a:endParaRPr lang="en-US" sz="1300" dirty="0"/>
+          </a:p>
+          <a:p>
+            <a:pPr marL="342900" indent="-342900">
+              <a:spcAft>
+                <a:spcPts val="600"/>
+              </a:spcAft>
+              <a:buSzPct val="100000"/>
+              <a:buChar char="•"/>
+            </a:pPr>
+            <a:r>
+              <a:rPr lang="en-US" sz="1300" dirty="0">
+                <a:solidFill>
+                  <a:schemeClr val="tx1"/>
+                </a:solidFill>
+              </a:rPr>
+              <a:t>o usuário comum também registra pedidos</a:t>
+            </a:r>
+            <a:endParaRPr lang="en-US" sz="1300" dirty="0"/>
+          </a:p>
+          <a:p>
+            <a:pPr marL="342900" indent="-342900">
+              <a:spcAft>
+                <a:spcPts val="600"/>
+              </a:spcAft>
+              <a:buSzPct val="100000"/>
+              <a:buChar char="•"/>
+            </a:pPr>
+            <a:r>
+              <a:rPr lang="en-US" sz="1300" dirty="0">
+                <a:solidFill>
+                  <a:schemeClr val="tx1"/>
+                </a:solidFill>
+              </a:rPr>
+              <a:t>aumentar, diminuir, incluir e remover itens: reserva pela diferença</a:t>
+            </a:r>
+            <a:endParaRPr lang="en-US" sz="1300" dirty="0"/>
+          </a:p>
+          <a:p>
+            <a:pPr marL="342900" indent="-342900">
+              <a:spcAft>
+                <a:spcPts val="600"/>
+              </a:spcAft>
+              <a:buSzPct val="100000"/>
+              <a:buChar char="•"/>
+            </a:pPr>
+            <a:r>
+              <a:rPr lang="en-US" sz="1300" dirty="0">
+                <a:solidFill>
+                  <a:schemeClr val="tx1"/>
+                </a:solidFill>
+              </a:rPr>
+              <a:t>aumento sem saldo bloqueia o Save</a:t>
+            </a:r>
+            <a:endParaRPr lang="en-US" sz="1300" dirty="0"/>
+          </a:p>
+          <a:p>
+            <a:pPr marL="342900" indent="-342900">
+              <a:spcAft>
+                <a:spcPts val="600"/>
+              </a:spcAft>
+              <a:buSzPct val="100000"/>
+              <a:buChar char="•"/>
+            </a:pPr>
+            <a:r>
+              <a:rPr lang="en-US" sz="1300" dirty="0">
+                <a:solidFill>
+                  <a:schemeClr val="tx1"/>
+                </a:solidFill>
+              </a:rPr>
+              <a:t>o cliente de um pedido registrado não pode ser trocado</a:t>
+            </a:r>
+            <a:endParaRPr lang="en-US" sz="1300" dirty="0"/>
+          </a:p>
+          <a:p>
+            <a:pPr marL="342900" indent="-342900">
+              <a:spcAft>
+                <a:spcPts val="600"/>
+              </a:spcAft>
+              <a:buSzPct val="100000"/>
+              <a:buChar char="•"/>
+            </a:pPr>
+            <a:r>
+              <a:rPr lang="en-US" sz="1300" dirty="0">
+                <a:solidFill>
+                  <a:schemeClr val="tx1"/>
+                </a:solidFill>
+              </a:rPr>
+              <a:t>só o ABERTO é editado; o registrado não é excluído</a:t>
+            </a:r>
+            <a:endParaRPr lang="en-US" sz="1300" dirty="0"/>
+          </a:p>
+        </p:txBody>
+      </p:sp>
+      <p:sp>
+        <p:nvSpPr>
+          <p:cNvPr id="8" name="Cartão"/>
+          <p:cNvSpPr/>
+          <p:nvPr/>
+        </p:nvSpPr>
+        <p:spPr>
+          <a:xfrm>
+            <a:off x="6199632" y="1554480"/>
+            <a:ext cx="5440680" cy="4526280"/>
+          </a:xfrm>
+          <a:prstGeom prst="roundRect">
+            <a:avLst>
+              <a:gd name="adj" fmla="val 2424"/>
+            </a:avLst>
+          </a:prstGeom>
+          <a:solidFill>
+            <a:schemeClr val="bg1"/>
+          </a:solidFill>
+          <a:ln w="9525">
+            <a:solidFill>
+              <a:srgbClr val="E5E5E5"/>
+            </a:solidFill>
+            <a:prstDash val="solid"/>
+          </a:ln>
+          <a:effectLst>
+            <a:outerShdw sx="100000" sy="100000" kx="0" ky="0" algn="bl" rotWithShape="0" blurRad="101600" dist="25400" dir="5400000">
+              <a:srgbClr val="223649">
+                <a:alpha val="14000"/>
+              </a:srgbClr>
+            </a:outerShdw>
+          </a:effectLst>
+        </p:spPr>
+      </p:sp>
+      <p:sp>
+        <p:nvSpPr>
+          <p:cNvPr id="9" name="Text 6"/>
+          <p:cNvSpPr txBox="1"/>
+          <p:nvPr/>
+        </p:nvSpPr>
+        <p:spPr>
+          <a:xfrm>
+            <a:off x="6473952" y="1691640"/>
+            <a:ext cx="4937760" cy="365760"/>
+          </a:xfrm>
+          <a:prstGeom prst="rect">
+            <a:avLst/>
+          </a:prstGeom>
+          <a:noFill/>
+          <a:ln/>
+        </p:spPr>
+        <p:txBody>
+          <a:bodyPr wrap="square" lIns="0" tIns="0" rIns="0" bIns="0" rtlCol="0" anchor="ctr"/>
+          <a:lstStyle/>
+          <a:p>
+            <a:pPr indent="0" marL="0">
+              <a:buNone/>
+            </a:pPr>
+            <a:r>
+              <a:rPr lang="en-US" sz="1500" b="1" dirty="0">
+                <a:solidFill>
+                  <a:schemeClr val="tx1"/>
+                </a:solidFill>
+              </a:rPr>
+              <a:t>ações e campos somente leitura</a:t>
+            </a:r>
+            <a:endParaRPr lang="en-US" sz="1500" dirty="0"/>
+          </a:p>
+        </p:txBody>
+      </p:sp>
+      <p:sp>
+        <p:nvSpPr>
+          <p:cNvPr id="10" name="Text 7"/>
+          <p:cNvSpPr txBox="1"/>
+          <p:nvPr/>
+        </p:nvSpPr>
+        <p:spPr>
+          <a:xfrm>
+            <a:off x="6473952" y="2148840"/>
+            <a:ext cx="4937760" cy="3794760"/>
+          </a:xfrm>
+          <a:prstGeom prst="rect">
+            <a:avLst/>
+          </a:prstGeom>
+          <a:noFill/>
+          <a:ln/>
+        </p:spPr>
+        <p:txBody>
+          <a:bodyPr wrap="square" lIns="0" tIns="0" rIns="0" bIns="0" rtlCol="0" anchor="t"/>
+          <a:lstStyle/>
+          <a:p>
+            <a:pPr marL="342900" indent="-342900">
+              <a:spcAft>
+                <a:spcPts val="600"/>
+              </a:spcAft>
+              <a:buSzPct val="100000"/>
+              <a:buChar char="•"/>
+            </a:pPr>
+            <a:r>
+              <a:rPr lang="en-US" sz="1300" dirty="0">
+                <a:solidFill>
+                  <a:schemeClr val="tx1"/>
+                </a:solidFill>
+              </a:rPr>
+              <a:t>recusado mantém ABERTO; aprovado leva a AGUARDANDO</a:t>
+            </a:r>
+            <a:endParaRPr lang="en-US" sz="1300" dirty="0"/>
+          </a:p>
+          <a:p>
+            <a:pPr marL="342900" indent="-342900">
+              <a:spcAft>
+                <a:spcPts val="600"/>
+              </a:spcAft>
+              <a:buSzPct val="100000"/>
+              <a:buChar char="•"/>
+            </a:pPr>
+            <a:r>
+              <a:rPr lang="en-US" sz="1300" dirty="0">
+                <a:solidFill>
+                  <a:schemeClr val="tx1"/>
+                </a:solidFill>
+              </a:rPr>
+              <a:t>dados de cartão inválidos são erro (não recusa)</a:t>
+            </a:r>
+            <a:endParaRPr lang="en-US" sz="1300" dirty="0"/>
+          </a:p>
+          <a:p>
+            <a:pPr marL="342900" indent="-342900">
+              <a:spcAft>
+                <a:spcPts val="600"/>
+              </a:spcAft>
+              <a:buSzPct val="100000"/>
+              <a:buChar char="•"/>
+            </a:pPr>
+            <a:r>
+              <a:rPr lang="en-US" sz="1300" dirty="0">
+                <a:solidFill>
+                  <a:schemeClr val="tx1"/>
+                </a:solidFill>
+              </a:rPr>
+              <a:t>aprovar exige pagamento aprovado; baixa e snapshots</a:t>
+            </a:r>
+            <a:endParaRPr lang="en-US" sz="1300" dirty="0"/>
+          </a:p>
+          <a:p>
+            <a:pPr marL="342900" indent="-342900">
+              <a:spcAft>
+                <a:spcPts val="600"/>
+              </a:spcAft>
+              <a:buSzPct val="100000"/>
+              <a:buChar char="•"/>
+            </a:pPr>
+            <a:r>
+              <a:rPr lang="en-US" sz="1300" dirty="0">
+                <a:solidFill>
+                  <a:schemeClr val="tx1"/>
+                </a:solidFill>
+              </a:rPr>
+              <a:t>cancelar sem pagamento libera a reserva e exige motivo</a:t>
+            </a:r>
+            <a:endParaRPr lang="en-US" sz="1300" dirty="0"/>
+          </a:p>
+          <a:p>
+            <a:pPr marL="342900" indent="-342900">
+              <a:spcAft>
+                <a:spcPts val="600"/>
+              </a:spcAft>
+              <a:buSzPct val="100000"/>
+              <a:buChar char="•"/>
+            </a:pPr>
+            <a:r>
+              <a:rPr lang="en-US" sz="1300" dirty="0">
+                <a:solidFill>
+                  <a:schemeClr val="tx1"/>
+                </a:solidFill>
+              </a:rPr>
+              <a:t>cancelar com pagamento aprovado abre reembolso</a:t>
+            </a:r>
+            <a:endParaRPr lang="en-US" sz="1300" dirty="0"/>
+          </a:p>
+          <a:p>
+            <a:pPr marL="342900" indent="-342900">
+              <a:spcAft>
+                <a:spcPts val="600"/>
+              </a:spcAft>
+              <a:buSzPct val="100000"/>
+              <a:buChar char="•"/>
+            </a:pPr>
+            <a:r>
+              <a:rPr lang="en-US" sz="1300" dirty="0">
+                <a:solidFill>
+                  <a:schemeClr val="tx1"/>
+                </a:solidFill>
+              </a:rPr>
+              <a:t>leitura desatualizada é recusada sem efeito</a:t>
+            </a:r>
+            <a:endParaRPr lang="en-US" sz="1300" dirty="0"/>
+          </a:p>
+          <a:p>
+            <a:pPr marL="342900" indent="-342900">
+              <a:spcAft>
+                <a:spcPts val="600"/>
+              </a:spcAft>
+              <a:buSzPct val="100000"/>
+              <a:buChar char="•"/>
+            </a:pPr>
+            <a:r>
+              <a:rPr lang="en-US" sz="1300" dirty="0">
+                <a:solidFill>
+                  <a:schemeClr val="tx1"/>
+                </a:solidFill>
+              </a:rPr>
+              <a:t>ações não rodam no rascunho nem durante a edição</a:t>
+            </a:r>
+            <a:endParaRPr lang="en-US" sz="1300" dirty="0"/>
+          </a:p>
+          <a:p>
+            <a:pPr marL="342900" indent="-342900">
+              <a:spcAft>
+                <a:spcPts val="600"/>
+              </a:spcAft>
+              <a:buSzPct val="100000"/>
+              <a:buChar char="•"/>
+            </a:pPr>
+            <a:r>
+              <a:rPr lang="en-US" sz="1300" dirty="0">
+                <a:solidFill>
+                  <a:schemeClr val="tx1"/>
+                </a:solidFill>
+              </a:rPr>
+              <a:t>dados do cliente e do pagamento calculados no $metadata</a:t>
+            </a:r>
+            <a:endParaRPr lang="en-US" sz="1300" dirty="0"/>
+          </a:p>
+          <a:p>
+            <a:pPr marL="342900" indent="-342900">
+              <a:spcAft>
+                <a:spcPts val="600"/>
+              </a:spcAft>
+              <a:buSzPct val="100000"/>
+              <a:buChar char="•"/>
+            </a:pPr>
+            <a:r>
+              <a:rPr lang="en-US" sz="1300" dirty="0">
+                <a:solidFill>
+                  <a:schemeClr val="tx1"/>
+                </a:solidFill>
+              </a:rPr>
+              <a:t>dados do cliente chegam pela associação, sem escrita</a:t>
+            </a:r>
+            <a:endParaRPr lang="en-US" sz="1300" dirty="0"/>
+          </a:p>
+          <a:p>
+            <a:pPr marL="342900" indent="-342900">
+              <a:spcAft>
+                <a:spcPts val="600"/>
+              </a:spcAft>
+              <a:buSzPct val="100000"/>
+              <a:buChar char="•"/>
+            </a:pPr>
+            <a:r>
+              <a:rPr lang="en-US" sz="1300" dirty="0">
+                <a:solidFill>
+                  <a:schemeClr val="tx1"/>
+                </a:solidFill>
+              </a:rPr>
+              <a:t>pagamento não aceita escrita e é preservado na edição</a:t>
+            </a:r>
+            <a:endParaRPr lang="en-US" sz="1300" dirty="0"/>
+          </a:p>
+        </p:txBody>
+      </p:sp>
+      <p:sp>
+        <p:nvSpPr>
+          <p:cNvPr id="25" name="Slide Number Placeholder 0"/>
+          <p:cNvSpPr>
+            <a:spLocks noGrp="1"/>
+          </p:cNvSpPr>
+          <p:nvPr>
+            <p:ph type="sldNum" sz="quarter" idx="4294967295"/>
+          </p:nvPr>
+        </p:nvSpPr>
+        <p:spPr>
+          <a:xfrm>
+            <a:off x="11155680" y="6419088"/>
+            <a:ext cx="484632" cy="274320"/>
+          </a:xfrm>
+          <a:prstGeom prst="rect">
+            <a:avLst/>
+          </a:prstGeom>
+          <a:extLst>
+            <a:ext uri="{C572A759-6A51-4108-AA02-DFA0A04FC94B}">
+              <ma14:wrappingTextBoxFlag xmlns:ma14="http://schemas.microsoft.com/office/mac/drawingml/2011/main" val="0"/>
+            </a:ext>
+          </a:extLst>
+        </p:spPr>
+        <p:txBody>
+          <a:bodyPr/>
+          <a:lstStyle>
+            <a:lvl1pPr>
+              <a:defRPr sz="1000">
+                <a:solidFill>
+                  <a:srgbClr val="556B82"/>
+                </a:solidFill>
+              </a:defRPr>
+            </a:lvl1pPr>
+          </a:lstStyle>
+          <a:p>
+            <a:pPr algn="r"/>
+            <a:fld id="{F7021451-1387-4CA6-816F-3879F97B5CBC}" type="slidenum">
+              <a:rPr b="0" lang="en-US"/>
+              <a:t>21</a:t>
+            </a:fld>
+            <a:endParaRPr lang="en-US"/>
+          </a:p>
+        </p:txBody>
+      </p:sp>
+    </p:spTree>
+  </p:cSld>
+  <p:clrMapOvr>
+    <a:masterClrMapping/>
+  </p:clrMapOvr>
+</p:sld>
+</file>
+
+<file path=ppt/slides/slide26.xml><?xml version="1.0" encoding="utf-8"?>
+<p:sld xmlns:a="http://schemas.openxmlformats.org/drawingml/2006/main" xmlns:p="http://schemas.openxmlformats.org/presentationml/2006/main" xmlns:r="http://schemas.openxmlformats.org/officeDocument/2006/relationships">
+  <p:cSld name="Slide 1">
+    <p:spTree>
+      <p:nvGrpSpPr>
+        <p:cNvPr id="1" name=""/>
+        <p:cNvGrpSpPr/>
+        <p:nvPr/>
+      </p:nvGrpSpPr>
+      <p:grpSpPr>
+        <a:xfrm>
+          <a:off x="0" y="0"/>
+          <a:ext cx="0" cy="0"/>
+          <a:chOff x="0" y="0"/>
+          <a:chExt cx="0" cy="0"/>
+        </a:xfrm>
+      </p:grpSpPr>
+      <p:sp>
+        <p:nvSpPr>
+          <p:cNvPr id="2" name="Text 0"/>
+          <p:cNvSpPr/>
+          <p:nvPr>
+            <p:ph idx="100" type="body" hasCustomPrompt="1"/>
+          </p:nvPr>
+        </p:nvSpPr>
+        <p:spPr>
+          <a:xfrm>
+            <a:off x="731520" y="1417320"/>
+            <a:ext cx="5486400" cy="411480"/>
+          </a:xfrm>
+          <a:prstGeom prst="rect">
+            <a:avLst/>
+          </a:prstGeom>
+          <a:noFill/>
+          <a:ln/>
+        </p:spPr>
+        <p:txBody>
+          <a:bodyPr wrap="square" lIns="0" tIns="0" rIns="0" bIns="0" rtlCol="0" anchor="ctr"/>
+          <a:lstStyle/>
+          <a:p>
+            <a:pPr algn="l" indent="0" marL="0">
+              <a:buNone/>
+            </a:pPr>
+            <a:r>
+              <a:rPr lang="en-US" sz="1400" b="1" spc="200" kern="0" dirty="0">
+                <a:solidFill>
+                  <a:srgbClr val="89D1FF"/>
+                </a:solidFill>
+              </a:rPr>
+              <a:t>ETAPA 6 · REEMBOLSOS</a:t>
+            </a:r>
+            <a:endParaRPr lang="en-US" sz="1400" dirty="0"/>
+          </a:p>
+        </p:txBody>
+      </p:sp>
+      <p:sp>
+        <p:nvSpPr>
+          <p:cNvPr id="3" name="Text 0"/>
+          <p:cNvSpPr/>
+          <p:nvPr>
+            <p:ph idx="101" type="title" hasCustomPrompt="1"/>
+          </p:nvPr>
+        </p:nvSpPr>
+        <p:spPr>
+          <a:xfrm>
+            <a:off x="731520" y="1965960"/>
+            <a:ext cx="6766560" cy="1737360"/>
+          </a:xfrm>
+          <a:prstGeom prst="rect">
+            <a:avLst/>
+          </a:prstGeom>
+          <a:noFill/>
+          <a:ln/>
+        </p:spPr>
+        <p:txBody>
+          <a:bodyPr wrap="square" lIns="0" tIns="0" rIns="0" bIns="0" rtlCol="0" anchor="t"/>
+          <a:lstStyle/>
+          <a:p>
+            <a:pPr algn="l" indent="0" marL="0">
+              <a:buNone/>
+            </a:pPr>
+            <a:r>
+              <a:rPr lang="en-US" sz="4400" b="1" dirty="0">
+                <a:solidFill>
+                  <a:schemeClr val="bg1"/>
+                </a:solidFill>
+              </a:rPr>
+              <a:t>BO Reembolsos</a:t>
+            </a:r>
+            <a:endParaRPr lang="en-US" sz="4400" dirty="0"/>
+          </a:p>
+        </p:txBody>
+      </p:sp>
+      <p:sp>
+        <p:nvSpPr>
+          <p:cNvPr id="4" name="Text 0"/>
+          <p:cNvSpPr/>
+          <p:nvPr>
+            <p:ph idx="102" type="body" hasCustomPrompt="1"/>
+          </p:nvPr>
+        </p:nvSpPr>
+        <p:spPr>
+          <a:xfrm>
+            <a:off x="731520" y="3840480"/>
+            <a:ext cx="6400800" cy="1097280"/>
+          </a:xfrm>
+          <a:prstGeom prst="rect">
+            <a:avLst/>
+          </a:prstGeom>
+          <a:noFill/>
+          <a:ln/>
+        </p:spPr>
+        <p:txBody>
+          <a:bodyPr wrap="square" lIns="0" tIns="0" rIns="0" bIns="0" rtlCol="0" anchor="t"/>
+          <a:lstStyle/>
+          <a:p>
+            <a:pPr algn="l" indent="0" marL="0">
+              <a:buNone/>
+            </a:pPr>
+            <a:r>
+              <a:rPr lang="en-US" sz="1800" dirty="0">
+                <a:solidFill>
+                  <a:srgbClr val="D1EFFF"/>
+                </a:solidFill>
+              </a:rPr>
+              <a:t>reembolsos.test e um teste de ponta a ponta pela API OData: cria, paga e cancela o pedido e decide o reembolso.</a:t>
+            </a:r>
+            <a:endParaRPr lang="en-US" sz="1800" dirty="0"/>
+          </a:p>
+        </p:txBody>
+      </p:sp>
+      <p:sp>
+        <p:nvSpPr>
+          <p:cNvPr id="5" name="Avatar da etapa"/>
+          <p:cNvSpPr/>
+          <p:nvPr/>
+        </p:nvSpPr>
+        <p:spPr>
+          <a:xfrm>
+            <a:off x="8183880" y="1417320"/>
+            <a:ext cx="3291840" cy="3291840"/>
+          </a:xfrm>
+          <a:prstGeom prst="roundRect">
+            <a:avLst>
+              <a:gd name="adj" fmla="val 22222"/>
+            </a:avLst>
+          </a:prstGeom>
+          <a:solidFill>
+            <a:srgbClr val="1B3A7A"/>
+          </a:solidFill>
+          <a:ln/>
+        </p:spPr>
+      </p:sp>
+      <p:sp>
+        <p:nvSpPr>
+          <p:cNvPr id="6" name="Avatar interno"/>
+          <p:cNvSpPr/>
+          <p:nvPr/>
+        </p:nvSpPr>
+        <p:spPr>
+          <a:xfrm>
+            <a:off x="8732520" y="1965960"/>
+            <a:ext cx="2194560" cy="2194560"/>
+          </a:xfrm>
+          <a:prstGeom prst="roundRect">
+            <a:avLst>
+              <a:gd name="adj" fmla="val 22917"/>
+            </a:avLst>
+          </a:prstGeom>
+          <a:solidFill>
+            <a:schemeClr val="accent1"/>
+          </a:solidFill>
+          <a:ln/>
+        </p:spPr>
+      </p:sp>
+      <p:pic>
+        <p:nvPicPr>
+          <p:cNvPr id="7" name="Image 0" descr="Reembolsos">    </p:cNvPr>
+          <p:cNvPicPr>
+            <a:picLocks noChangeAspect="1"/>
+          </p:cNvPicPr>
+          <p:nvPr/>
+        </p:nvPicPr>
+        <p:blipFill>
+          <a:blip r:embed="rId2"/>
+          <a:stretch>
+            <a:fillRect/>
+          </a:stretch>
+        </p:blipFill>
+        <p:spPr>
+          <a:xfrm>
+            <a:off x="9281160" y="2514600"/>
+            <a:ext cx="1097280" cy="1097280"/>
+          </a:xfrm>
+          <a:prstGeom prst="rect">
+            <a:avLst/>
+          </a:prstGeom>
+        </p:spPr>
+      </p:pic>
+      <p:sp>
+        <p:nvSpPr>
+          <p:cNvPr id="8" name="Etapa 1"/>
+          <p:cNvSpPr/>
+          <p:nvPr/>
+        </p:nvSpPr>
+        <p:spPr>
+          <a:xfrm>
+            <a:off x="8183880" y="5074920"/>
+            <a:ext cx="548640" cy="109728"/>
+          </a:xfrm>
+          <a:prstGeom prst="roundRect">
+            <a:avLst>
+              <a:gd name="adj" fmla="val 50000"/>
+            </a:avLst>
+          </a:prstGeom>
+          <a:solidFill>
+            <a:srgbClr val="1B3A7A"/>
+          </a:solidFill>
+          <a:ln/>
+        </p:spPr>
+      </p:sp>
+      <p:sp>
+        <p:nvSpPr>
+          <p:cNvPr id="9" name="Etapa 2"/>
+          <p:cNvSpPr/>
+          <p:nvPr/>
+        </p:nvSpPr>
+        <p:spPr>
+          <a:xfrm>
+            <a:off x="8842248" y="5074920"/>
+            <a:ext cx="548640" cy="109728"/>
+          </a:xfrm>
+          <a:prstGeom prst="roundRect">
+            <a:avLst>
+              <a:gd name="adj" fmla="val 50000"/>
+            </a:avLst>
+          </a:prstGeom>
+          <a:solidFill>
+            <a:srgbClr val="1B3A7A"/>
+          </a:solidFill>
+          <a:ln/>
+        </p:spPr>
+      </p:sp>
+      <p:sp>
+        <p:nvSpPr>
+          <p:cNvPr id="10" name="Etapa 3"/>
+          <p:cNvSpPr/>
+          <p:nvPr/>
+        </p:nvSpPr>
+        <p:spPr>
+          <a:xfrm>
+            <a:off x="9500616" y="5074920"/>
+            <a:ext cx="548640" cy="109728"/>
+          </a:xfrm>
+          <a:prstGeom prst="roundRect">
+            <a:avLst>
+              <a:gd name="adj" fmla="val 50000"/>
+            </a:avLst>
+          </a:prstGeom>
+          <a:solidFill>
+            <a:srgbClr val="1B3A7A"/>
+          </a:solidFill>
+          <a:ln/>
+        </p:spPr>
+      </p:sp>
+      <p:sp>
+        <p:nvSpPr>
+          <p:cNvPr id="11" name="Etapa 4"/>
+          <p:cNvSpPr/>
+          <p:nvPr/>
+        </p:nvSpPr>
+        <p:spPr>
+          <a:xfrm>
+            <a:off x="10158984" y="5074920"/>
+            <a:ext cx="548640" cy="109728"/>
+          </a:xfrm>
+          <a:prstGeom prst="roundRect">
+            <a:avLst>
+              <a:gd name="adj" fmla="val 50000"/>
+            </a:avLst>
+          </a:prstGeom>
+          <a:solidFill>
+            <a:srgbClr val="1B3A7A"/>
+          </a:solidFill>
+          <a:ln/>
+        </p:spPr>
+      </p:sp>
+      <p:sp>
+        <p:nvSpPr>
+          <p:cNvPr id="12" name="Etapa 5"/>
+          <p:cNvSpPr/>
+          <p:nvPr/>
+        </p:nvSpPr>
+        <p:spPr>
+          <a:xfrm>
+            <a:off x="10817352" y="5074920"/>
+            <a:ext cx="548640" cy="109728"/>
+          </a:xfrm>
+          <a:prstGeom prst="roundRect">
+            <a:avLst>
+              <a:gd name="adj" fmla="val 50000"/>
+            </a:avLst>
+          </a:prstGeom>
+          <a:solidFill>
+            <a:srgbClr val="89D1FF"/>
+          </a:solidFill>
+          <a:ln/>
+        </p:spPr>
+      </p:sp>
+      <p:sp>
+        <p:nvSpPr>
+          <p:cNvPr id="13" name="Text 10"/>
+          <p:cNvSpPr txBox="1"/>
+          <p:nvPr/>
+        </p:nvSpPr>
+        <p:spPr>
+          <a:xfrm>
+            <a:off x="8183880" y="5303520"/>
+            <a:ext cx="3291840" cy="274320"/>
+          </a:xfrm>
+          <a:prstGeom prst="rect">
+            <a:avLst/>
+          </a:prstGeom>
+          <a:noFill/>
+          <a:ln/>
+        </p:spPr>
+        <p:txBody>
+          <a:bodyPr wrap="square" lIns="0" tIns="0" rIns="0" bIns="0" rtlCol="0" anchor="ctr"/>
+          <a:lstStyle/>
+          <a:p>
+            <a:pPr indent="0" marL="0">
+              <a:buNone/>
+            </a:pPr>
+            <a:r>
+              <a:rPr lang="en-US" sz="1200" dirty="0">
+                <a:solidFill>
+                  <a:srgbClr val="89D1FF"/>
+                </a:solidFill>
+              </a:rPr>
+              <a:t>BO 5 de 5</a:t>
+            </a:r>
+            <a:endParaRPr lang="en-US" sz="1200" dirty="0"/>
+          </a:p>
+        </p:txBody>
+      </p:sp>
+    </p:spTree>
+  </p:cSld>
+  <p:clrMapOvr>
+    <a:masterClrMapping/>
+  </p:clrMapOvr>
+</p:sld>
+</file>
+
+<file path=ppt/slides/slide27.xml><?xml version="1.0" encoding="utf-8"?>
+<p:sld xmlns:a="http://schemas.openxmlformats.org/drawingml/2006/main" xmlns:p="http://schemas.openxmlformats.org/presentationml/2006/main" xmlns:r="http://schemas.openxmlformats.org/officeDocument/2006/relationships">
+  <p:cSld name="Slide 14">
+    <p:spTree>
+      <p:nvGrpSpPr>
+        <p:cNvPr id="1" name=""/>
+        <p:cNvGrpSpPr/>
+        <p:nvPr/>
+      </p:nvGrpSpPr>
+      <p:grpSpPr>
+        <a:xfrm>
+          <a:off x="0" y="0"/>
+          <a:ext cx="0" cy="0"/>
+          <a:chOff x="0" y="0"/>
+          <a:chExt cx="0" cy="0"/>
+        </a:xfrm>
+      </p:grpSpPr>
+      <p:sp>
+        <p:nvSpPr>
+          <p:cNvPr id="2" name="Text 0"/>
+          <p:cNvSpPr/>
+          <p:nvPr>
+            <p:ph idx="100" type="body" hasCustomPrompt="1"/>
+          </p:nvPr>
+        </p:nvSpPr>
+        <p:spPr>
+          <a:xfrm>
+            <a:off x="548640" y="292608"/>
+            <a:ext cx="9144000" cy="292608"/>
+          </a:xfrm>
+          <a:prstGeom prst="rect">
+            <a:avLst/>
+          </a:prstGeom>
+          <a:noFill/>
+          <a:ln/>
+        </p:spPr>
+        <p:txBody>
+          <a:bodyPr wrap="square" lIns="0" tIns="0" rIns="0" bIns="0" rtlCol="0" anchor="ctr"/>
+          <a:lstStyle/>
+          <a:p>
+            <a:pPr algn="l" indent="0" marL="0">
+              <a:buNone/>
+            </a:pPr>
+            <a:r>
+              <a:rPr lang="en-US" sz="1200" b="1" spc="150" kern="0" dirty="0">
+                <a:solidFill>
+                  <a:schemeClr val="accent1"/>
+                </a:solidFill>
+              </a:rPr>
+              <a:t>REEMBOLSOS · TESTES</a:t>
+            </a:r>
+            <a:endParaRPr lang="en-US" sz="1200" dirty="0"/>
+          </a:p>
+        </p:txBody>
+      </p:sp>
+      <p:sp>
+        <p:nvSpPr>
+          <p:cNvPr id="3" name="Text 0"/>
+          <p:cNvSpPr/>
+          <p:nvPr>
+            <p:ph idx="101" type="title" hasCustomPrompt="1"/>
+          </p:nvPr>
+        </p:nvSpPr>
+        <p:spPr>
+          <a:xfrm>
+            <a:off x="548640" y="603504"/>
+            <a:ext cx="11064240" cy="685800"/>
+          </a:xfrm>
+          <a:prstGeom prst="rect">
+            <a:avLst/>
+          </a:prstGeom>
+          <a:noFill/>
+          <a:ln/>
+        </p:spPr>
+        <p:txBody>
+          <a:bodyPr wrap="square" lIns="0" tIns="0" rIns="0" bIns="0" rtlCol="0" anchor="ctr"/>
+          <a:lstStyle/>
+          <a:p>
+            <a:pPr algn="l" indent="0" marL="0">
+              <a:buNone/>
+            </a:pPr>
+            <a:r>
+              <a:rPr lang="en-US" sz="3200" b="1" dirty="0">
+                <a:solidFill>
+                  <a:schemeClr val="tx1"/>
+                </a:solidFill>
+              </a:rPr>
+              <a:t>reembolsos.test: 4 testes do BO</a:t>
+            </a:r>
+            <a:endParaRPr lang="en-US" sz="3200" dirty="0"/>
+          </a:p>
+        </p:txBody>
+      </p:sp>
+      <p:sp>
+        <p:nvSpPr>
+          <p:cNvPr id="5" name="Bloco de código"/>
+          <p:cNvSpPr/>
+          <p:nvPr/>
+        </p:nvSpPr>
+        <p:spPr>
+          <a:xfrm>
+            <a:off x="548640" y="1554480"/>
+            <a:ext cx="6766560" cy="2849880"/>
+          </a:xfrm>
+          <a:prstGeom prst="roundRect">
+            <a:avLst>
+              <a:gd name="adj" fmla="val 3850"/>
+            </a:avLst>
+          </a:prstGeom>
+          <a:solidFill>
+            <a:srgbClr val="1F1F1F"/>
+          </a:solidFill>
+          <a:ln w="9525">
+            <a:solidFill>
+              <a:srgbClr val="2B2B2B"/>
+            </a:solidFill>
+            <a:prstDash val="solid"/>
+          </a:ln>
+          <a:effectLst>
+            <a:outerShdw sx="100000" sy="100000" kx="0" ky="0" algn="bl" rotWithShape="0" blurRad="101600" dist="25400" dir="5400000">
+              <a:srgbClr val="223649">
+                <a:alpha val="18000"/>
+              </a:srgbClr>
+            </a:outerShdw>
+          </a:effectLst>
+        </p:spPr>
+      </p:sp>
+      <p:sp>
+        <p:nvSpPr>
+          <p:cNvPr id="6" name="Código"/>
+          <p:cNvSpPr txBox="1"/>
+          <p:nvPr/>
+        </p:nvSpPr>
+        <p:spPr>
+          <a:xfrm>
+            <a:off x="777240" y="1737360"/>
+            <a:ext cx="6309360" cy="2484120"/>
+          </a:xfrm>
+          <a:prstGeom prst="rect">
+            <a:avLst/>
+          </a:prstGeom>
+          <a:noFill/>
+          <a:ln/>
+        </p:spPr>
+        <p:txBody>
+          <a:bodyPr wrap="square" lIns="0" tIns="0" rIns="0" bIns="0" rtlCol="0" anchor="t"/>
+          <a:lstStyle/>
+          <a:p>
+            <a:pPr indent="0" marL="0">
+              <a:buNone/>
+            </a:pPr>
+            <a:r>
+              <a:rPr lang="en-US" sz="1000" dirty="0">
+                <a:solidFill>
+                  <a:srgbClr val="569CD6"/>
+                </a:solidFill>
+                <a:latin typeface="Courier New" pitchFamily="34" charset="0"/>
+                <a:ea typeface="Courier New" pitchFamily="34" charset="-122"/>
+                <a:cs typeface="Courier New" pitchFamily="34" charset="-120"/>
+              </a:rPr>
+              <a:t>async</a:t>
+            </a:r>
+            <a:pPr indent="0" marL="0">
+              <a:buNone/>
+            </a:pPr>
+            <a:r>
+              <a:rPr lang="en-US" sz="1000" dirty="0">
+                <a:solidFill>
+                  <a:srgbClr val="CCCCCC"/>
+                </a:solidFill>
+                <a:latin typeface="Courier New" pitchFamily="34" charset="0"/>
+                <a:ea typeface="Courier New" pitchFamily="34" charset="-122"/>
+                <a:cs typeface="Courier New" pitchFamily="34" charset="-120"/>
+              </a:rPr>
+              <a:t> </a:t>
+            </a:r>
+            <a:pPr indent="0" marL="0">
+              <a:buNone/>
+            </a:pPr>
+            <a:r>
+              <a:rPr lang="en-US" sz="1000" dirty="0">
+                <a:solidFill>
+                  <a:srgbClr val="569CD6"/>
+                </a:solidFill>
+                <a:latin typeface="Courier New" pitchFamily="34" charset="0"/>
+                <a:ea typeface="Courier New" pitchFamily="34" charset="-122"/>
+                <a:cs typeface="Courier New" pitchFamily="34" charset="-120"/>
+              </a:rPr>
+              <a:t>function</a:t>
+            </a:r>
+            <a:pPr indent="0" marL="0">
+              <a:buNone/>
+            </a:pPr>
+            <a:r>
+              <a:rPr lang="en-US" sz="1000" dirty="0">
+                <a:solidFill>
+                  <a:srgbClr val="CCCCCC"/>
+                </a:solidFill>
+                <a:latin typeface="Courier New" pitchFamily="34" charset="0"/>
+                <a:ea typeface="Courier New" pitchFamily="34" charset="-122"/>
+                <a:cs typeface="Courier New" pitchFamily="34" charset="-120"/>
+              </a:rPr>
+              <a:t> </a:t>
+            </a:r>
+            <a:pPr indent="0" marL="0">
+              <a:buNone/>
+            </a:pPr>
+            <a:r>
+              <a:rPr lang="en-US" sz="1000" dirty="0">
+                <a:solidFill>
+                  <a:srgbClr val="DCDCAA"/>
+                </a:solidFill>
+                <a:latin typeface="Courier New" pitchFamily="34" charset="0"/>
+                <a:ea typeface="Courier New" pitchFamily="34" charset="-122"/>
+                <a:cs typeface="Courier New" pitchFamily="34" charset="-120"/>
+              </a:rPr>
+              <a:t>solicitacao</a:t>
+            </a:r>
+            <a:pPr indent="0" marL="0">
+              <a:buNone/>
+            </a:pPr>
+            <a:r>
+              <a:rPr lang="en-US" sz="1000" dirty="0">
+                <a:solidFill>
+                  <a:srgbClr val="FFD700"/>
+                </a:solidFill>
+                <a:latin typeface="Courier New" pitchFamily="34" charset="0"/>
+                <a:ea typeface="Courier New" pitchFamily="34" charset="-122"/>
+                <a:cs typeface="Courier New" pitchFamily="34" charset="-120"/>
+              </a:rPr>
+              <a:t>()</a:t>
+            </a:r>
+            <a:pPr indent="0" marL="0">
+              <a:buNone/>
+            </a:pPr>
+            <a:r>
+              <a:rPr lang="en-US" sz="1000" dirty="0">
+                <a:solidFill>
+                  <a:srgbClr val="CCCCCC"/>
+                </a:solidFill>
+                <a:latin typeface="Courier New" pitchFamily="34" charset="0"/>
+                <a:ea typeface="Courier New" pitchFamily="34" charset="-122"/>
+                <a:cs typeface="Courier New" pitchFamily="34" charset="-120"/>
+              </a:rPr>
+              <a:t> </a:t>
+            </a:r>
+            <a:pPr indent="0" marL="0">
+              <a:buNone/>
+            </a:pPr>
+            <a:r>
+              <a:rPr lang="en-US" sz="1000" dirty="0">
+                <a:solidFill>
+                  <a:srgbClr val="FFD700"/>
+                </a:solidFill>
+                <a:latin typeface="Courier New" pitchFamily="34" charset="0"/>
+                <a:ea typeface="Courier New" pitchFamily="34" charset="-122"/>
+                <a:cs typeface="Courier New" pitchFamily="34" charset="-120"/>
+              </a:rPr>
+              <a:t>{</a:t>
+            </a:r>
+            <a:endParaRPr lang="en-US" sz="1000" dirty="0"/>
+          </a:p>
+          <a:p>
+            <a:pPr indent="0" marL="0">
+              <a:buNone/>
+            </a:pPr>
+            <a:r>
+              <a:rPr lang="en-US" sz="1000" dirty="0">
+                <a:solidFill>
+                  <a:srgbClr val="CCCCCC"/>
+                </a:solidFill>
+                <a:latin typeface="Courier New" pitchFamily="34" charset="0"/>
+                <a:ea typeface="Courier New" pitchFamily="34" charset="-122"/>
+                <a:cs typeface="Courier New" pitchFamily="34" charset="-120"/>
+              </a:rPr>
+              <a:t>  </a:t>
+            </a:r>
+            <a:pPr indent="0" marL="0">
+              <a:buNone/>
+            </a:pPr>
+            <a:r>
+              <a:rPr lang="en-US" sz="1000" dirty="0">
+                <a:solidFill>
+                  <a:srgbClr val="569CD6"/>
+                </a:solidFill>
+                <a:latin typeface="Courier New" pitchFamily="34" charset="0"/>
+                <a:ea typeface="Courier New" pitchFamily="34" charset="-122"/>
+                <a:cs typeface="Courier New" pitchFamily="34" charset="-120"/>
+              </a:rPr>
+              <a:t>const</a:t>
+            </a:r>
+            <a:pPr indent="0" marL="0">
+              <a:buNone/>
+            </a:pPr>
+            <a:r>
+              <a:rPr lang="en-US" sz="1000" dirty="0">
+                <a:solidFill>
+                  <a:srgbClr val="CCCCCC"/>
+                </a:solidFill>
+                <a:latin typeface="Courier New" pitchFamily="34" charset="0"/>
+                <a:ea typeface="Courier New" pitchFamily="34" charset="-122"/>
+                <a:cs typeface="Courier New" pitchFamily="34" charset="-120"/>
+              </a:rPr>
+              <a:t> </a:t>
+            </a:r>
+            <a:pPr indent="0" marL="0">
+              <a:buNone/>
+            </a:pPr>
+            <a:r>
+              <a:rPr lang="en-US" sz="1000" dirty="0">
+                <a:solidFill>
+                  <a:srgbClr val="DA70D6"/>
+                </a:solidFill>
+                <a:latin typeface="Courier New" pitchFamily="34" charset="0"/>
+                <a:ea typeface="Courier New" pitchFamily="34" charset="-122"/>
+                <a:cs typeface="Courier New" pitchFamily="34" charset="-120"/>
+              </a:rPr>
+              <a:t>{</a:t>
+            </a:r>
+            <a:pPr indent="0" marL="0">
+              <a:buNone/>
+            </a:pPr>
+            <a:r>
+              <a:rPr lang="en-US" sz="1000" dirty="0">
+                <a:solidFill>
+                  <a:srgbClr val="CCCCCC"/>
+                </a:solidFill>
+                <a:latin typeface="Courier New" pitchFamily="34" charset="0"/>
+                <a:ea typeface="Courier New" pitchFamily="34" charset="-122"/>
+                <a:cs typeface="Courier New" pitchFamily="34" charset="-120"/>
+              </a:rPr>
+              <a:t> </a:t>
+            </a:r>
+            <a:pPr indent="0" marL="0">
+              <a:buNone/>
+            </a:pPr>
+            <a:r>
+              <a:rPr lang="en-US" sz="1000" dirty="0">
+                <a:solidFill>
+                  <a:srgbClr val="9CDCFE"/>
+                </a:solidFill>
+                <a:latin typeface="Courier New" pitchFamily="34" charset="0"/>
+                <a:ea typeface="Courier New" pitchFamily="34" charset="-122"/>
+                <a:cs typeface="Courier New" pitchFamily="34" charset="-120"/>
+              </a:rPr>
+              <a:t>data</a:t>
+            </a:r>
+            <a:pPr indent="0" marL="0">
+              <a:buNone/>
+            </a:pPr>
+            <a:r>
+              <a:rPr lang="en-US" sz="1000" dirty="0">
+                <a:solidFill>
+                  <a:srgbClr val="CCCCCC"/>
+                </a:solidFill>
+                <a:latin typeface="Courier New" pitchFamily="34" charset="0"/>
+                <a:ea typeface="Courier New" pitchFamily="34" charset="-122"/>
+                <a:cs typeface="Courier New" pitchFamily="34" charset="-120"/>
+              </a:rPr>
+              <a:t>: </a:t>
+            </a:r>
+            <a:pPr indent="0" marL="0">
+              <a:buNone/>
+            </a:pPr>
+            <a:r>
+              <a:rPr lang="en-US" sz="1000" dirty="0">
+                <a:solidFill>
+                  <a:srgbClr val="9CDCFE"/>
+                </a:solidFill>
+                <a:latin typeface="Courier New" pitchFamily="34" charset="0"/>
+                <a:ea typeface="Courier New" pitchFamily="34" charset="-122"/>
+                <a:cs typeface="Courier New" pitchFamily="34" charset="-120"/>
+              </a:rPr>
+              <a:t>cliente</a:t>
+            </a:r>
+            <a:pPr indent="0" marL="0">
+              <a:buNone/>
+            </a:pPr>
+            <a:r>
+              <a:rPr lang="en-US" sz="1000" dirty="0">
+                <a:solidFill>
+                  <a:srgbClr val="CCCCCC"/>
+                </a:solidFill>
+                <a:latin typeface="Courier New" pitchFamily="34" charset="0"/>
+                <a:ea typeface="Courier New" pitchFamily="34" charset="-122"/>
+                <a:cs typeface="Courier New" pitchFamily="34" charset="-120"/>
+              </a:rPr>
+              <a:t> </a:t>
+            </a:r>
+            <a:pPr indent="0" marL="0">
+              <a:buNone/>
+            </a:pPr>
+            <a:r>
+              <a:rPr lang="en-US" sz="1000" dirty="0">
+                <a:solidFill>
+                  <a:srgbClr val="DA70D6"/>
+                </a:solidFill>
+                <a:latin typeface="Courier New" pitchFamily="34" charset="0"/>
+                <a:ea typeface="Courier New" pitchFamily="34" charset="-122"/>
+                <a:cs typeface="Courier New" pitchFamily="34" charset="-120"/>
+              </a:rPr>
+              <a:t>}</a:t>
+            </a:r>
+            <a:pPr indent="0" marL="0">
+              <a:buNone/>
+            </a:pPr>
+            <a:r>
+              <a:rPr lang="en-US" sz="1000" dirty="0">
+                <a:solidFill>
+                  <a:srgbClr val="CCCCCC"/>
+                </a:solidFill>
+                <a:latin typeface="Courier New" pitchFamily="34" charset="0"/>
+                <a:ea typeface="Courier New" pitchFamily="34" charset="-122"/>
+                <a:cs typeface="Courier New" pitchFamily="34" charset="-120"/>
+              </a:rPr>
+              <a:t> =</a:t>
+            </a:r>
+            <a:endParaRPr lang="en-US" sz="1000" dirty="0"/>
+          </a:p>
+          <a:p>
+            <a:pPr indent="0" marL="0">
+              <a:buNone/>
+            </a:pPr>
+            <a:r>
+              <a:rPr lang="en-US" sz="1000" dirty="0">
+                <a:solidFill>
+                  <a:srgbClr val="CCCCCC"/>
+                </a:solidFill>
+                <a:latin typeface="Courier New" pitchFamily="34" charset="0"/>
+                <a:ea typeface="Courier New" pitchFamily="34" charset="-122"/>
+                <a:cs typeface="Courier New" pitchFamily="34" charset="-120"/>
+              </a:rPr>
+              <a:t>    </a:t>
+            </a:r>
+            <a:pPr indent="0" marL="0">
+              <a:buNone/>
+            </a:pPr>
+            <a:r>
+              <a:rPr lang="en-US" sz="1000" dirty="0">
+                <a:solidFill>
+                  <a:srgbClr val="C586C0"/>
+                </a:solidFill>
+                <a:latin typeface="Courier New" pitchFamily="34" charset="0"/>
+                <a:ea typeface="Courier New" pitchFamily="34" charset="-122"/>
+                <a:cs typeface="Courier New" pitchFamily="34" charset="-120"/>
+              </a:rPr>
+              <a:t>await</a:t>
+            </a:r>
+            <a:pPr indent="0" marL="0">
+              <a:buNone/>
+            </a:pPr>
+            <a:r>
+              <a:rPr lang="en-US" sz="1000" dirty="0">
+                <a:solidFill>
+                  <a:srgbClr val="CCCCCC"/>
+                </a:solidFill>
+                <a:latin typeface="Courier New" pitchFamily="34" charset="0"/>
+                <a:ea typeface="Courier New" pitchFamily="34" charset="-122"/>
+                <a:cs typeface="Courier New" pitchFamily="34" charset="-120"/>
+              </a:rPr>
+              <a:t> </a:t>
+            </a:r>
+            <a:pPr indent="0" marL="0">
+              <a:buNone/>
+            </a:pPr>
+            <a:r>
+              <a:rPr lang="en-US" sz="1000" dirty="0">
+                <a:solidFill>
+                  <a:srgbClr val="9CDCFE"/>
+                </a:solidFill>
+                <a:latin typeface="Courier New" pitchFamily="34" charset="0"/>
+                <a:ea typeface="Courier New" pitchFamily="34" charset="-122"/>
+                <a:cs typeface="Courier New" pitchFamily="34" charset="-120"/>
+              </a:rPr>
+              <a:t>api</a:t>
+            </a:r>
+            <a:pPr indent="0" marL="0">
+              <a:buNone/>
+            </a:pPr>
+            <a:r>
+              <a:rPr lang="en-US" sz="1000" dirty="0">
+                <a:solidFill>
+                  <a:srgbClr val="CCCCCC"/>
+                </a:solidFill>
+                <a:latin typeface="Courier New" pitchFamily="34" charset="0"/>
+                <a:ea typeface="Courier New" pitchFamily="34" charset="-122"/>
+                <a:cs typeface="Courier New" pitchFamily="34" charset="-120"/>
+              </a:rPr>
+              <a:t>.</a:t>
+            </a:r>
+            <a:pPr indent="0" marL="0">
+              <a:buNone/>
+            </a:pPr>
+            <a:r>
+              <a:rPr lang="en-US" sz="1000" dirty="0">
+                <a:solidFill>
+                  <a:srgbClr val="DCDCAA"/>
+                </a:solidFill>
+                <a:latin typeface="Courier New" pitchFamily="34" charset="0"/>
+                <a:ea typeface="Courier New" pitchFamily="34" charset="-122"/>
+                <a:cs typeface="Courier New" pitchFamily="34" charset="-120"/>
+              </a:rPr>
+              <a:t>get</a:t>
+            </a:r>
+            <a:pPr indent="0" marL="0">
+              <a:buNone/>
+            </a:pPr>
+            <a:r>
+              <a:rPr lang="en-US" sz="1000" dirty="0">
+                <a:solidFill>
+                  <a:srgbClr val="DA70D6"/>
+                </a:solidFill>
+                <a:latin typeface="Courier New" pitchFamily="34" charset="0"/>
+                <a:ea typeface="Courier New" pitchFamily="34" charset="-122"/>
+                <a:cs typeface="Courier New" pitchFamily="34" charset="-120"/>
+              </a:rPr>
+              <a:t>(</a:t>
+            </a:r>
+            <a:pPr indent="0" marL="0">
+              <a:buNone/>
+            </a:pPr>
+            <a:r>
+              <a:rPr lang="en-US" sz="1000" dirty="0">
+                <a:solidFill>
+                  <a:srgbClr val="CE9178"/>
+                </a:solidFill>
+                <a:latin typeface="Courier New" pitchFamily="34" charset="0"/>
+                <a:ea typeface="Courier New" pitchFamily="34" charset="-122"/>
+                <a:cs typeface="Courier New" pitchFamily="34" charset="-120"/>
+              </a:rPr>
+              <a:t>`</a:t>
+            </a:r>
+            <a:pPr indent="0" marL="0">
+              <a:buNone/>
+            </a:pPr>
+            <a:r>
+              <a:rPr lang="en-US" sz="1000" dirty="0">
+                <a:solidFill>
+                  <a:srgbClr val="569CD6"/>
+                </a:solidFill>
+                <a:latin typeface="Courier New" pitchFamily="34" charset="0"/>
+                <a:ea typeface="Courier New" pitchFamily="34" charset="-122"/>
+                <a:cs typeface="Courier New" pitchFamily="34" charset="-120"/>
+              </a:rPr>
+              <a:t>${</a:t>
+            </a:r>
+            <a:pPr indent="0" marL="0">
+              <a:buNone/>
+            </a:pPr>
+            <a:r>
+              <a:rPr lang="en-US" sz="1000" dirty="0">
+                <a:solidFill>
+                  <a:srgbClr val="9CDCFE"/>
+                </a:solidFill>
+                <a:latin typeface="Courier New" pitchFamily="34" charset="0"/>
+                <a:ea typeface="Courier New" pitchFamily="34" charset="-122"/>
+                <a:cs typeface="Courier New" pitchFamily="34" charset="-120"/>
+              </a:rPr>
+              <a:t>P</a:t>
+            </a:r>
+            <a:pPr indent="0" marL="0">
+              <a:buNone/>
+            </a:pPr>
+            <a:r>
+              <a:rPr lang="en-US" sz="1000" dirty="0">
+                <a:solidFill>
+                  <a:srgbClr val="569CD6"/>
+                </a:solidFill>
+                <a:latin typeface="Courier New" pitchFamily="34" charset="0"/>
+                <a:ea typeface="Courier New" pitchFamily="34" charset="-122"/>
+                <a:cs typeface="Courier New" pitchFamily="34" charset="-120"/>
+              </a:rPr>
+              <a:t>}</a:t>
+            </a:r>
+            <a:pPr indent="0" marL="0">
+              <a:buNone/>
+            </a:pPr>
+            <a:r>
+              <a:rPr lang="en-US" sz="1000" dirty="0">
+                <a:solidFill>
+                  <a:srgbClr val="CE9178"/>
+                </a:solidFill>
+                <a:latin typeface="Courier New" pitchFamily="34" charset="0"/>
+                <a:ea typeface="Courier New" pitchFamily="34" charset="-122"/>
+                <a:cs typeface="Courier New" pitchFamily="34" charset="-120"/>
+              </a:rPr>
+              <a:t>/ClientesAtivos?$top=1&amp;$skip=5`</a:t>
+            </a:r>
+            <a:pPr indent="0" marL="0">
+              <a:buNone/>
+            </a:pPr>
+            <a:r>
+              <a:rPr lang="en-US" sz="1000" dirty="0">
+                <a:solidFill>
+                  <a:srgbClr val="DA70D6"/>
+                </a:solidFill>
+                <a:latin typeface="Courier New" pitchFamily="34" charset="0"/>
+                <a:ea typeface="Courier New" pitchFamily="34" charset="-122"/>
+                <a:cs typeface="Courier New" pitchFamily="34" charset="-120"/>
+              </a:rPr>
+              <a:t>)</a:t>
+            </a:r>
+            <a:endParaRPr lang="en-US" sz="1000" dirty="0"/>
+          </a:p>
+          <a:p>
+            <a:pPr indent="0" marL="0">
+              <a:buNone/>
+            </a:pPr>
+            <a:r>
+              <a:rPr lang="en-US" sz="1000" dirty="0">
+                <a:solidFill>
+                  <a:srgbClr val="CCCCCC"/>
+                </a:solidFill>
+                <a:latin typeface="Courier New" pitchFamily="34" charset="0"/>
+                <a:ea typeface="Courier New" pitchFamily="34" charset="-122"/>
+                <a:cs typeface="Courier New" pitchFamily="34" charset="-120"/>
+              </a:rPr>
+              <a:t>  </a:t>
+            </a:r>
+            <a:pPr indent="0" marL="0">
+              <a:buNone/>
+            </a:pPr>
+            <a:r>
+              <a:rPr lang="en-US" sz="1000" dirty="0">
+                <a:solidFill>
+                  <a:srgbClr val="569CD6"/>
+                </a:solidFill>
+                <a:latin typeface="Courier New" pitchFamily="34" charset="0"/>
+                <a:ea typeface="Courier New" pitchFamily="34" charset="-122"/>
+                <a:cs typeface="Courier New" pitchFamily="34" charset="-120"/>
+              </a:rPr>
+              <a:t>const</a:t>
+            </a:r>
+            <a:pPr indent="0" marL="0">
+              <a:buNone/>
+            </a:pPr>
+            <a:r>
+              <a:rPr lang="en-US" sz="1000" dirty="0">
+                <a:solidFill>
+                  <a:srgbClr val="CCCCCC"/>
+                </a:solidFill>
+                <a:latin typeface="Courier New" pitchFamily="34" charset="0"/>
+                <a:ea typeface="Courier New" pitchFamily="34" charset="-122"/>
+                <a:cs typeface="Courier New" pitchFamily="34" charset="-120"/>
+              </a:rPr>
+              <a:t> </a:t>
+            </a:r>
+            <a:pPr indent="0" marL="0">
+              <a:buNone/>
+            </a:pPr>
+            <a:r>
+              <a:rPr lang="en-US" sz="1000" dirty="0">
+                <a:solidFill>
+                  <a:srgbClr val="DA70D6"/>
+                </a:solidFill>
+                <a:latin typeface="Courier New" pitchFamily="34" charset="0"/>
+                <a:ea typeface="Courier New" pitchFamily="34" charset="-122"/>
+                <a:cs typeface="Courier New" pitchFamily="34" charset="-120"/>
+              </a:rPr>
+              <a:t>{</a:t>
+            </a:r>
+            <a:pPr indent="0" marL="0">
+              <a:buNone/>
+            </a:pPr>
+            <a:r>
+              <a:rPr lang="en-US" sz="1000" dirty="0">
+                <a:solidFill>
+                  <a:srgbClr val="CCCCCC"/>
+                </a:solidFill>
+                <a:latin typeface="Courier New" pitchFamily="34" charset="0"/>
+                <a:ea typeface="Courier New" pitchFamily="34" charset="-122"/>
+                <a:cs typeface="Courier New" pitchFamily="34" charset="-120"/>
+              </a:rPr>
+              <a:t> </a:t>
+            </a:r>
+            <a:pPr indent="0" marL="0">
+              <a:buNone/>
+            </a:pPr>
+            <a:r>
+              <a:rPr lang="en-US" sz="1000" dirty="0">
+                <a:solidFill>
+                  <a:srgbClr val="9CDCFE"/>
+                </a:solidFill>
+                <a:latin typeface="Courier New" pitchFamily="34" charset="0"/>
+                <a:ea typeface="Courier New" pitchFamily="34" charset="-122"/>
+                <a:cs typeface="Courier New" pitchFamily="34" charset="-120"/>
+              </a:rPr>
+              <a:t>data</a:t>
+            </a:r>
+            <a:pPr indent="0" marL="0">
+              <a:buNone/>
+            </a:pPr>
+            <a:r>
+              <a:rPr lang="en-US" sz="1000" dirty="0">
+                <a:solidFill>
+                  <a:srgbClr val="CCCCCC"/>
+                </a:solidFill>
+                <a:latin typeface="Courier New" pitchFamily="34" charset="0"/>
+                <a:ea typeface="Courier New" pitchFamily="34" charset="-122"/>
+                <a:cs typeface="Courier New" pitchFamily="34" charset="-120"/>
+              </a:rPr>
+              <a:t>: </a:t>
+            </a:r>
+            <a:pPr indent="0" marL="0">
+              <a:buNone/>
+            </a:pPr>
+            <a:r>
+              <a:rPr lang="en-US" sz="1000" dirty="0">
+                <a:solidFill>
+                  <a:srgbClr val="9CDCFE"/>
+                </a:solidFill>
+                <a:latin typeface="Courier New" pitchFamily="34" charset="0"/>
+                <a:ea typeface="Courier New" pitchFamily="34" charset="-122"/>
+                <a:cs typeface="Courier New" pitchFamily="34" charset="-120"/>
+              </a:rPr>
+              <a:t>novo</a:t>
+            </a:r>
+            <a:pPr indent="0" marL="0">
+              <a:buNone/>
+            </a:pPr>
+            <a:r>
+              <a:rPr lang="en-US" sz="1000" dirty="0">
+                <a:solidFill>
+                  <a:srgbClr val="CCCCCC"/>
+                </a:solidFill>
+                <a:latin typeface="Courier New" pitchFamily="34" charset="0"/>
+                <a:ea typeface="Courier New" pitchFamily="34" charset="-122"/>
+                <a:cs typeface="Courier New" pitchFamily="34" charset="-120"/>
+              </a:rPr>
+              <a:t> </a:t>
+            </a:r>
+            <a:pPr indent="0" marL="0">
+              <a:buNone/>
+            </a:pPr>
+            <a:r>
+              <a:rPr lang="en-US" sz="1000" dirty="0">
+                <a:solidFill>
+                  <a:srgbClr val="DA70D6"/>
+                </a:solidFill>
+                <a:latin typeface="Courier New" pitchFamily="34" charset="0"/>
+                <a:ea typeface="Courier New" pitchFamily="34" charset="-122"/>
+                <a:cs typeface="Courier New" pitchFamily="34" charset="-120"/>
+              </a:rPr>
+              <a:t>}</a:t>
+            </a:r>
+            <a:pPr indent="0" marL="0">
+              <a:buNone/>
+            </a:pPr>
+            <a:r>
+              <a:rPr lang="en-US" sz="1000" dirty="0">
+                <a:solidFill>
+                  <a:srgbClr val="CCCCCC"/>
+                </a:solidFill>
+                <a:latin typeface="Courier New" pitchFamily="34" charset="0"/>
+                <a:ea typeface="Courier New" pitchFamily="34" charset="-122"/>
+                <a:cs typeface="Courier New" pitchFamily="34" charset="-120"/>
+              </a:rPr>
+              <a:t> = </a:t>
+            </a:r>
+            <a:pPr indent="0" marL="0">
+              <a:buNone/>
+            </a:pPr>
+            <a:r>
+              <a:rPr lang="en-US" sz="1000" dirty="0">
+                <a:solidFill>
+                  <a:srgbClr val="C586C0"/>
+                </a:solidFill>
+                <a:latin typeface="Courier New" pitchFamily="34" charset="0"/>
+                <a:ea typeface="Courier New" pitchFamily="34" charset="-122"/>
+                <a:cs typeface="Courier New" pitchFamily="34" charset="-120"/>
+              </a:rPr>
+              <a:t>await</a:t>
+            </a:r>
+            <a:pPr indent="0" marL="0">
+              <a:buNone/>
+            </a:pPr>
+            <a:r>
+              <a:rPr lang="en-US" sz="1000" dirty="0">
+                <a:solidFill>
+                  <a:srgbClr val="CCCCCC"/>
+                </a:solidFill>
+                <a:latin typeface="Courier New" pitchFamily="34" charset="0"/>
+                <a:ea typeface="Courier New" pitchFamily="34" charset="-122"/>
+                <a:cs typeface="Courier New" pitchFamily="34" charset="-120"/>
+              </a:rPr>
+              <a:t> </a:t>
+            </a:r>
+            <a:pPr indent="0" marL="0">
+              <a:buNone/>
+            </a:pPr>
+            <a:r>
+              <a:rPr lang="en-US" sz="1000" dirty="0">
+                <a:solidFill>
+                  <a:srgbClr val="9CDCFE"/>
+                </a:solidFill>
+                <a:latin typeface="Courier New" pitchFamily="34" charset="0"/>
+                <a:ea typeface="Courier New" pitchFamily="34" charset="-122"/>
+                <a:cs typeface="Courier New" pitchFamily="34" charset="-120"/>
+              </a:rPr>
+              <a:t>api</a:t>
+            </a:r>
+            <a:pPr indent="0" marL="0">
+              <a:buNone/>
+            </a:pPr>
+            <a:r>
+              <a:rPr lang="en-US" sz="1000" dirty="0">
+                <a:solidFill>
+                  <a:srgbClr val="CCCCCC"/>
+                </a:solidFill>
+                <a:latin typeface="Courier New" pitchFamily="34" charset="0"/>
+                <a:ea typeface="Courier New" pitchFamily="34" charset="-122"/>
+                <a:cs typeface="Courier New" pitchFamily="34" charset="-120"/>
+              </a:rPr>
+              <a:t>.</a:t>
+            </a:r>
+            <a:pPr indent="0" marL="0">
+              <a:buNone/>
+            </a:pPr>
+            <a:r>
+              <a:rPr lang="en-US" sz="1000" dirty="0">
+                <a:solidFill>
+                  <a:srgbClr val="DCDCAA"/>
+                </a:solidFill>
+                <a:latin typeface="Courier New" pitchFamily="34" charset="0"/>
+                <a:ea typeface="Courier New" pitchFamily="34" charset="-122"/>
+                <a:cs typeface="Courier New" pitchFamily="34" charset="-120"/>
+              </a:rPr>
+              <a:t>post</a:t>
+            </a:r>
+            <a:pPr indent="0" marL="0">
+              <a:buNone/>
+            </a:pPr>
+            <a:r>
+              <a:rPr lang="en-US" sz="1000" dirty="0">
+                <a:solidFill>
+                  <a:srgbClr val="DA70D6"/>
+                </a:solidFill>
+                <a:latin typeface="Courier New" pitchFamily="34" charset="0"/>
+                <a:ea typeface="Courier New" pitchFamily="34" charset="-122"/>
+                <a:cs typeface="Courier New" pitchFamily="34" charset="-120"/>
+              </a:rPr>
+              <a:t>(</a:t>
+            </a:r>
+            <a:pPr indent="0" marL="0">
+              <a:buNone/>
+            </a:pPr>
+            <a:r>
+              <a:rPr lang="en-US" sz="1000" dirty="0">
+                <a:solidFill>
+                  <a:srgbClr val="CE9178"/>
+                </a:solidFill>
+                <a:latin typeface="Courier New" pitchFamily="34" charset="0"/>
+                <a:ea typeface="Courier New" pitchFamily="34" charset="-122"/>
+                <a:cs typeface="Courier New" pitchFamily="34" charset="-120"/>
+              </a:rPr>
+              <a:t>`</a:t>
+            </a:r>
+            <a:pPr indent="0" marL="0">
+              <a:buNone/>
+            </a:pPr>
+            <a:r>
+              <a:rPr lang="en-US" sz="1000" dirty="0">
+                <a:solidFill>
+                  <a:srgbClr val="569CD6"/>
+                </a:solidFill>
+                <a:latin typeface="Courier New" pitchFamily="34" charset="0"/>
+                <a:ea typeface="Courier New" pitchFamily="34" charset="-122"/>
+                <a:cs typeface="Courier New" pitchFamily="34" charset="-120"/>
+              </a:rPr>
+              <a:t>${</a:t>
+            </a:r>
+            <a:pPr indent="0" marL="0">
+              <a:buNone/>
+            </a:pPr>
+            <a:r>
+              <a:rPr lang="en-US" sz="1000" dirty="0">
+                <a:solidFill>
+                  <a:srgbClr val="9CDCFE"/>
+                </a:solidFill>
+                <a:latin typeface="Courier New" pitchFamily="34" charset="0"/>
+                <a:ea typeface="Courier New" pitchFamily="34" charset="-122"/>
+                <a:cs typeface="Courier New" pitchFamily="34" charset="-120"/>
+              </a:rPr>
+              <a:t>P</a:t>
+            </a:r>
+            <a:pPr indent="0" marL="0">
+              <a:buNone/>
+            </a:pPr>
+            <a:r>
+              <a:rPr lang="en-US" sz="1000" dirty="0">
+                <a:solidFill>
+                  <a:srgbClr val="569CD6"/>
+                </a:solidFill>
+                <a:latin typeface="Courier New" pitchFamily="34" charset="0"/>
+                <a:ea typeface="Courier New" pitchFamily="34" charset="-122"/>
+                <a:cs typeface="Courier New" pitchFamily="34" charset="-120"/>
+              </a:rPr>
+              <a:t>}</a:t>
+            </a:r>
+            <a:pPr indent="0" marL="0">
+              <a:buNone/>
+            </a:pPr>
+            <a:r>
+              <a:rPr lang="en-US" sz="1000" dirty="0">
+                <a:solidFill>
+                  <a:srgbClr val="CE9178"/>
+                </a:solidFill>
+                <a:latin typeface="Courier New" pitchFamily="34" charset="0"/>
+                <a:ea typeface="Courier New" pitchFamily="34" charset="-122"/>
+                <a:cs typeface="Courier New" pitchFamily="34" charset="-120"/>
+              </a:rPr>
+              <a:t>/Pedidos`</a:t>
+            </a:r>
+            <a:pPr indent="0" marL="0">
+              <a:buNone/>
+            </a:pPr>
+            <a:r>
+              <a:rPr lang="en-US" sz="1000" dirty="0">
+                <a:solidFill>
+                  <a:srgbClr val="CCCCCC"/>
+                </a:solidFill>
+                <a:latin typeface="Courier New" pitchFamily="34" charset="0"/>
+                <a:ea typeface="Courier New" pitchFamily="34" charset="-122"/>
+                <a:cs typeface="Courier New" pitchFamily="34" charset="-120"/>
+              </a:rPr>
+              <a:t>, </a:t>
+            </a:r>
+            <a:pPr indent="0" marL="0">
+              <a:buNone/>
+            </a:pPr>
+            <a:r>
+              <a:rPr lang="en-US" sz="1000" dirty="0">
+                <a:solidFill>
+                  <a:srgbClr val="179FFF"/>
+                </a:solidFill>
+                <a:latin typeface="Courier New" pitchFamily="34" charset="0"/>
+                <a:ea typeface="Courier New" pitchFamily="34" charset="-122"/>
+                <a:cs typeface="Courier New" pitchFamily="34" charset="-120"/>
+              </a:rPr>
+              <a:t>{}</a:t>
+            </a:r>
+            <a:pPr indent="0" marL="0">
+              <a:buNone/>
+            </a:pPr>
+            <a:r>
+              <a:rPr lang="en-US" sz="1000" dirty="0">
+                <a:solidFill>
+                  <a:srgbClr val="DA70D6"/>
+                </a:solidFill>
+                <a:latin typeface="Courier New" pitchFamily="34" charset="0"/>
+                <a:ea typeface="Courier New" pitchFamily="34" charset="-122"/>
+                <a:cs typeface="Courier New" pitchFamily="34" charset="-120"/>
+              </a:rPr>
+              <a:t>)</a:t>
+            </a:r>
+            <a:endParaRPr lang="en-US" sz="1000" dirty="0"/>
+          </a:p>
+          <a:p>
+            <a:pPr indent="0" marL="0">
+              <a:buNone/>
+            </a:pPr>
+            <a:r>
+              <a:rPr lang="en-US" sz="1000" dirty="0">
+                <a:solidFill>
+                  <a:srgbClr val="CCCCCC"/>
+                </a:solidFill>
+                <a:latin typeface="Courier New" pitchFamily="34" charset="0"/>
+                <a:ea typeface="Courier New" pitchFamily="34" charset="-122"/>
+                <a:cs typeface="Courier New" pitchFamily="34" charset="-120"/>
+              </a:rPr>
+              <a:t>  </a:t>
+            </a:r>
+            <a:pPr indent="0" marL="0">
+              <a:buNone/>
+            </a:pPr>
+            <a:r>
+              <a:rPr lang="en-US" sz="1000" dirty="0">
+                <a:solidFill>
+                  <a:srgbClr val="C586C0"/>
+                </a:solidFill>
+                <a:latin typeface="Courier New" pitchFamily="34" charset="0"/>
+                <a:ea typeface="Courier New" pitchFamily="34" charset="-122"/>
+                <a:cs typeface="Courier New" pitchFamily="34" charset="-120"/>
+              </a:rPr>
+              <a:t>await</a:t>
+            </a:r>
+            <a:pPr indent="0" marL="0">
+              <a:buNone/>
+            </a:pPr>
+            <a:r>
+              <a:rPr lang="en-US" sz="1000" dirty="0">
+                <a:solidFill>
+                  <a:srgbClr val="CCCCCC"/>
+                </a:solidFill>
+                <a:latin typeface="Courier New" pitchFamily="34" charset="0"/>
+                <a:ea typeface="Courier New" pitchFamily="34" charset="-122"/>
+                <a:cs typeface="Courier New" pitchFamily="34" charset="-120"/>
+              </a:rPr>
+              <a:t> </a:t>
+            </a:r>
+            <a:pPr indent="0" marL="0">
+              <a:buNone/>
+            </a:pPr>
+            <a:r>
+              <a:rPr lang="en-US" sz="1000" dirty="0">
+                <a:solidFill>
+                  <a:srgbClr val="9CDCFE"/>
+                </a:solidFill>
+                <a:latin typeface="Courier New" pitchFamily="34" charset="0"/>
+                <a:ea typeface="Courier New" pitchFamily="34" charset="-122"/>
+                <a:cs typeface="Courier New" pitchFamily="34" charset="-120"/>
+              </a:rPr>
+              <a:t>api</a:t>
+            </a:r>
+            <a:pPr indent="0" marL="0">
+              <a:buNone/>
+            </a:pPr>
+            <a:r>
+              <a:rPr lang="en-US" sz="1000" dirty="0">
+                <a:solidFill>
+                  <a:srgbClr val="CCCCCC"/>
+                </a:solidFill>
+                <a:latin typeface="Courier New" pitchFamily="34" charset="0"/>
+                <a:ea typeface="Courier New" pitchFamily="34" charset="-122"/>
+                <a:cs typeface="Courier New" pitchFamily="34" charset="-120"/>
+              </a:rPr>
+              <a:t>.</a:t>
+            </a:r>
+            <a:pPr indent="0" marL="0">
+              <a:buNone/>
+            </a:pPr>
+            <a:r>
+              <a:rPr lang="en-US" sz="1000" dirty="0">
+                <a:solidFill>
+                  <a:srgbClr val="DCDCAA"/>
+                </a:solidFill>
+                <a:latin typeface="Courier New" pitchFamily="34" charset="0"/>
+                <a:ea typeface="Courier New" pitchFamily="34" charset="-122"/>
+                <a:cs typeface="Courier New" pitchFamily="34" charset="-120"/>
+              </a:rPr>
+              <a:t>patch</a:t>
+            </a:r>
+            <a:pPr indent="0" marL="0">
+              <a:buNone/>
+            </a:pPr>
+            <a:r>
+              <a:rPr lang="en-US" sz="1000" dirty="0">
+                <a:solidFill>
+                  <a:srgbClr val="DA70D6"/>
+                </a:solidFill>
+                <a:latin typeface="Courier New" pitchFamily="34" charset="0"/>
+                <a:ea typeface="Courier New" pitchFamily="34" charset="-122"/>
+                <a:cs typeface="Courier New" pitchFamily="34" charset="-120"/>
+              </a:rPr>
+              <a:t>(</a:t>
+            </a:r>
+            <a:pPr indent="0" marL="0">
+              <a:buNone/>
+            </a:pPr>
+            <a:r>
+              <a:rPr lang="en-US" sz="1000" dirty="0">
+                <a:solidFill>
+                  <a:srgbClr val="CE9178"/>
+                </a:solidFill>
+                <a:latin typeface="Courier New" pitchFamily="34" charset="0"/>
+                <a:ea typeface="Courier New" pitchFamily="34" charset="-122"/>
+                <a:cs typeface="Courier New" pitchFamily="34" charset="-120"/>
+              </a:rPr>
+              <a:t>`</a:t>
+            </a:r>
+            <a:pPr indent="0" marL="0">
+              <a:buNone/>
+            </a:pPr>
+            <a:r>
+              <a:rPr lang="en-US" sz="1000" dirty="0">
+                <a:solidFill>
+                  <a:srgbClr val="569CD6"/>
+                </a:solidFill>
+                <a:latin typeface="Courier New" pitchFamily="34" charset="0"/>
+                <a:ea typeface="Courier New" pitchFamily="34" charset="-122"/>
+                <a:cs typeface="Courier New" pitchFamily="34" charset="-120"/>
+              </a:rPr>
+              <a:t>${</a:t>
+            </a:r>
+            <a:pPr indent="0" marL="0">
+              <a:buNone/>
+            </a:pPr>
+            <a:r>
+              <a:rPr lang="en-US" sz="1000" dirty="0">
+                <a:solidFill>
+                  <a:srgbClr val="9CDCFE"/>
+                </a:solidFill>
+                <a:latin typeface="Courier New" pitchFamily="34" charset="0"/>
+                <a:ea typeface="Courier New" pitchFamily="34" charset="-122"/>
+                <a:cs typeface="Courier New" pitchFamily="34" charset="-120"/>
+              </a:rPr>
+              <a:t>P</a:t>
+            </a:r>
+            <a:pPr indent="0" marL="0">
+              <a:buNone/>
+            </a:pPr>
+            <a:r>
+              <a:rPr lang="en-US" sz="1000" dirty="0">
+                <a:solidFill>
+                  <a:srgbClr val="569CD6"/>
+                </a:solidFill>
+                <a:latin typeface="Courier New" pitchFamily="34" charset="0"/>
+                <a:ea typeface="Courier New" pitchFamily="34" charset="-122"/>
+                <a:cs typeface="Courier New" pitchFamily="34" charset="-120"/>
+              </a:rPr>
+              <a:t>}</a:t>
+            </a:r>
+            <a:pPr indent="0" marL="0">
+              <a:buNone/>
+            </a:pPr>
+            <a:r>
+              <a:rPr lang="en-US" sz="1000" dirty="0">
+                <a:solidFill>
+                  <a:srgbClr val="CE9178"/>
+                </a:solidFill>
+                <a:latin typeface="Courier New" pitchFamily="34" charset="0"/>
+                <a:ea typeface="Courier New" pitchFamily="34" charset="-122"/>
+                <a:cs typeface="Courier New" pitchFamily="34" charset="-120"/>
+              </a:rPr>
+              <a:t>/Pedidos</a:t>
+            </a:r>
+            <a:pPr indent="0" marL="0">
+              <a:buNone/>
+            </a:pPr>
+            <a:r>
+              <a:rPr lang="en-US" sz="1000" dirty="0">
+                <a:solidFill>
+                  <a:srgbClr val="569CD6"/>
+                </a:solidFill>
+                <a:latin typeface="Courier New" pitchFamily="34" charset="0"/>
+                <a:ea typeface="Courier New" pitchFamily="34" charset="-122"/>
+                <a:cs typeface="Courier New" pitchFamily="34" charset="-120"/>
+              </a:rPr>
+              <a:t>${</a:t>
+            </a:r>
+            <a:pPr indent="0" marL="0">
+              <a:buNone/>
+            </a:pPr>
+            <a:r>
+              <a:rPr lang="en-US" sz="1000" dirty="0">
+                <a:solidFill>
+                  <a:srgbClr val="9CDCFE"/>
+                </a:solidFill>
+                <a:latin typeface="Courier New" pitchFamily="34" charset="0"/>
+                <a:ea typeface="Courier New" pitchFamily="34" charset="-122"/>
+                <a:cs typeface="Courier New" pitchFamily="34" charset="-120"/>
+              </a:rPr>
+              <a:t>api</a:t>
+            </a:r>
+            <a:pPr indent="0" marL="0">
+              <a:buNone/>
+            </a:pPr>
+            <a:r>
+              <a:rPr lang="en-US" sz="1000" dirty="0">
+                <a:solidFill>
+                  <a:srgbClr val="CCCCCC"/>
+                </a:solidFill>
+                <a:latin typeface="Courier New" pitchFamily="34" charset="0"/>
+                <a:ea typeface="Courier New" pitchFamily="34" charset="-122"/>
+                <a:cs typeface="Courier New" pitchFamily="34" charset="-120"/>
+              </a:rPr>
+              <a:t>.</a:t>
+            </a:r>
+            <a:pPr indent="0" marL="0">
+              <a:buNone/>
+            </a:pPr>
+            <a:r>
+              <a:rPr lang="en-US" sz="1000" dirty="0">
+                <a:solidFill>
+                  <a:srgbClr val="9CDCFE"/>
+                </a:solidFill>
+                <a:latin typeface="Courier New" pitchFamily="34" charset="0"/>
+                <a:ea typeface="Courier New" pitchFamily="34" charset="-122"/>
+                <a:cs typeface="Courier New" pitchFamily="34" charset="-120"/>
+              </a:rPr>
+              <a:t>chave(novo</a:t>
+            </a:r>
+            <a:pPr indent="0" marL="0">
+              <a:buNone/>
+            </a:pPr>
+            <a:r>
+              <a:rPr lang="en-US" sz="1000" dirty="0">
+                <a:solidFill>
+                  <a:srgbClr val="CCCCCC"/>
+                </a:solidFill>
+                <a:latin typeface="Courier New" pitchFamily="34" charset="0"/>
+                <a:ea typeface="Courier New" pitchFamily="34" charset="-122"/>
+                <a:cs typeface="Courier New" pitchFamily="34" charset="-120"/>
+              </a:rPr>
+              <a:t>.</a:t>
+            </a:r>
+            <a:pPr indent="0" marL="0">
+              <a:buNone/>
+            </a:pPr>
+            <a:r>
+              <a:rPr lang="en-US" sz="1000" dirty="0">
+                <a:solidFill>
+                  <a:srgbClr val="9CDCFE"/>
+                </a:solidFill>
+                <a:latin typeface="Courier New" pitchFamily="34" charset="0"/>
+                <a:ea typeface="Courier New" pitchFamily="34" charset="-122"/>
+                <a:cs typeface="Courier New" pitchFamily="34" charset="-120"/>
+              </a:rPr>
+              <a:t>ID, false)</a:t>
+            </a:r>
+            <a:pPr indent="0" marL="0">
+              <a:buNone/>
+            </a:pPr>
+            <a:r>
+              <a:rPr lang="en-US" sz="1000" dirty="0">
+                <a:solidFill>
+                  <a:srgbClr val="569CD6"/>
+                </a:solidFill>
+                <a:latin typeface="Courier New" pitchFamily="34" charset="0"/>
+                <a:ea typeface="Courier New" pitchFamily="34" charset="-122"/>
+                <a:cs typeface="Courier New" pitchFamily="34" charset="-120"/>
+              </a:rPr>
+              <a:t>}</a:t>
+            </a:r>
+            <a:pPr indent="0" marL="0">
+              <a:buNone/>
+            </a:pPr>
+            <a:r>
+              <a:rPr lang="en-US" sz="1000" dirty="0">
+                <a:solidFill>
+                  <a:srgbClr val="CE9178"/>
+                </a:solidFill>
+                <a:latin typeface="Courier New" pitchFamily="34" charset="0"/>
+                <a:ea typeface="Courier New" pitchFamily="34" charset="-122"/>
+                <a:cs typeface="Courier New" pitchFamily="34" charset="-120"/>
+              </a:rPr>
+              <a:t>`</a:t>
+            </a:r>
+            <a:pPr indent="0" marL="0">
+              <a:buNone/>
+            </a:pPr>
+            <a:r>
+              <a:rPr lang="en-US" sz="1000" dirty="0">
+                <a:solidFill>
+                  <a:srgbClr val="CCCCCC"/>
+                </a:solidFill>
+                <a:latin typeface="Courier New" pitchFamily="34" charset="0"/>
+                <a:ea typeface="Courier New" pitchFamily="34" charset="-122"/>
+                <a:cs typeface="Courier New" pitchFamily="34" charset="-120"/>
+              </a:rPr>
+              <a:t>,</a:t>
+            </a:r>
+            <a:endParaRPr lang="en-US" sz="1000" dirty="0"/>
+          </a:p>
+          <a:p>
+            <a:pPr indent="0" marL="0">
+              <a:buNone/>
+            </a:pPr>
+            <a:r>
+              <a:rPr lang="en-US" sz="1000" dirty="0">
+                <a:solidFill>
+                  <a:srgbClr val="CCCCCC"/>
+                </a:solidFill>
+                <a:latin typeface="Courier New" pitchFamily="34" charset="0"/>
+                <a:ea typeface="Courier New" pitchFamily="34" charset="-122"/>
+                <a:cs typeface="Courier New" pitchFamily="34" charset="-120"/>
+              </a:rPr>
+              <a:t>    </a:t>
+            </a:r>
+            <a:pPr indent="0" marL="0">
+              <a:buNone/>
+            </a:pPr>
+            <a:r>
+              <a:rPr lang="en-US" sz="1000" dirty="0">
+                <a:solidFill>
+                  <a:srgbClr val="179FFF"/>
+                </a:solidFill>
+                <a:latin typeface="Courier New" pitchFamily="34" charset="0"/>
+                <a:ea typeface="Courier New" pitchFamily="34" charset="-122"/>
+                <a:cs typeface="Courier New" pitchFamily="34" charset="-120"/>
+              </a:rPr>
+              <a:t>{</a:t>
+            </a:r>
+            <a:pPr indent="0" marL="0">
+              <a:buNone/>
+            </a:pPr>
+            <a:r>
+              <a:rPr lang="en-US" sz="1000" dirty="0">
+                <a:solidFill>
+                  <a:srgbClr val="CCCCCC"/>
+                </a:solidFill>
+                <a:latin typeface="Courier New" pitchFamily="34" charset="0"/>
+                <a:ea typeface="Courier New" pitchFamily="34" charset="-122"/>
+                <a:cs typeface="Courier New" pitchFamily="34" charset="-120"/>
+              </a:rPr>
+              <a:t> </a:t>
+            </a:r>
+            <a:pPr indent="0" marL="0">
+              <a:buNone/>
+            </a:pPr>
+            <a:r>
+              <a:rPr lang="en-US" sz="1000" dirty="0">
+                <a:solidFill>
+                  <a:srgbClr val="9CDCFE"/>
+                </a:solidFill>
+                <a:latin typeface="Courier New" pitchFamily="34" charset="0"/>
+                <a:ea typeface="Courier New" pitchFamily="34" charset="-122"/>
+                <a:cs typeface="Courier New" pitchFamily="34" charset="-120"/>
+              </a:rPr>
+              <a:t>cliente_ID</a:t>
+            </a:r>
+            <a:pPr indent="0" marL="0">
+              <a:buNone/>
+            </a:pPr>
+            <a:r>
+              <a:rPr lang="en-US" sz="1000" dirty="0">
+                <a:solidFill>
+                  <a:srgbClr val="CCCCCC"/>
+                </a:solidFill>
+                <a:latin typeface="Courier New" pitchFamily="34" charset="0"/>
+                <a:ea typeface="Courier New" pitchFamily="34" charset="-122"/>
+                <a:cs typeface="Courier New" pitchFamily="34" charset="-120"/>
+              </a:rPr>
+              <a:t>: </a:t>
+            </a:r>
+            <a:pPr indent="0" marL="0">
+              <a:buNone/>
+            </a:pPr>
+            <a:r>
+              <a:rPr lang="en-US" sz="1000" dirty="0">
+                <a:solidFill>
+                  <a:srgbClr val="9CDCFE"/>
+                </a:solidFill>
+                <a:latin typeface="Courier New" pitchFamily="34" charset="0"/>
+                <a:ea typeface="Courier New" pitchFamily="34" charset="-122"/>
+                <a:cs typeface="Courier New" pitchFamily="34" charset="-120"/>
+              </a:rPr>
+              <a:t>cliente</a:t>
+            </a:r>
+            <a:pPr indent="0" marL="0">
+              <a:buNone/>
+            </a:pPr>
+            <a:r>
+              <a:rPr lang="en-US" sz="1000" dirty="0">
+                <a:solidFill>
+                  <a:srgbClr val="CCCCCC"/>
+                </a:solidFill>
+                <a:latin typeface="Courier New" pitchFamily="34" charset="0"/>
+                <a:ea typeface="Courier New" pitchFamily="34" charset="-122"/>
+                <a:cs typeface="Courier New" pitchFamily="34" charset="-120"/>
+              </a:rPr>
+              <a:t>.</a:t>
+            </a:r>
+            <a:pPr indent="0" marL="0">
+              <a:buNone/>
+            </a:pPr>
+            <a:r>
+              <a:rPr lang="en-US" sz="1000" dirty="0">
+                <a:solidFill>
+                  <a:srgbClr val="9CDCFE"/>
+                </a:solidFill>
+                <a:latin typeface="Courier New" pitchFamily="34" charset="0"/>
+                <a:ea typeface="Courier New" pitchFamily="34" charset="-122"/>
+                <a:cs typeface="Courier New" pitchFamily="34" charset="-120"/>
+              </a:rPr>
+              <a:t>value</a:t>
+            </a:r>
+            <a:pPr indent="0" marL="0">
+              <a:buNone/>
+            </a:pPr>
+            <a:r>
+              <a:rPr lang="en-US" sz="1000" dirty="0">
+                <a:solidFill>
+                  <a:srgbClr val="FFD700"/>
+                </a:solidFill>
+                <a:latin typeface="Courier New" pitchFamily="34" charset="0"/>
+                <a:ea typeface="Courier New" pitchFamily="34" charset="-122"/>
+                <a:cs typeface="Courier New" pitchFamily="34" charset="-120"/>
+              </a:rPr>
+              <a:t>[</a:t>
+            </a:r>
+            <a:pPr indent="0" marL="0">
+              <a:buNone/>
+            </a:pPr>
+            <a:r>
+              <a:rPr lang="en-US" sz="1000" dirty="0">
+                <a:solidFill>
+                  <a:srgbClr val="B5CEA8"/>
+                </a:solidFill>
+                <a:latin typeface="Courier New" pitchFamily="34" charset="0"/>
+                <a:ea typeface="Courier New" pitchFamily="34" charset="-122"/>
+                <a:cs typeface="Courier New" pitchFamily="34" charset="-120"/>
+              </a:rPr>
+              <a:t>0</a:t>
+            </a:r>
+            <a:pPr indent="0" marL="0">
+              <a:buNone/>
+            </a:pPr>
+            <a:r>
+              <a:rPr lang="en-US" sz="1000" dirty="0">
+                <a:solidFill>
+                  <a:srgbClr val="FFD700"/>
+                </a:solidFill>
+                <a:latin typeface="Courier New" pitchFamily="34" charset="0"/>
+                <a:ea typeface="Courier New" pitchFamily="34" charset="-122"/>
+                <a:cs typeface="Courier New" pitchFamily="34" charset="-120"/>
+              </a:rPr>
+              <a:t>]</a:t>
+            </a:r>
+            <a:pPr indent="0" marL="0">
+              <a:buNone/>
+            </a:pPr>
+            <a:r>
+              <a:rPr lang="en-US" sz="1000" dirty="0">
+                <a:solidFill>
+                  <a:srgbClr val="CCCCCC"/>
+                </a:solidFill>
+                <a:latin typeface="Courier New" pitchFamily="34" charset="0"/>
+                <a:ea typeface="Courier New" pitchFamily="34" charset="-122"/>
+                <a:cs typeface="Courier New" pitchFamily="34" charset="-120"/>
+              </a:rPr>
+              <a:t>.</a:t>
+            </a:r>
+            <a:pPr indent="0" marL="0">
+              <a:buNone/>
+            </a:pPr>
+            <a:r>
+              <a:rPr lang="en-US" sz="1000" dirty="0">
+                <a:solidFill>
+                  <a:srgbClr val="4FC1FF"/>
+                </a:solidFill>
+                <a:latin typeface="Courier New" pitchFamily="34" charset="0"/>
+                <a:ea typeface="Courier New" pitchFamily="34" charset="-122"/>
+                <a:cs typeface="Courier New" pitchFamily="34" charset="-120"/>
+              </a:rPr>
+              <a:t>ID</a:t>
+            </a:r>
+            <a:pPr indent="0" marL="0">
+              <a:buNone/>
+            </a:pPr>
+            <a:r>
+              <a:rPr lang="en-US" sz="1000" dirty="0">
+                <a:solidFill>
+                  <a:srgbClr val="CCCCCC"/>
+                </a:solidFill>
+                <a:latin typeface="Courier New" pitchFamily="34" charset="0"/>
+                <a:ea typeface="Courier New" pitchFamily="34" charset="-122"/>
+                <a:cs typeface="Courier New" pitchFamily="34" charset="-120"/>
+              </a:rPr>
+              <a:t> </a:t>
+            </a:r>
+            <a:pPr indent="0" marL="0">
+              <a:buNone/>
+            </a:pPr>
+            <a:r>
+              <a:rPr lang="en-US" sz="1000" dirty="0">
+                <a:solidFill>
+                  <a:srgbClr val="179FFF"/>
+                </a:solidFill>
+                <a:latin typeface="Courier New" pitchFamily="34" charset="0"/>
+                <a:ea typeface="Courier New" pitchFamily="34" charset="-122"/>
+                <a:cs typeface="Courier New" pitchFamily="34" charset="-120"/>
+              </a:rPr>
+              <a:t>}</a:t>
+            </a:r>
+            <a:pPr indent="0" marL="0">
+              <a:buNone/>
+            </a:pPr>
+            <a:r>
+              <a:rPr lang="en-US" sz="1000" dirty="0">
+                <a:solidFill>
+                  <a:srgbClr val="DA70D6"/>
+                </a:solidFill>
+                <a:latin typeface="Courier New" pitchFamily="34" charset="0"/>
+                <a:ea typeface="Courier New" pitchFamily="34" charset="-122"/>
+                <a:cs typeface="Courier New" pitchFamily="34" charset="-120"/>
+              </a:rPr>
+              <a:t>)</a:t>
+            </a:r>
+            <a:endParaRPr lang="en-US" sz="1000" dirty="0"/>
+          </a:p>
+          <a:p>
+            <a:pPr indent="0" marL="0">
+              <a:buNone/>
+            </a:pPr>
+            <a:r>
+              <a:rPr lang="en-US" sz="1000" dirty="0">
+                <a:solidFill>
+                  <a:srgbClr val="CCCCCC"/>
+                </a:solidFill>
+                <a:latin typeface="Courier New" pitchFamily="34" charset="0"/>
+                <a:ea typeface="Courier New" pitchFamily="34" charset="-122"/>
+                <a:cs typeface="Courier New" pitchFamily="34" charset="-120"/>
+              </a:rPr>
+              <a:t>  </a:t>
+            </a:r>
+            <a:pPr indent="0" marL="0">
+              <a:buNone/>
+            </a:pPr>
+            <a:r>
+              <a:rPr lang="en-US" sz="1000" dirty="0">
+                <a:solidFill>
+                  <a:srgbClr val="6A9955"/>
+                </a:solidFill>
+                <a:latin typeface="Courier New" pitchFamily="34" charset="0"/>
+                <a:ea typeface="Courier New" pitchFamily="34" charset="-122"/>
+                <a:cs typeface="Courier New" pitchFamily="34" charset="-120"/>
+              </a:rPr>
+              <a:t>// ... inclui uma linha com 2 unidades e ativa o rascunho</a:t>
+            </a:r>
+            <a:endParaRPr lang="en-US" sz="1000" dirty="0"/>
+          </a:p>
+          <a:p>
+            <a:pPr indent="0" marL="0">
+              <a:buNone/>
+            </a:pPr>
+            <a:r>
+              <a:rPr lang="en-US" sz="1000" dirty="0">
+                <a:solidFill>
+                  <a:srgbClr val="CCCCCC"/>
+                </a:solidFill>
+                <a:latin typeface="Courier New" pitchFamily="34" charset="0"/>
+                <a:ea typeface="Courier New" pitchFamily="34" charset="-122"/>
+                <a:cs typeface="Courier New" pitchFamily="34" charset="-120"/>
+              </a:rPr>
+              <a:t>  </a:t>
+            </a:r>
+            <a:pPr indent="0" marL="0">
+              <a:buNone/>
+            </a:pPr>
+            <a:r>
+              <a:rPr lang="en-US" sz="1000" dirty="0">
+                <a:solidFill>
+                  <a:srgbClr val="569CD6"/>
+                </a:solidFill>
+                <a:latin typeface="Courier New" pitchFamily="34" charset="0"/>
+                <a:ea typeface="Courier New" pitchFamily="34" charset="-122"/>
+                <a:cs typeface="Courier New" pitchFamily="34" charset="-120"/>
+              </a:rPr>
+              <a:t>const</a:t>
+            </a:r>
+            <a:pPr indent="0" marL="0">
+              <a:buNone/>
+            </a:pPr>
+            <a:r>
+              <a:rPr lang="en-US" sz="1000" dirty="0">
+                <a:solidFill>
+                  <a:srgbClr val="CCCCCC"/>
+                </a:solidFill>
+                <a:latin typeface="Courier New" pitchFamily="34" charset="0"/>
+                <a:ea typeface="Courier New" pitchFamily="34" charset="-122"/>
+                <a:cs typeface="Courier New" pitchFamily="34" charset="-120"/>
+              </a:rPr>
+              <a:t> </a:t>
+            </a:r>
+            <a:pPr indent="0" marL="0">
+              <a:buNone/>
+            </a:pPr>
+            <a:r>
+              <a:rPr lang="en-US" sz="1000" dirty="0">
+                <a:solidFill>
+                  <a:srgbClr val="9CDCFE"/>
+                </a:solidFill>
+                <a:latin typeface="Courier New" pitchFamily="34" charset="0"/>
+                <a:ea typeface="Courier New" pitchFamily="34" charset="-122"/>
+                <a:cs typeface="Courier New" pitchFamily="34" charset="-120"/>
+              </a:rPr>
+              <a:t>pedido</a:t>
+            </a:r>
+            <a:pPr indent="0" marL="0">
+              <a:buNone/>
+            </a:pPr>
+            <a:r>
+              <a:rPr lang="en-US" sz="1000" dirty="0">
+                <a:solidFill>
+                  <a:srgbClr val="CCCCCC"/>
+                </a:solidFill>
+                <a:latin typeface="Courier New" pitchFamily="34" charset="0"/>
+                <a:ea typeface="Courier New" pitchFamily="34" charset="-122"/>
+                <a:cs typeface="Courier New" pitchFamily="34" charset="-120"/>
+              </a:rPr>
+              <a:t> = </a:t>
+            </a:r>
+            <a:pPr indent="0" marL="0">
+              <a:buNone/>
+            </a:pPr>
+            <a:r>
+              <a:rPr lang="en-US" sz="1000" dirty="0">
+                <a:solidFill>
+                  <a:srgbClr val="C586C0"/>
+                </a:solidFill>
+                <a:latin typeface="Courier New" pitchFamily="34" charset="0"/>
+                <a:ea typeface="Courier New" pitchFamily="34" charset="-122"/>
+                <a:cs typeface="Courier New" pitchFamily="34" charset="-120"/>
+              </a:rPr>
+              <a:t>await</a:t>
+            </a:r>
+            <a:pPr indent="0" marL="0">
+              <a:buNone/>
+            </a:pPr>
+            <a:r>
+              <a:rPr lang="en-US" sz="1000" dirty="0">
+                <a:solidFill>
+                  <a:srgbClr val="CCCCCC"/>
+                </a:solidFill>
+                <a:latin typeface="Courier New" pitchFamily="34" charset="0"/>
+                <a:ea typeface="Courier New" pitchFamily="34" charset="-122"/>
+                <a:cs typeface="Courier New" pitchFamily="34" charset="-120"/>
+              </a:rPr>
+              <a:t> </a:t>
+            </a:r>
+            <a:pPr indent="0" marL="0">
+              <a:buNone/>
+            </a:pPr>
+            <a:r>
+              <a:rPr lang="en-US" sz="1000" dirty="0">
+                <a:solidFill>
+                  <a:srgbClr val="9CDCFE"/>
+                </a:solidFill>
+                <a:latin typeface="Courier New" pitchFamily="34" charset="0"/>
+                <a:ea typeface="Courier New" pitchFamily="34" charset="-122"/>
+                <a:cs typeface="Courier New" pitchFamily="34" charset="-120"/>
+              </a:rPr>
+              <a:t>api</a:t>
+            </a:r>
+            <a:pPr indent="0" marL="0">
+              <a:buNone/>
+            </a:pPr>
+            <a:r>
+              <a:rPr lang="en-US" sz="1000" dirty="0">
+                <a:solidFill>
+                  <a:srgbClr val="CCCCCC"/>
+                </a:solidFill>
+                <a:latin typeface="Courier New" pitchFamily="34" charset="0"/>
+                <a:ea typeface="Courier New" pitchFamily="34" charset="-122"/>
+                <a:cs typeface="Courier New" pitchFamily="34" charset="-120"/>
+              </a:rPr>
+              <a:t>.</a:t>
+            </a:r>
+            <a:pPr indent="0" marL="0">
+              <a:buNone/>
+            </a:pPr>
+            <a:r>
+              <a:rPr lang="en-US" sz="1000" dirty="0">
+                <a:solidFill>
+                  <a:srgbClr val="DCDCAA"/>
+                </a:solidFill>
+                <a:latin typeface="Courier New" pitchFamily="34" charset="0"/>
+                <a:ea typeface="Courier New" pitchFamily="34" charset="-122"/>
+                <a:cs typeface="Courier New" pitchFamily="34" charset="-120"/>
+              </a:rPr>
+              <a:t>ativar</a:t>
+            </a:r>
+            <a:pPr indent="0" marL="0">
+              <a:buNone/>
+            </a:pPr>
+            <a:r>
+              <a:rPr lang="en-US" sz="1000" dirty="0">
+                <a:solidFill>
+                  <a:srgbClr val="DA70D6"/>
+                </a:solidFill>
+                <a:latin typeface="Courier New" pitchFamily="34" charset="0"/>
+                <a:ea typeface="Courier New" pitchFamily="34" charset="-122"/>
+                <a:cs typeface="Courier New" pitchFamily="34" charset="-120"/>
+              </a:rPr>
+              <a:t>(</a:t>
+            </a:r>
+            <a:pPr indent="0" marL="0">
+              <a:buNone/>
+            </a:pPr>
+            <a:r>
+              <a:rPr lang="en-US" sz="1000" dirty="0">
+                <a:solidFill>
+                  <a:srgbClr val="4EC9B0"/>
+                </a:solidFill>
+                <a:latin typeface="Courier New" pitchFamily="34" charset="0"/>
+                <a:ea typeface="Courier New" pitchFamily="34" charset="-122"/>
+                <a:cs typeface="Courier New" pitchFamily="34" charset="-120"/>
+              </a:rPr>
+              <a:t>P</a:t>
+            </a:r>
+            <a:pPr indent="0" marL="0">
+              <a:buNone/>
+            </a:pPr>
+            <a:r>
+              <a:rPr lang="en-US" sz="1000" dirty="0">
+                <a:solidFill>
+                  <a:srgbClr val="CCCCCC"/>
+                </a:solidFill>
+                <a:latin typeface="Courier New" pitchFamily="34" charset="0"/>
+                <a:ea typeface="Courier New" pitchFamily="34" charset="-122"/>
+                <a:cs typeface="Courier New" pitchFamily="34" charset="-120"/>
+              </a:rPr>
+              <a:t>, </a:t>
+            </a:r>
+            <a:pPr indent="0" marL="0">
+              <a:buNone/>
+            </a:pPr>
+            <a:r>
+              <a:rPr lang="en-US" sz="1000" dirty="0">
+                <a:solidFill>
+                  <a:srgbClr val="CE9178"/>
+                </a:solidFill>
+                <a:latin typeface="Courier New" pitchFamily="34" charset="0"/>
+                <a:ea typeface="Courier New" pitchFamily="34" charset="-122"/>
+                <a:cs typeface="Courier New" pitchFamily="34" charset="-120"/>
+              </a:rPr>
+              <a:t>'Pedidos'</a:t>
+            </a:r>
+            <a:pPr indent="0" marL="0">
+              <a:buNone/>
+            </a:pPr>
+            <a:r>
+              <a:rPr lang="en-US" sz="1000" dirty="0">
+                <a:solidFill>
+                  <a:srgbClr val="CCCCCC"/>
+                </a:solidFill>
+                <a:latin typeface="Courier New" pitchFamily="34" charset="0"/>
+                <a:ea typeface="Courier New" pitchFamily="34" charset="-122"/>
+                <a:cs typeface="Courier New" pitchFamily="34" charset="-120"/>
+              </a:rPr>
+              <a:t>, </a:t>
+            </a:r>
+            <a:pPr indent="0" marL="0">
+              <a:buNone/>
+            </a:pPr>
+            <a:r>
+              <a:rPr lang="en-US" sz="1000" dirty="0">
+                <a:solidFill>
+                  <a:srgbClr val="9CDCFE"/>
+                </a:solidFill>
+                <a:latin typeface="Courier New" pitchFamily="34" charset="0"/>
+                <a:ea typeface="Courier New" pitchFamily="34" charset="-122"/>
+                <a:cs typeface="Courier New" pitchFamily="34" charset="-120"/>
+              </a:rPr>
+              <a:t>novo</a:t>
+            </a:r>
+            <a:pPr indent="0" marL="0">
+              <a:buNone/>
+            </a:pPr>
+            <a:r>
+              <a:rPr lang="en-US" sz="1000" dirty="0">
+                <a:solidFill>
+                  <a:srgbClr val="CCCCCC"/>
+                </a:solidFill>
+                <a:latin typeface="Courier New" pitchFamily="34" charset="0"/>
+                <a:ea typeface="Courier New" pitchFamily="34" charset="-122"/>
+                <a:cs typeface="Courier New" pitchFamily="34" charset="-120"/>
+              </a:rPr>
+              <a:t>.</a:t>
+            </a:r>
+            <a:pPr indent="0" marL="0">
+              <a:buNone/>
+            </a:pPr>
+            <a:r>
+              <a:rPr lang="en-US" sz="1000" dirty="0">
+                <a:solidFill>
+                  <a:srgbClr val="4FC1FF"/>
+                </a:solidFill>
+                <a:latin typeface="Courier New" pitchFamily="34" charset="0"/>
+                <a:ea typeface="Courier New" pitchFamily="34" charset="-122"/>
+                <a:cs typeface="Courier New" pitchFamily="34" charset="-120"/>
+              </a:rPr>
+              <a:t>ID</a:t>
+            </a:r>
+            <a:pPr indent="0" marL="0">
+              <a:buNone/>
+            </a:pPr>
+            <a:r>
+              <a:rPr lang="en-US" sz="1000" dirty="0">
+                <a:solidFill>
+                  <a:srgbClr val="DA70D6"/>
+                </a:solidFill>
+                <a:latin typeface="Courier New" pitchFamily="34" charset="0"/>
+                <a:ea typeface="Courier New" pitchFamily="34" charset="-122"/>
+                <a:cs typeface="Courier New" pitchFamily="34" charset="-120"/>
+              </a:rPr>
+              <a:t>)</a:t>
+            </a:r>
+            <a:endParaRPr lang="en-US" sz="1000" dirty="0"/>
+          </a:p>
+          <a:p>
+            <a:pPr indent="0" marL="0">
+              <a:buNone/>
+            </a:pPr>
+            <a:r>
+              <a:rPr lang="en-US" sz="1000" dirty="0">
+                <a:solidFill>
+                  <a:srgbClr val="CCCCCC"/>
+                </a:solidFill>
+                <a:latin typeface="Courier New" pitchFamily="34" charset="0"/>
+                <a:ea typeface="Courier New" pitchFamily="34" charset="-122"/>
+                <a:cs typeface="Courier New" pitchFamily="34" charset="-120"/>
+              </a:rPr>
+              <a:t>  </a:t>
+            </a:r>
+            <a:pPr indent="0" marL="0">
+              <a:buNone/>
+            </a:pPr>
+            <a:r>
+              <a:rPr lang="en-US" sz="1000" dirty="0">
+                <a:solidFill>
+                  <a:srgbClr val="C586C0"/>
+                </a:solidFill>
+                <a:latin typeface="Courier New" pitchFamily="34" charset="0"/>
+                <a:ea typeface="Courier New" pitchFamily="34" charset="-122"/>
+                <a:cs typeface="Courier New" pitchFamily="34" charset="-120"/>
+              </a:rPr>
+              <a:t>await</a:t>
+            </a:r>
+            <a:pPr indent="0" marL="0">
+              <a:buNone/>
+            </a:pPr>
+            <a:r>
+              <a:rPr lang="en-US" sz="1000" dirty="0">
+                <a:solidFill>
+                  <a:srgbClr val="CCCCCC"/>
+                </a:solidFill>
+                <a:latin typeface="Courier New" pitchFamily="34" charset="0"/>
+                <a:ea typeface="Courier New" pitchFamily="34" charset="-122"/>
+                <a:cs typeface="Courier New" pitchFamily="34" charset="-120"/>
+              </a:rPr>
+              <a:t> </a:t>
+            </a:r>
+            <a:pPr indent="0" marL="0">
+              <a:buNone/>
+            </a:pPr>
+            <a:r>
+              <a:rPr lang="en-US" sz="1000" dirty="0">
+                <a:solidFill>
+                  <a:srgbClr val="9CDCFE"/>
+                </a:solidFill>
+                <a:latin typeface="Courier New" pitchFamily="34" charset="0"/>
+                <a:ea typeface="Courier New" pitchFamily="34" charset="-122"/>
+                <a:cs typeface="Courier New" pitchFamily="34" charset="-120"/>
+              </a:rPr>
+              <a:t>api</a:t>
+            </a:r>
+            <a:pPr indent="0" marL="0">
+              <a:buNone/>
+            </a:pPr>
+            <a:r>
+              <a:rPr lang="en-US" sz="1000" dirty="0">
+                <a:solidFill>
+                  <a:srgbClr val="CCCCCC"/>
+                </a:solidFill>
+                <a:latin typeface="Courier New" pitchFamily="34" charset="0"/>
+                <a:ea typeface="Courier New" pitchFamily="34" charset="-122"/>
+                <a:cs typeface="Courier New" pitchFamily="34" charset="-120"/>
+              </a:rPr>
+              <a:t>.</a:t>
+            </a:r>
+            <a:pPr indent="0" marL="0">
+              <a:buNone/>
+            </a:pPr>
+            <a:r>
+              <a:rPr lang="en-US" sz="1000" dirty="0">
+                <a:solidFill>
+                  <a:srgbClr val="DCDCAA"/>
+                </a:solidFill>
+                <a:latin typeface="Courier New" pitchFamily="34" charset="0"/>
+                <a:ea typeface="Courier New" pitchFamily="34" charset="-122"/>
+                <a:cs typeface="Courier New" pitchFamily="34" charset="-120"/>
+              </a:rPr>
+              <a:t>post</a:t>
+            </a:r>
+            <a:pPr indent="0" marL="0">
+              <a:buNone/>
+            </a:pPr>
+            <a:r>
+              <a:rPr lang="en-US" sz="1000" dirty="0">
+                <a:solidFill>
+                  <a:srgbClr val="DA70D6"/>
+                </a:solidFill>
+                <a:latin typeface="Courier New" pitchFamily="34" charset="0"/>
+                <a:ea typeface="Courier New" pitchFamily="34" charset="-122"/>
+                <a:cs typeface="Courier New" pitchFamily="34" charset="-120"/>
+              </a:rPr>
+              <a:t>(</a:t>
+            </a:r>
+            <a:pPr indent="0" marL="0">
+              <a:buNone/>
+            </a:pPr>
+            <a:r>
+              <a:rPr lang="en-US" sz="1000" dirty="0">
+                <a:solidFill>
+                  <a:srgbClr val="CE9178"/>
+                </a:solidFill>
+                <a:latin typeface="Courier New" pitchFamily="34" charset="0"/>
+                <a:ea typeface="Courier New" pitchFamily="34" charset="-122"/>
+                <a:cs typeface="Courier New" pitchFamily="34" charset="-120"/>
+              </a:rPr>
+              <a:t>`...PedidosService.efetuarPagamento`</a:t>
+            </a:r>
+            <a:pPr indent="0" marL="0">
+              <a:buNone/>
+            </a:pPr>
+            <a:r>
+              <a:rPr lang="en-US" sz="1000" dirty="0">
+                <a:solidFill>
+                  <a:srgbClr val="CCCCCC"/>
+                </a:solidFill>
+                <a:latin typeface="Courier New" pitchFamily="34" charset="0"/>
+                <a:ea typeface="Courier New" pitchFamily="34" charset="-122"/>
+                <a:cs typeface="Courier New" pitchFamily="34" charset="-120"/>
+              </a:rPr>
+              <a:t>,</a:t>
+            </a:r>
+            <a:endParaRPr lang="en-US" sz="1000" dirty="0"/>
+          </a:p>
+          <a:p>
+            <a:pPr indent="0" marL="0">
+              <a:buNone/>
+            </a:pPr>
+            <a:r>
+              <a:rPr lang="en-US" sz="1000" dirty="0">
+                <a:solidFill>
+                  <a:srgbClr val="CCCCCC"/>
+                </a:solidFill>
+                <a:latin typeface="Courier New" pitchFamily="34" charset="0"/>
+                <a:ea typeface="Courier New" pitchFamily="34" charset="-122"/>
+                <a:cs typeface="Courier New" pitchFamily="34" charset="-120"/>
+              </a:rPr>
+              <a:t>    </a:t>
+            </a:r>
+            <a:pPr indent="0" marL="0">
+              <a:buNone/>
+            </a:pPr>
+            <a:r>
+              <a:rPr lang="en-US" sz="1000" dirty="0">
+                <a:solidFill>
+                  <a:srgbClr val="179FFF"/>
+                </a:solidFill>
+                <a:latin typeface="Courier New" pitchFamily="34" charset="0"/>
+                <a:ea typeface="Courier New" pitchFamily="34" charset="-122"/>
+                <a:cs typeface="Courier New" pitchFamily="34" charset="-120"/>
+              </a:rPr>
+              <a:t>{</a:t>
+            </a:r>
+            <a:pPr indent="0" marL="0">
+              <a:buNone/>
+            </a:pPr>
+            <a:r>
+              <a:rPr lang="en-US" sz="1000" dirty="0">
+                <a:solidFill>
+                  <a:srgbClr val="CCCCCC"/>
+                </a:solidFill>
+                <a:latin typeface="Courier New" pitchFamily="34" charset="0"/>
+                <a:ea typeface="Courier New" pitchFamily="34" charset="-122"/>
+                <a:cs typeface="Courier New" pitchFamily="34" charset="-120"/>
+              </a:rPr>
+              <a:t> </a:t>
+            </a:r>
+            <a:pPr indent="0" marL="0">
+              <a:buNone/>
+            </a:pPr>
+            <a:r>
+              <a:rPr lang="en-US" sz="1000" dirty="0">
+                <a:solidFill>
+                  <a:srgbClr val="9CDCFE"/>
+                </a:solidFill>
+                <a:latin typeface="Courier New" pitchFamily="34" charset="0"/>
+                <a:ea typeface="Courier New" pitchFamily="34" charset="-122"/>
+                <a:cs typeface="Courier New" pitchFamily="34" charset="-120"/>
+              </a:rPr>
+              <a:t>metodoPagamento</a:t>
+            </a:r>
+            <a:pPr indent="0" marL="0">
+              <a:buNone/>
+            </a:pPr>
+            <a:r>
+              <a:rPr lang="en-US" sz="1000" dirty="0">
+                <a:solidFill>
+                  <a:srgbClr val="CCCCCC"/>
+                </a:solidFill>
+                <a:latin typeface="Courier New" pitchFamily="34" charset="0"/>
+                <a:ea typeface="Courier New" pitchFamily="34" charset="-122"/>
+                <a:cs typeface="Courier New" pitchFamily="34" charset="-120"/>
+              </a:rPr>
+              <a:t>: </a:t>
+            </a:r>
+            <a:pPr indent="0" marL="0">
+              <a:buNone/>
+            </a:pPr>
+            <a:r>
+              <a:rPr lang="en-US" sz="1000" dirty="0">
+                <a:solidFill>
+                  <a:srgbClr val="CE9178"/>
+                </a:solidFill>
+                <a:latin typeface="Courier New" pitchFamily="34" charset="0"/>
+                <a:ea typeface="Courier New" pitchFamily="34" charset="-122"/>
+                <a:cs typeface="Courier New" pitchFamily="34" charset="-120"/>
+              </a:rPr>
+              <a:t>'CARTAO_DEBITO'</a:t>
+            </a:r>
+            <a:pPr indent="0" marL="0">
+              <a:buNone/>
+            </a:pPr>
+            <a:r>
+              <a:rPr lang="en-US" sz="1000" dirty="0">
+                <a:solidFill>
+                  <a:srgbClr val="CCCCCC"/>
+                </a:solidFill>
+                <a:latin typeface="Courier New" pitchFamily="34" charset="0"/>
+                <a:ea typeface="Courier New" pitchFamily="34" charset="-122"/>
+                <a:cs typeface="Courier New" pitchFamily="34" charset="-120"/>
+              </a:rPr>
+              <a:t>,</a:t>
+            </a:r>
+            <a:endParaRPr lang="en-US" sz="1000" dirty="0"/>
+          </a:p>
+          <a:p>
+            <a:pPr indent="0" marL="0">
+              <a:buNone/>
+            </a:pPr>
+            <a:r>
+              <a:rPr lang="en-US" sz="1000" dirty="0">
+                <a:solidFill>
+                  <a:srgbClr val="CCCCCC"/>
+                </a:solidFill>
+                <a:latin typeface="Courier New" pitchFamily="34" charset="0"/>
+                <a:ea typeface="Courier New" pitchFamily="34" charset="-122"/>
+                <a:cs typeface="Courier New" pitchFamily="34" charset="-120"/>
+              </a:rPr>
+              <a:t>      </a:t>
+            </a:r>
+            <a:pPr indent="0" marL="0">
+              <a:buNone/>
+            </a:pPr>
+            <a:r>
+              <a:rPr lang="en-US" sz="1000" dirty="0">
+                <a:solidFill>
+                  <a:srgbClr val="9CDCFE"/>
+                </a:solidFill>
+                <a:latin typeface="Courier New" pitchFamily="34" charset="0"/>
+                <a:ea typeface="Courier New" pitchFamily="34" charset="-122"/>
+                <a:cs typeface="Courier New" pitchFamily="34" charset="-120"/>
+              </a:rPr>
+              <a:t>numeroCartao</a:t>
+            </a:r>
+            <a:pPr indent="0" marL="0">
+              <a:buNone/>
+            </a:pPr>
+            <a:r>
+              <a:rPr lang="en-US" sz="1000" dirty="0">
+                <a:solidFill>
+                  <a:srgbClr val="CCCCCC"/>
+                </a:solidFill>
+                <a:latin typeface="Courier New" pitchFamily="34" charset="0"/>
+                <a:ea typeface="Courier New" pitchFamily="34" charset="-122"/>
+                <a:cs typeface="Courier New" pitchFamily="34" charset="-120"/>
+              </a:rPr>
+              <a:t>: </a:t>
+            </a:r>
+            <a:pPr indent="0" marL="0">
+              <a:buNone/>
+            </a:pPr>
+            <a:r>
+              <a:rPr lang="en-US" sz="1000" dirty="0">
+                <a:solidFill>
+                  <a:srgbClr val="CE9178"/>
+                </a:solidFill>
+                <a:latin typeface="Courier New" pitchFamily="34" charset="0"/>
+                <a:ea typeface="Courier New" pitchFamily="34" charset="-122"/>
+                <a:cs typeface="Courier New" pitchFamily="34" charset="-120"/>
+              </a:rPr>
+              <a:t>'5500000000000004'</a:t>
+            </a:r>
+            <a:pPr indent="0" marL="0">
+              <a:buNone/>
+            </a:pPr>
+            <a:r>
+              <a:rPr lang="en-US" sz="1000" dirty="0">
+                <a:solidFill>
+                  <a:srgbClr val="CCCCCC"/>
+                </a:solidFill>
+                <a:latin typeface="Courier New" pitchFamily="34" charset="0"/>
+                <a:ea typeface="Courier New" pitchFamily="34" charset="-122"/>
+                <a:cs typeface="Courier New" pitchFamily="34" charset="-120"/>
+              </a:rPr>
+              <a:t>,</a:t>
+            </a:r>
+            <a:endParaRPr lang="en-US" sz="1000" dirty="0"/>
+          </a:p>
+          <a:p>
+            <a:pPr indent="0" marL="0">
+              <a:buNone/>
+            </a:pPr>
+            <a:r>
+              <a:rPr lang="en-US" sz="1000" dirty="0">
+                <a:solidFill>
+                  <a:srgbClr val="CCCCCC"/>
+                </a:solidFill>
+                <a:latin typeface="Courier New" pitchFamily="34" charset="0"/>
+                <a:ea typeface="Courier New" pitchFamily="34" charset="-122"/>
+                <a:cs typeface="Courier New" pitchFamily="34" charset="-120"/>
+              </a:rPr>
+              <a:t>      </a:t>
+            </a:r>
+            <a:pPr indent="0" marL="0">
+              <a:buNone/>
+            </a:pPr>
+            <a:r>
+              <a:rPr lang="en-US" sz="1000" dirty="0">
+                <a:solidFill>
+                  <a:srgbClr val="9CDCFE"/>
+                </a:solidFill>
+                <a:latin typeface="Courier New" pitchFamily="34" charset="0"/>
+                <a:ea typeface="Courier New" pitchFamily="34" charset="-122"/>
+                <a:cs typeface="Courier New" pitchFamily="34" charset="-120"/>
+              </a:rPr>
+              <a:t>validade</a:t>
+            </a:r>
+            <a:pPr indent="0" marL="0">
+              <a:buNone/>
+            </a:pPr>
+            <a:r>
+              <a:rPr lang="en-US" sz="1000" dirty="0">
+                <a:solidFill>
+                  <a:srgbClr val="CCCCCC"/>
+                </a:solidFill>
+                <a:latin typeface="Courier New" pitchFamily="34" charset="0"/>
+                <a:ea typeface="Courier New" pitchFamily="34" charset="-122"/>
+                <a:cs typeface="Courier New" pitchFamily="34" charset="-120"/>
+              </a:rPr>
+              <a:t>: </a:t>
+            </a:r>
+            <a:pPr indent="0" marL="0">
+              <a:buNone/>
+            </a:pPr>
+            <a:r>
+              <a:rPr lang="en-US" sz="1000" dirty="0">
+                <a:solidFill>
+                  <a:srgbClr val="CE9178"/>
+                </a:solidFill>
+                <a:latin typeface="Courier New" pitchFamily="34" charset="0"/>
+                <a:ea typeface="Courier New" pitchFamily="34" charset="-122"/>
+                <a:cs typeface="Courier New" pitchFamily="34" charset="-120"/>
+              </a:rPr>
+              <a:t>'10/40'</a:t>
+            </a:r>
+            <a:pPr indent="0" marL="0">
+              <a:buNone/>
+            </a:pPr>
+            <a:r>
+              <a:rPr lang="en-US" sz="1000" dirty="0">
+                <a:solidFill>
+                  <a:srgbClr val="CCCCCC"/>
+                </a:solidFill>
+                <a:latin typeface="Courier New" pitchFamily="34" charset="0"/>
+                <a:ea typeface="Courier New" pitchFamily="34" charset="-122"/>
+                <a:cs typeface="Courier New" pitchFamily="34" charset="-120"/>
+              </a:rPr>
+              <a:t>, </a:t>
+            </a:r>
+            <a:pPr indent="0" marL="0">
+              <a:buNone/>
+            </a:pPr>
+            <a:r>
+              <a:rPr lang="en-US" sz="1000" dirty="0">
+                <a:solidFill>
+                  <a:srgbClr val="9CDCFE"/>
+                </a:solidFill>
+                <a:latin typeface="Courier New" pitchFamily="34" charset="0"/>
+                <a:ea typeface="Courier New" pitchFamily="34" charset="-122"/>
+                <a:cs typeface="Courier New" pitchFamily="34" charset="-120"/>
+              </a:rPr>
+              <a:t>cvv</a:t>
+            </a:r>
+            <a:pPr indent="0" marL="0">
+              <a:buNone/>
+            </a:pPr>
+            <a:r>
+              <a:rPr lang="en-US" sz="1000" dirty="0">
+                <a:solidFill>
+                  <a:srgbClr val="CCCCCC"/>
+                </a:solidFill>
+                <a:latin typeface="Courier New" pitchFamily="34" charset="0"/>
+                <a:ea typeface="Courier New" pitchFamily="34" charset="-122"/>
+                <a:cs typeface="Courier New" pitchFamily="34" charset="-120"/>
+              </a:rPr>
+              <a:t>: </a:t>
+            </a:r>
+            <a:pPr indent="0" marL="0">
+              <a:buNone/>
+            </a:pPr>
+            <a:r>
+              <a:rPr lang="en-US" sz="1000" dirty="0">
+                <a:solidFill>
+                  <a:srgbClr val="CE9178"/>
+                </a:solidFill>
+                <a:latin typeface="Courier New" pitchFamily="34" charset="0"/>
+                <a:ea typeface="Courier New" pitchFamily="34" charset="-122"/>
+                <a:cs typeface="Courier New" pitchFamily="34" charset="-120"/>
+              </a:rPr>
+              <a:t>'321'</a:t>
+            </a:r>
+            <a:pPr indent="0" marL="0">
+              <a:buNone/>
+            </a:pPr>
+            <a:r>
+              <a:rPr lang="en-US" sz="1000" dirty="0">
+                <a:solidFill>
+                  <a:srgbClr val="CCCCCC"/>
+                </a:solidFill>
+                <a:latin typeface="Courier New" pitchFamily="34" charset="0"/>
+                <a:ea typeface="Courier New" pitchFamily="34" charset="-122"/>
+                <a:cs typeface="Courier New" pitchFamily="34" charset="-120"/>
+              </a:rPr>
+              <a:t> </a:t>
+            </a:r>
+            <a:pPr indent="0" marL="0">
+              <a:buNone/>
+            </a:pPr>
+            <a:r>
+              <a:rPr lang="en-US" sz="1000" dirty="0">
+                <a:solidFill>
+                  <a:srgbClr val="179FFF"/>
+                </a:solidFill>
+                <a:latin typeface="Courier New" pitchFamily="34" charset="0"/>
+                <a:ea typeface="Courier New" pitchFamily="34" charset="-122"/>
+                <a:cs typeface="Courier New" pitchFamily="34" charset="-120"/>
+              </a:rPr>
+              <a:t>}</a:t>
+            </a:r>
+            <a:pPr indent="0" marL="0">
+              <a:buNone/>
+            </a:pPr>
+            <a:r>
+              <a:rPr lang="en-US" sz="1000" dirty="0">
+                <a:solidFill>
+                  <a:srgbClr val="DA70D6"/>
+                </a:solidFill>
+                <a:latin typeface="Courier New" pitchFamily="34" charset="0"/>
+                <a:ea typeface="Courier New" pitchFamily="34" charset="-122"/>
+                <a:cs typeface="Courier New" pitchFamily="34" charset="-120"/>
+              </a:rPr>
+              <a:t>)</a:t>
+            </a:r>
+            <a:endParaRPr lang="en-US" sz="1000" dirty="0"/>
+          </a:p>
+          <a:p>
+            <a:pPr indent="0" marL="0">
+              <a:buNone/>
+            </a:pPr>
+            <a:r>
+              <a:rPr lang="en-US" sz="1000" dirty="0">
+                <a:solidFill>
+                  <a:srgbClr val="CCCCCC"/>
+                </a:solidFill>
+                <a:latin typeface="Courier New" pitchFamily="34" charset="0"/>
+                <a:ea typeface="Courier New" pitchFamily="34" charset="-122"/>
+                <a:cs typeface="Courier New" pitchFamily="34" charset="-120"/>
+              </a:rPr>
+              <a:t>  </a:t>
+            </a:r>
+            <a:pPr indent="0" marL="0">
+              <a:buNone/>
+            </a:pPr>
+            <a:r>
+              <a:rPr lang="en-US" sz="1000" dirty="0">
+                <a:solidFill>
+                  <a:srgbClr val="C586C0"/>
+                </a:solidFill>
+                <a:latin typeface="Courier New" pitchFamily="34" charset="0"/>
+                <a:ea typeface="Courier New" pitchFamily="34" charset="-122"/>
+                <a:cs typeface="Courier New" pitchFamily="34" charset="-120"/>
+              </a:rPr>
+              <a:t>await</a:t>
+            </a:r>
+            <a:pPr indent="0" marL="0">
+              <a:buNone/>
+            </a:pPr>
+            <a:r>
+              <a:rPr lang="en-US" sz="1000" dirty="0">
+                <a:solidFill>
+                  <a:srgbClr val="CCCCCC"/>
+                </a:solidFill>
+                <a:latin typeface="Courier New" pitchFamily="34" charset="0"/>
+                <a:ea typeface="Courier New" pitchFamily="34" charset="-122"/>
+                <a:cs typeface="Courier New" pitchFamily="34" charset="-120"/>
+              </a:rPr>
+              <a:t> </a:t>
+            </a:r>
+            <a:pPr indent="0" marL="0">
+              <a:buNone/>
+            </a:pPr>
+            <a:r>
+              <a:rPr lang="en-US" sz="1000" dirty="0">
+                <a:solidFill>
+                  <a:srgbClr val="9CDCFE"/>
+                </a:solidFill>
+                <a:latin typeface="Courier New" pitchFamily="34" charset="0"/>
+                <a:ea typeface="Courier New" pitchFamily="34" charset="-122"/>
+                <a:cs typeface="Courier New" pitchFamily="34" charset="-120"/>
+              </a:rPr>
+              <a:t>api</a:t>
+            </a:r>
+            <a:pPr indent="0" marL="0">
+              <a:buNone/>
+            </a:pPr>
+            <a:r>
+              <a:rPr lang="en-US" sz="1000" dirty="0">
+                <a:solidFill>
+                  <a:srgbClr val="CCCCCC"/>
+                </a:solidFill>
+                <a:latin typeface="Courier New" pitchFamily="34" charset="0"/>
+                <a:ea typeface="Courier New" pitchFamily="34" charset="-122"/>
+                <a:cs typeface="Courier New" pitchFamily="34" charset="-120"/>
+              </a:rPr>
+              <a:t>.</a:t>
+            </a:r>
+            <a:pPr indent="0" marL="0">
+              <a:buNone/>
+            </a:pPr>
+            <a:r>
+              <a:rPr lang="en-US" sz="1000" dirty="0">
+                <a:solidFill>
+                  <a:srgbClr val="DCDCAA"/>
+                </a:solidFill>
+                <a:latin typeface="Courier New" pitchFamily="34" charset="0"/>
+                <a:ea typeface="Courier New" pitchFamily="34" charset="-122"/>
+                <a:cs typeface="Courier New" pitchFamily="34" charset="-120"/>
+              </a:rPr>
+              <a:t>post</a:t>
+            </a:r>
+            <a:pPr indent="0" marL="0">
+              <a:buNone/>
+            </a:pPr>
+            <a:r>
+              <a:rPr lang="en-US" sz="1000" dirty="0">
+                <a:solidFill>
+                  <a:srgbClr val="DA70D6"/>
+                </a:solidFill>
+                <a:latin typeface="Courier New" pitchFamily="34" charset="0"/>
+                <a:ea typeface="Courier New" pitchFamily="34" charset="-122"/>
+                <a:cs typeface="Courier New" pitchFamily="34" charset="-120"/>
+              </a:rPr>
+              <a:t>(</a:t>
+            </a:r>
+            <a:pPr indent="0" marL="0">
+              <a:buNone/>
+            </a:pPr>
+            <a:r>
+              <a:rPr lang="en-US" sz="1000" dirty="0">
+                <a:solidFill>
+                  <a:srgbClr val="CE9178"/>
+                </a:solidFill>
+                <a:latin typeface="Courier New" pitchFamily="34" charset="0"/>
+                <a:ea typeface="Courier New" pitchFamily="34" charset="-122"/>
+                <a:cs typeface="Courier New" pitchFamily="34" charset="-120"/>
+              </a:rPr>
+              <a:t>`...PedidosService.cancelarPedido`</a:t>
+            </a:r>
+            <a:pPr indent="0" marL="0">
+              <a:buNone/>
+            </a:pPr>
+            <a:r>
+              <a:rPr lang="en-US" sz="1000" dirty="0">
+                <a:solidFill>
+                  <a:srgbClr val="CCCCCC"/>
+                </a:solidFill>
+                <a:latin typeface="Courier New" pitchFamily="34" charset="0"/>
+                <a:ea typeface="Courier New" pitchFamily="34" charset="-122"/>
+                <a:cs typeface="Courier New" pitchFamily="34" charset="-120"/>
+              </a:rPr>
+              <a:t>,</a:t>
+            </a:r>
+            <a:endParaRPr lang="en-US" sz="1000" dirty="0"/>
+          </a:p>
+          <a:p>
+            <a:pPr indent="0" marL="0">
+              <a:buNone/>
+            </a:pPr>
+            <a:r>
+              <a:rPr lang="en-US" sz="1000" dirty="0">
+                <a:solidFill>
+                  <a:srgbClr val="CCCCCC"/>
+                </a:solidFill>
+                <a:latin typeface="Courier New" pitchFamily="34" charset="0"/>
+                <a:ea typeface="Courier New" pitchFamily="34" charset="-122"/>
+                <a:cs typeface="Courier New" pitchFamily="34" charset="-120"/>
+              </a:rPr>
+              <a:t>    </a:t>
+            </a:r>
+            <a:pPr indent="0" marL="0">
+              <a:buNone/>
+            </a:pPr>
+            <a:r>
+              <a:rPr lang="en-US" sz="1000" dirty="0">
+                <a:solidFill>
+                  <a:srgbClr val="179FFF"/>
+                </a:solidFill>
+                <a:latin typeface="Courier New" pitchFamily="34" charset="0"/>
+                <a:ea typeface="Courier New" pitchFamily="34" charset="-122"/>
+                <a:cs typeface="Courier New" pitchFamily="34" charset="-120"/>
+              </a:rPr>
+              <a:t>{</a:t>
+            </a:r>
+            <a:pPr indent="0" marL="0">
+              <a:buNone/>
+            </a:pPr>
+            <a:r>
+              <a:rPr lang="en-US" sz="1000" dirty="0">
+                <a:solidFill>
+                  <a:srgbClr val="CCCCCC"/>
+                </a:solidFill>
+                <a:latin typeface="Courier New" pitchFamily="34" charset="0"/>
+                <a:ea typeface="Courier New" pitchFamily="34" charset="-122"/>
+                <a:cs typeface="Courier New" pitchFamily="34" charset="-120"/>
+              </a:rPr>
+              <a:t> </a:t>
+            </a:r>
+            <a:pPr indent="0" marL="0">
+              <a:buNone/>
+            </a:pPr>
+            <a:r>
+              <a:rPr lang="en-US" sz="1000" dirty="0">
+                <a:solidFill>
+                  <a:srgbClr val="9CDCFE"/>
+                </a:solidFill>
+                <a:latin typeface="Courier New" pitchFamily="34" charset="0"/>
+                <a:ea typeface="Courier New" pitchFamily="34" charset="-122"/>
+                <a:cs typeface="Courier New" pitchFamily="34" charset="-120"/>
+              </a:rPr>
+              <a:t>motivoCancelamento</a:t>
+            </a:r>
+            <a:pPr indent="0" marL="0">
+              <a:buNone/>
+            </a:pPr>
+            <a:r>
+              <a:rPr lang="en-US" sz="1000" dirty="0">
+                <a:solidFill>
+                  <a:srgbClr val="CCCCCC"/>
+                </a:solidFill>
+                <a:latin typeface="Courier New" pitchFamily="34" charset="0"/>
+                <a:ea typeface="Courier New" pitchFamily="34" charset="-122"/>
+                <a:cs typeface="Courier New" pitchFamily="34" charset="-120"/>
+              </a:rPr>
+              <a:t>: </a:t>
+            </a:r>
+            <a:pPr indent="0" marL="0">
+              <a:buNone/>
+            </a:pPr>
+            <a:r>
+              <a:rPr lang="en-US" sz="1000" dirty="0">
+                <a:solidFill>
+                  <a:srgbClr val="CE9178"/>
+                </a:solidFill>
+                <a:latin typeface="Courier New" pitchFamily="34" charset="0"/>
+                <a:ea typeface="Courier New" pitchFamily="34" charset="-122"/>
+                <a:cs typeface="Courier New" pitchFamily="34" charset="-120"/>
+              </a:rPr>
+              <a:t>'Atraso na entrega'</a:t>
+            </a:r>
+            <a:pPr indent="0" marL="0">
+              <a:buNone/>
+            </a:pPr>
+            <a:r>
+              <a:rPr lang="en-US" sz="1000" dirty="0">
+                <a:solidFill>
+                  <a:srgbClr val="CCCCCC"/>
+                </a:solidFill>
+                <a:latin typeface="Courier New" pitchFamily="34" charset="0"/>
+                <a:ea typeface="Courier New" pitchFamily="34" charset="-122"/>
+                <a:cs typeface="Courier New" pitchFamily="34" charset="-120"/>
+              </a:rPr>
+              <a:t> </a:t>
+            </a:r>
+            <a:pPr indent="0" marL="0">
+              <a:buNone/>
+            </a:pPr>
+            <a:r>
+              <a:rPr lang="en-US" sz="1000" dirty="0">
+                <a:solidFill>
+                  <a:srgbClr val="179FFF"/>
+                </a:solidFill>
+                <a:latin typeface="Courier New" pitchFamily="34" charset="0"/>
+                <a:ea typeface="Courier New" pitchFamily="34" charset="-122"/>
+                <a:cs typeface="Courier New" pitchFamily="34" charset="-120"/>
+              </a:rPr>
+              <a:t>}</a:t>
+            </a:r>
+            <a:pPr indent="0" marL="0">
+              <a:buNone/>
+            </a:pPr>
+            <a:r>
+              <a:rPr lang="en-US" sz="1000" dirty="0">
+                <a:solidFill>
+                  <a:srgbClr val="DA70D6"/>
+                </a:solidFill>
+                <a:latin typeface="Courier New" pitchFamily="34" charset="0"/>
+                <a:ea typeface="Courier New" pitchFamily="34" charset="-122"/>
+                <a:cs typeface="Courier New" pitchFamily="34" charset="-120"/>
+              </a:rPr>
+              <a:t>)</a:t>
+            </a:r>
+            <a:endParaRPr lang="en-US" sz="1000" dirty="0"/>
+          </a:p>
+          <a:p>
+            <a:pPr indent="0" marL="0">
+              <a:buNone/>
+            </a:pPr>
+            <a:r>
+              <a:rPr lang="en-US" sz="1000" dirty="0">
+                <a:solidFill>
+                  <a:srgbClr val="CCCCCC"/>
+                </a:solidFill>
+                <a:latin typeface="Courier New" pitchFamily="34" charset="0"/>
+                <a:ea typeface="Courier New" pitchFamily="34" charset="-122"/>
+                <a:cs typeface="Courier New" pitchFamily="34" charset="-120"/>
+              </a:rPr>
+              <a:t>  ...</a:t>
+            </a:r>
+            <a:endParaRPr lang="en-US" sz="1000" dirty="0"/>
+          </a:p>
+          <a:p>
+            <a:pPr indent="0" marL="0">
+              <a:buNone/>
+            </a:pPr>
+            <a:r>
+              <a:rPr lang="en-US" sz="1000" dirty="0">
+                <a:solidFill>
+                  <a:srgbClr val="FFD700"/>
+                </a:solidFill>
+                <a:latin typeface="Courier New" pitchFamily="34" charset="0"/>
+                <a:ea typeface="Courier New" pitchFamily="34" charset="-122"/>
+                <a:cs typeface="Courier New" pitchFamily="34" charset="-120"/>
+              </a:rPr>
+              <a:t>}</a:t>
+            </a:r>
+            <a:endParaRPr lang="en-US" sz="1000" dirty="0"/>
+          </a:p>
+        </p:txBody>
+      </p:sp>
+      <p:sp>
+        <p:nvSpPr>
+          <p:cNvPr id="7" name="Cartão"/>
+          <p:cNvSpPr/>
+          <p:nvPr/>
+        </p:nvSpPr>
+        <p:spPr>
+          <a:xfrm>
+            <a:off x="7589520" y="1554480"/>
+            <a:ext cx="4050792" cy="4526280"/>
+          </a:xfrm>
+          <a:prstGeom prst="roundRect">
+            <a:avLst>
+              <a:gd name="adj" fmla="val 2709"/>
+            </a:avLst>
+          </a:prstGeom>
+          <a:solidFill>
+            <a:schemeClr val="bg1"/>
+          </a:solidFill>
+          <a:ln w="9525">
+            <a:solidFill>
+              <a:srgbClr val="E5E5E5"/>
+            </a:solidFill>
+            <a:prstDash val="solid"/>
+          </a:ln>
+          <a:effectLst>
+            <a:outerShdw sx="100000" sy="100000" kx="0" ky="0" algn="bl" rotWithShape="0" blurRad="101600" dist="25400" dir="5400000">
+              <a:srgbClr val="223649">
+                <a:alpha val="14000"/>
+              </a:srgbClr>
+            </a:outerShdw>
+          </a:effectLst>
+        </p:spPr>
+      </p:sp>
+      <p:sp>
+        <p:nvSpPr>
+          <p:cNvPr id="8" name="Text 5"/>
+          <p:cNvSpPr txBox="1"/>
+          <p:nvPr/>
+        </p:nvSpPr>
+        <p:spPr>
+          <a:xfrm>
+            <a:off x="7818120" y="1783080"/>
+            <a:ext cx="3611880" cy="4114800"/>
+          </a:xfrm>
+          <a:prstGeom prst="rect">
+            <a:avLst/>
+          </a:prstGeom>
+          <a:noFill/>
+          <a:ln/>
+        </p:spPr>
+        <p:txBody>
+          <a:bodyPr wrap="square" lIns="0" tIns="0" rIns="0" bIns="0" rtlCol="0" anchor="t"/>
+          <a:lstStyle/>
+          <a:p>
+            <a:pPr marL="342900" indent="-342900">
+              <a:spcAft>
+                <a:spcPts val="1400"/>
+              </a:spcAft>
+              <a:buSzPct val="100000"/>
+              <a:buChar char="•"/>
+            </a:pPr>
+            <a:r>
+              <a:rPr lang="en-US" sz="1400" dirty="0">
+                <a:solidFill>
+                  <a:schemeClr val="tx1"/>
+                </a:solidFill>
+              </a:rPr>
+              <a:t>aprovar cancela o pedido, devolve o pagamento, libera a reserva e gera snapshots</a:t>
+            </a:r>
+            <a:endParaRPr lang="en-US" sz="1400" dirty="0"/>
+          </a:p>
+          <a:p>
+            <a:pPr marL="342900" indent="-342900">
+              <a:spcAft>
+                <a:spcPts val="1400"/>
+              </a:spcAft>
+              <a:buSzPct val="100000"/>
+              <a:buChar char="•"/>
+            </a:pPr>
+            <a:r>
+              <a:rPr lang="en-US" sz="1400" dirty="0">
+                <a:solidFill>
+                  <a:schemeClr val="tx1"/>
+                </a:solidFill>
+              </a:rPr>
+              <a:t>rejeitar exige motivo e devolve o pedido ao status anterior</a:t>
+            </a:r>
+            <a:endParaRPr lang="en-US" sz="1400" dirty="0"/>
+          </a:p>
+          <a:p>
+            <a:pPr marL="342900" indent="-342900">
+              <a:spcAft>
+                <a:spcPts val="1400"/>
+              </a:spcAft>
+              <a:buSzPct val="100000"/>
+              <a:buChar char="•"/>
+            </a:pPr>
+            <a:r>
+              <a:rPr lang="en-US" sz="1400" dirty="0">
+                <a:solidFill>
+                  <a:schemeClr val="tx1"/>
+                </a:solidFill>
+              </a:rPr>
+              <a:t>solicitação já decidida não pode ser decidida de novo</a:t>
+            </a:r>
+            <a:endParaRPr lang="en-US" sz="1400" dirty="0"/>
+          </a:p>
+          <a:p>
+            <a:pPr marL="342900" indent="-342900">
+              <a:spcAft>
+                <a:spcPts val="1400"/>
+              </a:spcAft>
+              <a:buSzPct val="100000"/>
+              <a:buChar char="•"/>
+            </a:pPr>
+            <a:r>
+              <a:rPr lang="en-US" sz="1400" dirty="0">
+                <a:solidFill>
+                  <a:schemeClr val="tx1"/>
+                </a:solidFill>
+              </a:rPr>
+              <a:t>o usuário comum também decide reembolsos; a lista é somente leitura</a:t>
+            </a:r>
+            <a:endParaRPr lang="en-US" sz="1400" dirty="0"/>
+          </a:p>
+        </p:txBody>
+      </p:sp>
+      <p:sp>
+        <p:nvSpPr>
+          <p:cNvPr id="25" name="Slide Number Placeholder 0"/>
+          <p:cNvSpPr>
+            <a:spLocks noGrp="1"/>
+          </p:cNvSpPr>
+          <p:nvPr>
+            <p:ph type="sldNum" sz="quarter" idx="4294967295"/>
+          </p:nvPr>
+        </p:nvSpPr>
+        <p:spPr>
+          <a:xfrm>
+            <a:off x="11155680" y="6419088"/>
+            <a:ext cx="484632" cy="274320"/>
+          </a:xfrm>
+          <a:prstGeom prst="rect">
+            <a:avLst/>
+          </a:prstGeom>
+          <a:extLst>
+            <a:ext uri="{C572A759-6A51-4108-AA02-DFA0A04FC94B}">
+              <ma14:wrappingTextBoxFlag xmlns:ma14="http://schemas.microsoft.com/office/mac/drawingml/2011/main" val="0"/>
+            </a:ext>
+          </a:extLst>
+        </p:spPr>
+        <p:txBody>
+          <a:bodyPr/>
+          <a:lstStyle>
+            <a:lvl1pPr>
+              <a:defRPr sz="1000">
+                <a:solidFill>
+                  <a:srgbClr val="556B82"/>
+                </a:solidFill>
+              </a:defRPr>
+            </a:lvl1pPr>
+          </a:lstStyle>
+          <a:p>
+            <a:pPr algn="r"/>
+            <a:fld id="{F7021451-1387-4CA6-816F-3879F97B5CBC}" type="slidenum">
+              <a:rPr b="0" lang="en-US"/>
+              <a:t>14</a:t>
             </a:fld>
             <a:endParaRPr lang="en-US"/>
           </a:p>
@@ -18562,1434 +25991,6 @@
 </p:sld>
 </file>
 
-<file path=ppt/slides/slide6.xml><?xml version="1.0" encoding="utf-8"?>
-<p:sld xmlns:a="http://schemas.openxmlformats.org/drawingml/2006/main" xmlns:r="http://schemas.openxmlformats.org/officeDocument/2006/relationships" xmlns:p="http://schemas.openxmlformats.org/presentationml/2006/main">
-  <p:cSld name="Slide 6">
-    <p:spTree>
-      <p:nvGrpSpPr>
-        <p:cNvPr id="1" name=""/>
-        <p:cNvGrpSpPr/>
-        <p:nvPr/>
-      </p:nvGrpSpPr>
-      <p:grpSpPr>
-        <a:xfrm>
-          <a:off x="0" y="0"/>
-          <a:ext cx="0" cy="0"/>
-          <a:chOff x="0" y="0"/>
-          <a:chExt cx="0" cy="0"/>
-        </a:xfrm>
-      </p:grpSpPr>
-      <p:sp>
-        <p:nvSpPr>
-          <p:cNvPr id="2" name="Text 0"/>
-          <p:cNvSpPr/>
-          <p:nvPr>
-            <p:ph idx="100" type="body" hasCustomPrompt="1"/>
-          </p:nvPr>
-        </p:nvSpPr>
-        <p:spPr>
-          <a:xfrm>
-            <a:off x="548640" y="292608"/>
-            <a:ext cx="9144000" cy="292608"/>
-          </a:xfrm>
-          <a:prstGeom prst="rect">
-            <a:avLst/>
-          </a:prstGeom>
-          <a:noFill/>
-          <a:ln/>
-        </p:spPr>
-        <p:txBody>
-          <a:bodyPr wrap="square" lIns="0" tIns="0" rIns="0" bIns="0" rtlCol="0" anchor="ctr"/>
-          <a:lstStyle/>
-          <a:p>
-            <a:pPr algn="l" indent="0" marL="0">
-              <a:buNone/>
-            </a:pPr>
-            <a:r>
-              <a:rPr lang="en-US" sz="1200" b="1" spc="150" kern="0" dirty="0">
-                <a:solidFill>
-                  <a:schemeClr val="accent1"/>
-                </a:solidFill>
-              </a:rPr>
-              <a:t>TESTES</a:t>
-            </a:r>
-            <a:endParaRPr lang="en-US" sz="1200" dirty="0"/>
-          </a:p>
-        </p:txBody>
-      </p:sp>
-      <p:sp>
-        <p:nvSpPr>
-          <p:cNvPr id="3" name="Text 0"/>
-          <p:cNvSpPr/>
-          <p:nvPr>
-            <p:ph idx="101" type="title" hasCustomPrompt="1"/>
-          </p:nvPr>
-        </p:nvSpPr>
-        <p:spPr>
-          <a:xfrm>
-            <a:off x="548640" y="603504"/>
-            <a:ext cx="11064240" cy="685800"/>
-          </a:xfrm>
-          <a:prstGeom prst="rect">
-            <a:avLst/>
-          </a:prstGeom>
-          <a:noFill/>
-          <a:ln/>
-        </p:spPr>
-        <p:txBody>
-          <a:bodyPr wrap="square" lIns="0" tIns="0" rIns="0" bIns="0" rtlCol="0" anchor="ctr"/>
-          <a:lstStyle/>
-          <a:p>
-            <a:pPr algn="l" indent="0" marL="0">
-              <a:buNone/>
-            </a:pPr>
-            <a:r>
-              <a:rPr lang="en-US" sz="3200" b="1" dirty="0">
-                <a:solidFill>
-                  <a:schemeClr val="tx1"/>
-                </a:solidFill>
-              </a:rPr>
-              <a:t>Casos de teste: clientes e estoque</a:t>
-            </a:r>
-            <a:endParaRPr lang="en-US" sz="3200" dirty="0"/>
-          </a:p>
-        </p:txBody>
-      </p:sp>
-      <p:sp>
-        <p:nvSpPr>
-          <p:cNvPr id="5" name="Cartão"/>
-          <p:cNvSpPr/>
-          <p:nvPr/>
-        </p:nvSpPr>
-        <p:spPr>
-          <a:xfrm>
-            <a:off x="548640" y="1554480"/>
-            <a:ext cx="5440680" cy="4526280"/>
-          </a:xfrm>
-          <a:prstGeom prst="roundRect">
-            <a:avLst>
-              <a:gd name="adj" fmla="val 2424"/>
-            </a:avLst>
-          </a:prstGeom>
-          <a:solidFill>
-            <a:schemeClr val="bg1"/>
-          </a:solidFill>
-          <a:ln w="9525">
-            <a:solidFill>
-              <a:srgbClr val="E5E5E5"/>
-            </a:solidFill>
-            <a:prstDash val="solid"/>
-          </a:ln>
-          <a:effectLst>
-            <a:outerShdw sx="100000" sy="100000" kx="0" ky="0" algn="bl" rotWithShape="0" blurRad="101600" dist="25400" dir="5400000">
-              <a:srgbClr val="223649">
-                <a:alpha val="14000"/>
-              </a:srgbClr>
-            </a:outerShdw>
-          </a:effectLst>
-        </p:spPr>
-      </p:sp>
-      <p:sp>
-        <p:nvSpPr>
-          <p:cNvPr id="6" name="Text 3"/>
-          <p:cNvSpPr txBox="1"/>
-          <p:nvPr/>
-        </p:nvSpPr>
-        <p:spPr>
-          <a:xfrm>
-            <a:off x="822960" y="1691640"/>
-            <a:ext cx="4892040" cy="384048"/>
-          </a:xfrm>
-          <a:prstGeom prst="rect">
-            <a:avLst/>
-          </a:prstGeom>
-          <a:noFill/>
-          <a:ln/>
-        </p:spPr>
-        <p:txBody>
-          <a:bodyPr wrap="square" lIns="0" tIns="0" rIns="0" bIns="0" rtlCol="0" anchor="ctr"/>
-          <a:lstStyle/>
-          <a:p>
-            <a:pPr indent="0" marL="0">
-              <a:buNone/>
-            </a:pPr>
-            <a:r>
-              <a:rPr lang="en-US" sz="1500" b="1" dirty="0">
-                <a:solidFill>
-                  <a:schemeClr val="tx1"/>
-                </a:solidFill>
-                <a:latin typeface="Courier New" pitchFamily="34" charset="0"/>
-                <a:ea typeface="Courier New" pitchFamily="34" charset="-122"/>
-                <a:cs typeface="Courier New" pitchFamily="34" charset="-120"/>
-              </a:rPr>
-              <a:t>clientes.test (13)</a:t>
-            </a:r>
-            <a:endParaRPr lang="en-US" sz="1500" dirty="0"/>
-          </a:p>
-        </p:txBody>
-      </p:sp>
-      <p:sp>
-        <p:nvSpPr>
-          <p:cNvPr id="7" name="Text 4"/>
-          <p:cNvSpPr txBox="1"/>
-          <p:nvPr/>
-        </p:nvSpPr>
-        <p:spPr>
-          <a:xfrm>
-            <a:off x="822960" y="2194560"/>
-            <a:ext cx="4937760" cy="3749040"/>
-          </a:xfrm>
-          <a:prstGeom prst="rect">
-            <a:avLst/>
-          </a:prstGeom>
-          <a:noFill/>
-          <a:ln/>
-        </p:spPr>
-        <p:txBody>
-          <a:bodyPr wrap="square" lIns="0" tIns="0" rIns="0" bIns="0" rtlCol="0" anchor="t"/>
-          <a:lstStyle/>
-          <a:p>
-            <a:pPr marL="342900" indent="-342900">
-              <a:spcAft>
-                <a:spcPts val="600"/>
-              </a:spcAft>
-              <a:buSzPct val="100000"/>
-              <a:buChar char="•"/>
-            </a:pPr>
-            <a:r>
-              <a:rPr lang="en-US" sz="1300" dirty="0">
-                <a:solidFill>
-                  <a:schemeClr val="tx1"/>
-                </a:solidFill>
-              </a:rPr>
-              <a:t>cria cliente com endereço preenchido pelo ViaCEP, ativo e com score</a:t>
-            </a:r>
-            <a:endParaRPr lang="en-US" sz="1300" dirty="0"/>
-          </a:p>
-          <a:p>
-            <a:pPr marL="342900" indent="-342900">
-              <a:spcAft>
-                <a:spcPts val="600"/>
-              </a:spcAft>
-              <a:buSzPct val="100000"/>
-              <a:buChar char="•"/>
-            </a:pPr>
-            <a:r>
-              <a:rPr lang="en-US" sz="1300" dirty="0">
-                <a:solidFill>
-                  <a:schemeClr val="tx1"/>
-                </a:solidFill>
-              </a:rPr>
-              <a:t>CEP já cadastrado é reaproveitado sem chamar o ViaCEP</a:t>
-            </a:r>
-            <a:endParaRPr lang="en-US" sz="1300" dirty="0"/>
-          </a:p>
-          <a:p>
-            <a:pPr marL="342900" indent="-342900">
-              <a:spcAft>
-                <a:spcPts val="600"/>
-              </a:spcAft>
-              <a:buSzPct val="100000"/>
-              <a:buChar char="•"/>
-            </a:pPr>
-            <a:r>
-              <a:rPr lang="en-US" sz="1300" dirty="0">
-                <a:solidFill>
-                  <a:schemeClr val="tx1"/>
-                </a:solidFill>
-              </a:rPr>
-              <a:t>CPF inválido ou duplicado bloqueia o Save</a:t>
-            </a:r>
-            <a:endParaRPr lang="en-US" sz="1300" dirty="0"/>
-          </a:p>
-          <a:p>
-            <a:pPr marL="342900" indent="-342900">
-              <a:spcAft>
-                <a:spcPts val="600"/>
-              </a:spcAft>
-              <a:buSzPct val="100000"/>
-              <a:buChar char="•"/>
-            </a:pPr>
-            <a:r>
-              <a:rPr lang="en-US" sz="1300" dirty="0">
-                <a:solidFill>
-                  <a:schemeClr val="tx1"/>
-                </a:solidFill>
-              </a:rPr>
-              <a:t>e-mail, telefone e data de nascimento são validados</a:t>
-            </a:r>
-            <a:endParaRPr lang="en-US" sz="1300" dirty="0"/>
-          </a:p>
-          <a:p>
-            <a:pPr marL="342900" indent="-342900">
-              <a:spcAft>
-                <a:spcPts val="600"/>
-              </a:spcAft>
-              <a:buSzPct val="100000"/>
-              <a:buChar char="•"/>
-            </a:pPr>
-            <a:r>
-              <a:rPr lang="en-US" sz="1300" dirty="0">
-                <a:solidFill>
-                  <a:schemeClr val="tx1"/>
-                </a:solidFill>
-              </a:rPr>
-              <a:t>CEP inexistente ou ViaCEP indisponível bloqueiam o Save</a:t>
-            </a:r>
-            <a:endParaRPr lang="en-US" sz="1300" dirty="0"/>
-          </a:p>
-          <a:p>
-            <a:pPr marL="342900" indent="-342900">
-              <a:spcAft>
-                <a:spcPts val="600"/>
-              </a:spcAft>
-              <a:buSzPct val="100000"/>
-              <a:buChar char="•"/>
-            </a:pPr>
-            <a:r>
-              <a:rPr lang="en-US" sz="1300" dirty="0">
-                <a:solidFill>
-                  <a:schemeClr val="tx1"/>
-                </a:solidFill>
-              </a:rPr>
-              <a:t>CEP geral exige logradouro e bairro informados</a:t>
-            </a:r>
-            <a:endParaRPr lang="en-US" sz="1300" dirty="0"/>
-          </a:p>
-          <a:p>
-            <a:pPr marL="342900" indent="-342900">
-              <a:spcAft>
-                <a:spcPts val="600"/>
-              </a:spcAft>
-              <a:buSzPct val="100000"/>
-              <a:buChar char="•"/>
-            </a:pPr>
-            <a:r>
-              <a:rPr lang="en-US" sz="1300" dirty="0">
-                <a:solidFill>
-                  <a:schemeClr val="tx1"/>
-                </a:solidFill>
-              </a:rPr>
-              <a:t>número obrigatório e CEP único por cliente</a:t>
-            </a:r>
-            <a:endParaRPr lang="en-US" sz="1300" dirty="0"/>
-          </a:p>
-          <a:p>
-            <a:pPr marL="342900" indent="-342900">
-              <a:spcAft>
-                <a:spcPts val="600"/>
-              </a:spcAft>
-              <a:buSzPct val="100000"/>
-              <a:buChar char="•"/>
-            </a:pPr>
-            <a:r>
-              <a:rPr lang="en-US" sz="1300" dirty="0">
-                <a:solidFill>
-                  <a:schemeClr val="tx1"/>
-                </a:solidFill>
-              </a:rPr>
-              <a:t>definir endereço principal desmarca os demais</a:t>
-            </a:r>
-            <a:endParaRPr lang="en-US" sz="1300" dirty="0"/>
-          </a:p>
-          <a:p>
-            <a:pPr marL="342900" indent="-342900">
-              <a:spcAft>
-                <a:spcPts val="600"/>
-              </a:spcAft>
-              <a:buSzPct val="100000"/>
-              <a:buChar char="•"/>
-            </a:pPr>
-            <a:r>
-              <a:rPr lang="en-US" sz="1300" dirty="0">
-                <a:solidFill>
-                  <a:schemeClr val="tx1"/>
-                </a:solidFill>
-              </a:rPr>
-              <a:t>comum consulta, mas não cria, edita nem exclui</a:t>
-            </a:r>
-            <a:endParaRPr lang="en-US" sz="1300" dirty="0"/>
-          </a:p>
-          <a:p>
-            <a:pPr marL="342900" indent="-342900">
-              <a:spcAft>
-                <a:spcPts val="600"/>
-              </a:spcAft>
-              <a:buSzPct val="100000"/>
-              <a:buChar char="•"/>
-            </a:pPr>
-            <a:r>
-              <a:rPr lang="en-US" sz="1300" dirty="0">
-                <a:solidFill>
-                  <a:schemeClr val="tx1"/>
-                </a:solidFill>
-              </a:rPr>
-              <a:t>Permissoes.somenteLeitura por usuário</a:t>
-            </a:r>
-            <a:endParaRPr lang="en-US" sz="1300" dirty="0"/>
-          </a:p>
-          <a:p>
-            <a:pPr marL="342900" indent="-342900">
-              <a:spcAft>
-                <a:spcPts val="600"/>
-              </a:spcAft>
-              <a:buSzPct val="100000"/>
-              <a:buChar char="•"/>
-            </a:pPr>
-            <a:r>
-              <a:rPr lang="en-US" sz="1300" dirty="0">
-                <a:solidFill>
-                  <a:schemeClr val="tx1"/>
-                </a:solidFill>
-              </a:rPr>
-              <a:t>cliente com pedido não pode ser excluído</a:t>
-            </a:r>
-            <a:endParaRPr lang="en-US" sz="1300" dirty="0"/>
-          </a:p>
-          <a:p>
-            <a:pPr marL="342900" indent="-342900">
-              <a:spcAft>
-                <a:spcPts val="600"/>
-              </a:spcAft>
-              <a:buSzPct val="100000"/>
-              <a:buChar char="•"/>
-            </a:pPr>
-            <a:r>
-              <a:rPr lang="en-US" sz="1300" dirty="0">
-                <a:solidFill>
-                  <a:schemeClr val="tx1"/>
-                </a:solidFill>
-              </a:rPr>
-              <a:t>foto aceita só JPEG, PNG ou WEBP; gravada após o Save</a:t>
-            </a:r>
-            <a:endParaRPr lang="en-US" sz="1300" dirty="0"/>
-          </a:p>
-        </p:txBody>
-      </p:sp>
-      <p:sp>
-        <p:nvSpPr>
-          <p:cNvPr id="8" name="Cartão"/>
-          <p:cNvSpPr/>
-          <p:nvPr/>
-        </p:nvSpPr>
-        <p:spPr>
-          <a:xfrm>
-            <a:off x="6199632" y="1554480"/>
-            <a:ext cx="5440680" cy="4526280"/>
-          </a:xfrm>
-          <a:prstGeom prst="roundRect">
-            <a:avLst>
-              <a:gd name="adj" fmla="val 2424"/>
-            </a:avLst>
-          </a:prstGeom>
-          <a:solidFill>
-            <a:schemeClr val="bg1"/>
-          </a:solidFill>
-          <a:ln w="9525">
-            <a:solidFill>
-              <a:srgbClr val="E5E5E5"/>
-            </a:solidFill>
-            <a:prstDash val="solid"/>
-          </a:ln>
-          <a:effectLst>
-            <a:outerShdw sx="100000" sy="100000" kx="0" ky="0" algn="bl" rotWithShape="0" blurRad="101600" dist="25400" dir="5400000">
-              <a:srgbClr val="223649">
-                <a:alpha val="14000"/>
-              </a:srgbClr>
-            </a:outerShdw>
-          </a:effectLst>
-        </p:spPr>
-      </p:sp>
-      <p:sp>
-        <p:nvSpPr>
-          <p:cNvPr id="9" name="Text 6"/>
-          <p:cNvSpPr txBox="1"/>
-          <p:nvPr/>
-        </p:nvSpPr>
-        <p:spPr>
-          <a:xfrm>
-            <a:off x="6473952" y="1691640"/>
-            <a:ext cx="4892040" cy="384048"/>
-          </a:xfrm>
-          <a:prstGeom prst="rect">
-            <a:avLst/>
-          </a:prstGeom>
-          <a:noFill/>
-          <a:ln/>
-        </p:spPr>
-        <p:txBody>
-          <a:bodyPr wrap="square" lIns="0" tIns="0" rIns="0" bIns="0" rtlCol="0" anchor="ctr"/>
-          <a:lstStyle/>
-          <a:p>
-            <a:pPr indent="0" marL="0">
-              <a:buNone/>
-            </a:pPr>
-            <a:r>
-              <a:rPr lang="en-US" sz="1500" b="1" dirty="0">
-                <a:solidFill>
-                  <a:schemeClr val="tx1"/>
-                </a:solidFill>
-                <a:latin typeface="Courier New" pitchFamily="34" charset="0"/>
-                <a:ea typeface="Courier New" pitchFamily="34" charset="-122"/>
-                <a:cs typeface="Courier New" pitchFamily="34" charset="-120"/>
-              </a:rPr>
-              <a:t>estoque.test (10)</a:t>
-            </a:r>
-            <a:endParaRPr lang="en-US" sz="1500" dirty="0"/>
-          </a:p>
-        </p:txBody>
-      </p:sp>
-      <p:sp>
-        <p:nvSpPr>
-          <p:cNvPr id="10" name="Text 7"/>
-          <p:cNvSpPr txBox="1"/>
-          <p:nvPr/>
-        </p:nvSpPr>
-        <p:spPr>
-          <a:xfrm>
-            <a:off x="6473952" y="2194560"/>
-            <a:ext cx="4937760" cy="3749040"/>
-          </a:xfrm>
-          <a:prstGeom prst="rect">
-            <a:avLst/>
-          </a:prstGeom>
-          <a:noFill/>
-          <a:ln/>
-        </p:spPr>
-        <p:txBody>
-          <a:bodyPr wrap="square" lIns="0" tIns="0" rIns="0" bIns="0" rtlCol="0" anchor="t"/>
-          <a:lstStyle/>
-          <a:p>
-            <a:pPr marL="342900" indent="-342900">
-              <a:spcAft>
-                <a:spcPts val="600"/>
-              </a:spcAft>
-              <a:buSzPct val="100000"/>
-              <a:buChar char="•"/>
-            </a:pPr>
-            <a:r>
-              <a:rPr lang="en-US" sz="1300" dirty="0">
-                <a:solidFill>
-                  <a:schemeClr val="tx1"/>
-                </a:solidFill>
-              </a:rPr>
-              <a:t>gera SKU no Save com as 3 primeiras letras da categoria</a:t>
-            </a:r>
-            <a:endParaRPr lang="en-US" sz="1300" dirty="0"/>
-          </a:p>
-          <a:p>
-            <a:pPr marL="342900" indent="-342900">
-              <a:spcAft>
-                <a:spcPts val="600"/>
-              </a:spcAft>
-              <a:buSzPct val="100000"/>
-              <a:buChar char="•"/>
-            </a:pPr>
-            <a:r>
-              <a:rPr lang="en-US" sz="1300" dirty="0">
-                <a:solidFill>
-                  <a:schemeClr val="tx1"/>
-                </a:solidFill>
-              </a:rPr>
-              <a:t>regenera o SKU quando a categoria muda</a:t>
-            </a:r>
-            <a:endParaRPr lang="en-US" sz="1300" dirty="0"/>
-          </a:p>
-          <a:p>
-            <a:pPr marL="342900" indent="-342900">
-              <a:spcAft>
-                <a:spcPts val="600"/>
-              </a:spcAft>
-              <a:buSzPct val="100000"/>
-              <a:buChar char="•"/>
-            </a:pPr>
-            <a:r>
-              <a:rPr lang="en-US" sz="1300" dirty="0">
-                <a:solidFill>
-                  <a:schemeClr val="tx1"/>
-                </a:solidFill>
-              </a:rPr>
-              <a:t>disponível = estoque − reservada e os três status</a:t>
-            </a:r>
-            <a:endParaRPr lang="en-US" sz="1300" dirty="0"/>
-          </a:p>
-          <a:p>
-            <a:pPr marL="342900" indent="-342900">
-              <a:spcAft>
-                <a:spcPts val="600"/>
-              </a:spcAft>
-              <a:buSzPct val="100000"/>
-              <a:buChar char="•"/>
-            </a:pPr>
-            <a:r>
-              <a:rPr lang="en-US" sz="1300" dirty="0">
-                <a:solidFill>
-                  <a:schemeClr val="tx1"/>
-                </a:solidFill>
-              </a:rPr>
-              <a:t>preço negativo e estoque menor que a reserva rejeitados</a:t>
-            </a:r>
-            <a:endParaRPr lang="en-US" sz="1300" dirty="0"/>
-          </a:p>
-          <a:p>
-            <a:pPr marL="342900" indent="-342900">
-              <a:spcAft>
-                <a:spcPts val="600"/>
-              </a:spcAft>
-              <a:buSzPct val="100000"/>
-              <a:buChar char="•"/>
-            </a:pPr>
-            <a:r>
-              <a:rPr lang="en-US" sz="1300" dirty="0">
-                <a:solidFill>
-                  <a:schemeClr val="tx1"/>
-                </a:solidFill>
-              </a:rPr>
-              <a:t>salvar a edição do item não sobrescreve reservas</a:t>
-            </a:r>
-            <a:endParaRPr lang="en-US" sz="1300" dirty="0"/>
-          </a:p>
-          <a:p>
-            <a:pPr marL="342900" indent="-342900">
-              <a:spcAft>
-                <a:spcPts val="600"/>
-              </a:spcAft>
-              <a:buSzPct val="100000"/>
-              <a:buChar char="•"/>
-            </a:pPr>
-            <a:r>
-              <a:rPr lang="en-US" sz="1300" dirty="0">
-                <a:solidFill>
-                  <a:schemeClr val="tx1"/>
-                </a:solidFill>
-              </a:rPr>
-              <a:t>inativação bloqueada com estoque disponível</a:t>
-            </a:r>
-            <a:endParaRPr lang="en-US" sz="1300" dirty="0"/>
-          </a:p>
-          <a:p>
-            <a:pPr marL="342900" indent="-342900">
-              <a:spcAft>
-                <a:spcPts val="600"/>
-              </a:spcAft>
-              <a:buSzPct val="100000"/>
-              <a:buChar char="•"/>
-            </a:pPr>
-            <a:r>
-              <a:rPr lang="en-US" sz="1300" dirty="0">
-                <a:solidFill>
-                  <a:schemeClr val="tx1"/>
-                </a:solidFill>
-              </a:rPr>
-              <a:t>exclusão bloqueada para item vinculado a pedido</a:t>
-            </a:r>
-            <a:endParaRPr lang="en-US" sz="1300" dirty="0"/>
-          </a:p>
-          <a:p>
-            <a:pPr marL="342900" indent="-342900">
-              <a:spcAft>
-                <a:spcPts val="600"/>
-              </a:spcAft>
-              <a:buSzPct val="100000"/>
-              <a:buChar char="•"/>
-            </a:pPr>
-            <a:r>
-              <a:rPr lang="en-US" sz="1300" dirty="0">
-                <a:solidFill>
-                  <a:schemeClr val="tx1"/>
-                </a:solidFill>
-              </a:rPr>
-              <a:t>usuário comum consulta, mas não mantém itens</a:t>
-            </a:r>
-            <a:endParaRPr lang="en-US" sz="1300" dirty="0"/>
-          </a:p>
-          <a:p>
-            <a:pPr marL="342900" indent="-342900">
-              <a:spcAft>
-                <a:spcPts val="600"/>
-              </a:spcAft>
-              <a:buSzPct val="100000"/>
-              <a:buChar char="•"/>
-            </a:pPr>
-            <a:r>
-              <a:rPr lang="en-US" sz="1300" dirty="0">
-                <a:solidFill>
-                  <a:schemeClr val="tx1"/>
-                </a:solidFill>
-              </a:rPr>
-              <a:t>Permissoes.somenteLeitura por usuário</a:t>
-            </a:r>
-            <a:endParaRPr lang="en-US" sz="1300" dirty="0"/>
-          </a:p>
-          <a:p>
-            <a:pPr marL="342900" indent="-342900">
-              <a:spcAft>
-                <a:spcPts val="600"/>
-              </a:spcAft>
-              <a:buSzPct val="100000"/>
-              <a:buChar char="•"/>
-            </a:pPr>
-            <a:r>
-              <a:rPr lang="en-US" sz="1300" dirty="0">
-                <a:solidFill>
-                  <a:schemeClr val="tx1"/>
-                </a:solidFill>
-              </a:rPr>
-              <a:t>foto enviada no rascunho é gravada após o Save</a:t>
-            </a:r>
-            <a:endParaRPr lang="en-US" sz="1300" dirty="0"/>
-          </a:p>
-        </p:txBody>
-      </p:sp>
-      <p:sp>
-        <p:nvSpPr>
-          <p:cNvPr id="25" name="Slide Number Placeholder 0"/>
-          <p:cNvSpPr>
-            <a:spLocks noGrp="1"/>
-          </p:cNvSpPr>
-          <p:nvPr>
-            <p:ph type="sldNum" sz="quarter" idx="4294967295"/>
-          </p:nvPr>
-        </p:nvSpPr>
-        <p:spPr>
-          <a:xfrm>
-            <a:off x="11155680" y="6419088"/>
-            <a:ext cx="484632" cy="274320"/>
-          </a:xfrm>
-          <a:prstGeom prst="rect">
-            <a:avLst/>
-          </a:prstGeom>
-          <a:extLst>
-            <a:ext uri="{C572A759-6A51-4108-AA02-DFA0A04FC94B}">
-              <ma14:wrappingTextBoxFlag xmlns:ma14="http://schemas.microsoft.com/office/mac/drawingml/2011/main" val="0"/>
-            </a:ext>
-          </a:extLst>
-        </p:spPr>
-        <p:txBody>
-          <a:bodyPr/>
-          <a:lstStyle>
-            <a:lvl1pPr>
-              <a:defRPr sz="1000">
-                <a:solidFill>
-                  <a:srgbClr val="556B82"/>
-                </a:solidFill>
-              </a:defRPr>
-            </a:lvl1pPr>
-          </a:lstStyle>
-          <a:p>
-            <a:pPr algn="r"/>
-            <a:fld id="{F7021451-1387-4CA6-816F-3879F97B5CBC}" type="slidenum">
-              <a:rPr b="0" lang="en-US"/>
-              <a:t>6</a:t>
-            </a:fld>
-            <a:endParaRPr lang="en-US"/>
-          </a:p>
-        </p:txBody>
-      </p:sp>
-    </p:spTree>
-  </p:cSld>
-  <p:clrMapOvr>
-    <a:masterClrMapping/>
-  </p:clrMapOvr>
-</p:sld>
-</file>
-
-<file path=ppt/slides/slide7.xml><?xml version="1.0" encoding="utf-8"?>
-<p:sld xmlns:a="http://schemas.openxmlformats.org/drawingml/2006/main" xmlns:r="http://schemas.openxmlformats.org/officeDocument/2006/relationships" xmlns:p="http://schemas.openxmlformats.org/presentationml/2006/main">
-  <p:cSld name="Slide 7">
-    <p:spTree>
-      <p:nvGrpSpPr>
-        <p:cNvPr id="1" name=""/>
-        <p:cNvGrpSpPr/>
-        <p:nvPr/>
-      </p:nvGrpSpPr>
-      <p:grpSpPr>
-        <a:xfrm>
-          <a:off x="0" y="0"/>
-          <a:ext cx="0" cy="0"/>
-          <a:chOff x="0" y="0"/>
-          <a:chExt cx="0" cy="0"/>
-        </a:xfrm>
-      </p:grpSpPr>
-      <p:sp>
-        <p:nvSpPr>
-          <p:cNvPr id="2" name="Text 0"/>
-          <p:cNvSpPr/>
-          <p:nvPr>
-            <p:ph idx="100" type="body" hasCustomPrompt="1"/>
-          </p:nvPr>
-        </p:nvSpPr>
-        <p:spPr>
-          <a:xfrm>
-            <a:off x="548640" y="292608"/>
-            <a:ext cx="9144000" cy="292608"/>
-          </a:xfrm>
-          <a:prstGeom prst="rect">
-            <a:avLst/>
-          </a:prstGeom>
-          <a:noFill/>
-          <a:ln/>
-        </p:spPr>
-        <p:txBody>
-          <a:bodyPr wrap="square" lIns="0" tIns="0" rIns="0" bIns="0" rtlCol="0" anchor="ctr"/>
-          <a:lstStyle/>
-          <a:p>
-            <a:pPr algn="l" indent="0" marL="0">
-              <a:buNone/>
-            </a:pPr>
-            <a:r>
-              <a:rPr lang="en-US" sz="1200" b="1" spc="150" kern="0" dirty="0">
-                <a:solidFill>
-                  <a:schemeClr val="accent1"/>
-                </a:solidFill>
-              </a:rPr>
-              <a:t>TESTES</a:t>
-            </a:r>
-            <a:endParaRPr lang="en-US" sz="1200" dirty="0"/>
-          </a:p>
-        </p:txBody>
-      </p:sp>
-      <p:sp>
-        <p:nvSpPr>
-          <p:cNvPr id="3" name="Text 0"/>
-          <p:cNvSpPr/>
-          <p:nvPr>
-            <p:ph idx="101" type="title" hasCustomPrompt="1"/>
-          </p:nvPr>
-        </p:nvSpPr>
-        <p:spPr>
-          <a:xfrm>
-            <a:off x="548640" y="603504"/>
-            <a:ext cx="11064240" cy="685800"/>
-          </a:xfrm>
-          <a:prstGeom prst="rect">
-            <a:avLst/>
-          </a:prstGeom>
-          <a:noFill/>
-          <a:ln/>
-        </p:spPr>
-        <p:txBody>
-          <a:bodyPr wrap="square" lIns="0" tIns="0" rIns="0" bIns="0" rtlCol="0" anchor="ctr"/>
-          <a:lstStyle/>
-          <a:p>
-            <a:pPr algn="l" indent="0" marL="0">
-              <a:buNone/>
-            </a:pPr>
-            <a:r>
-              <a:rPr lang="en-US" sz="3200" b="1" dirty="0">
-                <a:solidFill>
-                  <a:schemeClr val="tx1"/>
-                </a:solidFill>
-              </a:rPr>
-              <a:t>Casos de teste: pedidos</a:t>
-            </a:r>
-            <a:endParaRPr lang="en-US" sz="3200" dirty="0"/>
-          </a:p>
-        </p:txBody>
-      </p:sp>
-      <p:sp>
-        <p:nvSpPr>
-          <p:cNvPr id="5" name="Cartão"/>
-          <p:cNvSpPr/>
-          <p:nvPr/>
-        </p:nvSpPr>
-        <p:spPr>
-          <a:xfrm>
-            <a:off x="548640" y="1554480"/>
-            <a:ext cx="5440680" cy="4526280"/>
-          </a:xfrm>
-          <a:prstGeom prst="roundRect">
-            <a:avLst>
-              <a:gd name="adj" fmla="val 2424"/>
-            </a:avLst>
-          </a:prstGeom>
-          <a:solidFill>
-            <a:schemeClr val="bg1"/>
-          </a:solidFill>
-          <a:ln w="9525">
-            <a:solidFill>
-              <a:srgbClr val="E5E5E5"/>
-            </a:solidFill>
-            <a:prstDash val="solid"/>
-          </a:ln>
-          <a:effectLst>
-            <a:outerShdw sx="100000" sy="100000" kx="0" ky="0" algn="bl" rotWithShape="0" blurRad="101600" dist="25400" dir="5400000">
-              <a:srgbClr val="223649">
-                <a:alpha val="14000"/>
-              </a:srgbClr>
-            </a:outerShdw>
-          </a:effectLst>
-        </p:spPr>
-      </p:sp>
-      <p:sp>
-        <p:nvSpPr>
-          <p:cNvPr id="6" name="Text 3"/>
-          <p:cNvSpPr txBox="1"/>
-          <p:nvPr/>
-        </p:nvSpPr>
-        <p:spPr>
-          <a:xfrm>
-            <a:off x="822960" y="1691640"/>
-            <a:ext cx="4892040" cy="384048"/>
-          </a:xfrm>
-          <a:prstGeom prst="rect">
-            <a:avLst/>
-          </a:prstGeom>
-          <a:noFill/>
-          <a:ln/>
-        </p:spPr>
-        <p:txBody>
-          <a:bodyPr wrap="square" lIns="0" tIns="0" rIns="0" bIns="0" rtlCol="0" anchor="ctr"/>
-          <a:lstStyle/>
-          <a:p>
-            <a:pPr indent="0" marL="0">
-              <a:buNone/>
-            </a:pPr>
-            <a:r>
-              <a:rPr lang="en-US" sz="1500" b="1" dirty="0">
-                <a:solidFill>
-                  <a:schemeClr val="tx1"/>
-                </a:solidFill>
-                <a:latin typeface="Courier New" pitchFamily="34" charset="0"/>
-                <a:ea typeface="Courier New" pitchFamily="34" charset="-122"/>
-                <a:cs typeface="Courier New" pitchFamily="34" charset="-120"/>
-              </a:rPr>
-              <a:t>registro e edição</a:t>
-            </a:r>
-            <a:endParaRPr lang="en-US" sz="1500" dirty="0"/>
-          </a:p>
-        </p:txBody>
-      </p:sp>
-      <p:sp>
-        <p:nvSpPr>
-          <p:cNvPr id="7" name="Text 4"/>
-          <p:cNvSpPr txBox="1"/>
-          <p:nvPr/>
-        </p:nvSpPr>
-        <p:spPr>
-          <a:xfrm>
-            <a:off x="822960" y="2194560"/>
-            <a:ext cx="4937760" cy="3749040"/>
-          </a:xfrm>
-          <a:prstGeom prst="rect">
-            <a:avLst/>
-          </a:prstGeom>
-          <a:noFill/>
-          <a:ln/>
-        </p:spPr>
-        <p:txBody>
-          <a:bodyPr wrap="square" lIns="0" tIns="0" rIns="0" bIns="0" rtlCol="0" anchor="t"/>
-          <a:lstStyle/>
-          <a:p>
-            <a:pPr marL="342900" indent="-342900">
-              <a:spcAft>
-                <a:spcPts val="600"/>
-              </a:spcAft>
-              <a:buSzPct val="100000"/>
-              <a:buChar char="•"/>
-            </a:pPr>
-            <a:r>
-              <a:rPr lang="en-US" sz="1300" dirty="0">
-                <a:solidFill>
-                  <a:schemeClr val="tx1"/>
-                </a:solidFill>
-              </a:rPr>
-              <a:t>rascunho não reserva estoque e calcula o total provisório</a:t>
-            </a:r>
-            <a:endParaRPr lang="en-US" sz="1300" dirty="0"/>
-          </a:p>
-          <a:p>
-            <a:pPr marL="342900" indent="-342900">
-              <a:spcAft>
-                <a:spcPts val="600"/>
-              </a:spcAft>
-              <a:buSzPct val="100000"/>
-              <a:buChar char="•"/>
-            </a:pPr>
-            <a:r>
-              <a:rPr lang="en-US" sz="1300" dirty="0">
-                <a:solidFill>
-                  <a:schemeClr val="tx1"/>
-                </a:solidFill>
-              </a:rPr>
-              <a:t>Salvar registra ABERTO, gera o número e reserva</a:t>
-            </a:r>
-            <a:endParaRPr lang="en-US" sz="1300" dirty="0"/>
-          </a:p>
-          <a:p>
-            <a:pPr marL="342900" indent="-342900">
-              <a:spcAft>
-                <a:spcPts val="600"/>
-              </a:spcAft>
-              <a:buSzPct val="100000"/>
-              <a:buChar char="•"/>
-            </a:pPr>
-            <a:r>
-              <a:rPr lang="en-US" sz="1300" dirty="0">
-                <a:solidFill>
-                  <a:schemeClr val="tx1"/>
-                </a:solidFill>
-              </a:rPr>
-              <a:t>estoque insuficiente bloqueia o Save; nada é reservado</a:t>
-            </a:r>
-            <a:endParaRPr lang="en-US" sz="1300" dirty="0"/>
-          </a:p>
-          <a:p>
-            <a:pPr marL="342900" indent="-342900">
-              <a:spcAft>
-                <a:spcPts val="600"/>
-              </a:spcAft>
-              <a:buSzPct val="100000"/>
-              <a:buChar char="•"/>
-            </a:pPr>
-            <a:r>
-              <a:rPr lang="en-US" sz="1300" dirty="0">
-                <a:solidFill>
-                  <a:schemeClr val="tx1"/>
-                </a:solidFill>
-              </a:rPr>
-              <a:t>pedido sem itens não é registrado</a:t>
-            </a:r>
-            <a:endParaRPr lang="en-US" sz="1300" dirty="0"/>
-          </a:p>
-          <a:p>
-            <a:pPr marL="342900" indent="-342900">
-              <a:spcAft>
-                <a:spcPts val="600"/>
-              </a:spcAft>
-              <a:buSzPct val="100000"/>
-              <a:buChar char="•"/>
-            </a:pPr>
-            <a:r>
-              <a:rPr lang="en-US" sz="1300" dirty="0">
-                <a:solidFill>
-                  <a:schemeClr val="tx1"/>
-                </a:solidFill>
-              </a:rPr>
-              <a:t>item sem estoque é barrado ao entrar no rascunho</a:t>
-            </a:r>
-            <a:endParaRPr lang="en-US" sz="1300" dirty="0"/>
-          </a:p>
-          <a:p>
-            <a:pPr marL="342900" indent="-342900">
-              <a:spcAft>
-                <a:spcPts val="600"/>
-              </a:spcAft>
-              <a:buSzPct val="100000"/>
-              <a:buChar char="•"/>
-            </a:pPr>
-            <a:r>
-              <a:rPr lang="en-US" sz="1300" dirty="0">
-                <a:solidFill>
-                  <a:schemeClr val="tx1"/>
-                </a:solidFill>
-              </a:rPr>
-              <a:t>o usuário comum também registra pedidos</a:t>
-            </a:r>
-            <a:endParaRPr lang="en-US" sz="1300" dirty="0"/>
-          </a:p>
-          <a:p>
-            <a:pPr marL="342900" indent="-342900">
-              <a:spcAft>
-                <a:spcPts val="600"/>
-              </a:spcAft>
-              <a:buSzPct val="100000"/>
-              <a:buChar char="•"/>
-            </a:pPr>
-            <a:r>
-              <a:rPr lang="en-US" sz="1300" dirty="0">
-                <a:solidFill>
-                  <a:schemeClr val="tx1"/>
-                </a:solidFill>
-              </a:rPr>
-              <a:t>aumentar, diminuir, incluir e remover itens: reserva pela diferença</a:t>
-            </a:r>
-            <a:endParaRPr lang="en-US" sz="1300" dirty="0"/>
-          </a:p>
-          <a:p>
-            <a:pPr marL="342900" indent="-342900">
-              <a:spcAft>
-                <a:spcPts val="600"/>
-              </a:spcAft>
-              <a:buSzPct val="100000"/>
-              <a:buChar char="•"/>
-            </a:pPr>
-            <a:r>
-              <a:rPr lang="en-US" sz="1300" dirty="0">
-                <a:solidFill>
-                  <a:schemeClr val="tx1"/>
-                </a:solidFill>
-              </a:rPr>
-              <a:t>aumento sem saldo bloqueia o Save</a:t>
-            </a:r>
-            <a:endParaRPr lang="en-US" sz="1300" dirty="0"/>
-          </a:p>
-          <a:p>
-            <a:pPr marL="342900" indent="-342900">
-              <a:spcAft>
-                <a:spcPts val="600"/>
-              </a:spcAft>
-              <a:buSzPct val="100000"/>
-              <a:buChar char="•"/>
-            </a:pPr>
-            <a:r>
-              <a:rPr lang="en-US" sz="1300" dirty="0">
-                <a:solidFill>
-                  <a:schemeClr val="tx1"/>
-                </a:solidFill>
-              </a:rPr>
-              <a:t>o cliente de um pedido registrado não pode ser trocado</a:t>
-            </a:r>
-            <a:endParaRPr lang="en-US" sz="1300" dirty="0"/>
-          </a:p>
-          <a:p>
-            <a:pPr marL="342900" indent="-342900">
-              <a:spcAft>
-                <a:spcPts val="600"/>
-              </a:spcAft>
-              <a:buSzPct val="100000"/>
-              <a:buChar char="•"/>
-            </a:pPr>
-            <a:r>
-              <a:rPr lang="en-US" sz="1300" dirty="0">
-                <a:solidFill>
-                  <a:schemeClr val="tx1"/>
-                </a:solidFill>
-              </a:rPr>
-              <a:t>só o ABERTO é editado; o registrado não é excluído</a:t>
-            </a:r>
-            <a:endParaRPr lang="en-US" sz="1300" dirty="0"/>
-          </a:p>
-        </p:txBody>
-      </p:sp>
-      <p:sp>
-        <p:nvSpPr>
-          <p:cNvPr id="8" name="Cartão"/>
-          <p:cNvSpPr/>
-          <p:nvPr/>
-        </p:nvSpPr>
-        <p:spPr>
-          <a:xfrm>
-            <a:off x="6199632" y="1554480"/>
-            <a:ext cx="5440680" cy="4526280"/>
-          </a:xfrm>
-          <a:prstGeom prst="roundRect">
-            <a:avLst>
-              <a:gd name="adj" fmla="val 2424"/>
-            </a:avLst>
-          </a:prstGeom>
-          <a:solidFill>
-            <a:schemeClr val="bg1"/>
-          </a:solidFill>
-          <a:ln w="9525">
-            <a:solidFill>
-              <a:srgbClr val="E5E5E5"/>
-            </a:solidFill>
-            <a:prstDash val="solid"/>
-          </a:ln>
-          <a:effectLst>
-            <a:outerShdw sx="100000" sy="100000" kx="0" ky="0" algn="bl" rotWithShape="0" blurRad="101600" dist="25400" dir="5400000">
-              <a:srgbClr val="223649">
-                <a:alpha val="14000"/>
-              </a:srgbClr>
-            </a:outerShdw>
-          </a:effectLst>
-        </p:spPr>
-      </p:sp>
-      <p:sp>
-        <p:nvSpPr>
-          <p:cNvPr id="9" name="Text 6"/>
-          <p:cNvSpPr txBox="1"/>
-          <p:nvPr/>
-        </p:nvSpPr>
-        <p:spPr>
-          <a:xfrm>
-            <a:off x="6473952" y="1691640"/>
-            <a:ext cx="4892040" cy="384048"/>
-          </a:xfrm>
-          <a:prstGeom prst="rect">
-            <a:avLst/>
-          </a:prstGeom>
-          <a:noFill/>
-          <a:ln/>
-        </p:spPr>
-        <p:txBody>
-          <a:bodyPr wrap="square" lIns="0" tIns="0" rIns="0" bIns="0" rtlCol="0" anchor="ctr"/>
-          <a:lstStyle/>
-          <a:p>
-            <a:pPr indent="0" marL="0">
-              <a:buNone/>
-            </a:pPr>
-            <a:r>
-              <a:rPr lang="en-US" sz="1500" b="1" dirty="0">
-                <a:solidFill>
-                  <a:schemeClr val="tx1"/>
-                </a:solidFill>
-                <a:latin typeface="Courier New" pitchFamily="34" charset="0"/>
-                <a:ea typeface="Courier New" pitchFamily="34" charset="-122"/>
-                <a:cs typeface="Courier New" pitchFamily="34" charset="-120"/>
-              </a:rPr>
-              <a:t>ações e campos somente leitura</a:t>
-            </a:r>
-            <a:endParaRPr lang="en-US" sz="1500" dirty="0"/>
-          </a:p>
-        </p:txBody>
-      </p:sp>
-      <p:sp>
-        <p:nvSpPr>
-          <p:cNvPr id="10" name="Text 7"/>
-          <p:cNvSpPr txBox="1"/>
-          <p:nvPr/>
-        </p:nvSpPr>
-        <p:spPr>
-          <a:xfrm>
-            <a:off x="6473952" y="2194560"/>
-            <a:ext cx="4937760" cy="3749040"/>
-          </a:xfrm>
-          <a:prstGeom prst="rect">
-            <a:avLst/>
-          </a:prstGeom>
-          <a:noFill/>
-          <a:ln/>
-        </p:spPr>
-        <p:txBody>
-          <a:bodyPr wrap="square" lIns="0" tIns="0" rIns="0" bIns="0" rtlCol="0" anchor="t"/>
-          <a:lstStyle/>
-          <a:p>
-            <a:pPr marL="342900" indent="-342900">
-              <a:spcAft>
-                <a:spcPts val="600"/>
-              </a:spcAft>
-              <a:buSzPct val="100000"/>
-              <a:buChar char="•"/>
-            </a:pPr>
-            <a:r>
-              <a:rPr lang="en-US" sz="1300" dirty="0">
-                <a:solidFill>
-                  <a:schemeClr val="tx1"/>
-                </a:solidFill>
-              </a:rPr>
-              <a:t>recusado mantém ABERTO; aprovado leva a AGUARDANDO</a:t>
-            </a:r>
-            <a:endParaRPr lang="en-US" sz="1300" dirty="0"/>
-          </a:p>
-          <a:p>
-            <a:pPr marL="342900" indent="-342900">
-              <a:spcAft>
-                <a:spcPts val="600"/>
-              </a:spcAft>
-              <a:buSzPct val="100000"/>
-              <a:buChar char="•"/>
-            </a:pPr>
-            <a:r>
-              <a:rPr lang="en-US" sz="1300" dirty="0">
-                <a:solidFill>
-                  <a:schemeClr val="tx1"/>
-                </a:solidFill>
-              </a:rPr>
-              <a:t>dados de cartão inválidos são erro (não recusa)</a:t>
-            </a:r>
-            <a:endParaRPr lang="en-US" sz="1300" dirty="0"/>
-          </a:p>
-          <a:p>
-            <a:pPr marL="342900" indent="-342900">
-              <a:spcAft>
-                <a:spcPts val="600"/>
-              </a:spcAft>
-              <a:buSzPct val="100000"/>
-              <a:buChar char="•"/>
-            </a:pPr>
-            <a:r>
-              <a:rPr lang="en-US" sz="1300" dirty="0">
-                <a:solidFill>
-                  <a:schemeClr val="tx1"/>
-                </a:solidFill>
-              </a:rPr>
-              <a:t>aprovar exige pagamento aprovado; baixa e snapshots</a:t>
-            </a:r>
-            <a:endParaRPr lang="en-US" sz="1300" dirty="0"/>
-          </a:p>
-          <a:p>
-            <a:pPr marL="342900" indent="-342900">
-              <a:spcAft>
-                <a:spcPts val="600"/>
-              </a:spcAft>
-              <a:buSzPct val="100000"/>
-              <a:buChar char="•"/>
-            </a:pPr>
-            <a:r>
-              <a:rPr lang="en-US" sz="1300" dirty="0">
-                <a:solidFill>
-                  <a:schemeClr val="tx1"/>
-                </a:solidFill>
-              </a:rPr>
-              <a:t>cancelar sem pagamento libera a reserva e exige motivo</a:t>
-            </a:r>
-            <a:endParaRPr lang="en-US" sz="1300" dirty="0"/>
-          </a:p>
-          <a:p>
-            <a:pPr marL="342900" indent="-342900">
-              <a:spcAft>
-                <a:spcPts val="600"/>
-              </a:spcAft>
-              <a:buSzPct val="100000"/>
-              <a:buChar char="•"/>
-            </a:pPr>
-            <a:r>
-              <a:rPr lang="en-US" sz="1300" dirty="0">
-                <a:solidFill>
-                  <a:schemeClr val="tx1"/>
-                </a:solidFill>
-              </a:rPr>
-              <a:t>cancelar com pagamento aprovado abre reembolso</a:t>
-            </a:r>
-            <a:endParaRPr lang="en-US" sz="1300" dirty="0"/>
-          </a:p>
-          <a:p>
-            <a:pPr marL="342900" indent="-342900">
-              <a:spcAft>
-                <a:spcPts val="600"/>
-              </a:spcAft>
-              <a:buSzPct val="100000"/>
-              <a:buChar char="•"/>
-            </a:pPr>
-            <a:r>
-              <a:rPr lang="en-US" sz="1300" dirty="0">
-                <a:solidFill>
-                  <a:schemeClr val="tx1"/>
-                </a:solidFill>
-              </a:rPr>
-              <a:t>ação com leitura desatualizada é recusada sem efeito</a:t>
-            </a:r>
-            <a:endParaRPr lang="en-US" sz="1300" dirty="0"/>
-          </a:p>
-          <a:p>
-            <a:pPr marL="342900" indent="-342900">
-              <a:spcAft>
-                <a:spcPts val="600"/>
-              </a:spcAft>
-              <a:buSzPct val="100000"/>
-              <a:buChar char="•"/>
-            </a:pPr>
-            <a:r>
-              <a:rPr lang="en-US" sz="1300" dirty="0">
-                <a:solidFill>
-                  <a:schemeClr val="tx1"/>
-                </a:solidFill>
-              </a:rPr>
-              <a:t>ações não rodam no rascunho nem durante a edição</a:t>
-            </a:r>
-            <a:endParaRPr lang="en-US" sz="1300" dirty="0"/>
-          </a:p>
-          <a:p>
-            <a:pPr marL="342900" indent="-342900">
-              <a:spcAft>
-                <a:spcPts val="600"/>
-              </a:spcAft>
-              <a:buSzPct val="100000"/>
-              <a:buChar char="•"/>
-            </a:pPr>
-            <a:r>
-              <a:rPr lang="en-US" sz="1300" dirty="0">
-                <a:solidFill>
-                  <a:schemeClr val="tx1"/>
-                </a:solidFill>
-              </a:rPr>
-              <a:t>dados do cliente e do pagamento calculados no $metadata</a:t>
-            </a:r>
-            <a:endParaRPr lang="en-US" sz="1300" dirty="0"/>
-          </a:p>
-          <a:p>
-            <a:pPr marL="342900" indent="-342900">
-              <a:spcAft>
-                <a:spcPts val="600"/>
-              </a:spcAft>
-              <a:buSzPct val="100000"/>
-              <a:buChar char="•"/>
-            </a:pPr>
-            <a:r>
-              <a:rPr lang="en-US" sz="1300" dirty="0">
-                <a:solidFill>
-                  <a:schemeClr val="tx1"/>
-                </a:solidFill>
-              </a:rPr>
-              <a:t>dados do cliente chegam pela associação, sem escrita</a:t>
-            </a:r>
-            <a:endParaRPr lang="en-US" sz="1300" dirty="0"/>
-          </a:p>
-          <a:p>
-            <a:pPr marL="342900" indent="-342900">
-              <a:spcAft>
-                <a:spcPts val="600"/>
-              </a:spcAft>
-              <a:buSzPct val="100000"/>
-              <a:buChar char="•"/>
-            </a:pPr>
-            <a:r>
-              <a:rPr lang="en-US" sz="1300" dirty="0">
-                <a:solidFill>
-                  <a:schemeClr val="tx1"/>
-                </a:solidFill>
-              </a:rPr>
-              <a:t>pagamento não aceita escrita e é preservado na edição</a:t>
-            </a:r>
-            <a:endParaRPr lang="en-US" sz="1300" dirty="0"/>
-          </a:p>
-        </p:txBody>
-      </p:sp>
-      <p:sp>
-        <p:nvSpPr>
-          <p:cNvPr id="25" name="Slide Number Placeholder 0"/>
-          <p:cNvSpPr>
-            <a:spLocks noGrp="1"/>
-          </p:cNvSpPr>
-          <p:nvPr>
-            <p:ph type="sldNum" sz="quarter" idx="4294967295"/>
-          </p:nvPr>
-        </p:nvSpPr>
-        <p:spPr>
-          <a:xfrm>
-            <a:off x="11155680" y="6419088"/>
-            <a:ext cx="484632" cy="274320"/>
-          </a:xfrm>
-          <a:prstGeom prst="rect">
-            <a:avLst/>
-          </a:prstGeom>
-          <a:extLst>
-            <a:ext uri="{C572A759-6A51-4108-AA02-DFA0A04FC94B}">
-              <ma14:wrappingTextBoxFlag xmlns:ma14="http://schemas.microsoft.com/office/mac/drawingml/2011/main" val="0"/>
-            </a:ext>
-          </a:extLst>
-        </p:spPr>
-        <p:txBody>
-          <a:bodyPr/>
-          <a:lstStyle>
-            <a:lvl1pPr>
-              <a:defRPr sz="1000">
-                <a:solidFill>
-                  <a:srgbClr val="556B82"/>
-                </a:solidFill>
-              </a:defRPr>
-            </a:lvl1pPr>
-          </a:lstStyle>
-          <a:p>
-            <a:pPr algn="r"/>
-            <a:fld id="{F7021451-1387-4CA6-816F-3879F97B5CBC}" type="slidenum">
-              <a:rPr b="0" lang="en-US"/>
-              <a:t>7</a:t>
-            </a:fld>
-            <a:endParaRPr lang="en-US"/>
-          </a:p>
-        </p:txBody>
-      </p:sp>
-    </p:spTree>
-  </p:cSld>
-  <p:clrMapOvr>
-    <a:masterClrMapping/>
-  </p:clrMapOvr>
-</p:sld>
-</file>
-
 <file path=ppt/slides/slide8.xml><?xml version="1.0" encoding="utf-8"?>
 <p:sld xmlns:a="http://schemas.openxmlformats.org/drawingml/2006/main" xmlns:r="http://schemas.openxmlformats.org/officeDocument/2006/relationships" xmlns:p="http://schemas.openxmlformats.org/presentationml/2006/main">
   <p:cSld name="Slide 8">
@@ -20645,7 +26646,7 @@
                   <a:schemeClr val="accent1"/>
                 </a:solidFill>
               </a:rPr>
-              <a:t>TESTES</a:t>
+              <a:t>REEMBOLSOS · TESTES</a:t>
             </a:r>
             <a:endParaRPr lang="en-US" sz="1200" dirty="0"/>
           </a:p>

--- a/docs/apresentacoes/06-testes-e-publicacao.pptx
+++ b/docs/apresentacoes/06-testes-e-publicacao.pptx
@@ -4505,8 +4505,8 @@
         </p:nvSpPr>
         <p:spPr>
           <a:xfrm>
-            <a:off x="1693987" y="1463040"/>
-            <a:ext cx="8800978" cy="4800600"/>
+            <a:off x="1956793" y="1463040"/>
+            <a:ext cx="8275365" cy="4800600"/>
           </a:xfrm>
           <a:prstGeom prst="roundRect">
             <a:avLst>
@@ -4547,8 +4547,8 @@
         </p:blipFill>
         <p:spPr>
           <a:xfrm>
-            <a:off x="1785427" y="1554480"/>
-            <a:ext cx="8618098" cy="4617720"/>
+            <a:off x="2048233" y="1554480"/>
+            <a:ext cx="8092485" cy="4617720"/>
           </a:xfrm>
           <a:prstGeom prst="rect">
             <a:avLst/>
